--- a/outputs/A.P._ai_governance.pptx
+++ b/outputs/A.P._ai_governance.pptx
@@ -3103,8 +3103,60 @@
           <a:prstGeom prst="rect">
             <a:avLst/>
           </a:prstGeom>
+          <a:ln>
+            <a:noFill/>
+          </a:ln>
+          <a:effectLst/>
+          <a:gradFill flip="none" rotWithShape="1">
+            <a:gsLst>
+              <a:gs pos="0">
+                <a:srgbClr val="0C2A8E"/>
+              </a:gs>
+              <a:gs pos="100000">
+                <a:srgbClr val="1FCBD9"/>
+              </a:gs>
+            </a:gsLst>
+            <a:lin ang="2700000" scaled="0"/>
+          </a:gradFill>
+        </p:spPr>
+        <p:style>
+          <a:lnRef idx="1">
+            <a:schemeClr val="accent1"/>
+          </a:lnRef>
+          <a:fillRef idx="3">
+            <a:schemeClr val="accent1"/>
+          </a:fillRef>
+          <a:effectRef idx="2">
+            <a:schemeClr val="accent1"/>
+          </a:effectRef>
+          <a:fontRef idx="minor">
+            <a:schemeClr val="lt1"/>
+          </a:fontRef>
+        </p:style>
+        <p:txBody>
+          <a:bodyPr rtlCol="0" anchor="ctr"/>
+          <a:lstStyle/>
+          <a:p>
+            <a:pPr algn="ctr"/>
+          </a:p>
+        </p:txBody>
+      </p:sp>
+      <p:sp>
+        <p:nvSpPr>
+          <p:cNvPr id="3" name="Rectangle 2"/>
+          <p:cNvSpPr/>
+          <p:nvPr/>
+        </p:nvSpPr>
+        <p:spPr>
+          <a:xfrm>
+            <a:off x="0" y="0"/>
+            <a:ext cx="3600000" cy="6858000"/>
+          </a:xfrm>
+          <a:prstGeom prst="rect">
+            <a:avLst/>
+          </a:prstGeom>
           <a:solidFill>
-            <a:srgbClr val="061A4D"/>
+            <a:srgbClr val="071F66"/>
           </a:solidFill>
           <a:ln>
             <a:noFill/>
@@ -3135,24 +3187,1282 @@
       </p:sp>
       <p:sp>
         <p:nvSpPr>
-          <p:cNvPr id="3" name="Oval 2"/>
+          <p:cNvPr id="4" name="TextBox 3"/>
+          <p:cNvSpPr txBox="1"/>
+          <p:nvPr/>
+        </p:nvSpPr>
+        <p:spPr>
+          <a:xfrm>
+            <a:off x="228600" y="260000"/>
+            <a:ext cx="3142800" cy="800000"/>
+          </a:xfrm>
+          <a:prstGeom prst="rect">
+            <a:avLst/>
+          </a:prstGeom>
+          <a:noFill/>
+        </p:spPr>
+        <p:txBody>
+          <a:bodyPr wrap="square" lIns="0" rIns="0" tIns="0" bIns="0">
+            <a:spAutoFit/>
+          </a:bodyPr>
+          <a:lstStyle/>
+          <a:p>
+            <a:pPr algn="l"/>
+            <a:r>
+              <a:rPr sz="4400" b="1" i="0">
+                <a:solidFill>
+                  <a:srgbClr val="3AEDE5"/>
+                </a:solidFill>
+                <a:latin typeface="Alegreya Sans"/>
+              </a:rPr>
+              <a:t>A.P.</a:t>
+            </a:r>
+          </a:p>
+        </p:txBody>
+      </p:sp>
+      <p:sp>
+        <p:nvSpPr>
+          <p:cNvPr id="5" name="TextBox 4"/>
+          <p:cNvSpPr txBox="1"/>
+          <p:nvPr/>
+        </p:nvSpPr>
+        <p:spPr>
+          <a:xfrm>
+            <a:off x="3828600" y="300000"/>
+            <a:ext cx="8134800" cy="800000"/>
+          </a:xfrm>
+          <a:prstGeom prst="rect">
+            <a:avLst/>
+          </a:prstGeom>
+          <a:noFill/>
+        </p:spPr>
+        <p:txBody>
+          <a:bodyPr wrap="square" lIns="0" rIns="0" tIns="0" bIns="0">
+            <a:spAutoFit/>
+          </a:bodyPr>
+          <a:lstStyle/>
+          <a:p>
+            <a:r>
+              <a:rPr sz="2000" b="1" i="0">
+                <a:solidFill>
+                  <a:srgbClr val="FFFFFF"/>
+                </a:solidFill>
+                <a:latin typeface="Alegreya Sans"/>
+              </a:rPr>
+              <a:t>Spécialiste AI Governance, AI Risk &amp; EU AI Act</a:t>
+            </a:r>
+          </a:p>
+          <a:p>
+            <a:pPr>
+              <a:spcBef>
+                <a:spcPts val="200"/>
+              </a:spcBef>
+            </a:pPr>
+            <a:r>
+              <a:rPr sz="1300" b="0" i="1">
+                <a:solidFill>
+                  <a:srgbClr val="3AEDE5"/>
+                </a:solidFill>
+                <a:latin typeface="Alegreya Sans"/>
+              </a:rPr>
+              <a:t>Gouvernance IA &amp; Conformité réglementaire — Services financiers</a:t>
+            </a:r>
+          </a:p>
+        </p:txBody>
+      </p:sp>
+      <p:sp>
+        <p:nvSpPr>
+          <p:cNvPr id="6" name="TextBox 5"/>
+          <p:cNvSpPr txBox="1"/>
+          <p:nvPr/>
+        </p:nvSpPr>
+        <p:spPr>
+          <a:xfrm>
+            <a:off x="228600" y="1180000"/>
+            <a:ext cx="3142800" cy="5318000"/>
+          </a:xfrm>
+          <a:prstGeom prst="rect">
+            <a:avLst/>
+          </a:prstGeom>
+          <a:noFill/>
+        </p:spPr>
+        <p:txBody>
+          <a:bodyPr wrap="square" lIns="0" rIns="0" tIns="0" bIns="0">
+            <a:spAutoFit/>
+          </a:bodyPr>
+          <a:lstStyle/>
+          <a:p>
+            <a:pPr algn="l">
+              <a:spcAft>
+                <a:spcPts val="300"/>
+              </a:spcAft>
+            </a:pPr>
+            <a:r>
+              <a:rPr sz="1100" b="1" i="0">
+                <a:solidFill>
+                  <a:srgbClr val="3AEDE5"/>
+                </a:solidFill>
+                <a:latin typeface="Alegreya Sans"/>
+              </a:rPr>
+              <a:t>DOMAINES D'EXPERTISE</a:t>
+            </a:r>
+          </a:p>
+          <a:p>
+            <a:pPr algn="l">
+              <a:spcAft>
+                <a:spcPts val="100"/>
+              </a:spcAft>
+            </a:pPr>
+            <a:r>
+              <a:rPr sz="1000" b="1" i="0">
+                <a:solidFill>
+                  <a:srgbClr val="3AEDE5"/>
+                </a:solidFill>
+                <a:latin typeface="Alegreya Sans"/>
+              </a:rPr>
+              <a:t>•  </a:t>
+            </a:r>
+            <a:r>
+              <a:rPr sz="1000" b="0" i="0">
+                <a:solidFill>
+                  <a:srgbClr val="FFFFFF"/>
+                </a:solidFill>
+                <a:latin typeface="Alegreya Sans"/>
+              </a:rPr>
+              <a:t>AI Governance</a:t>
+            </a:r>
+          </a:p>
+          <a:p>
+            <a:pPr algn="l">
+              <a:spcAft>
+                <a:spcPts val="100"/>
+              </a:spcAft>
+            </a:pPr>
+            <a:r>
+              <a:rPr sz="1000" b="1" i="0">
+                <a:solidFill>
+                  <a:srgbClr val="3AEDE5"/>
+                </a:solidFill>
+                <a:latin typeface="Alegreya Sans"/>
+              </a:rPr>
+              <a:t>•  </a:t>
+            </a:r>
+            <a:r>
+              <a:rPr sz="1000" b="0" i="0">
+                <a:solidFill>
+                  <a:srgbClr val="FFFFFF"/>
+                </a:solidFill>
+                <a:latin typeface="Alegreya Sans"/>
+              </a:rPr>
+              <a:t>AI Risk Management</a:t>
+            </a:r>
+          </a:p>
+          <a:p>
+            <a:pPr algn="l">
+              <a:spcAft>
+                <a:spcPts val="100"/>
+              </a:spcAft>
+            </a:pPr>
+            <a:r>
+              <a:rPr sz="1000" b="1" i="0">
+                <a:solidFill>
+                  <a:srgbClr val="3AEDE5"/>
+                </a:solidFill>
+                <a:latin typeface="Alegreya Sans"/>
+              </a:rPr>
+              <a:t>•  </a:t>
+            </a:r>
+            <a:r>
+              <a:rPr sz="1000" b="0" i="0">
+                <a:solidFill>
+                  <a:srgbClr val="FFFFFF"/>
+                </a:solidFill>
+                <a:latin typeface="Alegreya Sans"/>
+              </a:rPr>
+              <a:t>EU AI Act</a:t>
+            </a:r>
+          </a:p>
+          <a:p>
+            <a:pPr algn="l">
+              <a:spcAft>
+                <a:spcPts val="100"/>
+              </a:spcAft>
+            </a:pPr>
+            <a:r>
+              <a:rPr sz="1000" b="1" i="0">
+                <a:solidFill>
+                  <a:srgbClr val="3AEDE5"/>
+                </a:solidFill>
+                <a:latin typeface="Alegreya Sans"/>
+              </a:rPr>
+              <a:t>•  </a:t>
+            </a:r>
+            <a:r>
+              <a:rPr sz="1000" b="0" i="0">
+                <a:solidFill>
+                  <a:srgbClr val="FFFFFF"/>
+                </a:solidFill>
+                <a:latin typeface="Alegreya Sans"/>
+              </a:rPr>
+              <a:t>Digital Compliance</a:t>
+            </a:r>
+          </a:p>
+          <a:p>
+            <a:pPr algn="l">
+              <a:spcAft>
+                <a:spcPts val="100"/>
+              </a:spcAft>
+            </a:pPr>
+            <a:r>
+              <a:rPr sz="1000" b="1" i="0">
+                <a:solidFill>
+                  <a:srgbClr val="3AEDE5"/>
+                </a:solidFill>
+                <a:latin typeface="Alegreya Sans"/>
+              </a:rPr>
+              <a:t>•  </a:t>
+            </a:r>
+            <a:r>
+              <a:rPr sz="1000" b="0" i="0">
+                <a:solidFill>
+                  <a:srgbClr val="FFFFFF"/>
+                </a:solidFill>
+                <a:latin typeface="Alegreya Sans"/>
+              </a:rPr>
+              <a:t>Regulatory Strategy</a:t>
+            </a:r>
+          </a:p>
+          <a:p>
+            <a:pPr algn="l">
+              <a:spcAft>
+                <a:spcPts val="100"/>
+              </a:spcAft>
+            </a:pPr>
+            <a:r>
+              <a:rPr sz="1000" b="1" i="0">
+                <a:solidFill>
+                  <a:srgbClr val="3AEDE5"/>
+                </a:solidFill>
+                <a:latin typeface="Alegreya Sans"/>
+              </a:rPr>
+              <a:t>•  </a:t>
+            </a:r>
+            <a:r>
+              <a:rPr sz="1000" b="0" i="0">
+                <a:solidFill>
+                  <a:srgbClr val="FFFFFF"/>
+                </a:solidFill>
+                <a:latin typeface="Alegreya Sans"/>
+              </a:rPr>
+              <a:t>Cross-functional Leadership</a:t>
+            </a:r>
+          </a:p>
+          <a:p>
+            <a:pPr algn="l">
+              <a:spcBef>
+                <a:spcPts val="600"/>
+              </a:spcBef>
+              <a:spcAft>
+                <a:spcPts val="300"/>
+              </a:spcAft>
+            </a:pPr>
+            <a:r>
+              <a:rPr sz="1100" b="1" i="0">
+                <a:solidFill>
+                  <a:srgbClr val="3AEDE5"/>
+                </a:solidFill>
+                <a:latin typeface="Alegreya Sans"/>
+              </a:rPr>
+              <a:t>LANGUES</a:t>
+            </a:r>
+          </a:p>
+          <a:p>
+            <a:pPr algn="l">
+              <a:spcAft>
+                <a:spcPts val="100"/>
+              </a:spcAft>
+            </a:pPr>
+            <a:r>
+              <a:rPr sz="1000" b="1" i="0">
+                <a:solidFill>
+                  <a:srgbClr val="3AEDE5"/>
+                </a:solidFill>
+                <a:latin typeface="Alegreya Sans"/>
+              </a:rPr>
+              <a:t>•  </a:t>
+            </a:r>
+            <a:r>
+              <a:rPr sz="1000" b="0" i="0">
+                <a:solidFill>
+                  <a:srgbClr val="FFFFFF"/>
+                </a:solidFill>
+                <a:latin typeface="Alegreya Sans"/>
+              </a:rPr>
+              <a:t>Français — Langue maternelle</a:t>
+            </a:r>
+          </a:p>
+          <a:p>
+            <a:pPr algn="l">
+              <a:spcAft>
+                <a:spcPts val="100"/>
+              </a:spcAft>
+            </a:pPr>
+            <a:r>
+              <a:rPr sz="1000" b="1" i="0">
+                <a:solidFill>
+                  <a:srgbClr val="3AEDE5"/>
+                </a:solidFill>
+                <a:latin typeface="Alegreya Sans"/>
+              </a:rPr>
+              <a:t>•  </a:t>
+            </a:r>
+            <a:r>
+              <a:rPr sz="1000" b="0" i="0">
+                <a:solidFill>
+                  <a:srgbClr val="FFFFFF"/>
+                </a:solidFill>
+                <a:latin typeface="Alegreya Sans"/>
+              </a:rPr>
+              <a:t>Anglais — TOEIC 955/990</a:t>
+            </a:r>
+          </a:p>
+          <a:p>
+            <a:pPr algn="l">
+              <a:spcBef>
+                <a:spcPts val="600"/>
+              </a:spcBef>
+              <a:spcAft>
+                <a:spcPts val="300"/>
+              </a:spcAft>
+            </a:pPr>
+            <a:r>
+              <a:rPr sz="1100" b="1" i="0">
+                <a:solidFill>
+                  <a:srgbClr val="3AEDE5"/>
+                </a:solidFill>
+                <a:latin typeface="Alegreya Sans"/>
+              </a:rPr>
+              <a:t>FORMATION &amp; CERTIFICATIONS</a:t>
+            </a:r>
+          </a:p>
+          <a:p>
+            <a:pPr algn="l">
+              <a:spcAft>
+                <a:spcPts val="100"/>
+              </a:spcAft>
+            </a:pPr>
+            <a:r>
+              <a:rPr sz="1000" b="1" i="0">
+                <a:solidFill>
+                  <a:srgbClr val="3AEDE5"/>
+                </a:solidFill>
+                <a:latin typeface="Alegreya Sans"/>
+              </a:rPr>
+              <a:t>2024  </a:t>
+            </a:r>
+            <a:r>
+              <a:rPr sz="1000" b="1" i="0">
+                <a:solidFill>
+                  <a:srgbClr val="FFFFFF"/>
+                </a:solidFill>
+                <a:latin typeface="Alegreya Sans"/>
+              </a:rPr>
+              <a:t>EDHEC Business School</a:t>
+            </a:r>
+          </a:p>
+          <a:p>
+            <a:pPr algn="l">
+              <a:spcAft>
+                <a:spcPts val="300"/>
+              </a:spcAft>
+            </a:pPr>
+            <a:r>
+              <a:rPr sz="1000" b="0" i="1">
+                <a:solidFill>
+                  <a:srgbClr val="CCD6E8"/>
+                </a:solidFill>
+                <a:latin typeface="Alegreya Sans"/>
+              </a:rPr>
+              <a:t>Certification Digital Ethics Officer (avec Mention)</a:t>
+            </a:r>
+          </a:p>
+          <a:p>
+            <a:pPr algn="l">
+              <a:spcAft>
+                <a:spcPts val="100"/>
+              </a:spcAft>
+            </a:pPr>
+            <a:r>
+              <a:rPr sz="1000" b="1" i="0">
+                <a:solidFill>
+                  <a:srgbClr val="3AEDE5"/>
+                </a:solidFill>
+                <a:latin typeface="Alegreya Sans"/>
+              </a:rPr>
+              <a:t>2015 — 2020  </a:t>
+            </a:r>
+            <a:r>
+              <a:rPr sz="1000" b="1" i="0">
+                <a:solidFill>
+                  <a:srgbClr val="FFFFFF"/>
+                </a:solidFill>
+                <a:latin typeface="Alegreya Sans"/>
+              </a:rPr>
+              <a:t>Sciences Po Saint-Germain-en-Laye</a:t>
+            </a:r>
+          </a:p>
+          <a:p>
+            <a:pPr algn="l">
+              <a:spcAft>
+                <a:spcPts val="300"/>
+              </a:spcAft>
+            </a:pPr>
+            <a:r>
+              <a:rPr sz="1000" b="0" i="1">
+                <a:solidFill>
+                  <a:srgbClr val="CCD6E8"/>
+                </a:solidFill>
+                <a:latin typeface="Alegreya Sans"/>
+              </a:rPr>
+              <a:t>Master II Affaires européennes et internationales (avec Mention)</a:t>
+            </a:r>
+          </a:p>
+          <a:p>
+            <a:pPr algn="l">
+              <a:spcAft>
+                <a:spcPts val="100"/>
+              </a:spcAft>
+            </a:pPr>
+            <a:r>
+              <a:rPr sz="1000" b="1" i="0">
+                <a:solidFill>
+                  <a:srgbClr val="3AEDE5"/>
+                </a:solidFill>
+                <a:latin typeface="Alegreya Sans"/>
+              </a:rPr>
+              <a:t>2020  </a:t>
+            </a:r>
+            <a:r>
+              <a:rPr sz="1000" b="1" i="0">
+                <a:solidFill>
+                  <a:srgbClr val="FFFFFF"/>
+                </a:solidFill>
+                <a:latin typeface="Alegreya Sans"/>
+              </a:rPr>
+              <a:t>Université de Versailles Saint-Quentin-en-Yvelines</a:t>
+            </a:r>
+          </a:p>
+          <a:p>
+            <a:pPr algn="l">
+              <a:spcAft>
+                <a:spcPts val="300"/>
+              </a:spcAft>
+            </a:pPr>
+            <a:r>
+              <a:rPr sz="1000" b="0" i="1">
+                <a:solidFill>
+                  <a:srgbClr val="CCD6E8"/>
+                </a:solidFill>
+                <a:latin typeface="Alegreya Sans"/>
+              </a:rPr>
+              <a:t>Master II Influence &amp; Affaires publiques (avec Mention)</a:t>
+            </a:r>
+          </a:p>
+        </p:txBody>
+      </p:sp>
+      <p:sp>
+        <p:nvSpPr>
+          <p:cNvPr id="7" name="TextBox 6"/>
+          <p:cNvSpPr txBox="1"/>
+          <p:nvPr/>
+        </p:nvSpPr>
+        <p:spPr>
+          <a:xfrm>
+            <a:off x="3828600" y="1180000"/>
+            <a:ext cx="8134800" cy="5318000"/>
+          </a:xfrm>
+          <a:prstGeom prst="rect">
+            <a:avLst/>
+          </a:prstGeom>
+          <a:noFill/>
+        </p:spPr>
+        <p:txBody>
+          <a:bodyPr wrap="square" lIns="0" rIns="0" tIns="0" bIns="0">
+            <a:spAutoFit/>
+          </a:bodyPr>
+          <a:lstStyle/>
+          <a:p>
+            <a:pPr algn="l">
+              <a:spcAft>
+                <a:spcPts val="300"/>
+              </a:spcAft>
+            </a:pPr>
+            <a:r>
+              <a:rPr sz="1100" b="1" i="0">
+                <a:solidFill>
+                  <a:srgbClr val="3AEDE5"/>
+                </a:solidFill>
+                <a:latin typeface="Alegreya Sans"/>
+              </a:rPr>
+              <a:t>RÉSUMÉ</a:t>
+            </a:r>
+          </a:p>
+          <a:p>
+            <a:pPr algn="l">
+              <a:spcAft>
+                <a:spcPts val="300"/>
+              </a:spcAft>
+            </a:pPr>
+            <a:r>
+              <a:rPr sz="1000" b="0" i="0">
+                <a:solidFill>
+                  <a:srgbClr val="FFFFFF"/>
+                </a:solidFill>
+                <a:latin typeface="Alegreya Sans"/>
+              </a:rPr>
+              <a:t>Expert en gouvernance de l'IA, AI Risk Management et conformité réglementaire, avec près de 8 ans d'expérience auprès de grandes institutions bancaires. Spécialisé dans l'EU AI Act et le déploiement de dispositifs de gouvernance IA à l'échelle internationale.</a:t>
+            </a:r>
+          </a:p>
+          <a:p>
+            <a:pPr algn="l">
+              <a:spcBef>
+                <a:spcPts val="600"/>
+              </a:spcBef>
+              <a:spcAft>
+                <a:spcPts val="300"/>
+              </a:spcAft>
+            </a:pPr>
+            <a:r>
+              <a:rPr sz="1100" b="1" i="0">
+                <a:solidFill>
+                  <a:srgbClr val="3AEDE5"/>
+                </a:solidFill>
+                <a:latin typeface="Alegreya Sans"/>
+              </a:rPr>
+              <a:t>EXPÉRIENCE PROFESSIONNELLE</a:t>
+            </a:r>
+          </a:p>
+          <a:p>
+            <a:pPr algn="l">
+              <a:spcAft>
+                <a:spcPts val="100"/>
+              </a:spcAft>
+            </a:pPr>
+            <a:r>
+              <a:rPr sz="1000" b="1" i="0">
+                <a:solidFill>
+                  <a:srgbClr val="3AEDE5"/>
+                </a:solidFill>
+                <a:latin typeface="Alegreya Sans"/>
+              </a:rPr>
+              <a:t>▸ </a:t>
+            </a:r>
+            <a:r>
+              <a:rPr sz="1000" b="1" i="0">
+                <a:solidFill>
+                  <a:srgbClr val="FFFFFF"/>
+                </a:solidFill>
+                <a:latin typeface="Alegreya Sans"/>
+              </a:rPr>
+              <a:t>Top-tier CIB européenne</a:t>
+            </a:r>
+            <a:r>
+              <a:rPr sz="1000" b="0" i="0">
+                <a:solidFill>
+                  <a:srgbClr val="FFFFFF"/>
+                </a:solidFill>
+                <a:latin typeface="Alegreya Sans"/>
+              </a:rPr>
+              <a:t> — AI Compliance Lead (consultant)</a:t>
+            </a:r>
+            <a:r>
+              <a:rPr sz="1000" b="0" i="1">
+                <a:solidFill>
+                  <a:srgbClr val="3AEDE5"/>
+                </a:solidFill>
+                <a:latin typeface="Alegreya Sans"/>
+              </a:rPr>
+              <a:t>  (8 mois — en cours)</a:t>
+            </a:r>
+          </a:p>
+          <a:p>
+            <a:pPr algn="l" lvl="1">
+              <a:spcAft>
+                <a:spcPts val="100"/>
+              </a:spcAft>
+            </a:pPr>
+            <a:r>
+              <a:rPr sz="1000" b="1" i="0">
+                <a:solidFill>
+                  <a:srgbClr val="3AEDE5"/>
+                </a:solidFill>
+                <a:latin typeface="Alegreya Sans"/>
+              </a:rPr>
+              <a:t>•  </a:t>
+            </a:r>
+            <a:r>
+              <a:rPr sz="1000" b="0" i="0">
+                <a:solidFill>
+                  <a:srgbClr val="FFFFFF"/>
+                </a:solidFill>
+                <a:latin typeface="Alegreya Sans"/>
+              </a:rPr>
+              <a:t>Finalisation et mise en œuvre du cadre de gouvernance des risques IA : politiques internes, cartographie des risques, comitologie et coordination des fonctions support et métiers.</a:t>
+            </a:r>
+          </a:p>
+          <a:p>
+            <a:pPr algn="l" lvl="1">
+              <a:spcAft>
+                <a:spcPts val="100"/>
+              </a:spcAft>
+            </a:pPr>
+            <a:r>
+              <a:rPr sz="1000" b="1" i="0">
+                <a:solidFill>
+                  <a:srgbClr val="3AEDE5"/>
+                </a:solidFill>
+                <a:latin typeface="Alegreya Sans"/>
+              </a:rPr>
+              <a:t>•  </a:t>
+            </a:r>
+            <a:r>
+              <a:rPr sz="1000" b="0" i="0">
+                <a:solidFill>
+                  <a:srgbClr val="FFFFFF"/>
+                </a:solidFill>
+                <a:latin typeface="Alegreya Sans"/>
+              </a:rPr>
+              <a:t>Pilotage opérationnel de la gouvernance : identification, évaluation, priorisation, validation et remédiation des systèmes d'IA.</a:t>
+            </a:r>
+          </a:p>
+          <a:p>
+            <a:pPr algn="l" lvl="1">
+              <a:spcAft>
+                <a:spcPts val="100"/>
+              </a:spcAft>
+            </a:pPr>
+            <a:r>
+              <a:rPr sz="1000" b="1" i="0">
+                <a:solidFill>
+                  <a:srgbClr val="3AEDE5"/>
+                </a:solidFill>
+                <a:latin typeface="Alegreya Sans"/>
+              </a:rPr>
+              <a:t>•  </a:t>
+            </a:r>
+            <a:r>
+              <a:rPr sz="1000" b="0" i="0">
+                <a:solidFill>
+                  <a:srgbClr val="FFFFFF"/>
+                </a:solidFill>
+                <a:latin typeface="Alegreya Sans"/>
+              </a:rPr>
+              <a:t>Contribution au déploiement international du dispositif dans plus de 40 entités, dont USA, UK, APAC et MEA.</a:t>
+            </a:r>
+          </a:p>
+          <a:p>
+            <a:pPr algn="l">
+              <a:spcAft>
+                <a:spcPts val="100"/>
+              </a:spcAft>
+            </a:pPr>
+            <a:r>
+              <a:rPr sz="1000" b="1" i="0">
+                <a:solidFill>
+                  <a:srgbClr val="3AEDE5"/>
+                </a:solidFill>
+                <a:latin typeface="Alegreya Sans"/>
+              </a:rPr>
+              <a:t>▸ </a:t>
+            </a:r>
+            <a:r>
+              <a:rPr sz="1000" b="1" i="0">
+                <a:solidFill>
+                  <a:srgbClr val="FFFFFF"/>
+                </a:solidFill>
+                <a:latin typeface="Alegreya Sans"/>
+              </a:rPr>
+              <a:t>Sia Partners</a:t>
+            </a:r>
+            <a:r>
+              <a:rPr sz="1000" b="0" i="0">
+                <a:solidFill>
+                  <a:srgbClr val="FFFFFF"/>
+                </a:solidFill>
+                <a:latin typeface="Alegreya Sans"/>
+              </a:rPr>
+              <a:t> — Associate Manager</a:t>
+            </a:r>
+            <a:r>
+              <a:rPr sz="1000" b="0" i="1">
+                <a:solidFill>
+                  <a:srgbClr val="3AEDE5"/>
+                </a:solidFill>
+                <a:latin typeface="Alegreya Sans"/>
+              </a:rPr>
+              <a:t>  (10 mois — en cours)</a:t>
+            </a:r>
+          </a:p>
+          <a:p>
+            <a:pPr algn="l" lvl="1">
+              <a:spcAft>
+                <a:spcPts val="100"/>
+              </a:spcAft>
+            </a:pPr>
+            <a:r>
+              <a:rPr sz="1000" b="1" i="0">
+                <a:solidFill>
+                  <a:srgbClr val="3AEDE5"/>
+                </a:solidFill>
+                <a:latin typeface="Alegreya Sans"/>
+              </a:rPr>
+              <a:t>•  </a:t>
+            </a:r>
+            <a:r>
+              <a:rPr sz="1000" b="0" i="0">
+                <a:solidFill>
+                  <a:srgbClr val="FFFFFF"/>
+                </a:solidFill>
+                <a:latin typeface="Alegreya Sans"/>
+              </a:rPr>
+              <a:t>Responsable de l'offre AI Risk Management : coordination des réponses aux appels d'offres, veille stratégique et réglementaire, développement commercial et animation de l'écosystème financier.</a:t>
+            </a:r>
+          </a:p>
+          <a:p>
+            <a:pPr algn="l" lvl="1">
+              <a:spcAft>
+                <a:spcPts val="100"/>
+              </a:spcAft>
+            </a:pPr>
+            <a:r>
+              <a:rPr sz="1000" b="1" i="0">
+                <a:solidFill>
+                  <a:srgbClr val="3AEDE5"/>
+                </a:solidFill>
+                <a:latin typeface="Alegreya Sans"/>
+              </a:rPr>
+              <a:t>•  </a:t>
+            </a:r>
+            <a:r>
+              <a:rPr sz="1000" b="0" i="0">
+                <a:solidFill>
+                  <a:srgbClr val="FFFFFF"/>
+                </a:solidFill>
+                <a:latin typeface="Alegreya Sans"/>
+              </a:rPr>
+              <a:t>Pilotage et animation du groupe de travail IA de l'association Paris Europlace (+40 responsables du secteur financier) : rédaction de position papers et de réponses aux consultations européennes, benchmarks.</a:t>
+            </a:r>
+          </a:p>
+          <a:p>
+            <a:pPr algn="l">
+              <a:spcAft>
+                <a:spcPts val="100"/>
+              </a:spcAft>
+            </a:pPr>
+            <a:r>
+              <a:rPr sz="1000" b="1" i="0">
+                <a:solidFill>
+                  <a:srgbClr val="3AEDE5"/>
+                </a:solidFill>
+                <a:latin typeface="Alegreya Sans"/>
+              </a:rPr>
+              <a:t>▸ </a:t>
+            </a:r>
+            <a:r>
+              <a:rPr sz="1000" b="1" i="0">
+                <a:solidFill>
+                  <a:srgbClr val="FFFFFF"/>
+                </a:solidFill>
+                <a:latin typeface="Alegreya Sans"/>
+              </a:rPr>
+              <a:t>Groupe BPCE</a:t>
+            </a:r>
+            <a:r>
+              <a:rPr sz="1000" b="0" i="0">
+                <a:solidFill>
+                  <a:srgbClr val="FFFFFF"/>
+                </a:solidFill>
+                <a:latin typeface="Alegreya Sans"/>
+              </a:rPr>
+              <a:t> — Group EU AI Act Project Manager</a:t>
+            </a:r>
+            <a:r>
+              <a:rPr sz="1000" b="0" i="1">
+                <a:solidFill>
+                  <a:srgbClr val="3AEDE5"/>
+                </a:solidFill>
+                <a:latin typeface="Alegreya Sans"/>
+              </a:rPr>
+              <a:t>  (18 mois)</a:t>
+            </a:r>
+          </a:p>
+          <a:p>
+            <a:pPr algn="l" lvl="1">
+              <a:spcAft>
+                <a:spcPts val="100"/>
+              </a:spcAft>
+            </a:pPr>
+            <a:r>
+              <a:rPr sz="1000" b="1" i="0">
+                <a:solidFill>
+                  <a:srgbClr val="3AEDE5"/>
+                </a:solidFill>
+                <a:latin typeface="Alegreya Sans"/>
+              </a:rPr>
+              <a:t>•  </a:t>
+            </a:r>
+            <a:r>
+              <a:rPr sz="1000" b="0" i="0">
+                <a:solidFill>
+                  <a:srgbClr val="FFFFFF"/>
+                </a:solidFill>
+                <a:latin typeface="Alegreya Sans"/>
+              </a:rPr>
+              <a:t>Responsable du programme de mise en conformité EU AI Act du Groupe BPCE et de ses entités (Natixis, Oney, BRED, etc.) : cartographie et évaluation des risques IA, définition de la politique et du cadre normatif Groupe, évolution des processus opérationnels, animation du comité de pilotage.</a:t>
+            </a:r>
+          </a:p>
+          <a:p>
+            <a:pPr algn="l" lvl="1">
+              <a:spcAft>
+                <a:spcPts val="100"/>
+              </a:spcAft>
+            </a:pPr>
+            <a:r>
+              <a:rPr sz="1000" b="1" i="0">
+                <a:solidFill>
+                  <a:srgbClr val="3AEDE5"/>
+                </a:solidFill>
+                <a:latin typeface="Alegreya Sans"/>
+              </a:rPr>
+              <a:t>•  </a:t>
+            </a:r>
+            <a:r>
+              <a:rPr sz="1000" b="0" i="0">
+                <a:solidFill>
+                  <a:srgbClr val="FFFFFF"/>
+                </a:solidFill>
+                <a:latin typeface="Alegreya Sans"/>
+              </a:rPr>
+              <a:t>Coordination et accompagnement de plus de 35 décideurs locaux (DPO, Chief Compliance Officer, CDO, etc.) dans la déclinaison du cadre normatif Groupe.</a:t>
+            </a:r>
+          </a:p>
+          <a:p>
+            <a:pPr algn="l" lvl="1">
+              <a:spcAft>
+                <a:spcPts val="100"/>
+              </a:spcAft>
+            </a:pPr>
+            <a:r>
+              <a:rPr sz="1000" b="1" i="0">
+                <a:solidFill>
+                  <a:srgbClr val="3AEDE5"/>
+                </a:solidFill>
+                <a:latin typeface="Alegreya Sans"/>
+              </a:rPr>
+              <a:t>•  </a:t>
+            </a:r>
+            <a:r>
+              <a:rPr sz="1000" b="0" i="0">
+                <a:solidFill>
+                  <a:srgbClr val="FFFFFF"/>
+                </a:solidFill>
+                <a:latin typeface="Alegreya Sans"/>
+              </a:rPr>
+              <a:t>Conseil stratégique auprès des dirigeants et des métiers pour interpréter et décliner les exigences réglementaires applicables aux systèmes d'IA.</a:t>
+            </a:r>
+          </a:p>
+          <a:p>
+            <a:pPr algn="l">
+              <a:spcAft>
+                <a:spcPts val="100"/>
+              </a:spcAft>
+            </a:pPr>
+            <a:r>
+              <a:rPr sz="1000" b="1" i="0">
+                <a:solidFill>
+                  <a:srgbClr val="3AEDE5"/>
+                </a:solidFill>
+                <a:latin typeface="Alegreya Sans"/>
+              </a:rPr>
+              <a:t>▸ </a:t>
+            </a:r>
+            <a:r>
+              <a:rPr sz="1000" b="1" i="0">
+                <a:solidFill>
+                  <a:srgbClr val="FFFFFF"/>
+                </a:solidFill>
+                <a:latin typeface="Alegreya Sans"/>
+              </a:rPr>
+              <a:t>Oney / Oneytrust</a:t>
+            </a:r>
+            <a:r>
+              <a:rPr sz="1000" b="0" i="0">
+                <a:solidFill>
+                  <a:srgbClr val="FFFFFF"/>
+                </a:solidFill>
+                <a:latin typeface="Alegreya Sans"/>
+              </a:rPr>
+              <a:t> — Expert Leader — Digital &amp; AI Compliance Officer</a:t>
+            </a:r>
+            <a:r>
+              <a:rPr sz="1000" b="0" i="1">
+                <a:solidFill>
+                  <a:srgbClr val="3AEDE5"/>
+                </a:solidFill>
+                <a:latin typeface="Alegreya Sans"/>
+              </a:rPr>
+              <a:t>  (38 mois)</a:t>
+            </a:r>
+          </a:p>
+          <a:p>
+            <a:pPr algn="l" lvl="1">
+              <a:spcAft>
+                <a:spcPts val="100"/>
+              </a:spcAft>
+            </a:pPr>
+            <a:r>
+              <a:rPr sz="1000" b="1" i="0">
+                <a:solidFill>
+                  <a:srgbClr val="3AEDE5"/>
+                </a:solidFill>
+                <a:latin typeface="Alegreya Sans"/>
+              </a:rPr>
+              <a:t>•  </a:t>
+            </a:r>
+            <a:r>
+              <a:rPr sz="1000" b="0" i="0">
+                <a:solidFill>
+                  <a:srgbClr val="FFFFFF"/>
+                </a:solidFill>
+                <a:latin typeface="Alegreya Sans"/>
+              </a:rPr>
+              <a:t>Structuration du cadre de gouvernance des risques IA avec le Chief Data Officer : inventaire des systèmes, formation des référents métiers et pilotage de la conformité EU AI Act dans plus de 10 entités internationales.</a:t>
+            </a:r>
+          </a:p>
+          <a:p>
+            <a:pPr algn="l" lvl="1">
+              <a:spcAft>
+                <a:spcPts val="100"/>
+              </a:spcAft>
+            </a:pPr>
+            <a:r>
+              <a:rPr sz="1000" b="1" i="0">
+                <a:solidFill>
+                  <a:srgbClr val="3AEDE5"/>
+                </a:solidFill>
+                <a:latin typeface="Alegreya Sans"/>
+              </a:rPr>
+              <a:t>•  </a:t>
+            </a:r>
+            <a:r>
+              <a:rPr sz="1000" b="0" i="0">
+                <a:solidFill>
+                  <a:srgbClr val="FFFFFF"/>
+                </a:solidFill>
+                <a:latin typeface="Alegreya Sans"/>
+              </a:rPr>
+              <a:t>Ambassadeur des outils d'IA Générative Groupe auprès de 3 000 collaborateurs Oney.</a:t>
+            </a:r>
+          </a:p>
+          <a:p>
+            <a:pPr algn="l" lvl="1">
+              <a:spcAft>
+                <a:spcPts val="100"/>
+              </a:spcAft>
+            </a:pPr>
+            <a:r>
+              <a:rPr sz="1000" b="1" i="0">
+                <a:solidFill>
+                  <a:srgbClr val="3AEDE5"/>
+                </a:solidFill>
+                <a:latin typeface="Alegreya Sans"/>
+              </a:rPr>
+              <a:t>•  </a:t>
+            </a:r>
+            <a:r>
+              <a:rPr sz="1000" b="0" i="0">
+                <a:solidFill>
+                  <a:srgbClr val="FFFFFF"/>
+                </a:solidFill>
+                <a:latin typeface="Alegreya Sans"/>
+              </a:rPr>
+              <a:t>Pilotage des activités RGPD de la filiale Oneytrust : rédaction et mise à jour AIPD, clauses contractuelles, formation, contrôles RGPD, référent privacy by design dans les projets de lutte contre la fraude.</a:t>
+            </a:r>
+          </a:p>
+          <a:p>
+            <a:pPr algn="l">
+              <a:spcBef>
+                <a:spcPts val="600"/>
+              </a:spcBef>
+              <a:spcAft>
+                <a:spcPts val="300"/>
+              </a:spcAft>
+            </a:pPr>
+            <a:r>
+              <a:rPr sz="1100" b="1" i="0">
+                <a:solidFill>
+                  <a:srgbClr val="3AEDE5"/>
+                </a:solidFill>
+                <a:latin typeface="Alegreya Sans"/>
+              </a:rPr>
+              <a:t>RÉFÉRENCES</a:t>
+            </a:r>
+          </a:p>
+          <a:p>
+            <a:pPr algn="l">
+              <a:spcAft>
+                <a:spcPts val="200"/>
+              </a:spcAft>
+            </a:pPr>
+            <a:r>
+              <a:rPr sz="1000" b="0" i="1">
+                <a:solidFill>
+                  <a:srgbClr val="FFFFFF"/>
+                </a:solidFill>
+                <a:latin typeface="Alegreya Sans"/>
+              </a:rPr>
+              <a:t>Groupe BPCE, Natixis, Oney, Sia Partners, Paris Europlace</a:t>
+            </a:r>
+          </a:p>
+          <a:p>
+            <a:pPr algn="l">
+              <a:spcBef>
+                <a:spcPts val="600"/>
+              </a:spcBef>
+              <a:spcAft>
+                <a:spcPts val="300"/>
+              </a:spcAft>
+            </a:pPr>
+            <a:r>
+              <a:rPr sz="1100" b="1" i="0">
+                <a:solidFill>
+                  <a:srgbClr val="3AEDE5"/>
+                </a:solidFill>
+                <a:latin typeface="Alegreya Sans"/>
+              </a:rPr>
+              <a:t>ENGAGEMENTS &amp; RÉALISATIONS</a:t>
+            </a:r>
+          </a:p>
+          <a:p>
+            <a:pPr algn="l">
+              <a:spcAft>
+                <a:spcPts val="100"/>
+              </a:spcAft>
+            </a:pPr>
+            <a:r>
+              <a:rPr sz="1000" b="1" i="0">
+                <a:solidFill>
+                  <a:srgbClr val="3AEDE5"/>
+                </a:solidFill>
+                <a:latin typeface="Alegreya Sans"/>
+              </a:rPr>
+              <a:t>• </a:t>
+            </a:r>
+            <a:r>
+              <a:rPr sz="1000" b="1" i="0">
+                <a:solidFill>
+                  <a:srgbClr val="FFFFFF"/>
+                </a:solidFill>
+                <a:latin typeface="Alegreya Sans"/>
+              </a:rPr>
+              <a:t>Conseiller Numérique</a:t>
+            </a:r>
+            <a:r>
+              <a:rPr sz="1000" b="0" i="0">
+                <a:solidFill>
+                  <a:srgbClr val="CCD6E8"/>
+                </a:solidFill>
+                <a:latin typeface="Alegreya Sans"/>
+              </a:rPr>
+              <a:t> — Bénévole au sein du Conseil du Numérique d'une commune des Yvelines, aux côtés du Maire.</a:t>
+            </a:r>
+          </a:p>
+          <a:p>
+            <a:pPr algn="l">
+              <a:spcAft>
+                <a:spcPts val="100"/>
+              </a:spcAft>
+            </a:pPr>
+            <a:r>
+              <a:rPr sz="1000" b="1" i="0">
+                <a:solidFill>
+                  <a:srgbClr val="3AEDE5"/>
+                </a:solidFill>
+                <a:latin typeface="Alegreya Sans"/>
+              </a:rPr>
+              <a:t>• </a:t>
+            </a:r>
+            <a:r>
+              <a:rPr sz="1000" b="1" i="0">
+                <a:solidFill>
+                  <a:srgbClr val="FFFFFF"/>
+                </a:solidFill>
+                <a:latin typeface="Alegreya Sans"/>
+              </a:rPr>
+              <a:t>Podcasteur</a:t>
+            </a:r>
+            <a:r>
+              <a:rPr sz="1000" b="0" i="0">
+                <a:solidFill>
+                  <a:srgbClr val="CCD6E8"/>
+                </a:solidFill>
+                <a:latin typeface="Alegreya Sans"/>
+              </a:rPr>
+              <a:t> — Créateur et animateur d'un podcast sur l'IA — personnalités influentes du secteur.</a:t>
+            </a:r>
+          </a:p>
+          <a:p>
+            <a:pPr algn="l">
+              <a:spcAft>
+                <a:spcPts val="100"/>
+              </a:spcAft>
+            </a:pPr>
+            <a:r>
+              <a:rPr sz="1000" b="1" i="0">
+                <a:solidFill>
+                  <a:srgbClr val="3AEDE5"/>
+                </a:solidFill>
+                <a:latin typeface="Alegreya Sans"/>
+              </a:rPr>
+              <a:t>• </a:t>
+            </a:r>
+            <a:r>
+              <a:rPr sz="1000" b="1" i="0">
+                <a:solidFill>
+                  <a:srgbClr val="FFFFFF"/>
+                </a:solidFill>
+                <a:latin typeface="Alegreya Sans"/>
+              </a:rPr>
+              <a:t>Conférencier</a:t>
+            </a:r>
+            <a:r>
+              <a:rPr sz="1000" b="0" i="0">
+                <a:solidFill>
+                  <a:srgbClr val="CCD6E8"/>
+                </a:solidFill>
+                <a:latin typeface="Alegreya Sans"/>
+              </a:rPr>
+              <a:t> — Intervenant sur l'IA et ses enjeux (écoles de commerce, mairies, administrateurs).</a:t>
+            </a:r>
+          </a:p>
+          <a:p>
+            <a:pPr algn="l">
+              <a:spcAft>
+                <a:spcPts val="100"/>
+              </a:spcAft>
+            </a:pPr>
+            <a:r>
+              <a:rPr sz="1000" b="1" i="0">
+                <a:solidFill>
+                  <a:srgbClr val="3AEDE5"/>
+                </a:solidFill>
+                <a:latin typeface="Alegreya Sans"/>
+              </a:rPr>
+              <a:t>• </a:t>
+            </a:r>
+            <a:r>
+              <a:rPr sz="1000" b="1" i="0">
+                <a:solidFill>
+                  <a:srgbClr val="FFFFFF"/>
+                </a:solidFill>
+                <a:latin typeface="Alegreya Sans"/>
+              </a:rPr>
+              <a:t>Juré EDHEC</a:t>
+            </a:r>
+            <a:r>
+              <a:rPr sz="1000" b="0" i="0">
+                <a:solidFill>
+                  <a:srgbClr val="CCD6E8"/>
+                </a:solidFill>
+                <a:latin typeface="Alegreya Sans"/>
+              </a:rPr>
+              <a:t> — Juré des projets IA — certification Digital Ethics Officer.</a:t>
+            </a:r>
+          </a:p>
+        </p:txBody>
+      </p:sp>
+      <p:sp>
+        <p:nvSpPr>
+          <p:cNvPr id="8" name="TextBox 7"/>
+          <p:cNvSpPr txBox="1"/>
+          <p:nvPr/>
+        </p:nvSpPr>
+        <p:spPr>
+          <a:xfrm>
+            <a:off x="228600" y="6578000"/>
+            <a:ext cx="11734800" cy="280000"/>
+          </a:xfrm>
+          <a:prstGeom prst="rect">
+            <a:avLst/>
+          </a:prstGeom>
+          <a:noFill/>
+        </p:spPr>
+        <p:txBody>
+          <a:bodyPr wrap="square" lIns="0" rIns="0" tIns="0" bIns="0">
+            <a:spAutoFit/>
+          </a:bodyPr>
+          <a:lstStyle/>
+          <a:p>
+            <a:pPr algn="ctr"/>
+            <a:r>
+              <a:rPr sz="900" b="0" i="1">
+                <a:solidFill>
+                  <a:srgbClr val="CCD6E8"/>
+                </a:solidFill>
+                <a:latin typeface="Alegreya Sans"/>
+              </a:rPr>
+              <a:t>Les informations de ce document sont strictement confidentielles — Ce document ne peut être partagé qu'avec l'accord de son propriétaire</a:t>
+            </a:r>
+          </a:p>
+        </p:txBody>
+      </p:sp>
+    </p:spTree>
+  </p:cSld>
+  <p:clrMapOvr>
+    <a:masterClrMapping/>
+  </p:clrMapOvr>
+</p:sld>
+</file>
+
+<file path=ppt/slides/slide2.xml><?xml version="1.0" encoding="utf-8"?>
+<p:sld xmlns:a="http://schemas.openxmlformats.org/drawingml/2006/main" xmlns:p="http://schemas.openxmlformats.org/presentationml/2006/main" xmlns:r="http://schemas.openxmlformats.org/officeDocument/2006/relationships">
+  <p:cSld>
+    <p:spTree>
+      <p:nvGrpSpPr>
+        <p:cNvPr id="1" name=""/>
+        <p:cNvGrpSpPr/>
+        <p:nvPr/>
+      </p:nvGrpSpPr>
+      <p:grpSpPr/>
+      <p:sp>
+        <p:nvSpPr>
+          <p:cNvPr id="2" name="Rectangle 1"/>
           <p:cNvSpPr/>
           <p:nvPr/>
         </p:nvSpPr>
         <p:spPr>
           <a:xfrm>
-            <a:off x="8692000" y="4058000"/>
-            <a:ext cx="5500000" cy="5500000"/>
+            <a:off x="0" y="0"/>
+            <a:ext cx="12192000" cy="6858000"/>
           </a:xfrm>
-          <a:prstGeom prst="ellipse">
+          <a:prstGeom prst="rect">
             <a:avLst/>
           </a:prstGeom>
-          <a:solidFill>
-            <a:srgbClr val="1FCBD9"/>
-          </a:solidFill>
           <a:ln>
             <a:noFill/>
           </a:ln>
+          <a:effectLst/>
+          <a:gradFill flip="none" rotWithShape="1">
+            <a:gsLst>
+              <a:gs pos="0">
+                <a:srgbClr val="0C2A8E"/>
+              </a:gs>
+              <a:gs pos="100000">
+                <a:srgbClr val="1FCBD9"/>
+              </a:gs>
+            </a:gsLst>
+            <a:lin ang="2700000" scaled="0"/>
+          </a:gradFill>
         </p:spPr>
         <p:style>
           <a:lnRef idx="1">
@@ -3178,50 +4488,7 @@
       </p:sp>
       <p:sp>
         <p:nvSpPr>
-          <p:cNvPr id="4" name="Oval 3"/>
-          <p:cNvSpPr/>
-          <p:nvPr/>
-        </p:nvSpPr>
-        <p:spPr>
-          <a:xfrm>
-            <a:off x="7692000" y="3058000"/>
-            <a:ext cx="5500000" cy="5500000"/>
-          </a:xfrm>
-          <a:prstGeom prst="ellipse">
-            <a:avLst/>
-          </a:prstGeom>
-          <a:solidFill>
-            <a:srgbClr val="0B2A8A"/>
-          </a:solidFill>
-          <a:ln>
-            <a:noFill/>
-          </a:ln>
-        </p:spPr>
-        <p:style>
-          <a:lnRef idx="1">
-            <a:schemeClr val="accent1"/>
-          </a:lnRef>
-          <a:fillRef idx="3">
-            <a:schemeClr val="accent1"/>
-          </a:fillRef>
-          <a:effectRef idx="2">
-            <a:schemeClr val="accent1"/>
-          </a:effectRef>
-          <a:fontRef idx="minor">
-            <a:schemeClr val="lt1"/>
-          </a:fontRef>
-        </p:style>
-        <p:txBody>
-          <a:bodyPr rtlCol="0" anchor="ctr"/>
-          <a:lstStyle/>
-          <a:p>
-            <a:pPr algn="ctr"/>
-          </a:p>
-        </p:txBody>
-      </p:sp>
-      <p:sp>
-        <p:nvSpPr>
-          <p:cNvPr id="5" name="Rectangle 4"/>
+          <p:cNvPr id="3" name="Rectangle 2"/>
           <p:cNvSpPr/>
           <p:nvPr/>
         </p:nvSpPr>
@@ -3234,7 +4501,7 @@
             <a:avLst/>
           </a:prstGeom>
           <a:solidFill>
-            <a:srgbClr val="0B2A8A"/>
+            <a:srgbClr val="071F66"/>
           </a:solidFill>
           <a:ln>
             <a:noFill/>
@@ -3265,14 +4532,14 @@
       </p:sp>
       <p:sp>
         <p:nvSpPr>
-          <p:cNvPr id="6" name="TextBox 5"/>
+          <p:cNvPr id="4" name="TextBox 3"/>
           <p:cNvSpPr txBox="1"/>
           <p:nvPr/>
         </p:nvSpPr>
         <p:spPr>
           <a:xfrm>
-            <a:off x="228600" y="280000"/>
-            <a:ext cx="3142800" cy="900000"/>
+            <a:off x="228600" y="260000"/>
+            <a:ext cx="3142800" cy="800000"/>
           </a:xfrm>
           <a:prstGeom prst="rect">
             <a:avLst/>
@@ -3287,7 +4554,7 @@
           <a:p>
             <a:pPr algn="l"/>
             <a:r>
-              <a:rPr sz="4000" b="1" i="0">
+              <a:rPr sz="4400" b="1" i="0">
                 <a:solidFill>
                   <a:srgbClr val="3AEDE5"/>
                 </a:solidFill>
@@ -3300,14 +4567,14 @@
       </p:sp>
       <p:sp>
         <p:nvSpPr>
-          <p:cNvPr id="7" name="TextBox 6"/>
+          <p:cNvPr id="5" name="TextBox 4"/>
           <p:cNvSpPr txBox="1"/>
           <p:nvPr/>
         </p:nvSpPr>
         <p:spPr>
           <a:xfrm>
             <a:off x="3828600" y="300000"/>
-            <a:ext cx="8134800" cy="900000"/>
+            <a:ext cx="8134800" cy="800000"/>
           </a:xfrm>
           <a:prstGeom prst="rect">
             <a:avLst/>
@@ -3321,13 +4588,13 @@
           <a:lstStyle/>
           <a:p>
             <a:r>
-              <a:rPr sz="1800" b="1" i="0">
-                <a:solidFill>
-                  <a:srgbClr val="FFFFFF"/>
-                </a:solidFill>
-                <a:latin typeface="Alegreya Sans"/>
-              </a:rPr>
-              <a:t>Spécialiste AI Governance, AI Risk &amp; EU AI Act</a:t>
+              <a:rPr sz="2000" b="1" i="0">
+                <a:solidFill>
+                  <a:srgbClr val="FFFFFF"/>
+                </a:solidFill>
+                <a:latin typeface="Alegreya Sans"/>
+              </a:rPr>
+              <a:t>AI Governance, AI Risk &amp; EU AI Act Specialist</a:t>
             </a:r>
           </a:p>
           <a:p>
@@ -3337,27 +4604,27 @@
               </a:spcBef>
             </a:pPr>
             <a:r>
-              <a:rPr sz="1200" b="0" i="1">
-                <a:solidFill>
-                  <a:srgbClr val="3AEDE5"/>
-                </a:solidFill>
-                <a:latin typeface="Alegreya Sans"/>
-              </a:rPr>
-              <a:t>Gouvernance IA &amp; Conformité réglementaire — Services financiers</a:t>
-            </a:r>
-          </a:p>
-        </p:txBody>
-      </p:sp>
-      <p:sp>
-        <p:nvSpPr>
-          <p:cNvPr id="8" name="TextBox 7"/>
+              <a:rPr sz="1300" b="0" i="1">
+                <a:solidFill>
+                  <a:srgbClr val="3AEDE5"/>
+                </a:solidFill>
+                <a:latin typeface="Alegreya Sans"/>
+              </a:rPr>
+              <a:t>AI Governance &amp; Regulatory Compliance — Financial Services</a:t>
+            </a:r>
+          </a:p>
+        </p:txBody>
+      </p:sp>
+      <p:sp>
+        <p:nvSpPr>
+          <p:cNvPr id="6" name="TextBox 5"/>
           <p:cNvSpPr txBox="1"/>
           <p:nvPr/>
         </p:nvSpPr>
         <p:spPr>
           <a:xfrm>
-            <a:off x="228600" y="1300000"/>
-            <a:ext cx="3142800" cy="5178000"/>
+            <a:off x="228600" y="1180000"/>
+            <a:ext cx="3142800" cy="5318000"/>
           </a:xfrm>
           <a:prstGeom prst="rect">
             <a:avLst/>
@@ -3372,7 +4639,7 @@
           <a:p>
             <a:pPr algn="l">
               <a:spcAft>
-                <a:spcPts val="400"/>
+                <a:spcPts val="300"/>
               </a:spcAft>
             </a:pPr>
             <a:r>
@@ -3382,17 +4649,17 @@
                 </a:solidFill>
                 <a:latin typeface="Alegreya Sans"/>
               </a:rPr>
-              <a:t>DOMAINES D'EXPERTISE</a:t>
-            </a:r>
-          </a:p>
-          <a:p>
-            <a:pPr algn="l">
-              <a:spcAft>
-                <a:spcPts val="200"/>
-              </a:spcAft>
-            </a:pPr>
-            <a:r>
-              <a:rPr sz="850" b="1" i="0">
+              <a:t>MAIN AREAS OF EXPERTISE</a:t>
+            </a:r>
+          </a:p>
+          <a:p>
+            <a:pPr algn="l">
+              <a:spcAft>
+                <a:spcPts val="100"/>
+              </a:spcAft>
+            </a:pPr>
+            <a:r>
+              <a:rPr sz="1000" b="1" i="0">
                 <a:solidFill>
                   <a:srgbClr val="3AEDE5"/>
                 </a:solidFill>
@@ -3401,7 +4668,7 @@
               <a:t>•  </a:t>
             </a:r>
             <a:r>
-              <a:rPr sz="850" b="0" i="0">
+              <a:rPr sz="1000" b="0" i="0">
                 <a:solidFill>
                   <a:srgbClr val="FFFFFF"/>
                 </a:solidFill>
@@ -3413,11 +4680,11 @@
           <a:p>
             <a:pPr algn="l">
               <a:spcAft>
-                <a:spcPts val="200"/>
-              </a:spcAft>
-            </a:pPr>
-            <a:r>
-              <a:rPr sz="850" b="1" i="0">
+                <a:spcPts val="100"/>
+              </a:spcAft>
+            </a:pPr>
+            <a:r>
+              <a:rPr sz="1000" b="1" i="0">
                 <a:solidFill>
                   <a:srgbClr val="3AEDE5"/>
                 </a:solidFill>
@@ -3426,7 +4693,7 @@
               <a:t>•  </a:t>
             </a:r>
             <a:r>
-              <a:rPr sz="850" b="0" i="0">
+              <a:rPr sz="1000" b="0" i="0">
                 <a:solidFill>
                   <a:srgbClr val="FFFFFF"/>
                 </a:solidFill>
@@ -3438,11 +4705,11 @@
           <a:p>
             <a:pPr algn="l">
               <a:spcAft>
-                <a:spcPts val="200"/>
-              </a:spcAft>
-            </a:pPr>
-            <a:r>
-              <a:rPr sz="850" b="1" i="0">
+                <a:spcPts val="100"/>
+              </a:spcAft>
+            </a:pPr>
+            <a:r>
+              <a:rPr sz="1000" b="1" i="0">
                 <a:solidFill>
                   <a:srgbClr val="3AEDE5"/>
                 </a:solidFill>
@@ -3451,7 +4718,7 @@
               <a:t>•  </a:t>
             </a:r>
             <a:r>
-              <a:rPr sz="850" b="0" i="0">
+              <a:rPr sz="1000" b="0" i="0">
                 <a:solidFill>
                   <a:srgbClr val="FFFFFF"/>
                 </a:solidFill>
@@ -3463,11 +4730,11 @@
           <a:p>
             <a:pPr algn="l">
               <a:spcAft>
-                <a:spcPts val="200"/>
-              </a:spcAft>
-            </a:pPr>
-            <a:r>
-              <a:rPr sz="850" b="1" i="0">
+                <a:spcPts val="100"/>
+              </a:spcAft>
+            </a:pPr>
+            <a:r>
+              <a:rPr sz="1000" b="1" i="0">
                 <a:solidFill>
                   <a:srgbClr val="3AEDE5"/>
                 </a:solidFill>
@@ -3476,7 +4743,7 @@
               <a:t>•  </a:t>
             </a:r>
             <a:r>
-              <a:rPr sz="850" b="0" i="0">
+              <a:rPr sz="1000" b="0" i="0">
                 <a:solidFill>
                   <a:srgbClr val="FFFFFF"/>
                 </a:solidFill>
@@ -3488,11 +4755,11 @@
           <a:p>
             <a:pPr algn="l">
               <a:spcAft>
-                <a:spcPts val="200"/>
-              </a:spcAft>
-            </a:pPr>
-            <a:r>
-              <a:rPr sz="850" b="1" i="0">
+                <a:spcPts val="100"/>
+              </a:spcAft>
+            </a:pPr>
+            <a:r>
+              <a:rPr sz="1000" b="1" i="0">
                 <a:solidFill>
                   <a:srgbClr val="3AEDE5"/>
                 </a:solidFill>
@@ -3501,7 +4768,7 @@
               <a:t>•  </a:t>
             </a:r>
             <a:r>
-              <a:rPr sz="850" b="0" i="0">
+              <a:rPr sz="1000" b="0" i="0">
                 <a:solidFill>
                   <a:srgbClr val="FFFFFF"/>
                 </a:solidFill>
@@ -3513,11 +4780,11 @@
           <a:p>
             <a:pPr algn="l">
               <a:spcAft>
-                <a:spcPts val="200"/>
-              </a:spcAft>
-            </a:pPr>
-            <a:r>
-              <a:rPr sz="850" b="1" i="0">
+                <a:spcPts val="100"/>
+              </a:spcAft>
+            </a:pPr>
+            <a:r>
+              <a:rPr sz="1000" b="1" i="0">
                 <a:solidFill>
                   <a:srgbClr val="3AEDE5"/>
                 </a:solidFill>
@@ -3526,7 +4793,7 @@
               <a:t>•  </a:t>
             </a:r>
             <a:r>
-              <a:rPr sz="850" b="0" i="0">
+              <a:rPr sz="1000" b="0" i="0">
                 <a:solidFill>
                   <a:srgbClr val="FFFFFF"/>
                 </a:solidFill>
@@ -3537,24 +4804,11 @@
           </a:p>
           <a:p>
             <a:pPr algn="l">
-              <a:spcAft>
-                <a:spcPts val="200"/>
-              </a:spcAft>
-            </a:pPr>
-            <a:r>
-              <a:rPr sz="400" b="0" i="0">
-                <a:solidFill>
-                  <a:srgbClr val="0B2A8A"/>
-                </a:solidFill>
-                <a:latin typeface="Alegreya Sans"/>
-              </a:rPr>
-              <a:t> </a:t>
-            </a:r>
-          </a:p>
-          <a:p>
-            <a:pPr algn="l">
-              <a:spcAft>
-                <a:spcPts val="400"/>
+              <a:spcBef>
+                <a:spcPts val="600"/>
+              </a:spcBef>
+              <a:spcAft>
+                <a:spcPts val="300"/>
               </a:spcAft>
             </a:pPr>
             <a:r>
@@ -3564,17 +4818,17 @@
                 </a:solidFill>
                 <a:latin typeface="Alegreya Sans"/>
               </a:rPr>
-              <a:t>LANGUES</a:t>
-            </a:r>
-          </a:p>
-          <a:p>
-            <a:pPr algn="l">
-              <a:spcAft>
-                <a:spcPts val="200"/>
-              </a:spcAft>
-            </a:pPr>
-            <a:r>
-              <a:rPr sz="850" b="1" i="0">
+              <a:t>LANGUAGES</a:t>
+            </a:r>
+          </a:p>
+          <a:p>
+            <a:pPr algn="l">
+              <a:spcAft>
+                <a:spcPts val="100"/>
+              </a:spcAft>
+            </a:pPr>
+            <a:r>
+              <a:rPr sz="1000" b="1" i="0">
                 <a:solidFill>
                   <a:srgbClr val="3AEDE5"/>
                 </a:solidFill>
@@ -3583,23 +4837,23 @@
               <a:t>•  </a:t>
             </a:r>
             <a:r>
-              <a:rPr sz="850" b="0" i="0">
-                <a:solidFill>
-                  <a:srgbClr val="FFFFFF"/>
-                </a:solidFill>
-                <a:latin typeface="Alegreya Sans"/>
-              </a:rPr>
-              <a:t>Français — Langue maternelle</a:t>
-            </a:r>
-          </a:p>
-          <a:p>
-            <a:pPr algn="l">
-              <a:spcAft>
-                <a:spcPts val="200"/>
-              </a:spcAft>
-            </a:pPr>
-            <a:r>
-              <a:rPr sz="850" b="1" i="0">
+              <a:rPr sz="1000" b="0" i="0">
+                <a:solidFill>
+                  <a:srgbClr val="FFFFFF"/>
+                </a:solidFill>
+                <a:latin typeface="Alegreya Sans"/>
+              </a:rPr>
+              <a:t>French — Native</a:t>
+            </a:r>
+          </a:p>
+          <a:p>
+            <a:pPr algn="l">
+              <a:spcAft>
+                <a:spcPts val="100"/>
+              </a:spcAft>
+            </a:pPr>
+            <a:r>
+              <a:rPr sz="1000" b="1" i="0">
                 <a:solidFill>
                   <a:srgbClr val="3AEDE5"/>
                 </a:solidFill>
@@ -3608,35 +4862,22 @@
               <a:t>•  </a:t>
             </a:r>
             <a:r>
-              <a:rPr sz="850" b="0" i="0">
-                <a:solidFill>
-                  <a:srgbClr val="FFFFFF"/>
-                </a:solidFill>
-                <a:latin typeface="Alegreya Sans"/>
-              </a:rPr>
-              <a:t>Anglais — TOEIC 955/990</a:t>
-            </a:r>
-          </a:p>
-          <a:p>
-            <a:pPr algn="l">
-              <a:spcAft>
-                <a:spcPts val="200"/>
-              </a:spcAft>
-            </a:pPr>
-            <a:r>
-              <a:rPr sz="400" b="0" i="0">
-                <a:solidFill>
-                  <a:srgbClr val="0B2A8A"/>
-                </a:solidFill>
-                <a:latin typeface="Alegreya Sans"/>
-              </a:rPr>
-              <a:t> </a:t>
-            </a:r>
-          </a:p>
-          <a:p>
-            <a:pPr algn="l">
-              <a:spcAft>
-                <a:spcPts val="400"/>
+              <a:rPr sz="1000" b="0" i="0">
+                <a:solidFill>
+                  <a:srgbClr val="FFFFFF"/>
+                </a:solidFill>
+                <a:latin typeface="Alegreya Sans"/>
+              </a:rPr>
+              <a:t>English — TOEIC 955/990</a:t>
+            </a:r>
+          </a:p>
+          <a:p>
+            <a:pPr algn="l">
+              <a:spcBef>
+                <a:spcPts val="600"/>
+              </a:spcBef>
+              <a:spcAft>
+                <a:spcPts val="300"/>
               </a:spcAft>
             </a:pPr>
             <a:r>
@@ -3646,7 +4887,7 @@
                 </a:solidFill>
                 <a:latin typeface="Alegreya Sans"/>
               </a:rPr>
-              <a:t>FORMATION &amp; CERTIFICATIONS</a:t>
+              <a:t>EDUCATION &amp; CERTIFICATIONS</a:t>
             </a:r>
           </a:p>
           <a:p>
@@ -3656,7 +4897,7 @@
               </a:spcAft>
             </a:pPr>
             <a:r>
-              <a:rPr sz="750" b="1" i="0">
+              <a:rPr sz="1000" b="1" i="0">
                 <a:solidFill>
                   <a:srgbClr val="3AEDE5"/>
                 </a:solidFill>
@@ -3665,7 +4906,7 @@
               <a:t>2024  </a:t>
             </a:r>
             <a:r>
-              <a:rPr sz="750" b="1" i="0">
+              <a:rPr sz="1000" b="1" i="0">
                 <a:solidFill>
                   <a:srgbClr val="FFFFFF"/>
                 </a:solidFill>
@@ -3681,13 +4922,13 @@
               </a:spcAft>
             </a:pPr>
             <a:r>
-              <a:rPr sz="750" b="0" i="1">
+              <a:rPr sz="1000" b="0" i="1">
                 <a:solidFill>
                   <a:srgbClr val="CCD6E8"/>
                 </a:solidFill>
                 <a:latin typeface="Alegreya Sans"/>
               </a:rPr>
-              <a:t>Certification Digital Ethics Officer (avec Mention)</a:t>
+              <a:t>Digital Ethics Officer certification (with Distinction)</a:t>
             </a:r>
           </a:p>
           <a:p>
@@ -3697,7 +4938,7 @@
               </a:spcAft>
             </a:pPr>
             <a:r>
-              <a:rPr sz="750" b="1" i="0">
+              <a:rPr sz="1000" b="1" i="0">
                 <a:solidFill>
                   <a:srgbClr val="3AEDE5"/>
                 </a:solidFill>
@@ -3706,7 +4947,7 @@
               <a:t>2015 — 2020  </a:t>
             </a:r>
             <a:r>
-              <a:rPr sz="750" b="1" i="0">
+              <a:rPr sz="1000" b="1" i="0">
                 <a:solidFill>
                   <a:srgbClr val="FFFFFF"/>
                 </a:solidFill>
@@ -3722,13 +4963,13 @@
               </a:spcAft>
             </a:pPr>
             <a:r>
-              <a:rPr sz="750" b="0" i="1">
+              <a:rPr sz="1000" b="0" i="1">
                 <a:solidFill>
                   <a:srgbClr val="CCD6E8"/>
                 </a:solidFill>
                 <a:latin typeface="Alegreya Sans"/>
               </a:rPr>
-              <a:t>Master II Affaires européennes et internationales (avec Mention)</a:t>
+              <a:t>Master's in European &amp; International Affairs (with Distinction)</a:t>
             </a:r>
           </a:p>
           <a:p>
@@ -3738,7 +4979,7 @@
               </a:spcAft>
             </a:pPr>
             <a:r>
-              <a:rPr sz="750" b="1" i="0">
+              <a:rPr sz="1000" b="1" i="0">
                 <a:solidFill>
                   <a:srgbClr val="3AEDE5"/>
                 </a:solidFill>
@@ -3747,13 +4988,13 @@
               <a:t>2020  </a:t>
             </a:r>
             <a:r>
-              <a:rPr sz="750" b="1" i="0">
-                <a:solidFill>
-                  <a:srgbClr val="FFFFFF"/>
-                </a:solidFill>
-                <a:latin typeface="Alegreya Sans"/>
-              </a:rPr>
-              <a:t>Université de Versailles Saint-Quentin-en-Yvelines</a:t>
+              <a:rPr sz="1000" b="1" i="0">
+                <a:solidFill>
+                  <a:srgbClr val="FFFFFF"/>
+                </a:solidFill>
+                <a:latin typeface="Alegreya Sans"/>
+              </a:rPr>
+              <a:t>University of Versailles Saint-Quentin-en-Yvelines</a:t>
             </a:r>
           </a:p>
           <a:p>
@@ -3763,27 +5004,27 @@
               </a:spcAft>
             </a:pPr>
             <a:r>
-              <a:rPr sz="750" b="0" i="1">
+              <a:rPr sz="1000" b="0" i="1">
                 <a:solidFill>
                   <a:srgbClr val="CCD6E8"/>
                 </a:solidFill>
                 <a:latin typeface="Alegreya Sans"/>
               </a:rPr>
-              <a:t>Master II Influence &amp; Affaires publiques (avec Mention)</a:t>
-            </a:r>
-          </a:p>
-        </p:txBody>
-      </p:sp>
-      <p:sp>
-        <p:nvSpPr>
-          <p:cNvPr id="9" name="TextBox 8"/>
+              <a:t>Master's in Influence &amp; Public Affairs (with Distinction)</a:t>
+            </a:r>
+          </a:p>
+        </p:txBody>
+      </p:sp>
+      <p:sp>
+        <p:nvSpPr>
+          <p:cNvPr id="7" name="TextBox 6"/>
           <p:cNvSpPr txBox="1"/>
           <p:nvPr/>
         </p:nvSpPr>
         <p:spPr>
           <a:xfrm>
-            <a:off x="3828600" y="1300000"/>
-            <a:ext cx="8134800" cy="5178000"/>
+            <a:off x="3828600" y="1180000"/>
+            <a:ext cx="8134800" cy="5318000"/>
           </a:xfrm>
           <a:prstGeom prst="rect">
             <a:avLst/>
@@ -3798,7 +5039,7 @@
           <a:p>
             <a:pPr algn="l">
               <a:spcAft>
-                <a:spcPts val="400"/>
+                <a:spcPts val="300"/>
               </a:spcAft>
             </a:pPr>
             <a:r>
@@ -3808,7 +5049,7 @@
                 </a:solidFill>
                 <a:latin typeface="Alegreya Sans"/>
               </a:rPr>
-              <a:t>RÉSUMÉ</a:t>
+              <a:t>SUMMARY</a:t>
             </a:r>
           </a:p>
           <a:p>
@@ -3818,13 +5059,498 @@
               </a:spcAft>
             </a:pPr>
             <a:r>
-              <a:rPr sz="850" b="0" i="0">
-                <a:solidFill>
-                  <a:srgbClr val="FFFFFF"/>
-                </a:solidFill>
-                <a:latin typeface="Alegreya Sans"/>
-              </a:rPr>
-              <a:t>Expert en gouvernance de l'IA, AI Risk Management et conformité réglementaire, avec près de 8 ans d'expérience auprès de grandes institutions bancaires. Spécialisé dans l'EU AI Act et le déploiement de dispositifs de gouvernance IA à l'échelle internationale.</a:t>
+              <a:rPr sz="1000" b="0" i="0">
+                <a:solidFill>
+                  <a:srgbClr val="FFFFFF"/>
+                </a:solidFill>
+                <a:latin typeface="Alegreya Sans"/>
+              </a:rPr>
+              <a:t>Expert in AI Governance, AI Risk Management and regulatory compliance, with nearly 8 years of experience advising major banking institutions. Specialised in the EU AI Act and the international rollout of AI governance frameworks.</a:t>
+            </a:r>
+          </a:p>
+          <a:p>
+            <a:pPr algn="l">
+              <a:spcBef>
+                <a:spcPts val="600"/>
+              </a:spcBef>
+              <a:spcAft>
+                <a:spcPts val="300"/>
+              </a:spcAft>
+            </a:pPr>
+            <a:r>
+              <a:rPr sz="1100" b="1" i="0">
+                <a:solidFill>
+                  <a:srgbClr val="3AEDE5"/>
+                </a:solidFill>
+                <a:latin typeface="Alegreya Sans"/>
+              </a:rPr>
+              <a:t>PROFESSIONAL EXPERIENCE</a:t>
+            </a:r>
+          </a:p>
+          <a:p>
+            <a:pPr algn="l">
+              <a:spcAft>
+                <a:spcPts val="100"/>
+              </a:spcAft>
+            </a:pPr>
+            <a:r>
+              <a:rPr sz="1000" b="1" i="0">
+                <a:solidFill>
+                  <a:srgbClr val="3AEDE5"/>
+                </a:solidFill>
+                <a:latin typeface="Alegreya Sans"/>
+              </a:rPr>
+              <a:t>▸ </a:t>
+            </a:r>
+            <a:r>
+              <a:rPr sz="1000" b="1" i="0">
+                <a:solidFill>
+                  <a:srgbClr val="FFFFFF"/>
+                </a:solidFill>
+                <a:latin typeface="Alegreya Sans"/>
+              </a:rPr>
+              <a:t>Top-tier European CIB</a:t>
+            </a:r>
+            <a:r>
+              <a:rPr sz="1000" b="0" i="0">
+                <a:solidFill>
+                  <a:srgbClr val="FFFFFF"/>
+                </a:solidFill>
+                <a:latin typeface="Alegreya Sans"/>
+              </a:rPr>
+              <a:t> — AI Compliance Lead (consultant)</a:t>
+            </a:r>
+            <a:r>
+              <a:rPr sz="1000" b="0" i="1">
+                <a:solidFill>
+                  <a:srgbClr val="3AEDE5"/>
+                </a:solidFill>
+                <a:latin typeface="Alegreya Sans"/>
+              </a:rPr>
+              <a:t>  (8 months — ongoing)</a:t>
+            </a:r>
+          </a:p>
+          <a:p>
+            <a:pPr algn="l" lvl="1">
+              <a:spcAft>
+                <a:spcPts val="100"/>
+              </a:spcAft>
+            </a:pPr>
+            <a:r>
+              <a:rPr sz="1000" b="1" i="0">
+                <a:solidFill>
+                  <a:srgbClr val="3AEDE5"/>
+                </a:solidFill>
+                <a:latin typeface="Alegreya Sans"/>
+              </a:rPr>
+              <a:t>•  </a:t>
+            </a:r>
+            <a:r>
+              <a:rPr sz="1000" b="0" i="0">
+                <a:solidFill>
+                  <a:srgbClr val="FFFFFF"/>
+                </a:solidFill>
+                <a:latin typeface="Alegreya Sans"/>
+              </a:rPr>
+              <a:t>Finalisation and rollout of the AI risk governance framework: internal policies, risk mapping, committee design, coordination of support and business functions.</a:t>
+            </a:r>
+          </a:p>
+          <a:p>
+            <a:pPr algn="l" lvl="1">
+              <a:spcAft>
+                <a:spcPts val="100"/>
+              </a:spcAft>
+            </a:pPr>
+            <a:r>
+              <a:rPr sz="1000" b="1" i="0">
+                <a:solidFill>
+                  <a:srgbClr val="3AEDE5"/>
+                </a:solidFill>
+                <a:latin typeface="Alegreya Sans"/>
+              </a:rPr>
+              <a:t>•  </a:t>
+            </a:r>
+            <a:r>
+              <a:rPr sz="1000" b="0" i="0">
+                <a:solidFill>
+                  <a:srgbClr val="FFFFFF"/>
+                </a:solidFill>
+                <a:latin typeface="Alegreya Sans"/>
+              </a:rPr>
+              <a:t>Operational pilot of AI governance: identification, assessment, prioritisation, validation and remediation of AI systems.</a:t>
+            </a:r>
+          </a:p>
+          <a:p>
+            <a:pPr algn="l" lvl="1">
+              <a:spcAft>
+                <a:spcPts val="100"/>
+              </a:spcAft>
+            </a:pPr>
+            <a:r>
+              <a:rPr sz="1000" b="1" i="0">
+                <a:solidFill>
+                  <a:srgbClr val="3AEDE5"/>
+                </a:solidFill>
+                <a:latin typeface="Alegreya Sans"/>
+              </a:rPr>
+              <a:t>•  </a:t>
+            </a:r>
+            <a:r>
+              <a:rPr sz="1000" b="0" i="0">
+                <a:solidFill>
+                  <a:srgbClr val="FFFFFF"/>
+                </a:solidFill>
+                <a:latin typeface="Alegreya Sans"/>
+              </a:rPr>
+              <a:t>Contribution to the international rollout across 40+ entities, including USA, UK, APAC and MEA.</a:t>
+            </a:r>
+          </a:p>
+          <a:p>
+            <a:pPr algn="l">
+              <a:spcAft>
+                <a:spcPts val="100"/>
+              </a:spcAft>
+            </a:pPr>
+            <a:r>
+              <a:rPr sz="1000" b="1" i="0">
+                <a:solidFill>
+                  <a:srgbClr val="3AEDE5"/>
+                </a:solidFill>
+                <a:latin typeface="Alegreya Sans"/>
+              </a:rPr>
+              <a:t>▸ </a:t>
+            </a:r>
+            <a:r>
+              <a:rPr sz="1000" b="1" i="0">
+                <a:solidFill>
+                  <a:srgbClr val="FFFFFF"/>
+                </a:solidFill>
+                <a:latin typeface="Alegreya Sans"/>
+              </a:rPr>
+              <a:t>Sia Partners</a:t>
+            </a:r>
+            <a:r>
+              <a:rPr sz="1000" b="0" i="0">
+                <a:solidFill>
+                  <a:srgbClr val="FFFFFF"/>
+                </a:solidFill>
+                <a:latin typeface="Alegreya Sans"/>
+              </a:rPr>
+              <a:t> — Associate Manager</a:t>
+            </a:r>
+            <a:r>
+              <a:rPr sz="1000" b="0" i="1">
+                <a:solidFill>
+                  <a:srgbClr val="3AEDE5"/>
+                </a:solidFill>
+                <a:latin typeface="Alegreya Sans"/>
+              </a:rPr>
+              <a:t>  (10 months — ongoing)</a:t>
+            </a:r>
+          </a:p>
+          <a:p>
+            <a:pPr algn="l" lvl="1">
+              <a:spcAft>
+                <a:spcPts val="100"/>
+              </a:spcAft>
+            </a:pPr>
+            <a:r>
+              <a:rPr sz="1000" b="1" i="0">
+                <a:solidFill>
+                  <a:srgbClr val="3AEDE5"/>
+                </a:solidFill>
+                <a:latin typeface="Alegreya Sans"/>
+              </a:rPr>
+              <a:t>•  </a:t>
+            </a:r>
+            <a:r>
+              <a:rPr sz="1000" b="0" i="0">
+                <a:solidFill>
+                  <a:srgbClr val="FFFFFF"/>
+                </a:solidFill>
+                <a:latin typeface="Alegreya Sans"/>
+              </a:rPr>
+              <a:t>Head of the AI Risk Management offering: RFP coordination, strategic and regulatory watch, business development and financial-ecosystem animation.</a:t>
+            </a:r>
+          </a:p>
+          <a:p>
+            <a:pPr algn="l" lvl="1">
+              <a:spcAft>
+                <a:spcPts val="100"/>
+              </a:spcAft>
+            </a:pPr>
+            <a:r>
+              <a:rPr sz="1000" b="1" i="0">
+                <a:solidFill>
+                  <a:srgbClr val="3AEDE5"/>
+                </a:solidFill>
+                <a:latin typeface="Alegreya Sans"/>
+              </a:rPr>
+              <a:t>•  </a:t>
+            </a:r>
+            <a:r>
+              <a:rPr sz="1000" b="0" i="0">
+                <a:solidFill>
+                  <a:srgbClr val="FFFFFF"/>
+                </a:solidFill>
+                <a:latin typeface="Alegreya Sans"/>
+              </a:rPr>
+              <a:t>Lead of the AI working group at Paris Europlace association (40+ senior financial-sector representatives): position papers, EU consultation responses, benchmarks.</a:t>
+            </a:r>
+          </a:p>
+          <a:p>
+            <a:pPr algn="l">
+              <a:spcAft>
+                <a:spcPts val="100"/>
+              </a:spcAft>
+            </a:pPr>
+            <a:r>
+              <a:rPr sz="1000" b="1" i="0">
+                <a:solidFill>
+                  <a:srgbClr val="3AEDE5"/>
+                </a:solidFill>
+                <a:latin typeface="Alegreya Sans"/>
+              </a:rPr>
+              <a:t>▸ </a:t>
+            </a:r>
+            <a:r>
+              <a:rPr sz="1000" b="1" i="0">
+                <a:solidFill>
+                  <a:srgbClr val="FFFFFF"/>
+                </a:solidFill>
+                <a:latin typeface="Alegreya Sans"/>
+              </a:rPr>
+              <a:t>Groupe BPCE</a:t>
+            </a:r>
+            <a:r>
+              <a:rPr sz="1000" b="0" i="0">
+                <a:solidFill>
+                  <a:srgbClr val="FFFFFF"/>
+                </a:solidFill>
+                <a:latin typeface="Alegreya Sans"/>
+              </a:rPr>
+              <a:t> — Group EU AI Act Project Manager</a:t>
+            </a:r>
+            <a:r>
+              <a:rPr sz="1000" b="0" i="1">
+                <a:solidFill>
+                  <a:srgbClr val="3AEDE5"/>
+                </a:solidFill>
+                <a:latin typeface="Alegreya Sans"/>
+              </a:rPr>
+              <a:t>  (18 months)</a:t>
+            </a:r>
+          </a:p>
+          <a:p>
+            <a:pPr algn="l" lvl="1">
+              <a:spcAft>
+                <a:spcPts val="100"/>
+              </a:spcAft>
+            </a:pPr>
+            <a:r>
+              <a:rPr sz="1000" b="1" i="0">
+                <a:solidFill>
+                  <a:srgbClr val="3AEDE5"/>
+                </a:solidFill>
+                <a:latin typeface="Alegreya Sans"/>
+              </a:rPr>
+              <a:t>•  </a:t>
+            </a:r>
+            <a:r>
+              <a:rPr sz="1000" b="0" i="0">
+                <a:solidFill>
+                  <a:srgbClr val="FFFFFF"/>
+                </a:solidFill>
+                <a:latin typeface="Alegreya Sans"/>
+              </a:rPr>
+              <a:t>Lead of the EU AI Act compliance programme for Groupe BPCE and its entities (Natixis, Oney, BRED, etc.): AI risk mapping and assessment, definition of Group policy and standards, operational process evolution, steering-committee animation.</a:t>
+            </a:r>
+          </a:p>
+          <a:p>
+            <a:pPr algn="l" lvl="1">
+              <a:spcAft>
+                <a:spcPts val="100"/>
+              </a:spcAft>
+            </a:pPr>
+            <a:r>
+              <a:rPr sz="1000" b="1" i="0">
+                <a:solidFill>
+                  <a:srgbClr val="3AEDE5"/>
+                </a:solidFill>
+                <a:latin typeface="Alegreya Sans"/>
+              </a:rPr>
+              <a:t>•  </a:t>
+            </a:r>
+            <a:r>
+              <a:rPr sz="1000" b="0" i="0">
+                <a:solidFill>
+                  <a:srgbClr val="FFFFFF"/>
+                </a:solidFill>
+                <a:latin typeface="Alegreya Sans"/>
+              </a:rPr>
+              <a:t>Coordination and support of 35+ local decision-makers (DPO, Chief Compliance Officer, CDO, etc.) in deploying the Group framework.</a:t>
+            </a:r>
+          </a:p>
+          <a:p>
+            <a:pPr algn="l" lvl="1">
+              <a:spcAft>
+                <a:spcPts val="100"/>
+              </a:spcAft>
+            </a:pPr>
+            <a:r>
+              <a:rPr sz="1000" b="1" i="0">
+                <a:solidFill>
+                  <a:srgbClr val="3AEDE5"/>
+                </a:solidFill>
+                <a:latin typeface="Alegreya Sans"/>
+              </a:rPr>
+              <a:t>•  </a:t>
+            </a:r>
+            <a:r>
+              <a:rPr sz="1000" b="0" i="0">
+                <a:solidFill>
+                  <a:srgbClr val="FFFFFF"/>
+                </a:solidFill>
+                <a:latin typeface="Alegreya Sans"/>
+              </a:rPr>
+              <a:t>Strategic advisory to executives and business lines on interpreting and applying regulatory requirements for AI systems.</a:t>
+            </a:r>
+          </a:p>
+          <a:p>
+            <a:pPr algn="l">
+              <a:spcAft>
+                <a:spcPts val="100"/>
+              </a:spcAft>
+            </a:pPr>
+            <a:r>
+              <a:rPr sz="1000" b="1" i="0">
+                <a:solidFill>
+                  <a:srgbClr val="3AEDE5"/>
+                </a:solidFill>
+                <a:latin typeface="Alegreya Sans"/>
+              </a:rPr>
+              <a:t>▸ </a:t>
+            </a:r>
+            <a:r>
+              <a:rPr sz="1000" b="1" i="0">
+                <a:solidFill>
+                  <a:srgbClr val="FFFFFF"/>
+                </a:solidFill>
+                <a:latin typeface="Alegreya Sans"/>
+              </a:rPr>
+              <a:t>Oney / Oneytrust</a:t>
+            </a:r>
+            <a:r>
+              <a:rPr sz="1000" b="0" i="0">
+                <a:solidFill>
+                  <a:srgbClr val="FFFFFF"/>
+                </a:solidFill>
+                <a:latin typeface="Alegreya Sans"/>
+              </a:rPr>
+              <a:t> — Expert Leader — Digital &amp; AI Compliance Officer</a:t>
+            </a:r>
+            <a:r>
+              <a:rPr sz="1000" b="0" i="1">
+                <a:solidFill>
+                  <a:srgbClr val="3AEDE5"/>
+                </a:solidFill>
+                <a:latin typeface="Alegreya Sans"/>
+              </a:rPr>
+              <a:t>  (38 months)</a:t>
+            </a:r>
+          </a:p>
+          <a:p>
+            <a:pPr algn="l" lvl="1">
+              <a:spcAft>
+                <a:spcPts val="100"/>
+              </a:spcAft>
+            </a:pPr>
+            <a:r>
+              <a:rPr sz="1000" b="1" i="0">
+                <a:solidFill>
+                  <a:srgbClr val="3AEDE5"/>
+                </a:solidFill>
+                <a:latin typeface="Alegreya Sans"/>
+              </a:rPr>
+              <a:t>•  </a:t>
+            </a:r>
+            <a:r>
+              <a:rPr sz="1000" b="0" i="0">
+                <a:solidFill>
+                  <a:srgbClr val="FFFFFF"/>
+                </a:solidFill>
+                <a:latin typeface="Alegreya Sans"/>
+              </a:rPr>
+              <a:t>Built the AI risk governance framework with the Chief Data Officer: systems inventory, training of business reference owners, EU AI Act compliance pilot across 10+ international entities.</a:t>
+            </a:r>
+          </a:p>
+          <a:p>
+            <a:pPr algn="l" lvl="1">
+              <a:spcAft>
+                <a:spcPts val="100"/>
+              </a:spcAft>
+            </a:pPr>
+            <a:r>
+              <a:rPr sz="1000" b="1" i="0">
+                <a:solidFill>
+                  <a:srgbClr val="3AEDE5"/>
+                </a:solidFill>
+                <a:latin typeface="Alegreya Sans"/>
+              </a:rPr>
+              <a:t>•  </a:t>
+            </a:r>
+            <a:r>
+              <a:rPr sz="1000" b="0" i="0">
+                <a:solidFill>
+                  <a:srgbClr val="FFFFFF"/>
+                </a:solidFill>
+                <a:latin typeface="Alegreya Sans"/>
+              </a:rPr>
+              <a:t>Group GenAI tools ambassador to 3,000 Oney employees.</a:t>
+            </a:r>
+          </a:p>
+          <a:p>
+            <a:pPr algn="l" lvl="1">
+              <a:spcAft>
+                <a:spcPts val="100"/>
+              </a:spcAft>
+            </a:pPr>
+            <a:r>
+              <a:rPr sz="1000" b="1" i="0">
+                <a:solidFill>
+                  <a:srgbClr val="3AEDE5"/>
+                </a:solidFill>
+                <a:latin typeface="Alegreya Sans"/>
+              </a:rPr>
+              <a:t>•  </a:t>
+            </a:r>
+            <a:r>
+              <a:rPr sz="1000" b="0" i="0">
+                <a:solidFill>
+                  <a:srgbClr val="FFFFFF"/>
+                </a:solidFill>
+                <a:latin typeface="Alegreya Sans"/>
+              </a:rPr>
+              <a:t>Pilot of Oneytrust's GDPR activities: DPIA drafting and updates, contractual clauses, training, GDPR controls, privacy-by-design referent on anti-fraud projects.</a:t>
+            </a:r>
+          </a:p>
+          <a:p>
+            <a:pPr algn="l">
+              <a:spcBef>
+                <a:spcPts val="600"/>
+              </a:spcBef>
+              <a:spcAft>
+                <a:spcPts val="300"/>
+              </a:spcAft>
+            </a:pPr>
+            <a:r>
+              <a:rPr sz="1100" b="1" i="0">
+                <a:solidFill>
+                  <a:srgbClr val="3AEDE5"/>
+                </a:solidFill>
+                <a:latin typeface="Alegreya Sans"/>
+              </a:rPr>
+              <a:t>MAIN REFERENCES</a:t>
             </a:r>
           </a:p>
           <a:p>
@@ -3834,19 +5560,22 @@
               </a:spcAft>
             </a:pPr>
             <a:r>
-              <a:rPr sz="400" b="0" i="0">
-                <a:solidFill>
-                  <a:srgbClr val="061A4D"/>
-                </a:solidFill>
-                <a:latin typeface="Alegreya Sans"/>
-              </a:rPr>
-              <a:t> </a:t>
-            </a:r>
-          </a:p>
-          <a:p>
-            <a:pPr algn="l">
-              <a:spcAft>
-                <a:spcPts val="400"/>
+              <a:rPr sz="1000" b="0" i="1">
+                <a:solidFill>
+                  <a:srgbClr val="FFFFFF"/>
+                </a:solidFill>
+                <a:latin typeface="Alegreya Sans"/>
+              </a:rPr>
+              <a:t>Groupe BPCE, Natixis, Oney, Sia Partners, Paris Europlace</a:t>
+            </a:r>
+          </a:p>
+          <a:p>
+            <a:pPr algn="l">
+              <a:spcBef>
+                <a:spcPts val="600"/>
+              </a:spcBef>
+              <a:spcAft>
+                <a:spcPts val="300"/>
               </a:spcAft>
             </a:pPr>
             <a:r>
@@ -3856,7 +5585,7 @@
                 </a:solidFill>
                 <a:latin typeface="Alegreya Sans"/>
               </a:rPr>
-              <a:t>EXPÉRIENCE PROFESSIONNELLE</a:t>
+              <a:t>ENGAGEMENTS &amp; ACHIEVEMENTS</a:t>
             </a:r>
           </a:p>
           <a:p>
@@ -3866,140 +5595,31 @@
               </a:spcAft>
             </a:pPr>
             <a:r>
-              <a:rPr sz="850" b="1" i="0">
-                <a:solidFill>
-                  <a:srgbClr val="3AEDE5"/>
-                </a:solidFill>
-                <a:latin typeface="Alegreya Sans"/>
-              </a:rPr>
-              <a:t>▸ </a:t>
-            </a:r>
-            <a:r>
-              <a:rPr sz="850" b="1" i="0">
-                <a:solidFill>
-                  <a:srgbClr val="FFFFFF"/>
-                </a:solidFill>
-                <a:latin typeface="Alegreya Sans"/>
-              </a:rPr>
-              <a:t>Top-tier CIB européenne</a:t>
-            </a:r>
-            <a:r>
-              <a:rPr sz="850" b="0" i="0">
-                <a:solidFill>
-                  <a:srgbClr val="FFFFFF"/>
-                </a:solidFill>
-                <a:latin typeface="Alegreya Sans"/>
-              </a:rPr>
-              <a:t> — AI Compliance Lead (consultant)</a:t>
-            </a:r>
-            <a:r>
-              <a:rPr sz="750" b="0" i="1">
-                <a:solidFill>
-                  <a:srgbClr val="3AEDE5"/>
-                </a:solidFill>
-                <a:latin typeface="Alegreya Sans"/>
-              </a:rPr>
-              <a:t>  (8 mois — en cours)</a:t>
-            </a:r>
-          </a:p>
-          <a:p>
-            <a:pPr algn="l" lvl="1">
-              <a:spcAft>
-                <a:spcPts val="200"/>
-              </a:spcAft>
-            </a:pPr>
-            <a:r>
-              <a:rPr sz="750" b="1" i="0">
-                <a:solidFill>
-                  <a:srgbClr val="3AEDE5"/>
-                </a:solidFill>
-                <a:latin typeface="Alegreya Sans"/>
-              </a:rPr>
-              <a:t>•  </a:t>
-            </a:r>
-            <a:r>
-              <a:rPr sz="750" b="0" i="0">
-                <a:solidFill>
-                  <a:srgbClr val="FFFFFF"/>
-                </a:solidFill>
-                <a:latin typeface="Alegreya Sans"/>
-              </a:rPr>
-              <a:t>Finalisation et mise en œuvre du cadre de gouvernance des risques IA : politiques internes, cartographie des risques, comitologie et coordination des fonctions support et métiers.</a:t>
-            </a:r>
-          </a:p>
-          <a:p>
-            <a:pPr algn="l" lvl="1">
-              <a:spcAft>
-                <a:spcPts val="200"/>
-              </a:spcAft>
-            </a:pPr>
-            <a:r>
-              <a:rPr sz="750" b="1" i="0">
-                <a:solidFill>
-                  <a:srgbClr val="3AEDE5"/>
-                </a:solidFill>
-                <a:latin typeface="Alegreya Sans"/>
-              </a:rPr>
-              <a:t>•  </a:t>
-            </a:r>
-            <a:r>
-              <a:rPr sz="750" b="0" i="0">
-                <a:solidFill>
-                  <a:srgbClr val="FFFFFF"/>
-                </a:solidFill>
-                <a:latin typeface="Alegreya Sans"/>
-              </a:rPr>
-              <a:t>Pilotage opérationnel de la gouvernance : identification, évaluation, priorisation, validation et remédiation des systèmes d'IA.</a:t>
-            </a:r>
-          </a:p>
-          <a:p>
-            <a:pPr algn="l" lvl="1">
-              <a:spcAft>
-                <a:spcPts val="200"/>
-              </a:spcAft>
-            </a:pPr>
-            <a:r>
-              <a:rPr sz="750" b="1" i="0">
-                <a:solidFill>
-                  <a:srgbClr val="3AEDE5"/>
-                </a:solidFill>
-                <a:latin typeface="Alegreya Sans"/>
-              </a:rPr>
-              <a:t>•  </a:t>
-            </a:r>
-            <a:r>
-              <a:rPr sz="750" b="0" i="0">
-                <a:solidFill>
-                  <a:srgbClr val="FFFFFF"/>
-                </a:solidFill>
-                <a:latin typeface="Alegreya Sans"/>
-              </a:rPr>
-              <a:t>Contribution au déploiement international du dispositif dans plus de 40 entités, dont USA, UK, APAC et MEA.</a:t>
-            </a:r>
-          </a:p>
-          <a:p>
-            <a:pPr algn="l" lvl="1">
-              <a:spcAft>
-                <a:spcPts val="200"/>
-              </a:spcAft>
-            </a:pPr>
-            <a:r>
-              <a:rPr sz="750" b="1" i="0">
-                <a:solidFill>
-                  <a:srgbClr val="3AEDE5"/>
-                </a:solidFill>
-                <a:latin typeface="Alegreya Sans"/>
-              </a:rPr>
-              <a:t>•  </a:t>
-            </a:r>
-            <a:r>
-              <a:rPr sz="750" b="0" i="0">
-                <a:solidFill>
-                  <a:srgbClr val="FFFFFF"/>
-                </a:solidFill>
-                <a:latin typeface="Alegreya Sans"/>
-              </a:rPr>
-              <a:t>Configuration agile et pilotage métier de l'outil supportant les processus de gouvernance, documentation, validation et maîtrise des risques IA.</a:t>
+              <a:rPr sz="1000" b="1" i="0">
+                <a:solidFill>
+                  <a:srgbClr val="3AEDE5"/>
+                </a:solidFill>
+                <a:latin typeface="Alegreya Sans"/>
+              </a:rPr>
+              <a:t>• </a:t>
+            </a:r>
+            <a:r>
+              <a:rPr sz="1000" b="1" i="0">
+                <a:solidFill>
+                  <a:srgbClr val="FFFFFF"/>
+                </a:solidFill>
+                <a:latin typeface="Alegreya Sans"/>
+              </a:rPr>
+              <a:t>Digital Council Advisor</a:t>
+            </a:r>
+            <a:r>
+              <a:rPr sz="1000" b="0" i="0">
+                <a:solidFill>
+                  <a:srgbClr val="CCD6E8"/>
+                </a:solidFill>
+                <a:latin typeface="Alegreya Sans"/>
+              </a:rPr>
+              <a:t> — Volunteer at a local Digital Council (Yvelines), alongside the Mayor.</a:t>
             </a:r>
           </a:p>
           <a:p>
@@ -4009,90 +5629,31 @@
               </a:spcAft>
             </a:pPr>
             <a:r>
-              <a:rPr sz="850" b="1" i="0">
-                <a:solidFill>
-                  <a:srgbClr val="3AEDE5"/>
-                </a:solidFill>
-                <a:latin typeface="Alegreya Sans"/>
-              </a:rPr>
-              <a:t>▸ </a:t>
-            </a:r>
-            <a:r>
-              <a:rPr sz="850" b="1" i="0">
-                <a:solidFill>
-                  <a:srgbClr val="FFFFFF"/>
-                </a:solidFill>
-                <a:latin typeface="Alegreya Sans"/>
-              </a:rPr>
-              <a:t>Sia Partners</a:t>
-            </a:r>
-            <a:r>
-              <a:rPr sz="850" b="0" i="0">
-                <a:solidFill>
-                  <a:srgbClr val="FFFFFF"/>
-                </a:solidFill>
-                <a:latin typeface="Alegreya Sans"/>
-              </a:rPr>
-              <a:t> — Associate Manager</a:t>
-            </a:r>
-            <a:r>
-              <a:rPr sz="750" b="0" i="1">
-                <a:solidFill>
-                  <a:srgbClr val="3AEDE5"/>
-                </a:solidFill>
-                <a:latin typeface="Alegreya Sans"/>
-              </a:rPr>
-              <a:t>  (10 mois — en cours)</a:t>
-            </a:r>
-          </a:p>
-          <a:p>
-            <a:pPr algn="l" lvl="1">
-              <a:spcAft>
-                <a:spcPts val="200"/>
-              </a:spcAft>
-            </a:pPr>
-            <a:r>
-              <a:rPr sz="750" b="1" i="0">
-                <a:solidFill>
-                  <a:srgbClr val="3AEDE5"/>
-                </a:solidFill>
-                <a:latin typeface="Alegreya Sans"/>
-              </a:rPr>
-              <a:t>•  </a:t>
-            </a:r>
-            <a:r>
-              <a:rPr sz="750" b="0" i="0">
-                <a:solidFill>
-                  <a:srgbClr val="FFFFFF"/>
-                </a:solidFill>
-                <a:latin typeface="Alegreya Sans"/>
-              </a:rPr>
-              <a:t>Responsable de l'offre AI Risk Management : coordination des réponses aux appels d'offres, veille stratégique et réglementaire, développement commercial et animation de l'écosystème financier.</a:t>
-            </a:r>
-          </a:p>
-          <a:p>
-            <a:pPr algn="l" lvl="1">
-              <a:spcAft>
-                <a:spcPts val="200"/>
-              </a:spcAft>
-            </a:pPr>
-            <a:r>
-              <a:rPr sz="750" b="1" i="0">
-                <a:solidFill>
-                  <a:srgbClr val="3AEDE5"/>
-                </a:solidFill>
-                <a:latin typeface="Alegreya Sans"/>
-              </a:rPr>
-              <a:t>•  </a:t>
-            </a:r>
-            <a:r>
-              <a:rPr sz="750" b="0" i="0">
-                <a:solidFill>
-                  <a:srgbClr val="FFFFFF"/>
-                </a:solidFill>
-                <a:latin typeface="Alegreya Sans"/>
-              </a:rPr>
-              <a:t>Pilotage et animation du groupe de travail IA de l'association Paris Europlace (+40 responsables du secteur financier) : rédaction de position papers et de réponses aux consultations européennes, benchmarks.</a:t>
+              <a:rPr sz="1000" b="1" i="0">
+                <a:solidFill>
+                  <a:srgbClr val="3AEDE5"/>
+                </a:solidFill>
+                <a:latin typeface="Alegreya Sans"/>
+              </a:rPr>
+              <a:t>• </a:t>
+            </a:r>
+            <a:r>
+              <a:rPr sz="1000" b="1" i="0">
+                <a:solidFill>
+                  <a:srgbClr val="FFFFFF"/>
+                </a:solidFill>
+                <a:latin typeface="Alegreya Sans"/>
+              </a:rPr>
+              <a:t>Podcaster</a:t>
+            </a:r>
+            <a:r>
+              <a:rPr sz="1000" b="0" i="0">
+                <a:solidFill>
+                  <a:srgbClr val="CCD6E8"/>
+                </a:solidFill>
+                <a:latin typeface="Alegreya Sans"/>
+              </a:rPr>
+              <a:t> — Creator and host of an AI podcast featuring influential figures in the sector.</a:t>
             </a:r>
           </a:p>
           <a:p>
@@ -4102,115 +5663,31 @@
               </a:spcAft>
             </a:pPr>
             <a:r>
-              <a:rPr sz="850" b="1" i="0">
-                <a:solidFill>
-                  <a:srgbClr val="3AEDE5"/>
-                </a:solidFill>
-                <a:latin typeface="Alegreya Sans"/>
-              </a:rPr>
-              <a:t>▸ </a:t>
-            </a:r>
-            <a:r>
-              <a:rPr sz="850" b="1" i="0">
-                <a:solidFill>
-                  <a:srgbClr val="FFFFFF"/>
-                </a:solidFill>
-                <a:latin typeface="Alegreya Sans"/>
-              </a:rPr>
-              <a:t>Groupe BPCE</a:t>
-            </a:r>
-            <a:r>
-              <a:rPr sz="850" b="0" i="0">
-                <a:solidFill>
-                  <a:srgbClr val="FFFFFF"/>
-                </a:solidFill>
-                <a:latin typeface="Alegreya Sans"/>
-              </a:rPr>
-              <a:t> — Group EU AI Act Project Manager</a:t>
-            </a:r>
-            <a:r>
-              <a:rPr sz="750" b="0" i="1">
-                <a:solidFill>
-                  <a:srgbClr val="3AEDE5"/>
-                </a:solidFill>
-                <a:latin typeface="Alegreya Sans"/>
-              </a:rPr>
-              <a:t>  (18 mois)</a:t>
-            </a:r>
-          </a:p>
-          <a:p>
-            <a:pPr algn="l" lvl="1">
-              <a:spcAft>
-                <a:spcPts val="200"/>
-              </a:spcAft>
-            </a:pPr>
-            <a:r>
-              <a:rPr sz="750" b="1" i="0">
-                <a:solidFill>
-                  <a:srgbClr val="3AEDE5"/>
-                </a:solidFill>
-                <a:latin typeface="Alegreya Sans"/>
-              </a:rPr>
-              <a:t>•  </a:t>
-            </a:r>
-            <a:r>
-              <a:rPr sz="750" b="0" i="0">
-                <a:solidFill>
-                  <a:srgbClr val="FFFFFF"/>
-                </a:solidFill>
-                <a:latin typeface="Alegreya Sans"/>
-              </a:rPr>
-              <a:t>Responsable du programme de mise en conformité EU AI Act du Groupe BPCE et de ses entités (Natixis, Oney, BRED, etc.) : cartographie et évaluation des risques IA, définition de la politique et du cadre normatif Groupe, évolution des processus opérationnels, animation du comité de pilotage.</a:t>
-            </a:r>
-          </a:p>
-          <a:p>
-            <a:pPr algn="l" lvl="1">
-              <a:spcAft>
-                <a:spcPts val="200"/>
-              </a:spcAft>
-            </a:pPr>
-            <a:r>
-              <a:rPr sz="750" b="1" i="0">
-                <a:solidFill>
-                  <a:srgbClr val="3AEDE5"/>
-                </a:solidFill>
-                <a:latin typeface="Alegreya Sans"/>
-              </a:rPr>
-              <a:t>•  </a:t>
-            </a:r>
-            <a:r>
-              <a:rPr sz="750" b="0" i="0">
-                <a:solidFill>
-                  <a:srgbClr val="FFFFFF"/>
-                </a:solidFill>
-                <a:latin typeface="Alegreya Sans"/>
-              </a:rPr>
-              <a:t>Coordination et accompagnement de plus de 35 décideurs locaux (DPO, Chief Compliance Officer, CDO, etc.) dans la déclinaison du cadre normatif Groupe.</a:t>
-            </a:r>
-          </a:p>
-          <a:p>
-            <a:pPr algn="l" lvl="1">
-              <a:spcAft>
-                <a:spcPts val="200"/>
-              </a:spcAft>
-            </a:pPr>
-            <a:r>
-              <a:rPr sz="750" b="1" i="0">
-                <a:solidFill>
-                  <a:srgbClr val="3AEDE5"/>
-                </a:solidFill>
-                <a:latin typeface="Alegreya Sans"/>
-              </a:rPr>
-              <a:t>•  </a:t>
-            </a:r>
-            <a:r>
-              <a:rPr sz="750" b="0" i="0">
-                <a:solidFill>
-                  <a:srgbClr val="FFFFFF"/>
-                </a:solidFill>
-                <a:latin typeface="Alegreya Sans"/>
-              </a:rPr>
-              <a:t>Conseil stratégique auprès des dirigeants et des métiers pour interpréter et décliner les exigences réglementaires applicables aux systèmes d'IA.</a:t>
+              <a:rPr sz="1000" b="1" i="0">
+                <a:solidFill>
+                  <a:srgbClr val="3AEDE5"/>
+                </a:solidFill>
+                <a:latin typeface="Alegreya Sans"/>
+              </a:rPr>
+              <a:t>• </a:t>
+            </a:r>
+            <a:r>
+              <a:rPr sz="1000" b="1" i="0">
+                <a:solidFill>
+                  <a:srgbClr val="FFFFFF"/>
+                </a:solidFill>
+                <a:latin typeface="Alegreya Sans"/>
+              </a:rPr>
+              <a:t>Speaker</a:t>
+            </a:r>
+            <a:r>
+              <a:rPr sz="1000" b="0" i="0">
+                <a:solidFill>
+                  <a:srgbClr val="CCD6E8"/>
+                </a:solidFill>
+                <a:latin typeface="Alegreya Sans"/>
+              </a:rPr>
+              <a:t> — Speaker on AI and its challenges (business schools, town halls, board members).</a:t>
             </a:r>
           </a:p>
           <a:p>
@@ -4220,323 +5697,7 @@
               </a:spcAft>
             </a:pPr>
             <a:r>
-              <a:rPr sz="850" b="1" i="0">
-                <a:solidFill>
-                  <a:srgbClr val="3AEDE5"/>
-                </a:solidFill>
-                <a:latin typeface="Alegreya Sans"/>
-              </a:rPr>
-              <a:t>▸ </a:t>
-            </a:r>
-            <a:r>
-              <a:rPr sz="850" b="1" i="0">
-                <a:solidFill>
-                  <a:srgbClr val="FFFFFF"/>
-                </a:solidFill>
-                <a:latin typeface="Alegreya Sans"/>
-              </a:rPr>
-              <a:t>Oney / Oneytrust</a:t>
-            </a:r>
-            <a:r>
-              <a:rPr sz="850" b="0" i="0">
-                <a:solidFill>
-                  <a:srgbClr val="FFFFFF"/>
-                </a:solidFill>
-                <a:latin typeface="Alegreya Sans"/>
-              </a:rPr>
-              <a:t> — Expert Leader — Digital &amp; AI Compliance Officer</a:t>
-            </a:r>
-            <a:r>
-              <a:rPr sz="750" b="0" i="1">
-                <a:solidFill>
-                  <a:srgbClr val="3AEDE5"/>
-                </a:solidFill>
-                <a:latin typeface="Alegreya Sans"/>
-              </a:rPr>
-              <a:t>  (38 mois)</a:t>
-            </a:r>
-          </a:p>
-          <a:p>
-            <a:pPr algn="l" lvl="1">
-              <a:spcAft>
-                <a:spcPts val="200"/>
-              </a:spcAft>
-            </a:pPr>
-            <a:r>
-              <a:rPr sz="750" b="1" i="0">
-                <a:solidFill>
-                  <a:srgbClr val="3AEDE5"/>
-                </a:solidFill>
-                <a:latin typeface="Alegreya Sans"/>
-              </a:rPr>
-              <a:t>•  </a:t>
-            </a:r>
-            <a:r>
-              <a:rPr sz="750" b="0" i="0">
-                <a:solidFill>
-                  <a:srgbClr val="FFFFFF"/>
-                </a:solidFill>
-                <a:latin typeface="Alegreya Sans"/>
-              </a:rPr>
-              <a:t>Structuration du cadre de gouvernance des risques IA avec le Chief Data Officer : inventaire des systèmes, formation des référents métiers et pilotage de la conformité EU AI Act dans plus de 10 entités internationales.</a:t>
-            </a:r>
-          </a:p>
-          <a:p>
-            <a:pPr algn="l" lvl="1">
-              <a:spcAft>
-                <a:spcPts val="200"/>
-              </a:spcAft>
-            </a:pPr>
-            <a:r>
-              <a:rPr sz="750" b="1" i="0">
-                <a:solidFill>
-                  <a:srgbClr val="3AEDE5"/>
-                </a:solidFill>
-                <a:latin typeface="Alegreya Sans"/>
-              </a:rPr>
-              <a:t>•  </a:t>
-            </a:r>
-            <a:r>
-              <a:rPr sz="750" b="0" i="0">
-                <a:solidFill>
-                  <a:srgbClr val="FFFFFF"/>
-                </a:solidFill>
-                <a:latin typeface="Alegreya Sans"/>
-              </a:rPr>
-              <a:t>Ambassadeur des outils d'IA Générative Groupe auprès de 3 000 collaborateurs Oney.</a:t>
-            </a:r>
-          </a:p>
-          <a:p>
-            <a:pPr algn="l" lvl="1">
-              <a:spcAft>
-                <a:spcPts val="200"/>
-              </a:spcAft>
-            </a:pPr>
-            <a:r>
-              <a:rPr sz="750" b="1" i="0">
-                <a:solidFill>
-                  <a:srgbClr val="3AEDE5"/>
-                </a:solidFill>
-                <a:latin typeface="Alegreya Sans"/>
-              </a:rPr>
-              <a:t>•  </a:t>
-            </a:r>
-            <a:r>
-              <a:rPr sz="750" b="0" i="0">
-                <a:solidFill>
-                  <a:srgbClr val="FFFFFF"/>
-                </a:solidFill>
-                <a:latin typeface="Alegreya Sans"/>
-              </a:rPr>
-              <a:t>Pilotage des activités RGPD de la filiale Oneytrust : rédaction et mise à jour AIPD, clauses contractuelles, formation, contrôles RGPD, référent privacy by design dans les projets de lutte contre la fraude.</a:t>
-            </a:r>
-          </a:p>
-          <a:p>
-            <a:pPr algn="l">
-              <a:spcAft>
-                <a:spcPts val="100"/>
-              </a:spcAft>
-            </a:pPr>
-            <a:r>
-              <a:rPr sz="850" b="1" i="0">
-                <a:solidFill>
-                  <a:srgbClr val="3AEDE5"/>
-                </a:solidFill>
-                <a:latin typeface="Alegreya Sans"/>
-              </a:rPr>
-              <a:t>▸ </a:t>
-            </a:r>
-            <a:r>
-              <a:rPr sz="850" b="1" i="0">
-                <a:solidFill>
-                  <a:srgbClr val="FFFFFF"/>
-                </a:solidFill>
-                <a:latin typeface="Alegreya Sans"/>
-              </a:rPr>
-              <a:t>Groupe BPCE</a:t>
-            </a:r>
-            <a:r>
-              <a:rPr sz="850" b="0" i="0">
-                <a:solidFill>
-                  <a:srgbClr val="FFFFFF"/>
-                </a:solidFill>
-                <a:latin typeface="Alegreya Sans"/>
-              </a:rPr>
-              <a:t> — Public Affairs Project Manager</a:t>
-            </a:r>
-            <a:r>
-              <a:rPr sz="750" b="0" i="1">
-                <a:solidFill>
-                  <a:srgbClr val="3AEDE5"/>
-                </a:solidFill>
-                <a:latin typeface="Alegreya Sans"/>
-              </a:rPr>
-              <a:t>  (36 mois)</a:t>
-            </a:r>
-          </a:p>
-          <a:p>
-            <a:pPr algn="l" lvl="1">
-              <a:spcAft>
-                <a:spcPts val="200"/>
-              </a:spcAft>
-            </a:pPr>
-            <a:r>
-              <a:rPr sz="750" b="1" i="0">
-                <a:solidFill>
-                  <a:srgbClr val="3AEDE5"/>
-                </a:solidFill>
-                <a:latin typeface="Alegreya Sans"/>
-              </a:rPr>
-              <a:t>•  </a:t>
-            </a:r>
-            <a:r>
-              <a:rPr sz="750" b="0" i="0">
-                <a:solidFill>
-                  <a:srgbClr val="FFFFFF"/>
-                </a:solidFill>
-                <a:latin typeface="Alegreya Sans"/>
-              </a:rPr>
-              <a:t>Coordination des contributions stratégiques du Groupe BPCE aux initiatives réglementaires européennes sur le numérique (EU AI Act, Digital Euro, EUDI Wallet, Data Act, PSD3, AI Trustworthy Guidelines).</a:t>
-            </a:r>
-          </a:p>
-          <a:p>
-            <a:pPr algn="l" lvl="1">
-              <a:spcAft>
-                <a:spcPts val="200"/>
-              </a:spcAft>
-            </a:pPr>
-            <a:r>
-              <a:rPr sz="750" b="1" i="0">
-                <a:solidFill>
-                  <a:srgbClr val="3AEDE5"/>
-                </a:solidFill>
-                <a:latin typeface="Alegreya Sans"/>
-              </a:rPr>
-              <a:t>•  </a:t>
-            </a:r>
-            <a:r>
-              <a:rPr sz="750" b="0" i="0">
-                <a:solidFill>
-                  <a:srgbClr val="FFFFFF"/>
-                </a:solidFill>
-                <a:latin typeface="Alegreya Sans"/>
-              </a:rPr>
-              <a:t>Rédaction de la Charte éthique en matière d'IA du Groupe BPCE en collaboration avec les métiers.</a:t>
-            </a:r>
-          </a:p>
-          <a:p>
-            <a:pPr algn="l" lvl="1">
-              <a:spcAft>
-                <a:spcPts val="200"/>
-              </a:spcAft>
-            </a:pPr>
-            <a:r>
-              <a:rPr sz="750" b="1" i="0">
-                <a:solidFill>
-                  <a:srgbClr val="3AEDE5"/>
-                </a:solidFill>
-                <a:latin typeface="Alegreya Sans"/>
-              </a:rPr>
-              <a:t>•  </a:t>
-            </a:r>
-            <a:r>
-              <a:rPr sz="750" b="0" i="0">
-                <a:solidFill>
-                  <a:srgbClr val="FFFFFF"/>
-                </a:solidFill>
-                <a:latin typeface="Alegreya Sans"/>
-              </a:rPr>
-              <a:t>Représentation du Groupe BPCE sur la place financière dans les associations professionnelles européennes (EBF, EACB, ESBG, MEDEF, FBF, AFEP).</a:t>
-            </a:r>
-          </a:p>
-          <a:p>
-            <a:pPr algn="l">
-              <a:spcAft>
-                <a:spcPts val="200"/>
-              </a:spcAft>
-            </a:pPr>
-            <a:r>
-              <a:rPr sz="400" b="0" i="0">
-                <a:solidFill>
-                  <a:srgbClr val="061A4D"/>
-                </a:solidFill>
-                <a:latin typeface="Alegreya Sans"/>
-              </a:rPr>
-              <a:t> </a:t>
-            </a:r>
-          </a:p>
-          <a:p>
-            <a:pPr algn="l">
-              <a:spcAft>
-                <a:spcPts val="400"/>
-              </a:spcAft>
-            </a:pPr>
-            <a:r>
-              <a:rPr sz="1100" b="1" i="0">
-                <a:solidFill>
-                  <a:srgbClr val="3AEDE5"/>
-                </a:solidFill>
-                <a:latin typeface="Alegreya Sans"/>
-              </a:rPr>
-              <a:t>RÉFÉRENCES</a:t>
-            </a:r>
-          </a:p>
-          <a:p>
-            <a:pPr algn="l">
-              <a:spcAft>
-                <a:spcPts val="200"/>
-              </a:spcAft>
-            </a:pPr>
-            <a:r>
-              <a:rPr sz="850" b="0" i="1">
-                <a:solidFill>
-                  <a:srgbClr val="FFFFFF"/>
-                </a:solidFill>
-                <a:latin typeface="Alegreya Sans"/>
-              </a:rPr>
-              <a:t>Groupe BPCE, Natixis, Oney, Sia Partners, Paris Europlace</a:t>
-            </a:r>
-          </a:p>
-          <a:p>
-            <a:pPr algn="l">
-              <a:spcAft>
-                <a:spcPts val="200"/>
-              </a:spcAft>
-            </a:pPr>
-            <a:r>
-              <a:rPr sz="400" b="0" i="0">
-                <a:solidFill>
-                  <a:srgbClr val="061A4D"/>
-                </a:solidFill>
-                <a:latin typeface="Alegreya Sans"/>
-              </a:rPr>
-              <a:t> </a:t>
-            </a:r>
-          </a:p>
-          <a:p>
-            <a:pPr algn="l">
-              <a:spcAft>
-                <a:spcPts val="400"/>
-              </a:spcAft>
-            </a:pPr>
-            <a:r>
-              <a:rPr sz="1100" b="1" i="0">
-                <a:solidFill>
-                  <a:srgbClr val="3AEDE5"/>
-                </a:solidFill>
-                <a:latin typeface="Alegreya Sans"/>
-              </a:rPr>
-              <a:t>ENGAGEMENTS &amp; RÉALISATIONS</a:t>
-            </a:r>
-          </a:p>
-          <a:p>
-            <a:pPr algn="l">
-              <a:spcAft>
-                <a:spcPts val="100"/>
-              </a:spcAft>
-            </a:pPr>
-            <a:r>
-              <a:rPr sz="750" b="1" i="0">
+              <a:rPr sz="1000" b="1" i="0">
                 <a:solidFill>
                   <a:srgbClr val="3AEDE5"/>
                 </a:solidFill>
@@ -4545,131 +5706,29 @@
               <a:t>• </a:t>
             </a:r>
             <a:r>
-              <a:rPr sz="750" b="1" i="0">
-                <a:solidFill>
-                  <a:srgbClr val="FFFFFF"/>
-                </a:solidFill>
-                <a:latin typeface="Alegreya Sans"/>
-              </a:rPr>
-              <a:t>Conseiller Numérique</a:t>
-            </a:r>
-            <a:r>
-              <a:rPr sz="750" b="0" i="0">
+              <a:rPr sz="1000" b="1" i="0">
+                <a:solidFill>
+                  <a:srgbClr val="FFFFFF"/>
+                </a:solidFill>
+                <a:latin typeface="Alegreya Sans"/>
+              </a:rPr>
+              <a:t>EDHEC Juror</a:t>
+            </a:r>
+            <a:r>
+              <a:rPr sz="1000" b="0" i="0">
                 <a:solidFill>
                   <a:srgbClr val="CCD6E8"/>
                 </a:solidFill>
                 <a:latin typeface="Alegreya Sans"/>
               </a:rPr>
-              <a:t> — Bénévole au sein du Conseil du Numérique d'une commune des Yvelines, aux côtés du Maire.</a:t>
-            </a:r>
-          </a:p>
-          <a:p>
-            <a:pPr algn="l">
-              <a:spcAft>
-                <a:spcPts val="100"/>
-              </a:spcAft>
-            </a:pPr>
-            <a:r>
-              <a:rPr sz="750" b="1" i="0">
-                <a:solidFill>
-                  <a:srgbClr val="3AEDE5"/>
-                </a:solidFill>
-                <a:latin typeface="Alegreya Sans"/>
-              </a:rPr>
-              <a:t>• </a:t>
-            </a:r>
-            <a:r>
-              <a:rPr sz="750" b="1" i="0">
-                <a:solidFill>
-                  <a:srgbClr val="FFFFFF"/>
-                </a:solidFill>
-                <a:latin typeface="Alegreya Sans"/>
-              </a:rPr>
-              <a:t>Podcasteur</a:t>
-            </a:r>
-            <a:r>
-              <a:rPr sz="750" b="0" i="0">
-                <a:solidFill>
-                  <a:srgbClr val="CCD6E8"/>
-                </a:solidFill>
-                <a:latin typeface="Alegreya Sans"/>
-              </a:rPr>
-              <a:t> — Créateur et animateur d'un podcast sur l'IA — personnalités influentes du secteur.</a:t>
-            </a:r>
-          </a:p>
-          <a:p>
-            <a:pPr algn="l">
-              <a:spcAft>
-                <a:spcPts val="100"/>
-              </a:spcAft>
-            </a:pPr>
-            <a:r>
-              <a:rPr sz="750" b="1" i="0">
-                <a:solidFill>
-                  <a:srgbClr val="3AEDE5"/>
-                </a:solidFill>
-                <a:latin typeface="Alegreya Sans"/>
-              </a:rPr>
-              <a:t>• </a:t>
-            </a:r>
-            <a:r>
-              <a:rPr sz="750" b="1" i="0">
-                <a:solidFill>
-                  <a:srgbClr val="FFFFFF"/>
-                </a:solidFill>
-                <a:latin typeface="Alegreya Sans"/>
-              </a:rPr>
-              <a:t>Conférencier</a:t>
-            </a:r>
-            <a:r>
-              <a:rPr sz="750" b="0" i="0">
-                <a:solidFill>
-                  <a:srgbClr val="CCD6E8"/>
-                </a:solidFill>
-                <a:latin typeface="Alegreya Sans"/>
-              </a:rPr>
-              <a:t> — Intervenant sur l'IA et ses enjeux (écoles de commerce, mairies, administrateurs).</a:t>
-            </a:r>
-          </a:p>
-          <a:p>
-            <a:pPr algn="l">
-              <a:spcAft>
-                <a:spcPts val="100"/>
-              </a:spcAft>
-            </a:pPr>
-            <a:r>
-              <a:rPr sz="750" b="1" i="0">
-                <a:solidFill>
-                  <a:srgbClr val="3AEDE5"/>
-                </a:solidFill>
-                <a:latin typeface="Alegreya Sans"/>
-              </a:rPr>
-              <a:t>• </a:t>
-            </a:r>
-            <a:r>
-              <a:rPr sz="750" b="1" i="0">
-                <a:solidFill>
-                  <a:srgbClr val="FFFFFF"/>
-                </a:solidFill>
-                <a:latin typeface="Alegreya Sans"/>
-              </a:rPr>
-              <a:t>Juré EDHEC</a:t>
-            </a:r>
-            <a:r>
-              <a:rPr sz="750" b="0" i="0">
-                <a:solidFill>
-                  <a:srgbClr val="CCD6E8"/>
-                </a:solidFill>
-                <a:latin typeface="Alegreya Sans"/>
-              </a:rPr>
-              <a:t> — Juré des projets IA — certification Digital Ethics Officer.</a:t>
-            </a:r>
-          </a:p>
-        </p:txBody>
-      </p:sp>
-      <p:sp>
-        <p:nvSpPr>
-          <p:cNvPr id="10" name="TextBox 9"/>
+              <a:t> — Juror for AI projects — Digital Ethics Officer certification.</a:t>
+            </a:r>
+          </a:p>
+        </p:txBody>
+      </p:sp>
+      <p:sp>
+        <p:nvSpPr>
+          <p:cNvPr id="8" name="TextBox 7"/>
           <p:cNvSpPr txBox="1"/>
           <p:nvPr/>
         </p:nvSpPr>
@@ -4691,1638 +5750,7 @@
           <a:p>
             <a:pPr algn="ctr"/>
             <a:r>
-              <a:rPr sz="700" b="0" i="1">
-                <a:solidFill>
-                  <a:srgbClr val="CCD6E8"/>
-                </a:solidFill>
-                <a:latin typeface="Alegreya Sans"/>
-              </a:rPr>
-              <a:t>Les informations de ce document sont strictement confidentielles — Ce document ne peut être partagé qu'avec l'accord de son propriétaire</a:t>
-            </a:r>
-          </a:p>
-        </p:txBody>
-      </p:sp>
-    </p:spTree>
-  </p:cSld>
-  <p:clrMapOvr>
-    <a:masterClrMapping/>
-  </p:clrMapOvr>
-</p:sld>
-</file>
-
-<file path=ppt/slides/slide2.xml><?xml version="1.0" encoding="utf-8"?>
-<p:sld xmlns:a="http://schemas.openxmlformats.org/drawingml/2006/main" xmlns:p="http://schemas.openxmlformats.org/presentationml/2006/main" xmlns:r="http://schemas.openxmlformats.org/officeDocument/2006/relationships">
-  <p:cSld>
-    <p:spTree>
-      <p:nvGrpSpPr>
-        <p:cNvPr id="1" name=""/>
-        <p:cNvGrpSpPr/>
-        <p:nvPr/>
-      </p:nvGrpSpPr>
-      <p:grpSpPr/>
-      <p:sp>
-        <p:nvSpPr>
-          <p:cNvPr id="2" name="Rectangle 1"/>
-          <p:cNvSpPr/>
-          <p:nvPr/>
-        </p:nvSpPr>
-        <p:spPr>
-          <a:xfrm>
-            <a:off x="0" y="0"/>
-            <a:ext cx="12192000" cy="6858000"/>
-          </a:xfrm>
-          <a:prstGeom prst="rect">
-            <a:avLst/>
-          </a:prstGeom>
-          <a:solidFill>
-            <a:srgbClr val="061A4D"/>
-          </a:solidFill>
-          <a:ln>
-            <a:noFill/>
-          </a:ln>
-          <a:effectLst/>
-        </p:spPr>
-        <p:style>
-          <a:lnRef idx="1">
-            <a:schemeClr val="accent1"/>
-          </a:lnRef>
-          <a:fillRef idx="3">
-            <a:schemeClr val="accent1"/>
-          </a:fillRef>
-          <a:effectRef idx="2">
-            <a:schemeClr val="accent1"/>
-          </a:effectRef>
-          <a:fontRef idx="minor">
-            <a:schemeClr val="lt1"/>
-          </a:fontRef>
-        </p:style>
-        <p:txBody>
-          <a:bodyPr rtlCol="0" anchor="ctr"/>
-          <a:lstStyle/>
-          <a:p>
-            <a:pPr algn="ctr"/>
-          </a:p>
-        </p:txBody>
-      </p:sp>
-      <p:sp>
-        <p:nvSpPr>
-          <p:cNvPr id="3" name="Oval 2"/>
-          <p:cNvSpPr/>
-          <p:nvPr/>
-        </p:nvSpPr>
-        <p:spPr>
-          <a:xfrm>
-            <a:off x="8692000" y="4058000"/>
-            <a:ext cx="5500000" cy="5500000"/>
-          </a:xfrm>
-          <a:prstGeom prst="ellipse">
-            <a:avLst/>
-          </a:prstGeom>
-          <a:solidFill>
-            <a:srgbClr val="1FCBD9"/>
-          </a:solidFill>
-          <a:ln>
-            <a:noFill/>
-          </a:ln>
-        </p:spPr>
-        <p:style>
-          <a:lnRef idx="1">
-            <a:schemeClr val="accent1"/>
-          </a:lnRef>
-          <a:fillRef idx="3">
-            <a:schemeClr val="accent1"/>
-          </a:fillRef>
-          <a:effectRef idx="2">
-            <a:schemeClr val="accent1"/>
-          </a:effectRef>
-          <a:fontRef idx="minor">
-            <a:schemeClr val="lt1"/>
-          </a:fontRef>
-        </p:style>
-        <p:txBody>
-          <a:bodyPr rtlCol="0" anchor="ctr"/>
-          <a:lstStyle/>
-          <a:p>
-            <a:pPr algn="ctr"/>
-          </a:p>
-        </p:txBody>
-      </p:sp>
-      <p:sp>
-        <p:nvSpPr>
-          <p:cNvPr id="4" name="Oval 3"/>
-          <p:cNvSpPr/>
-          <p:nvPr/>
-        </p:nvSpPr>
-        <p:spPr>
-          <a:xfrm>
-            <a:off x="7692000" y="3058000"/>
-            <a:ext cx="5500000" cy="5500000"/>
-          </a:xfrm>
-          <a:prstGeom prst="ellipse">
-            <a:avLst/>
-          </a:prstGeom>
-          <a:solidFill>
-            <a:srgbClr val="0B2A8A"/>
-          </a:solidFill>
-          <a:ln>
-            <a:noFill/>
-          </a:ln>
-        </p:spPr>
-        <p:style>
-          <a:lnRef idx="1">
-            <a:schemeClr val="accent1"/>
-          </a:lnRef>
-          <a:fillRef idx="3">
-            <a:schemeClr val="accent1"/>
-          </a:fillRef>
-          <a:effectRef idx="2">
-            <a:schemeClr val="accent1"/>
-          </a:effectRef>
-          <a:fontRef idx="minor">
-            <a:schemeClr val="lt1"/>
-          </a:fontRef>
-        </p:style>
-        <p:txBody>
-          <a:bodyPr rtlCol="0" anchor="ctr"/>
-          <a:lstStyle/>
-          <a:p>
-            <a:pPr algn="ctr"/>
-          </a:p>
-        </p:txBody>
-      </p:sp>
-      <p:sp>
-        <p:nvSpPr>
-          <p:cNvPr id="5" name="Rectangle 4"/>
-          <p:cNvSpPr/>
-          <p:nvPr/>
-        </p:nvSpPr>
-        <p:spPr>
-          <a:xfrm>
-            <a:off x="0" y="0"/>
-            <a:ext cx="3600000" cy="6858000"/>
-          </a:xfrm>
-          <a:prstGeom prst="rect">
-            <a:avLst/>
-          </a:prstGeom>
-          <a:solidFill>
-            <a:srgbClr val="0B2A8A"/>
-          </a:solidFill>
-          <a:ln>
-            <a:noFill/>
-          </a:ln>
-          <a:effectLst/>
-        </p:spPr>
-        <p:style>
-          <a:lnRef idx="1">
-            <a:schemeClr val="accent1"/>
-          </a:lnRef>
-          <a:fillRef idx="3">
-            <a:schemeClr val="accent1"/>
-          </a:fillRef>
-          <a:effectRef idx="2">
-            <a:schemeClr val="accent1"/>
-          </a:effectRef>
-          <a:fontRef idx="minor">
-            <a:schemeClr val="lt1"/>
-          </a:fontRef>
-        </p:style>
-        <p:txBody>
-          <a:bodyPr rtlCol="0" anchor="ctr"/>
-          <a:lstStyle/>
-          <a:p>
-            <a:pPr algn="ctr"/>
-          </a:p>
-        </p:txBody>
-      </p:sp>
-      <p:sp>
-        <p:nvSpPr>
-          <p:cNvPr id="6" name="TextBox 5"/>
-          <p:cNvSpPr txBox="1"/>
-          <p:nvPr/>
-        </p:nvSpPr>
-        <p:spPr>
-          <a:xfrm>
-            <a:off x="228600" y="280000"/>
-            <a:ext cx="3142800" cy="900000"/>
-          </a:xfrm>
-          <a:prstGeom prst="rect">
-            <a:avLst/>
-          </a:prstGeom>
-          <a:noFill/>
-        </p:spPr>
-        <p:txBody>
-          <a:bodyPr wrap="square" lIns="0" rIns="0" tIns="0" bIns="0">
-            <a:spAutoFit/>
-          </a:bodyPr>
-          <a:lstStyle/>
-          <a:p>
-            <a:pPr algn="l"/>
-            <a:r>
-              <a:rPr sz="4000" b="1" i="0">
-                <a:solidFill>
-                  <a:srgbClr val="3AEDE5"/>
-                </a:solidFill>
-                <a:latin typeface="Alegreya Sans"/>
-              </a:rPr>
-              <a:t>A.P.</a:t>
-            </a:r>
-          </a:p>
-        </p:txBody>
-      </p:sp>
-      <p:sp>
-        <p:nvSpPr>
-          <p:cNvPr id="7" name="TextBox 6"/>
-          <p:cNvSpPr txBox="1"/>
-          <p:nvPr/>
-        </p:nvSpPr>
-        <p:spPr>
-          <a:xfrm>
-            <a:off x="3828600" y="300000"/>
-            <a:ext cx="8134800" cy="900000"/>
-          </a:xfrm>
-          <a:prstGeom prst="rect">
-            <a:avLst/>
-          </a:prstGeom>
-          <a:noFill/>
-        </p:spPr>
-        <p:txBody>
-          <a:bodyPr wrap="square" lIns="0" rIns="0" tIns="0" bIns="0">
-            <a:spAutoFit/>
-          </a:bodyPr>
-          <a:lstStyle/>
-          <a:p>
-            <a:r>
-              <a:rPr sz="1800" b="1" i="0">
-                <a:solidFill>
-                  <a:srgbClr val="FFFFFF"/>
-                </a:solidFill>
-                <a:latin typeface="Alegreya Sans"/>
-              </a:rPr>
-              <a:t>AI Governance, AI Risk &amp; EU AI Act Specialist</a:t>
-            </a:r>
-          </a:p>
-          <a:p>
-            <a:pPr>
-              <a:spcBef>
-                <a:spcPts val="200"/>
-              </a:spcBef>
-            </a:pPr>
-            <a:r>
-              <a:rPr sz="1200" b="0" i="1">
-                <a:solidFill>
-                  <a:srgbClr val="3AEDE5"/>
-                </a:solidFill>
-                <a:latin typeface="Alegreya Sans"/>
-              </a:rPr>
-              <a:t>AI Governance &amp; Regulatory Compliance — Financial Services</a:t>
-            </a:r>
-          </a:p>
-        </p:txBody>
-      </p:sp>
-      <p:sp>
-        <p:nvSpPr>
-          <p:cNvPr id="8" name="TextBox 7"/>
-          <p:cNvSpPr txBox="1"/>
-          <p:nvPr/>
-        </p:nvSpPr>
-        <p:spPr>
-          <a:xfrm>
-            <a:off x="228600" y="1300000"/>
-            <a:ext cx="3142800" cy="5178000"/>
-          </a:xfrm>
-          <a:prstGeom prst="rect">
-            <a:avLst/>
-          </a:prstGeom>
-          <a:noFill/>
-        </p:spPr>
-        <p:txBody>
-          <a:bodyPr wrap="square" lIns="0" rIns="0" tIns="0" bIns="0">
-            <a:spAutoFit/>
-          </a:bodyPr>
-          <a:lstStyle/>
-          <a:p>
-            <a:pPr algn="l">
-              <a:spcAft>
-                <a:spcPts val="400"/>
-              </a:spcAft>
-            </a:pPr>
-            <a:r>
-              <a:rPr sz="1100" b="1" i="0">
-                <a:solidFill>
-                  <a:srgbClr val="3AEDE5"/>
-                </a:solidFill>
-                <a:latin typeface="Alegreya Sans"/>
-              </a:rPr>
-              <a:t>MAIN AREAS OF EXPERTISE</a:t>
-            </a:r>
-          </a:p>
-          <a:p>
-            <a:pPr algn="l">
-              <a:spcAft>
-                <a:spcPts val="200"/>
-              </a:spcAft>
-            </a:pPr>
-            <a:r>
-              <a:rPr sz="850" b="1" i="0">
-                <a:solidFill>
-                  <a:srgbClr val="3AEDE5"/>
-                </a:solidFill>
-                <a:latin typeface="Alegreya Sans"/>
-              </a:rPr>
-              <a:t>•  </a:t>
-            </a:r>
-            <a:r>
-              <a:rPr sz="850" b="0" i="0">
-                <a:solidFill>
-                  <a:srgbClr val="FFFFFF"/>
-                </a:solidFill>
-                <a:latin typeface="Alegreya Sans"/>
-              </a:rPr>
-              <a:t>AI Governance</a:t>
-            </a:r>
-          </a:p>
-          <a:p>
-            <a:pPr algn="l">
-              <a:spcAft>
-                <a:spcPts val="200"/>
-              </a:spcAft>
-            </a:pPr>
-            <a:r>
-              <a:rPr sz="850" b="1" i="0">
-                <a:solidFill>
-                  <a:srgbClr val="3AEDE5"/>
-                </a:solidFill>
-                <a:latin typeface="Alegreya Sans"/>
-              </a:rPr>
-              <a:t>•  </a:t>
-            </a:r>
-            <a:r>
-              <a:rPr sz="850" b="0" i="0">
-                <a:solidFill>
-                  <a:srgbClr val="FFFFFF"/>
-                </a:solidFill>
-                <a:latin typeface="Alegreya Sans"/>
-              </a:rPr>
-              <a:t>AI Risk Management</a:t>
-            </a:r>
-          </a:p>
-          <a:p>
-            <a:pPr algn="l">
-              <a:spcAft>
-                <a:spcPts val="200"/>
-              </a:spcAft>
-            </a:pPr>
-            <a:r>
-              <a:rPr sz="850" b="1" i="0">
-                <a:solidFill>
-                  <a:srgbClr val="3AEDE5"/>
-                </a:solidFill>
-                <a:latin typeface="Alegreya Sans"/>
-              </a:rPr>
-              <a:t>•  </a:t>
-            </a:r>
-            <a:r>
-              <a:rPr sz="850" b="0" i="0">
-                <a:solidFill>
-                  <a:srgbClr val="FFFFFF"/>
-                </a:solidFill>
-                <a:latin typeface="Alegreya Sans"/>
-              </a:rPr>
-              <a:t>EU AI Act</a:t>
-            </a:r>
-          </a:p>
-          <a:p>
-            <a:pPr algn="l">
-              <a:spcAft>
-                <a:spcPts val="200"/>
-              </a:spcAft>
-            </a:pPr>
-            <a:r>
-              <a:rPr sz="850" b="1" i="0">
-                <a:solidFill>
-                  <a:srgbClr val="3AEDE5"/>
-                </a:solidFill>
-                <a:latin typeface="Alegreya Sans"/>
-              </a:rPr>
-              <a:t>•  </a:t>
-            </a:r>
-            <a:r>
-              <a:rPr sz="850" b="0" i="0">
-                <a:solidFill>
-                  <a:srgbClr val="FFFFFF"/>
-                </a:solidFill>
-                <a:latin typeface="Alegreya Sans"/>
-              </a:rPr>
-              <a:t>Digital Compliance</a:t>
-            </a:r>
-          </a:p>
-          <a:p>
-            <a:pPr algn="l">
-              <a:spcAft>
-                <a:spcPts val="200"/>
-              </a:spcAft>
-            </a:pPr>
-            <a:r>
-              <a:rPr sz="850" b="1" i="0">
-                <a:solidFill>
-                  <a:srgbClr val="3AEDE5"/>
-                </a:solidFill>
-                <a:latin typeface="Alegreya Sans"/>
-              </a:rPr>
-              <a:t>•  </a:t>
-            </a:r>
-            <a:r>
-              <a:rPr sz="850" b="0" i="0">
-                <a:solidFill>
-                  <a:srgbClr val="FFFFFF"/>
-                </a:solidFill>
-                <a:latin typeface="Alegreya Sans"/>
-              </a:rPr>
-              <a:t>Regulatory Strategy</a:t>
-            </a:r>
-          </a:p>
-          <a:p>
-            <a:pPr algn="l">
-              <a:spcAft>
-                <a:spcPts val="200"/>
-              </a:spcAft>
-            </a:pPr>
-            <a:r>
-              <a:rPr sz="850" b="1" i="0">
-                <a:solidFill>
-                  <a:srgbClr val="3AEDE5"/>
-                </a:solidFill>
-                <a:latin typeface="Alegreya Sans"/>
-              </a:rPr>
-              <a:t>•  </a:t>
-            </a:r>
-            <a:r>
-              <a:rPr sz="850" b="0" i="0">
-                <a:solidFill>
-                  <a:srgbClr val="FFFFFF"/>
-                </a:solidFill>
-                <a:latin typeface="Alegreya Sans"/>
-              </a:rPr>
-              <a:t>Cross-functional Leadership</a:t>
-            </a:r>
-          </a:p>
-          <a:p>
-            <a:pPr algn="l">
-              <a:spcAft>
-                <a:spcPts val="200"/>
-              </a:spcAft>
-            </a:pPr>
-            <a:r>
-              <a:rPr sz="400" b="0" i="0">
-                <a:solidFill>
-                  <a:srgbClr val="0B2A8A"/>
-                </a:solidFill>
-                <a:latin typeface="Alegreya Sans"/>
-              </a:rPr>
-              <a:t> </a:t>
-            </a:r>
-          </a:p>
-          <a:p>
-            <a:pPr algn="l">
-              <a:spcAft>
-                <a:spcPts val="400"/>
-              </a:spcAft>
-            </a:pPr>
-            <a:r>
-              <a:rPr sz="1100" b="1" i="0">
-                <a:solidFill>
-                  <a:srgbClr val="3AEDE5"/>
-                </a:solidFill>
-                <a:latin typeface="Alegreya Sans"/>
-              </a:rPr>
-              <a:t>LANGUAGES</a:t>
-            </a:r>
-          </a:p>
-          <a:p>
-            <a:pPr algn="l">
-              <a:spcAft>
-                <a:spcPts val="200"/>
-              </a:spcAft>
-            </a:pPr>
-            <a:r>
-              <a:rPr sz="850" b="1" i="0">
-                <a:solidFill>
-                  <a:srgbClr val="3AEDE5"/>
-                </a:solidFill>
-                <a:latin typeface="Alegreya Sans"/>
-              </a:rPr>
-              <a:t>•  </a:t>
-            </a:r>
-            <a:r>
-              <a:rPr sz="850" b="0" i="0">
-                <a:solidFill>
-                  <a:srgbClr val="FFFFFF"/>
-                </a:solidFill>
-                <a:latin typeface="Alegreya Sans"/>
-              </a:rPr>
-              <a:t>French — Native</a:t>
-            </a:r>
-          </a:p>
-          <a:p>
-            <a:pPr algn="l">
-              <a:spcAft>
-                <a:spcPts val="200"/>
-              </a:spcAft>
-            </a:pPr>
-            <a:r>
-              <a:rPr sz="850" b="1" i="0">
-                <a:solidFill>
-                  <a:srgbClr val="3AEDE5"/>
-                </a:solidFill>
-                <a:latin typeface="Alegreya Sans"/>
-              </a:rPr>
-              <a:t>•  </a:t>
-            </a:r>
-            <a:r>
-              <a:rPr sz="850" b="0" i="0">
-                <a:solidFill>
-                  <a:srgbClr val="FFFFFF"/>
-                </a:solidFill>
-                <a:latin typeface="Alegreya Sans"/>
-              </a:rPr>
-              <a:t>English — TOEIC 955/990</a:t>
-            </a:r>
-          </a:p>
-          <a:p>
-            <a:pPr algn="l">
-              <a:spcAft>
-                <a:spcPts val="200"/>
-              </a:spcAft>
-            </a:pPr>
-            <a:r>
-              <a:rPr sz="400" b="0" i="0">
-                <a:solidFill>
-                  <a:srgbClr val="0B2A8A"/>
-                </a:solidFill>
-                <a:latin typeface="Alegreya Sans"/>
-              </a:rPr>
-              <a:t> </a:t>
-            </a:r>
-          </a:p>
-          <a:p>
-            <a:pPr algn="l">
-              <a:spcAft>
-                <a:spcPts val="400"/>
-              </a:spcAft>
-            </a:pPr>
-            <a:r>
-              <a:rPr sz="1100" b="1" i="0">
-                <a:solidFill>
-                  <a:srgbClr val="3AEDE5"/>
-                </a:solidFill>
-                <a:latin typeface="Alegreya Sans"/>
-              </a:rPr>
-              <a:t>EDUCATION &amp; CERTIFICATIONS</a:t>
-            </a:r>
-          </a:p>
-          <a:p>
-            <a:pPr algn="l">
-              <a:spcAft>
-                <a:spcPts val="100"/>
-              </a:spcAft>
-            </a:pPr>
-            <a:r>
-              <a:rPr sz="750" b="1" i="0">
-                <a:solidFill>
-                  <a:srgbClr val="3AEDE5"/>
-                </a:solidFill>
-                <a:latin typeface="Alegreya Sans"/>
-              </a:rPr>
-              <a:t>2024  </a:t>
-            </a:r>
-            <a:r>
-              <a:rPr sz="750" b="1" i="0">
-                <a:solidFill>
-                  <a:srgbClr val="FFFFFF"/>
-                </a:solidFill>
-                <a:latin typeface="Alegreya Sans"/>
-              </a:rPr>
-              <a:t>EDHEC Business School</a:t>
-            </a:r>
-          </a:p>
-          <a:p>
-            <a:pPr algn="l">
-              <a:spcAft>
-                <a:spcPts val="300"/>
-              </a:spcAft>
-            </a:pPr>
-            <a:r>
-              <a:rPr sz="750" b="0" i="1">
-                <a:solidFill>
-                  <a:srgbClr val="CCD6E8"/>
-                </a:solidFill>
-                <a:latin typeface="Alegreya Sans"/>
-              </a:rPr>
-              <a:t>Digital Ethics Officer certification (with Distinction)</a:t>
-            </a:r>
-          </a:p>
-          <a:p>
-            <a:pPr algn="l">
-              <a:spcAft>
-                <a:spcPts val="100"/>
-              </a:spcAft>
-            </a:pPr>
-            <a:r>
-              <a:rPr sz="750" b="1" i="0">
-                <a:solidFill>
-                  <a:srgbClr val="3AEDE5"/>
-                </a:solidFill>
-                <a:latin typeface="Alegreya Sans"/>
-              </a:rPr>
-              <a:t>2015 — 2020  </a:t>
-            </a:r>
-            <a:r>
-              <a:rPr sz="750" b="1" i="0">
-                <a:solidFill>
-                  <a:srgbClr val="FFFFFF"/>
-                </a:solidFill>
-                <a:latin typeface="Alegreya Sans"/>
-              </a:rPr>
-              <a:t>Sciences Po Saint-Germain-en-Laye</a:t>
-            </a:r>
-          </a:p>
-          <a:p>
-            <a:pPr algn="l">
-              <a:spcAft>
-                <a:spcPts val="300"/>
-              </a:spcAft>
-            </a:pPr>
-            <a:r>
-              <a:rPr sz="750" b="0" i="1">
-                <a:solidFill>
-                  <a:srgbClr val="CCD6E8"/>
-                </a:solidFill>
-                <a:latin typeface="Alegreya Sans"/>
-              </a:rPr>
-              <a:t>Master's in European &amp; International Affairs (with Distinction)</a:t>
-            </a:r>
-          </a:p>
-          <a:p>
-            <a:pPr algn="l">
-              <a:spcAft>
-                <a:spcPts val="100"/>
-              </a:spcAft>
-            </a:pPr>
-            <a:r>
-              <a:rPr sz="750" b="1" i="0">
-                <a:solidFill>
-                  <a:srgbClr val="3AEDE5"/>
-                </a:solidFill>
-                <a:latin typeface="Alegreya Sans"/>
-              </a:rPr>
-              <a:t>2020  </a:t>
-            </a:r>
-            <a:r>
-              <a:rPr sz="750" b="1" i="0">
-                <a:solidFill>
-                  <a:srgbClr val="FFFFFF"/>
-                </a:solidFill>
-                <a:latin typeface="Alegreya Sans"/>
-              </a:rPr>
-              <a:t>University of Versailles Saint-Quentin-en-Yvelines</a:t>
-            </a:r>
-          </a:p>
-          <a:p>
-            <a:pPr algn="l">
-              <a:spcAft>
-                <a:spcPts val="300"/>
-              </a:spcAft>
-            </a:pPr>
-            <a:r>
-              <a:rPr sz="750" b="0" i="1">
-                <a:solidFill>
-                  <a:srgbClr val="CCD6E8"/>
-                </a:solidFill>
-                <a:latin typeface="Alegreya Sans"/>
-              </a:rPr>
-              <a:t>Master's in Influence &amp; Public Affairs (with Distinction)</a:t>
-            </a:r>
-          </a:p>
-        </p:txBody>
-      </p:sp>
-      <p:sp>
-        <p:nvSpPr>
-          <p:cNvPr id="9" name="TextBox 8"/>
-          <p:cNvSpPr txBox="1"/>
-          <p:nvPr/>
-        </p:nvSpPr>
-        <p:spPr>
-          <a:xfrm>
-            <a:off x="3828600" y="1300000"/>
-            <a:ext cx="8134800" cy="5178000"/>
-          </a:xfrm>
-          <a:prstGeom prst="rect">
-            <a:avLst/>
-          </a:prstGeom>
-          <a:noFill/>
-        </p:spPr>
-        <p:txBody>
-          <a:bodyPr wrap="square" lIns="0" rIns="0" tIns="0" bIns="0">
-            <a:spAutoFit/>
-          </a:bodyPr>
-          <a:lstStyle/>
-          <a:p>
-            <a:pPr algn="l">
-              <a:spcAft>
-                <a:spcPts val="400"/>
-              </a:spcAft>
-            </a:pPr>
-            <a:r>
-              <a:rPr sz="1100" b="1" i="0">
-                <a:solidFill>
-                  <a:srgbClr val="3AEDE5"/>
-                </a:solidFill>
-                <a:latin typeface="Alegreya Sans"/>
-              </a:rPr>
-              <a:t>SUMMARY</a:t>
-            </a:r>
-          </a:p>
-          <a:p>
-            <a:pPr algn="l">
-              <a:spcAft>
-                <a:spcPts val="300"/>
-              </a:spcAft>
-            </a:pPr>
-            <a:r>
-              <a:rPr sz="850" b="0" i="0">
-                <a:solidFill>
-                  <a:srgbClr val="FFFFFF"/>
-                </a:solidFill>
-                <a:latin typeface="Alegreya Sans"/>
-              </a:rPr>
-              <a:t>Expert in AI Governance, AI Risk Management and regulatory compliance, with nearly 8 years of experience advising major banking institutions. Specialised in the EU AI Act and the international rollout of AI governance frameworks.</a:t>
-            </a:r>
-          </a:p>
-          <a:p>
-            <a:pPr algn="l">
-              <a:spcAft>
-                <a:spcPts val="200"/>
-              </a:spcAft>
-            </a:pPr>
-            <a:r>
-              <a:rPr sz="400" b="0" i="0">
-                <a:solidFill>
-                  <a:srgbClr val="061A4D"/>
-                </a:solidFill>
-                <a:latin typeface="Alegreya Sans"/>
-              </a:rPr>
-              <a:t> </a:t>
-            </a:r>
-          </a:p>
-          <a:p>
-            <a:pPr algn="l">
-              <a:spcAft>
-                <a:spcPts val="400"/>
-              </a:spcAft>
-            </a:pPr>
-            <a:r>
-              <a:rPr sz="1100" b="1" i="0">
-                <a:solidFill>
-                  <a:srgbClr val="3AEDE5"/>
-                </a:solidFill>
-                <a:latin typeface="Alegreya Sans"/>
-              </a:rPr>
-              <a:t>PROFESSIONAL EXPERIENCE</a:t>
-            </a:r>
-          </a:p>
-          <a:p>
-            <a:pPr algn="l">
-              <a:spcAft>
-                <a:spcPts val="100"/>
-              </a:spcAft>
-            </a:pPr>
-            <a:r>
-              <a:rPr sz="850" b="1" i="0">
-                <a:solidFill>
-                  <a:srgbClr val="3AEDE5"/>
-                </a:solidFill>
-                <a:latin typeface="Alegreya Sans"/>
-              </a:rPr>
-              <a:t>▸ </a:t>
-            </a:r>
-            <a:r>
-              <a:rPr sz="850" b="1" i="0">
-                <a:solidFill>
-                  <a:srgbClr val="FFFFFF"/>
-                </a:solidFill>
-                <a:latin typeface="Alegreya Sans"/>
-              </a:rPr>
-              <a:t>Top-tier European CIB</a:t>
-            </a:r>
-            <a:r>
-              <a:rPr sz="850" b="0" i="0">
-                <a:solidFill>
-                  <a:srgbClr val="FFFFFF"/>
-                </a:solidFill>
-                <a:latin typeface="Alegreya Sans"/>
-              </a:rPr>
-              <a:t> — AI Compliance Lead (consultant)</a:t>
-            </a:r>
-            <a:r>
-              <a:rPr sz="750" b="0" i="1">
-                <a:solidFill>
-                  <a:srgbClr val="3AEDE5"/>
-                </a:solidFill>
-                <a:latin typeface="Alegreya Sans"/>
-              </a:rPr>
-              <a:t>  (8 months — ongoing)</a:t>
-            </a:r>
-          </a:p>
-          <a:p>
-            <a:pPr algn="l" lvl="1">
-              <a:spcAft>
-                <a:spcPts val="200"/>
-              </a:spcAft>
-            </a:pPr>
-            <a:r>
-              <a:rPr sz="750" b="1" i="0">
-                <a:solidFill>
-                  <a:srgbClr val="3AEDE5"/>
-                </a:solidFill>
-                <a:latin typeface="Alegreya Sans"/>
-              </a:rPr>
-              <a:t>•  </a:t>
-            </a:r>
-            <a:r>
-              <a:rPr sz="750" b="0" i="0">
-                <a:solidFill>
-                  <a:srgbClr val="FFFFFF"/>
-                </a:solidFill>
-                <a:latin typeface="Alegreya Sans"/>
-              </a:rPr>
-              <a:t>Finalisation and rollout of the AI risk governance framework: internal policies, risk mapping, committee design, coordination of support and business functions.</a:t>
-            </a:r>
-          </a:p>
-          <a:p>
-            <a:pPr algn="l" lvl="1">
-              <a:spcAft>
-                <a:spcPts val="200"/>
-              </a:spcAft>
-            </a:pPr>
-            <a:r>
-              <a:rPr sz="750" b="1" i="0">
-                <a:solidFill>
-                  <a:srgbClr val="3AEDE5"/>
-                </a:solidFill>
-                <a:latin typeface="Alegreya Sans"/>
-              </a:rPr>
-              <a:t>•  </a:t>
-            </a:r>
-            <a:r>
-              <a:rPr sz="750" b="0" i="0">
-                <a:solidFill>
-                  <a:srgbClr val="FFFFFF"/>
-                </a:solidFill>
-                <a:latin typeface="Alegreya Sans"/>
-              </a:rPr>
-              <a:t>Operational pilot of AI governance: identification, assessment, prioritisation, validation and remediation of AI systems.</a:t>
-            </a:r>
-          </a:p>
-          <a:p>
-            <a:pPr algn="l" lvl="1">
-              <a:spcAft>
-                <a:spcPts val="200"/>
-              </a:spcAft>
-            </a:pPr>
-            <a:r>
-              <a:rPr sz="750" b="1" i="0">
-                <a:solidFill>
-                  <a:srgbClr val="3AEDE5"/>
-                </a:solidFill>
-                <a:latin typeface="Alegreya Sans"/>
-              </a:rPr>
-              <a:t>•  </a:t>
-            </a:r>
-            <a:r>
-              <a:rPr sz="750" b="0" i="0">
-                <a:solidFill>
-                  <a:srgbClr val="FFFFFF"/>
-                </a:solidFill>
-                <a:latin typeface="Alegreya Sans"/>
-              </a:rPr>
-              <a:t>Contribution to the international rollout across 40+ entities, including USA, UK, APAC and MEA.</a:t>
-            </a:r>
-          </a:p>
-          <a:p>
-            <a:pPr algn="l" lvl="1">
-              <a:spcAft>
-                <a:spcPts val="200"/>
-              </a:spcAft>
-            </a:pPr>
-            <a:r>
-              <a:rPr sz="750" b="1" i="0">
-                <a:solidFill>
-                  <a:srgbClr val="3AEDE5"/>
-                </a:solidFill>
-                <a:latin typeface="Alegreya Sans"/>
-              </a:rPr>
-              <a:t>•  </a:t>
-            </a:r>
-            <a:r>
-              <a:rPr sz="750" b="0" i="0">
-                <a:solidFill>
-                  <a:srgbClr val="FFFFFF"/>
-                </a:solidFill>
-                <a:latin typeface="Alegreya Sans"/>
-              </a:rPr>
-              <a:t>Agile configuration and business pilot of the tool supporting governance, documentation, validation and AI risk control.</a:t>
-            </a:r>
-          </a:p>
-          <a:p>
-            <a:pPr algn="l">
-              <a:spcAft>
-                <a:spcPts val="100"/>
-              </a:spcAft>
-            </a:pPr>
-            <a:r>
-              <a:rPr sz="850" b="1" i="0">
-                <a:solidFill>
-                  <a:srgbClr val="3AEDE5"/>
-                </a:solidFill>
-                <a:latin typeface="Alegreya Sans"/>
-              </a:rPr>
-              <a:t>▸ </a:t>
-            </a:r>
-            <a:r>
-              <a:rPr sz="850" b="1" i="0">
-                <a:solidFill>
-                  <a:srgbClr val="FFFFFF"/>
-                </a:solidFill>
-                <a:latin typeface="Alegreya Sans"/>
-              </a:rPr>
-              <a:t>Sia Partners</a:t>
-            </a:r>
-            <a:r>
-              <a:rPr sz="850" b="0" i="0">
-                <a:solidFill>
-                  <a:srgbClr val="FFFFFF"/>
-                </a:solidFill>
-                <a:latin typeface="Alegreya Sans"/>
-              </a:rPr>
-              <a:t> — Associate Manager</a:t>
-            </a:r>
-            <a:r>
-              <a:rPr sz="750" b="0" i="1">
-                <a:solidFill>
-                  <a:srgbClr val="3AEDE5"/>
-                </a:solidFill>
-                <a:latin typeface="Alegreya Sans"/>
-              </a:rPr>
-              <a:t>  (10 months — ongoing)</a:t>
-            </a:r>
-          </a:p>
-          <a:p>
-            <a:pPr algn="l" lvl="1">
-              <a:spcAft>
-                <a:spcPts val="200"/>
-              </a:spcAft>
-            </a:pPr>
-            <a:r>
-              <a:rPr sz="750" b="1" i="0">
-                <a:solidFill>
-                  <a:srgbClr val="3AEDE5"/>
-                </a:solidFill>
-                <a:latin typeface="Alegreya Sans"/>
-              </a:rPr>
-              <a:t>•  </a:t>
-            </a:r>
-            <a:r>
-              <a:rPr sz="750" b="0" i="0">
-                <a:solidFill>
-                  <a:srgbClr val="FFFFFF"/>
-                </a:solidFill>
-                <a:latin typeface="Alegreya Sans"/>
-              </a:rPr>
-              <a:t>Head of the AI Risk Management offering: RFP coordination, strategic and regulatory watch, business development and financial-ecosystem animation.</a:t>
-            </a:r>
-          </a:p>
-          <a:p>
-            <a:pPr algn="l" lvl="1">
-              <a:spcAft>
-                <a:spcPts val="200"/>
-              </a:spcAft>
-            </a:pPr>
-            <a:r>
-              <a:rPr sz="750" b="1" i="0">
-                <a:solidFill>
-                  <a:srgbClr val="3AEDE5"/>
-                </a:solidFill>
-                <a:latin typeface="Alegreya Sans"/>
-              </a:rPr>
-              <a:t>•  </a:t>
-            </a:r>
-            <a:r>
-              <a:rPr sz="750" b="0" i="0">
-                <a:solidFill>
-                  <a:srgbClr val="FFFFFF"/>
-                </a:solidFill>
-                <a:latin typeface="Alegreya Sans"/>
-              </a:rPr>
-              <a:t>Lead of the AI working group at Paris Europlace association (40+ senior financial-sector representatives): position papers, EU consultation responses, benchmarks.</a:t>
-            </a:r>
-          </a:p>
-          <a:p>
-            <a:pPr algn="l">
-              <a:spcAft>
-                <a:spcPts val="100"/>
-              </a:spcAft>
-            </a:pPr>
-            <a:r>
-              <a:rPr sz="850" b="1" i="0">
-                <a:solidFill>
-                  <a:srgbClr val="3AEDE5"/>
-                </a:solidFill>
-                <a:latin typeface="Alegreya Sans"/>
-              </a:rPr>
-              <a:t>▸ </a:t>
-            </a:r>
-            <a:r>
-              <a:rPr sz="850" b="1" i="0">
-                <a:solidFill>
-                  <a:srgbClr val="FFFFFF"/>
-                </a:solidFill>
-                <a:latin typeface="Alegreya Sans"/>
-              </a:rPr>
-              <a:t>Groupe BPCE</a:t>
-            </a:r>
-            <a:r>
-              <a:rPr sz="850" b="0" i="0">
-                <a:solidFill>
-                  <a:srgbClr val="FFFFFF"/>
-                </a:solidFill>
-                <a:latin typeface="Alegreya Sans"/>
-              </a:rPr>
-              <a:t> — Group EU AI Act Project Manager</a:t>
-            </a:r>
-            <a:r>
-              <a:rPr sz="750" b="0" i="1">
-                <a:solidFill>
-                  <a:srgbClr val="3AEDE5"/>
-                </a:solidFill>
-                <a:latin typeface="Alegreya Sans"/>
-              </a:rPr>
-              <a:t>  (18 months)</a:t>
-            </a:r>
-          </a:p>
-          <a:p>
-            <a:pPr algn="l" lvl="1">
-              <a:spcAft>
-                <a:spcPts val="200"/>
-              </a:spcAft>
-            </a:pPr>
-            <a:r>
-              <a:rPr sz="750" b="1" i="0">
-                <a:solidFill>
-                  <a:srgbClr val="3AEDE5"/>
-                </a:solidFill>
-                <a:latin typeface="Alegreya Sans"/>
-              </a:rPr>
-              <a:t>•  </a:t>
-            </a:r>
-            <a:r>
-              <a:rPr sz="750" b="0" i="0">
-                <a:solidFill>
-                  <a:srgbClr val="FFFFFF"/>
-                </a:solidFill>
-                <a:latin typeface="Alegreya Sans"/>
-              </a:rPr>
-              <a:t>Lead of the EU AI Act compliance programme for Groupe BPCE and its entities (Natixis, Oney, BRED, etc.): AI risk mapping and assessment, definition of Group policy and standards, operational process evolution, steering-committee animation.</a:t>
-            </a:r>
-          </a:p>
-          <a:p>
-            <a:pPr algn="l" lvl="1">
-              <a:spcAft>
-                <a:spcPts val="200"/>
-              </a:spcAft>
-            </a:pPr>
-            <a:r>
-              <a:rPr sz="750" b="1" i="0">
-                <a:solidFill>
-                  <a:srgbClr val="3AEDE5"/>
-                </a:solidFill>
-                <a:latin typeface="Alegreya Sans"/>
-              </a:rPr>
-              <a:t>•  </a:t>
-            </a:r>
-            <a:r>
-              <a:rPr sz="750" b="0" i="0">
-                <a:solidFill>
-                  <a:srgbClr val="FFFFFF"/>
-                </a:solidFill>
-                <a:latin typeface="Alegreya Sans"/>
-              </a:rPr>
-              <a:t>Coordination and support of 35+ local decision-makers (DPO, Chief Compliance Officer, CDO, etc.) in deploying the Group framework.</a:t>
-            </a:r>
-          </a:p>
-          <a:p>
-            <a:pPr algn="l" lvl="1">
-              <a:spcAft>
-                <a:spcPts val="200"/>
-              </a:spcAft>
-            </a:pPr>
-            <a:r>
-              <a:rPr sz="750" b="1" i="0">
-                <a:solidFill>
-                  <a:srgbClr val="3AEDE5"/>
-                </a:solidFill>
-                <a:latin typeface="Alegreya Sans"/>
-              </a:rPr>
-              <a:t>•  </a:t>
-            </a:r>
-            <a:r>
-              <a:rPr sz="750" b="0" i="0">
-                <a:solidFill>
-                  <a:srgbClr val="FFFFFF"/>
-                </a:solidFill>
-                <a:latin typeface="Alegreya Sans"/>
-              </a:rPr>
-              <a:t>Strategic advisory to executives and business lines on interpreting and applying regulatory requirements for AI systems.</a:t>
-            </a:r>
-          </a:p>
-          <a:p>
-            <a:pPr algn="l">
-              <a:spcAft>
-                <a:spcPts val="100"/>
-              </a:spcAft>
-            </a:pPr>
-            <a:r>
-              <a:rPr sz="850" b="1" i="0">
-                <a:solidFill>
-                  <a:srgbClr val="3AEDE5"/>
-                </a:solidFill>
-                <a:latin typeface="Alegreya Sans"/>
-              </a:rPr>
-              <a:t>▸ </a:t>
-            </a:r>
-            <a:r>
-              <a:rPr sz="850" b="1" i="0">
-                <a:solidFill>
-                  <a:srgbClr val="FFFFFF"/>
-                </a:solidFill>
-                <a:latin typeface="Alegreya Sans"/>
-              </a:rPr>
-              <a:t>Oney / Oneytrust</a:t>
-            </a:r>
-            <a:r>
-              <a:rPr sz="850" b="0" i="0">
-                <a:solidFill>
-                  <a:srgbClr val="FFFFFF"/>
-                </a:solidFill>
-                <a:latin typeface="Alegreya Sans"/>
-              </a:rPr>
-              <a:t> — Expert Leader — Digital &amp; AI Compliance Officer</a:t>
-            </a:r>
-            <a:r>
-              <a:rPr sz="750" b="0" i="1">
-                <a:solidFill>
-                  <a:srgbClr val="3AEDE5"/>
-                </a:solidFill>
-                <a:latin typeface="Alegreya Sans"/>
-              </a:rPr>
-              <a:t>  (38 months)</a:t>
-            </a:r>
-          </a:p>
-          <a:p>
-            <a:pPr algn="l" lvl="1">
-              <a:spcAft>
-                <a:spcPts val="200"/>
-              </a:spcAft>
-            </a:pPr>
-            <a:r>
-              <a:rPr sz="750" b="1" i="0">
-                <a:solidFill>
-                  <a:srgbClr val="3AEDE5"/>
-                </a:solidFill>
-                <a:latin typeface="Alegreya Sans"/>
-              </a:rPr>
-              <a:t>•  </a:t>
-            </a:r>
-            <a:r>
-              <a:rPr sz="750" b="0" i="0">
-                <a:solidFill>
-                  <a:srgbClr val="FFFFFF"/>
-                </a:solidFill>
-                <a:latin typeface="Alegreya Sans"/>
-              </a:rPr>
-              <a:t>Built the AI risk governance framework with the Chief Data Officer: systems inventory, training of business reference owners, EU AI Act compliance pilot across 10+ international entities.</a:t>
-            </a:r>
-          </a:p>
-          <a:p>
-            <a:pPr algn="l" lvl="1">
-              <a:spcAft>
-                <a:spcPts val="200"/>
-              </a:spcAft>
-            </a:pPr>
-            <a:r>
-              <a:rPr sz="750" b="1" i="0">
-                <a:solidFill>
-                  <a:srgbClr val="3AEDE5"/>
-                </a:solidFill>
-                <a:latin typeface="Alegreya Sans"/>
-              </a:rPr>
-              <a:t>•  </a:t>
-            </a:r>
-            <a:r>
-              <a:rPr sz="750" b="0" i="0">
-                <a:solidFill>
-                  <a:srgbClr val="FFFFFF"/>
-                </a:solidFill>
-                <a:latin typeface="Alegreya Sans"/>
-              </a:rPr>
-              <a:t>Group GenAI tools ambassador to 3,000 Oney employees.</a:t>
-            </a:r>
-          </a:p>
-          <a:p>
-            <a:pPr algn="l" lvl="1">
-              <a:spcAft>
-                <a:spcPts val="200"/>
-              </a:spcAft>
-            </a:pPr>
-            <a:r>
-              <a:rPr sz="750" b="1" i="0">
-                <a:solidFill>
-                  <a:srgbClr val="3AEDE5"/>
-                </a:solidFill>
-                <a:latin typeface="Alegreya Sans"/>
-              </a:rPr>
-              <a:t>•  </a:t>
-            </a:r>
-            <a:r>
-              <a:rPr sz="750" b="0" i="0">
-                <a:solidFill>
-                  <a:srgbClr val="FFFFFF"/>
-                </a:solidFill>
-                <a:latin typeface="Alegreya Sans"/>
-              </a:rPr>
-              <a:t>Pilot of Oneytrust's GDPR activities: DPIA drafting and updates, contractual clauses, training, GDPR controls, privacy-by-design referent on anti-fraud projects.</a:t>
-            </a:r>
-          </a:p>
-          <a:p>
-            <a:pPr algn="l">
-              <a:spcAft>
-                <a:spcPts val="100"/>
-              </a:spcAft>
-            </a:pPr>
-            <a:r>
-              <a:rPr sz="850" b="1" i="0">
-                <a:solidFill>
-                  <a:srgbClr val="3AEDE5"/>
-                </a:solidFill>
-                <a:latin typeface="Alegreya Sans"/>
-              </a:rPr>
-              <a:t>▸ </a:t>
-            </a:r>
-            <a:r>
-              <a:rPr sz="850" b="1" i="0">
-                <a:solidFill>
-                  <a:srgbClr val="FFFFFF"/>
-                </a:solidFill>
-                <a:latin typeface="Alegreya Sans"/>
-              </a:rPr>
-              <a:t>Groupe BPCE</a:t>
-            </a:r>
-            <a:r>
-              <a:rPr sz="850" b="0" i="0">
-                <a:solidFill>
-                  <a:srgbClr val="FFFFFF"/>
-                </a:solidFill>
-                <a:latin typeface="Alegreya Sans"/>
-              </a:rPr>
-              <a:t> — Public Affairs Project Manager</a:t>
-            </a:r>
-            <a:r>
-              <a:rPr sz="750" b="0" i="1">
-                <a:solidFill>
-                  <a:srgbClr val="3AEDE5"/>
-                </a:solidFill>
-                <a:latin typeface="Alegreya Sans"/>
-              </a:rPr>
-              <a:t>  (36 months)</a:t>
-            </a:r>
-          </a:p>
-          <a:p>
-            <a:pPr algn="l" lvl="1">
-              <a:spcAft>
-                <a:spcPts val="200"/>
-              </a:spcAft>
-            </a:pPr>
-            <a:r>
-              <a:rPr sz="750" b="1" i="0">
-                <a:solidFill>
-                  <a:srgbClr val="3AEDE5"/>
-                </a:solidFill>
-                <a:latin typeface="Alegreya Sans"/>
-              </a:rPr>
-              <a:t>•  </a:t>
-            </a:r>
-            <a:r>
-              <a:rPr sz="750" b="0" i="0">
-                <a:solidFill>
-                  <a:srgbClr val="FFFFFF"/>
-                </a:solidFill>
-                <a:latin typeface="Alegreya Sans"/>
-              </a:rPr>
-              <a:t>Coordination of Groupe BPCE's strategic contributions to European digital regulation initiatives (EU AI Act, Digital Euro, EUDI Wallet, Data Act, PSD3, AI Trustworthy Guidelines).</a:t>
-            </a:r>
-          </a:p>
-          <a:p>
-            <a:pPr algn="l" lvl="1">
-              <a:spcAft>
-                <a:spcPts val="200"/>
-              </a:spcAft>
-            </a:pPr>
-            <a:r>
-              <a:rPr sz="750" b="1" i="0">
-                <a:solidFill>
-                  <a:srgbClr val="3AEDE5"/>
-                </a:solidFill>
-                <a:latin typeface="Alegreya Sans"/>
-              </a:rPr>
-              <a:t>•  </a:t>
-            </a:r>
-            <a:r>
-              <a:rPr sz="750" b="0" i="0">
-                <a:solidFill>
-                  <a:srgbClr val="FFFFFF"/>
-                </a:solidFill>
-                <a:latin typeface="Alegreya Sans"/>
-              </a:rPr>
-              <a:t>Co-author of Groupe BPCE's AI ethics charter in collaboration with the business lines.</a:t>
-            </a:r>
-          </a:p>
-          <a:p>
-            <a:pPr algn="l" lvl="1">
-              <a:spcAft>
-                <a:spcPts val="200"/>
-              </a:spcAft>
-            </a:pPr>
-            <a:r>
-              <a:rPr sz="750" b="1" i="0">
-                <a:solidFill>
-                  <a:srgbClr val="3AEDE5"/>
-                </a:solidFill>
-                <a:latin typeface="Alegreya Sans"/>
-              </a:rPr>
-              <a:t>•  </a:t>
-            </a:r>
-            <a:r>
-              <a:rPr sz="750" b="0" i="0">
-                <a:solidFill>
-                  <a:srgbClr val="FFFFFF"/>
-                </a:solidFill>
-                <a:latin typeface="Alegreya Sans"/>
-              </a:rPr>
-              <a:t>Representation of Groupe BPCE in European professional associations (EBF, EACB, ESBG, MEDEF, FBF, AFEP).</a:t>
-            </a:r>
-          </a:p>
-          <a:p>
-            <a:pPr algn="l">
-              <a:spcAft>
-                <a:spcPts val="200"/>
-              </a:spcAft>
-            </a:pPr>
-            <a:r>
-              <a:rPr sz="400" b="0" i="0">
-                <a:solidFill>
-                  <a:srgbClr val="061A4D"/>
-                </a:solidFill>
-                <a:latin typeface="Alegreya Sans"/>
-              </a:rPr>
-              <a:t> </a:t>
-            </a:r>
-          </a:p>
-          <a:p>
-            <a:pPr algn="l">
-              <a:spcAft>
-                <a:spcPts val="400"/>
-              </a:spcAft>
-            </a:pPr>
-            <a:r>
-              <a:rPr sz="1100" b="1" i="0">
-                <a:solidFill>
-                  <a:srgbClr val="3AEDE5"/>
-                </a:solidFill>
-                <a:latin typeface="Alegreya Sans"/>
-              </a:rPr>
-              <a:t>MAIN REFERENCES</a:t>
-            </a:r>
-          </a:p>
-          <a:p>
-            <a:pPr algn="l">
-              <a:spcAft>
-                <a:spcPts val="200"/>
-              </a:spcAft>
-            </a:pPr>
-            <a:r>
-              <a:rPr sz="850" b="0" i="1">
-                <a:solidFill>
-                  <a:srgbClr val="FFFFFF"/>
-                </a:solidFill>
-                <a:latin typeface="Alegreya Sans"/>
-              </a:rPr>
-              <a:t>Groupe BPCE, Natixis, Oney, Sia Partners, Paris Europlace</a:t>
-            </a:r>
-          </a:p>
-          <a:p>
-            <a:pPr algn="l">
-              <a:spcAft>
-                <a:spcPts val="200"/>
-              </a:spcAft>
-            </a:pPr>
-            <a:r>
-              <a:rPr sz="400" b="0" i="0">
-                <a:solidFill>
-                  <a:srgbClr val="061A4D"/>
-                </a:solidFill>
-                <a:latin typeface="Alegreya Sans"/>
-              </a:rPr>
-              <a:t> </a:t>
-            </a:r>
-          </a:p>
-          <a:p>
-            <a:pPr algn="l">
-              <a:spcAft>
-                <a:spcPts val="400"/>
-              </a:spcAft>
-            </a:pPr>
-            <a:r>
-              <a:rPr sz="1100" b="1" i="0">
-                <a:solidFill>
-                  <a:srgbClr val="3AEDE5"/>
-                </a:solidFill>
-                <a:latin typeface="Alegreya Sans"/>
-              </a:rPr>
-              <a:t>ENGAGEMENTS &amp; ACHIEVEMENTS</a:t>
-            </a:r>
-          </a:p>
-          <a:p>
-            <a:pPr algn="l">
-              <a:spcAft>
-                <a:spcPts val="100"/>
-              </a:spcAft>
-            </a:pPr>
-            <a:r>
-              <a:rPr sz="750" b="1" i="0">
-                <a:solidFill>
-                  <a:srgbClr val="3AEDE5"/>
-                </a:solidFill>
-                <a:latin typeface="Alegreya Sans"/>
-              </a:rPr>
-              <a:t>• </a:t>
-            </a:r>
-            <a:r>
-              <a:rPr sz="750" b="1" i="0">
-                <a:solidFill>
-                  <a:srgbClr val="FFFFFF"/>
-                </a:solidFill>
-                <a:latin typeface="Alegreya Sans"/>
-              </a:rPr>
-              <a:t>Digital Council Advisor</a:t>
-            </a:r>
-            <a:r>
-              <a:rPr sz="750" b="0" i="0">
-                <a:solidFill>
-                  <a:srgbClr val="CCD6E8"/>
-                </a:solidFill>
-                <a:latin typeface="Alegreya Sans"/>
-              </a:rPr>
-              <a:t> — Volunteer at a local Digital Council (Yvelines), alongside the Mayor.</a:t>
-            </a:r>
-          </a:p>
-          <a:p>
-            <a:pPr algn="l">
-              <a:spcAft>
-                <a:spcPts val="100"/>
-              </a:spcAft>
-            </a:pPr>
-            <a:r>
-              <a:rPr sz="750" b="1" i="0">
-                <a:solidFill>
-                  <a:srgbClr val="3AEDE5"/>
-                </a:solidFill>
-                <a:latin typeface="Alegreya Sans"/>
-              </a:rPr>
-              <a:t>• </a:t>
-            </a:r>
-            <a:r>
-              <a:rPr sz="750" b="1" i="0">
-                <a:solidFill>
-                  <a:srgbClr val="FFFFFF"/>
-                </a:solidFill>
-                <a:latin typeface="Alegreya Sans"/>
-              </a:rPr>
-              <a:t>Podcaster</a:t>
-            </a:r>
-            <a:r>
-              <a:rPr sz="750" b="0" i="0">
-                <a:solidFill>
-                  <a:srgbClr val="CCD6E8"/>
-                </a:solidFill>
-                <a:latin typeface="Alegreya Sans"/>
-              </a:rPr>
-              <a:t> — Creator and host of an AI podcast featuring influential figures in the sector.</a:t>
-            </a:r>
-          </a:p>
-          <a:p>
-            <a:pPr algn="l">
-              <a:spcAft>
-                <a:spcPts val="100"/>
-              </a:spcAft>
-            </a:pPr>
-            <a:r>
-              <a:rPr sz="750" b="1" i="0">
-                <a:solidFill>
-                  <a:srgbClr val="3AEDE5"/>
-                </a:solidFill>
-                <a:latin typeface="Alegreya Sans"/>
-              </a:rPr>
-              <a:t>• </a:t>
-            </a:r>
-            <a:r>
-              <a:rPr sz="750" b="1" i="0">
-                <a:solidFill>
-                  <a:srgbClr val="FFFFFF"/>
-                </a:solidFill>
-                <a:latin typeface="Alegreya Sans"/>
-              </a:rPr>
-              <a:t>Speaker</a:t>
-            </a:r>
-            <a:r>
-              <a:rPr sz="750" b="0" i="0">
-                <a:solidFill>
-                  <a:srgbClr val="CCD6E8"/>
-                </a:solidFill>
-                <a:latin typeface="Alegreya Sans"/>
-              </a:rPr>
-              <a:t> — Speaker on AI and its challenges (business schools, town halls, board members).</a:t>
-            </a:r>
-          </a:p>
-          <a:p>
-            <a:pPr algn="l">
-              <a:spcAft>
-                <a:spcPts val="100"/>
-              </a:spcAft>
-            </a:pPr>
-            <a:r>
-              <a:rPr sz="750" b="1" i="0">
-                <a:solidFill>
-                  <a:srgbClr val="3AEDE5"/>
-                </a:solidFill>
-                <a:latin typeface="Alegreya Sans"/>
-              </a:rPr>
-              <a:t>• </a:t>
-            </a:r>
-            <a:r>
-              <a:rPr sz="750" b="1" i="0">
-                <a:solidFill>
-                  <a:srgbClr val="FFFFFF"/>
-                </a:solidFill>
-                <a:latin typeface="Alegreya Sans"/>
-              </a:rPr>
-              <a:t>EDHEC Juror</a:t>
-            </a:r>
-            <a:r>
-              <a:rPr sz="750" b="0" i="0">
-                <a:solidFill>
-                  <a:srgbClr val="CCD6E8"/>
-                </a:solidFill>
-                <a:latin typeface="Alegreya Sans"/>
-              </a:rPr>
-              <a:t> — Juror for AI projects — Digital Ethics Officer certification.</a:t>
-            </a:r>
-          </a:p>
-        </p:txBody>
-      </p:sp>
-      <p:sp>
-        <p:nvSpPr>
-          <p:cNvPr id="10" name="TextBox 9"/>
-          <p:cNvSpPr txBox="1"/>
-          <p:nvPr/>
-        </p:nvSpPr>
-        <p:spPr>
-          <a:xfrm>
-            <a:off x="228600" y="6578000"/>
-            <a:ext cx="11734800" cy="280000"/>
-          </a:xfrm>
-          <a:prstGeom prst="rect">
-            <a:avLst/>
-          </a:prstGeom>
-          <a:noFill/>
-        </p:spPr>
-        <p:txBody>
-          <a:bodyPr wrap="square" lIns="0" rIns="0" tIns="0" bIns="0">
-            <a:spAutoFit/>
-          </a:bodyPr>
-          <a:lstStyle/>
-          <a:p>
-            <a:pPr algn="ctr"/>
-            <a:r>
-              <a:rPr sz="700" b="0" i="1">
+              <a:rPr sz="900" b="0" i="1">
                 <a:solidFill>
                   <a:srgbClr val="CCD6E8"/>
                 </a:solidFill>

--- a/outputs/A.P._ai_governance.pptx
+++ b/outputs/A.P._ai_governance.pptx
@@ -3112,6 +3112,9 @@
               <a:gs pos="0">
                 <a:srgbClr val="0C2A8E"/>
               </a:gs>
+              <a:gs pos="70000">
+                <a:srgbClr val="0C2A8E"/>
+              </a:gs>
               <a:gs pos="100000">
                 <a:srgbClr val="1FCBD9"/>
               </a:gs>
@@ -3150,7 +3153,7 @@
         <p:spPr>
           <a:xfrm>
             <a:off x="0" y="0"/>
-            <a:ext cx="3600000" cy="6858000"/>
+            <a:ext cx="4300000" cy="6858000"/>
           </a:xfrm>
           <a:prstGeom prst="rect">
             <a:avLst/>
@@ -3194,7 +3197,7 @@
         <p:spPr>
           <a:xfrm>
             <a:off x="228600" y="260000"/>
-            <a:ext cx="3142800" cy="800000"/>
+            <a:ext cx="3842800" cy="800000"/>
           </a:xfrm>
           <a:prstGeom prst="rect">
             <a:avLst/>
@@ -3228,8 +3231,8 @@
         </p:nvSpPr>
         <p:spPr>
           <a:xfrm>
-            <a:off x="3828600" y="300000"/>
-            <a:ext cx="8134800" cy="800000"/>
+            <a:off x="4528600" y="300000"/>
+            <a:ext cx="7434800" cy="800000"/>
           </a:xfrm>
           <a:prstGeom prst="rect">
             <a:avLst/>
@@ -3279,7 +3282,7 @@
         <p:spPr>
           <a:xfrm>
             <a:off x="228600" y="1180000"/>
-            <a:ext cx="3142800" cy="5318000"/>
+            <a:ext cx="3842800" cy="5318000"/>
           </a:xfrm>
           <a:prstGeom prst="rect">
             <a:avLst/>
@@ -3434,6 +3437,25 @@
           </a:p>
           <a:p>
             <a:pPr algn="l">
+              <a:spcBef>
+                <a:spcPts val="600"/>
+              </a:spcBef>
+              <a:spcAft>
+                <a:spcPts val="300"/>
+              </a:spcAft>
+            </a:pPr>
+            <a:r>
+              <a:rPr sz="1100" b="1" i="0">
+                <a:solidFill>
+                  <a:srgbClr val="3AEDE5"/>
+                </a:solidFill>
+                <a:latin typeface="Alegreya Sans"/>
+              </a:rPr>
+              <a:t>LANGUES</a:t>
+            </a:r>
+          </a:p>
+          <a:p>
+            <a:pPr algn="l">
               <a:spcAft>
                 <a:spcPts val="100"/>
               </a:spcAft>
@@ -3454,7 +3476,32 @@
                 </a:solidFill>
                 <a:latin typeface="Alegreya Sans"/>
               </a:rPr>
-              <a:t>Cross-functional Leadership</a:t>
+              <a:t>Français — Langue maternelle</a:t>
+            </a:r>
+          </a:p>
+          <a:p>
+            <a:pPr algn="l">
+              <a:spcAft>
+                <a:spcPts val="100"/>
+              </a:spcAft>
+            </a:pPr>
+            <a:r>
+              <a:rPr sz="1000" b="1" i="0">
+                <a:solidFill>
+                  <a:srgbClr val="3AEDE5"/>
+                </a:solidFill>
+                <a:latin typeface="Alegreya Sans"/>
+              </a:rPr>
+              <a:t>•  </a:t>
+            </a:r>
+            <a:r>
+              <a:rPr sz="1000" b="0" i="0">
+                <a:solidFill>
+                  <a:srgbClr val="FFFFFF"/>
+                </a:solidFill>
+                <a:latin typeface="Alegreya Sans"/>
+              </a:rPr>
+              <a:t>Anglais — TOEIC 955/990</a:t>
             </a:r>
           </a:p>
           <a:p>
@@ -3473,7 +3520,7 @@
                 </a:solidFill>
                 <a:latin typeface="Alegreya Sans"/>
               </a:rPr>
-              <a:t>LANGUES</a:t>
+              <a:t>FORMATION &amp; CERTIFICATIONS</a:t>
             </a:r>
           </a:p>
           <a:p>
@@ -3489,21 +3536,37 @@
                 </a:solidFill>
                 <a:latin typeface="Alegreya Sans"/>
               </a:rPr>
-              <a:t>•  </a:t>
-            </a:r>
-            <a:r>
-              <a:rPr sz="1000" b="0" i="0">
-                <a:solidFill>
-                  <a:srgbClr val="FFFFFF"/>
-                </a:solidFill>
-                <a:latin typeface="Alegreya Sans"/>
-              </a:rPr>
-              <a:t>Français — Langue maternelle</a:t>
+              <a:t>2024  </a:t>
+            </a:r>
+            <a:r>
+              <a:rPr sz="1000" b="1" i="0">
+                <a:solidFill>
+                  <a:srgbClr val="FFFFFF"/>
+                </a:solidFill>
+                <a:latin typeface="Alegreya Sans"/>
+              </a:rPr>
+              <a:t>EDHEC Business School</a:t>
             </a:r>
           </a:p>
           <a:p>
             <a:pPr algn="l">
               <a:spcAft>
+                <a:spcPts val="300"/>
+              </a:spcAft>
+            </a:pPr>
+            <a:r>
+              <a:rPr sz="1000" b="0" i="1">
+                <a:solidFill>
+                  <a:srgbClr val="CCD6E8"/>
+                </a:solidFill>
+                <a:latin typeface="Alegreya Sans"/>
+              </a:rPr>
+              <a:t>Certification Digital Ethics Officer (avec Me…</a:t>
+            </a:r>
+          </a:p>
+          <a:p>
+            <a:pPr algn="l">
+              <a:spcAft>
                 <a:spcPts val="100"/>
               </a:spcAft>
             </a:pPr>
@@ -3514,16 +3577,73 @@
                 </a:solidFill>
                 <a:latin typeface="Alegreya Sans"/>
               </a:rPr>
-              <a:t>•  </a:t>
-            </a:r>
-            <a:r>
-              <a:rPr sz="1000" b="0" i="0">
-                <a:solidFill>
-                  <a:srgbClr val="FFFFFF"/>
-                </a:solidFill>
-                <a:latin typeface="Alegreya Sans"/>
-              </a:rPr>
-              <a:t>Anglais — TOEIC 955/990</a:t>
+              <a:t>2015 — 2020  </a:t>
+            </a:r>
+            <a:r>
+              <a:rPr sz="1000" b="1" i="0">
+                <a:solidFill>
+                  <a:srgbClr val="FFFFFF"/>
+                </a:solidFill>
+                <a:latin typeface="Alegreya Sans"/>
+              </a:rPr>
+              <a:t>Sciences Po Saint-Germain-en-Laye</a:t>
+            </a:r>
+          </a:p>
+          <a:p>
+            <a:pPr algn="l">
+              <a:spcAft>
+                <a:spcPts val="300"/>
+              </a:spcAft>
+            </a:pPr>
+            <a:r>
+              <a:rPr sz="1000" b="0" i="1">
+                <a:solidFill>
+                  <a:srgbClr val="CCD6E8"/>
+                </a:solidFill>
+                <a:latin typeface="Alegreya Sans"/>
+              </a:rPr>
+              <a:t>Master II Affaires européennes et internation…</a:t>
+            </a:r>
+          </a:p>
+          <a:p>
+            <a:pPr algn="l">
+              <a:spcAft>
+                <a:spcPts val="100"/>
+              </a:spcAft>
+            </a:pPr>
+            <a:r>
+              <a:rPr sz="1000" b="1" i="0">
+                <a:solidFill>
+                  <a:srgbClr val="3AEDE5"/>
+                </a:solidFill>
+                <a:latin typeface="Alegreya Sans"/>
+              </a:rPr>
+              <a:t>2020  </a:t>
+            </a:r>
+            <a:r>
+              <a:rPr sz="1000" b="1" i="0">
+                <a:solidFill>
+                  <a:srgbClr val="FFFFFF"/>
+                </a:solidFill>
+                <a:latin typeface="Alegreya Sans"/>
+              </a:rPr>
+              <a:t>Université de Versailles Saint-Quentin-en-Yvelines</a:t>
+            </a:r>
+          </a:p>
+          <a:p>
+            <a:pPr algn="l">
+              <a:spcAft>
+                <a:spcPts val="300"/>
+              </a:spcAft>
+            </a:pPr>
+            <a:r>
+              <a:rPr sz="1000" b="0" i="1">
+                <a:solidFill>
+                  <a:srgbClr val="CCD6E8"/>
+                </a:solidFill>
+                <a:latin typeface="Alegreya Sans"/>
+              </a:rPr>
+              <a:t>Master II Influence &amp; Affaires publiques (ave…</a:t>
             </a:r>
           </a:p>
           <a:p>
@@ -3542,40 +3662,67 @@
                 </a:solidFill>
                 <a:latin typeface="Alegreya Sans"/>
               </a:rPr>
-              <a:t>FORMATION &amp; CERTIFICATIONS</a:t>
+              <a:t>ENGAGEMENTS &amp; RÉALISATIONS</a:t>
             </a:r>
           </a:p>
           <a:p>
             <a:pPr algn="l">
               <a:spcAft>
-                <a:spcPts val="100"/>
-              </a:spcAft>
-            </a:pPr>
-            <a:r>
-              <a:rPr sz="1000" b="1" i="0">
-                <a:solidFill>
-                  <a:srgbClr val="3AEDE5"/>
-                </a:solidFill>
-                <a:latin typeface="Alegreya Sans"/>
-              </a:rPr>
-              <a:t>2024  </a:t>
-            </a:r>
-            <a:r>
-              <a:rPr sz="1000" b="1" i="0">
-                <a:solidFill>
-                  <a:srgbClr val="FFFFFF"/>
-                </a:solidFill>
-                <a:latin typeface="Alegreya Sans"/>
-              </a:rPr>
-              <a:t>EDHEC Business School</a:t>
+                <a:spcPts val="200"/>
+              </a:spcAft>
+            </a:pPr>
+            <a:r>
+              <a:rPr sz="1000" b="1" i="0">
+                <a:solidFill>
+                  <a:srgbClr val="3AEDE5"/>
+                </a:solidFill>
+                <a:latin typeface="Alegreya Sans"/>
+              </a:rPr>
+              <a:t>• </a:t>
+            </a:r>
+            <a:r>
+              <a:rPr sz="1000" b="1" i="0">
+                <a:solidFill>
+                  <a:srgbClr val="FFFFFF"/>
+                </a:solidFill>
+                <a:latin typeface="Alegreya Sans"/>
+              </a:rPr>
+              <a:t>Conseiller Numérique</a:t>
+            </a:r>
+            <a:r>
+              <a:rPr sz="1000" b="0" i="1">
+                <a:solidFill>
+                  <a:srgbClr val="CCD6E8"/>
+                </a:solidFill>
+                <a:latin typeface="Alegreya Sans"/>
+              </a:rPr>
+              <a:t> — Bénévole au sein du Conseil du Numérique…</a:t>
             </a:r>
           </a:p>
           <a:p>
             <a:pPr algn="l">
               <a:spcAft>
-                <a:spcPts val="300"/>
-              </a:spcAft>
-            </a:pPr>
+                <a:spcPts val="200"/>
+              </a:spcAft>
+            </a:pPr>
+            <a:r>
+              <a:rPr sz="1000" b="1" i="0">
+                <a:solidFill>
+                  <a:srgbClr val="3AEDE5"/>
+                </a:solidFill>
+                <a:latin typeface="Alegreya Sans"/>
+              </a:rPr>
+              <a:t>• </a:t>
+            </a:r>
+            <a:r>
+              <a:rPr sz="1000" b="1" i="0">
+                <a:solidFill>
+                  <a:srgbClr val="FFFFFF"/>
+                </a:solidFill>
+                <a:latin typeface="Alegreya Sans"/>
+              </a:rPr>
+              <a:t>Podcasteur</a:t>
+            </a:r>
             <a:r>
               <a:rPr sz="1000" b="0" i="1">
                 <a:solidFill>
@@ -3583,40 +3730,33 @@
                 </a:solidFill>
                 <a:latin typeface="Alegreya Sans"/>
               </a:rPr>
-              <a:t>Certification Digital Ethics Officer (avec Mention)</a:t>
+              <a:t> — Créateur et animateur d'un podcast sur l…</a:t>
             </a:r>
           </a:p>
           <a:p>
             <a:pPr algn="l">
               <a:spcAft>
-                <a:spcPts val="100"/>
-              </a:spcAft>
-            </a:pPr>
-            <a:r>
-              <a:rPr sz="1000" b="1" i="0">
-                <a:solidFill>
-                  <a:srgbClr val="3AEDE5"/>
-                </a:solidFill>
-                <a:latin typeface="Alegreya Sans"/>
-              </a:rPr>
-              <a:t>2015 — 2020  </a:t>
-            </a:r>
-            <a:r>
-              <a:rPr sz="1000" b="1" i="0">
-                <a:solidFill>
-                  <a:srgbClr val="FFFFFF"/>
-                </a:solidFill>
-                <a:latin typeface="Alegreya Sans"/>
-              </a:rPr>
-              <a:t>Sciences Po Saint-Germain-en-Laye</a:t>
-            </a:r>
-          </a:p>
-          <a:p>
-            <a:pPr algn="l">
-              <a:spcAft>
-                <a:spcPts val="300"/>
-              </a:spcAft>
-            </a:pPr>
+                <a:spcPts val="200"/>
+              </a:spcAft>
+            </a:pPr>
+            <a:r>
+              <a:rPr sz="1000" b="1" i="0">
+                <a:solidFill>
+                  <a:srgbClr val="3AEDE5"/>
+                </a:solidFill>
+                <a:latin typeface="Alegreya Sans"/>
+              </a:rPr>
+              <a:t>• </a:t>
+            </a:r>
+            <a:r>
+              <a:rPr sz="1000" b="1" i="0">
+                <a:solidFill>
+                  <a:srgbClr val="FFFFFF"/>
+                </a:solidFill>
+                <a:latin typeface="Alegreya Sans"/>
+              </a:rPr>
+              <a:t>Conférencier</a:t>
+            </a:r>
             <a:r>
               <a:rPr sz="1000" b="0" i="1">
                 <a:solidFill>
@@ -3624,48 +3764,7 @@
                 </a:solidFill>
                 <a:latin typeface="Alegreya Sans"/>
               </a:rPr>
-              <a:t>Master II Affaires européennes et internationales (avec Mention)</a:t>
-            </a:r>
-          </a:p>
-          <a:p>
-            <a:pPr algn="l">
-              <a:spcAft>
-                <a:spcPts val="100"/>
-              </a:spcAft>
-            </a:pPr>
-            <a:r>
-              <a:rPr sz="1000" b="1" i="0">
-                <a:solidFill>
-                  <a:srgbClr val="3AEDE5"/>
-                </a:solidFill>
-                <a:latin typeface="Alegreya Sans"/>
-              </a:rPr>
-              <a:t>2020  </a:t>
-            </a:r>
-            <a:r>
-              <a:rPr sz="1000" b="1" i="0">
-                <a:solidFill>
-                  <a:srgbClr val="FFFFFF"/>
-                </a:solidFill>
-                <a:latin typeface="Alegreya Sans"/>
-              </a:rPr>
-              <a:t>Université de Versailles Saint-Quentin-en-Yvelines</a:t>
-            </a:r>
-          </a:p>
-          <a:p>
-            <a:pPr algn="l">
-              <a:spcAft>
-                <a:spcPts val="300"/>
-              </a:spcAft>
-            </a:pPr>
-            <a:r>
-              <a:rPr sz="1000" b="0" i="1">
-                <a:solidFill>
-                  <a:srgbClr val="CCD6E8"/>
-                </a:solidFill>
-                <a:latin typeface="Alegreya Sans"/>
-              </a:rPr>
-              <a:t>Master II Influence &amp; Affaires publiques (avec Mention)</a:t>
+              <a:t> — Intervenant sur l'IA et ses enjeux (écol…</a:t>
             </a:r>
           </a:p>
         </p:txBody>
@@ -3678,8 +3777,8 @@
         </p:nvSpPr>
         <p:spPr>
           <a:xfrm>
-            <a:off x="3828600" y="1180000"/>
-            <a:ext cx="8134800" cy="5318000"/>
+            <a:off x="4528600" y="1180000"/>
+            <a:ext cx="7434800" cy="5318000"/>
           </a:xfrm>
           <a:prstGeom prst="rect">
             <a:avLst/>
@@ -3720,7 +3819,7 @@
                 </a:solidFill>
                 <a:latin typeface="Alegreya Sans"/>
               </a:rPr>
-              <a:t>Expert en gouvernance de l'IA, AI Risk Management et conformité réglementaire, avec près de 8 ans d'expérience auprès de grandes institutions bancaires. Spécialisé dans l'EU AI Act et le déploiement de dispositifs de gouvernance IA à l'échelle internationale.</a:t>
+              <a:t>Expert en gouvernance de l'IA, AI Risk Management et conformité réglementaire, avec près de 8 ans d'expérience auprès de grandes institutions bancaires. Spécialisé dans l'EU AI Act et le déploiement de dispositifs de gou…</a:t>
             </a:r>
           </a:p>
           <a:p>
@@ -3807,7 +3906,7 @@
                 </a:solidFill>
                 <a:latin typeface="Alegreya Sans"/>
               </a:rPr>
-              <a:t>Finalisation et mise en œuvre du cadre de gouvernance des risques IA : politiques internes, cartographie des risques, comitologie et coordination des fonctions support et métiers.</a:t>
+              <a:t>Finalisation et mise en œuvre du cadre de gouvernance des risques IA : politiques internes, cartographie des risques, comitologie et coordination des fonctions…</a:t>
             </a:r>
           </a:p>
           <a:p>
@@ -3836,6 +3935,49 @@
             </a:r>
           </a:p>
           <a:p>
+            <a:pPr algn="l">
+              <a:spcAft>
+                <a:spcPts val="100"/>
+              </a:spcAft>
+            </a:pPr>
+            <a:r>
+              <a:rPr sz="1000" b="1" i="0">
+                <a:solidFill>
+                  <a:srgbClr val="3AEDE5"/>
+                </a:solidFill>
+                <a:latin typeface="Alegreya Sans"/>
+              </a:rPr>
+              <a:t>▸ </a:t>
+            </a:r>
+            <a:r>
+              <a:rPr sz="1000" b="1" i="0">
+                <a:solidFill>
+                  <a:srgbClr val="FFFFFF"/>
+                </a:solidFill>
+                <a:latin typeface="Alegreya Sans"/>
+              </a:rPr>
+              <a:t>Sia Partners</a:t>
+            </a:r>
+            <a:r>
+              <a:rPr sz="1000" b="0" i="0">
+                <a:solidFill>
+                  <a:srgbClr val="FFFFFF"/>
+                </a:solidFill>
+                <a:latin typeface="Alegreya Sans"/>
+              </a:rPr>
+              <a:t> — Associate Manager</a:t>
+            </a:r>
+            <a:r>
+              <a:rPr sz="1000" b="0" i="1">
+                <a:solidFill>
+                  <a:srgbClr val="3AEDE5"/>
+                </a:solidFill>
+                <a:latin typeface="Alegreya Sans"/>
+              </a:rPr>
+              <a:t>  (10 mois — en cours)</a:t>
+            </a:r>
+          </a:p>
+          <a:p>
             <a:pPr algn="l" lvl="1">
               <a:spcAft>
                 <a:spcPts val="100"/>
@@ -3857,7 +3999,32 @@
                 </a:solidFill>
                 <a:latin typeface="Alegreya Sans"/>
               </a:rPr>
-              <a:t>Contribution au déploiement international du dispositif dans plus de 40 entités, dont USA, UK, APAC et MEA.</a:t>
+              <a:t>Responsable de l'offre AI Risk Management : coordination des réponses aux appels d'offres, veille stratégique et réglementaire, développement commercial et anim…</a:t>
+            </a:r>
+          </a:p>
+          <a:p>
+            <a:pPr algn="l" lvl="1">
+              <a:spcAft>
+                <a:spcPts val="100"/>
+              </a:spcAft>
+            </a:pPr>
+            <a:r>
+              <a:rPr sz="1000" b="1" i="0">
+                <a:solidFill>
+                  <a:srgbClr val="3AEDE5"/>
+                </a:solidFill>
+                <a:latin typeface="Alegreya Sans"/>
+              </a:rPr>
+              <a:t>•  </a:t>
+            </a:r>
+            <a:r>
+              <a:rPr sz="1000" b="0" i="0">
+                <a:solidFill>
+                  <a:srgbClr val="FFFFFF"/>
+                </a:solidFill>
+                <a:latin typeface="Alegreya Sans"/>
+              </a:rPr>
+              <a:t>Pilotage et animation du groupe de travail IA de l'association Paris Europlace (+40 responsables du secteur financier) : rédaction de position papers et de répo…</a:t>
             </a:r>
           </a:p>
           <a:p>
@@ -3882,7 +4049,7 @@
                 </a:solidFill>
                 <a:latin typeface="Alegreya Sans"/>
               </a:rPr>
-              <a:t>Sia Partners</a:t>
+              <a:t>Groupe BPCE</a:t>
             </a:r>
             <a:r>
               <a:rPr sz="1000" b="0" i="0">
@@ -3891,7 +4058,7 @@
                 </a:solidFill>
                 <a:latin typeface="Alegreya Sans"/>
               </a:rPr>
-              <a:t> — Associate Manager</a:t>
+              <a:t> — Group EU AI Act Project Manager</a:t>
             </a:r>
             <a:r>
               <a:rPr sz="1000" b="0" i="1">
@@ -3900,7 +4067,7 @@
                 </a:solidFill>
                 <a:latin typeface="Alegreya Sans"/>
               </a:rPr>
-              <a:t>  (10 mois — en cours)</a:t>
+              <a:t>  (18 mois)</a:t>
             </a:r>
           </a:p>
           <a:p>
@@ -3925,7 +4092,7 @@
                 </a:solidFill>
                 <a:latin typeface="Alegreya Sans"/>
               </a:rPr>
-              <a:t>Responsable de l'offre AI Risk Management : coordination des réponses aux appels d'offres, veille stratégique et réglementaire, développement commercial et animation de l'écosystème financier.</a:t>
+              <a:t>Responsable du programme de mise en conformité EU AI Act du Groupe BPCE et de ses entités (Natixis, Oney, BRED, etc.) : cartographie et évaluation des risques I…</a:t>
             </a:r>
           </a:p>
           <a:p>
@@ -3950,7 +4117,7 @@
                 </a:solidFill>
                 <a:latin typeface="Alegreya Sans"/>
               </a:rPr>
-              <a:t>Pilotage et animation du groupe de travail IA de l'association Paris Europlace (+40 responsables du secteur financier) : rédaction de position papers et de réponses aux consultations européennes, benchmarks.</a:t>
+              <a:t>Coordination et accompagnement de plus de 35 décideurs locaux (DPO, Chief Compliance Officer, CDO, etc.) dans la déclinaison du cadre normatif Groupe.</a:t>
             </a:r>
           </a:p>
           <a:p>
@@ -3975,7 +4142,7 @@
                 </a:solidFill>
                 <a:latin typeface="Alegreya Sans"/>
               </a:rPr>
-              <a:t>Groupe BPCE</a:t>
+              <a:t>Oney / Oneytrust</a:t>
             </a:r>
             <a:r>
               <a:rPr sz="1000" b="0" i="0">
@@ -3984,7 +4151,7 @@
                 </a:solidFill>
                 <a:latin typeface="Alegreya Sans"/>
               </a:rPr>
-              <a:t> — Group EU AI Act Project Manager</a:t>
+              <a:t> — Expert Leader — Digital &amp; AI Compliance Officer</a:t>
             </a:r>
             <a:r>
               <a:rPr sz="1000" b="0" i="1">
@@ -3993,7 +4160,7 @@
                 </a:solidFill>
                 <a:latin typeface="Alegreya Sans"/>
               </a:rPr>
-              <a:t>  (18 mois)</a:t>
+              <a:t>  (38 mois)</a:t>
             </a:r>
           </a:p>
           <a:p>
@@ -4018,7 +4185,7 @@
                 </a:solidFill>
                 <a:latin typeface="Alegreya Sans"/>
               </a:rPr>
-              <a:t>Responsable du programme de mise en conformité EU AI Act du Groupe BPCE et de ses entités (Natixis, Oney, BRED, etc.) : cartographie et évaluation des risques IA, définition de la politique et du cadre normatif Groupe, évolution des processus opérationnels, animation du comité de pilotage.</a:t>
+              <a:t>Structuration du cadre de gouvernance des risques IA avec le Chief Data Officer : inventaire des systèmes, formation des référents métiers et pilotage de la con…</a:t>
             </a:r>
           </a:p>
           <a:p>
@@ -4043,150 +4210,7 @@
                 </a:solidFill>
                 <a:latin typeface="Alegreya Sans"/>
               </a:rPr>
-              <a:t>Coordination et accompagnement de plus de 35 décideurs locaux (DPO, Chief Compliance Officer, CDO, etc.) dans la déclinaison du cadre normatif Groupe.</a:t>
-            </a:r>
-          </a:p>
-          <a:p>
-            <a:pPr algn="l" lvl="1">
-              <a:spcAft>
-                <a:spcPts val="100"/>
-              </a:spcAft>
-            </a:pPr>
-            <a:r>
-              <a:rPr sz="1000" b="1" i="0">
-                <a:solidFill>
-                  <a:srgbClr val="3AEDE5"/>
-                </a:solidFill>
-                <a:latin typeface="Alegreya Sans"/>
-              </a:rPr>
-              <a:t>•  </a:t>
-            </a:r>
-            <a:r>
-              <a:rPr sz="1000" b="0" i="0">
-                <a:solidFill>
-                  <a:srgbClr val="FFFFFF"/>
-                </a:solidFill>
-                <a:latin typeface="Alegreya Sans"/>
-              </a:rPr>
-              <a:t>Conseil stratégique auprès des dirigeants et des métiers pour interpréter et décliner les exigences réglementaires applicables aux systèmes d'IA.</a:t>
-            </a:r>
-          </a:p>
-          <a:p>
-            <a:pPr algn="l">
-              <a:spcAft>
-                <a:spcPts val="100"/>
-              </a:spcAft>
-            </a:pPr>
-            <a:r>
-              <a:rPr sz="1000" b="1" i="0">
-                <a:solidFill>
-                  <a:srgbClr val="3AEDE5"/>
-                </a:solidFill>
-                <a:latin typeface="Alegreya Sans"/>
-              </a:rPr>
-              <a:t>▸ </a:t>
-            </a:r>
-            <a:r>
-              <a:rPr sz="1000" b="1" i="0">
-                <a:solidFill>
-                  <a:srgbClr val="FFFFFF"/>
-                </a:solidFill>
-                <a:latin typeface="Alegreya Sans"/>
-              </a:rPr>
-              <a:t>Oney / Oneytrust</a:t>
-            </a:r>
-            <a:r>
-              <a:rPr sz="1000" b="0" i="0">
-                <a:solidFill>
-                  <a:srgbClr val="FFFFFF"/>
-                </a:solidFill>
-                <a:latin typeface="Alegreya Sans"/>
-              </a:rPr>
-              <a:t> — Expert Leader — Digital &amp; AI Compliance Officer</a:t>
-            </a:r>
-            <a:r>
-              <a:rPr sz="1000" b="0" i="1">
-                <a:solidFill>
-                  <a:srgbClr val="3AEDE5"/>
-                </a:solidFill>
-                <a:latin typeface="Alegreya Sans"/>
-              </a:rPr>
-              <a:t>  (38 mois)</a:t>
-            </a:r>
-          </a:p>
-          <a:p>
-            <a:pPr algn="l" lvl="1">
-              <a:spcAft>
-                <a:spcPts val="100"/>
-              </a:spcAft>
-            </a:pPr>
-            <a:r>
-              <a:rPr sz="1000" b="1" i="0">
-                <a:solidFill>
-                  <a:srgbClr val="3AEDE5"/>
-                </a:solidFill>
-                <a:latin typeface="Alegreya Sans"/>
-              </a:rPr>
-              <a:t>•  </a:t>
-            </a:r>
-            <a:r>
-              <a:rPr sz="1000" b="0" i="0">
-                <a:solidFill>
-                  <a:srgbClr val="FFFFFF"/>
-                </a:solidFill>
-                <a:latin typeface="Alegreya Sans"/>
-              </a:rPr>
-              <a:t>Structuration du cadre de gouvernance des risques IA avec le Chief Data Officer : inventaire des systèmes, formation des référents métiers et pilotage de la conformité EU AI Act dans plus de 10 entités internationales.</a:t>
-            </a:r>
-          </a:p>
-          <a:p>
-            <a:pPr algn="l" lvl="1">
-              <a:spcAft>
-                <a:spcPts val="100"/>
-              </a:spcAft>
-            </a:pPr>
-            <a:r>
-              <a:rPr sz="1000" b="1" i="0">
-                <a:solidFill>
-                  <a:srgbClr val="3AEDE5"/>
-                </a:solidFill>
-                <a:latin typeface="Alegreya Sans"/>
-              </a:rPr>
-              <a:t>•  </a:t>
-            </a:r>
-            <a:r>
-              <a:rPr sz="1000" b="0" i="0">
-                <a:solidFill>
-                  <a:srgbClr val="FFFFFF"/>
-                </a:solidFill>
-                <a:latin typeface="Alegreya Sans"/>
-              </a:rPr>
               <a:t>Ambassadeur des outils d'IA Générative Groupe auprès de 3 000 collaborateurs Oney.</a:t>
-            </a:r>
-          </a:p>
-          <a:p>
-            <a:pPr algn="l" lvl="1">
-              <a:spcAft>
-                <a:spcPts val="100"/>
-              </a:spcAft>
-            </a:pPr>
-            <a:r>
-              <a:rPr sz="1000" b="1" i="0">
-                <a:solidFill>
-                  <a:srgbClr val="3AEDE5"/>
-                </a:solidFill>
-                <a:latin typeface="Alegreya Sans"/>
-              </a:rPr>
-              <a:t>•  </a:t>
-            </a:r>
-            <a:r>
-              <a:rPr sz="1000" b="0" i="0">
-                <a:solidFill>
-                  <a:srgbClr val="FFFFFF"/>
-                </a:solidFill>
-                <a:latin typeface="Alegreya Sans"/>
-              </a:rPr>
-              <a:t>Pilotage des activités RGPD de la filiale Oneytrust : rédaction et mise à jour AIPD, clauses contractuelles, formation, contrôles RGPD, référent privacy by design dans les projets de lutte contre la fraude.</a:t>
             </a:r>
           </a:p>
           <a:p>
@@ -4222,161 +4246,6 @@
                 <a:latin typeface="Alegreya Sans"/>
               </a:rPr>
               <a:t>Groupe BPCE, Natixis, Oney, Sia Partners, Paris Europlace</a:t>
-            </a:r>
-          </a:p>
-          <a:p>
-            <a:pPr algn="l">
-              <a:spcBef>
-                <a:spcPts val="600"/>
-              </a:spcBef>
-              <a:spcAft>
-                <a:spcPts val="300"/>
-              </a:spcAft>
-            </a:pPr>
-            <a:r>
-              <a:rPr sz="1100" b="1" i="0">
-                <a:solidFill>
-                  <a:srgbClr val="3AEDE5"/>
-                </a:solidFill>
-                <a:latin typeface="Alegreya Sans"/>
-              </a:rPr>
-              <a:t>ENGAGEMENTS &amp; RÉALISATIONS</a:t>
-            </a:r>
-          </a:p>
-          <a:p>
-            <a:pPr algn="l">
-              <a:spcAft>
-                <a:spcPts val="100"/>
-              </a:spcAft>
-            </a:pPr>
-            <a:r>
-              <a:rPr sz="1000" b="1" i="0">
-                <a:solidFill>
-                  <a:srgbClr val="3AEDE5"/>
-                </a:solidFill>
-                <a:latin typeface="Alegreya Sans"/>
-              </a:rPr>
-              <a:t>• </a:t>
-            </a:r>
-            <a:r>
-              <a:rPr sz="1000" b="1" i="0">
-                <a:solidFill>
-                  <a:srgbClr val="FFFFFF"/>
-                </a:solidFill>
-                <a:latin typeface="Alegreya Sans"/>
-              </a:rPr>
-              <a:t>Conseiller Numérique</a:t>
-            </a:r>
-            <a:r>
-              <a:rPr sz="1000" b="0" i="0">
-                <a:solidFill>
-                  <a:srgbClr val="CCD6E8"/>
-                </a:solidFill>
-                <a:latin typeface="Alegreya Sans"/>
-              </a:rPr>
-              <a:t> — Bénévole au sein du Conseil du Numérique d'une commune des Yvelines, aux côtés du Maire.</a:t>
-            </a:r>
-          </a:p>
-          <a:p>
-            <a:pPr algn="l">
-              <a:spcAft>
-                <a:spcPts val="100"/>
-              </a:spcAft>
-            </a:pPr>
-            <a:r>
-              <a:rPr sz="1000" b="1" i="0">
-                <a:solidFill>
-                  <a:srgbClr val="3AEDE5"/>
-                </a:solidFill>
-                <a:latin typeface="Alegreya Sans"/>
-              </a:rPr>
-              <a:t>• </a:t>
-            </a:r>
-            <a:r>
-              <a:rPr sz="1000" b="1" i="0">
-                <a:solidFill>
-                  <a:srgbClr val="FFFFFF"/>
-                </a:solidFill>
-                <a:latin typeface="Alegreya Sans"/>
-              </a:rPr>
-              <a:t>Podcasteur</a:t>
-            </a:r>
-            <a:r>
-              <a:rPr sz="1000" b="0" i="0">
-                <a:solidFill>
-                  <a:srgbClr val="CCD6E8"/>
-                </a:solidFill>
-                <a:latin typeface="Alegreya Sans"/>
-              </a:rPr>
-              <a:t> — Créateur et animateur d'un podcast sur l'IA — personnalités influentes du secteur.</a:t>
-            </a:r>
-          </a:p>
-          <a:p>
-            <a:pPr algn="l">
-              <a:spcAft>
-                <a:spcPts val="100"/>
-              </a:spcAft>
-            </a:pPr>
-            <a:r>
-              <a:rPr sz="1000" b="1" i="0">
-                <a:solidFill>
-                  <a:srgbClr val="3AEDE5"/>
-                </a:solidFill>
-                <a:latin typeface="Alegreya Sans"/>
-              </a:rPr>
-              <a:t>• </a:t>
-            </a:r>
-            <a:r>
-              <a:rPr sz="1000" b="1" i="0">
-                <a:solidFill>
-                  <a:srgbClr val="FFFFFF"/>
-                </a:solidFill>
-                <a:latin typeface="Alegreya Sans"/>
-              </a:rPr>
-              <a:t>Conférencier</a:t>
-            </a:r>
-            <a:r>
-              <a:rPr sz="1000" b="0" i="0">
-                <a:solidFill>
-                  <a:srgbClr val="CCD6E8"/>
-                </a:solidFill>
-                <a:latin typeface="Alegreya Sans"/>
-              </a:rPr>
-              <a:t> — Intervenant sur l'IA et ses enjeux (écoles de commerce, mairies, administrateurs).</a:t>
-            </a:r>
-          </a:p>
-          <a:p>
-            <a:pPr algn="l">
-              <a:spcAft>
-                <a:spcPts val="100"/>
-              </a:spcAft>
-            </a:pPr>
-            <a:r>
-              <a:rPr sz="1000" b="1" i="0">
-                <a:solidFill>
-                  <a:srgbClr val="3AEDE5"/>
-                </a:solidFill>
-                <a:latin typeface="Alegreya Sans"/>
-              </a:rPr>
-              <a:t>• </a:t>
-            </a:r>
-            <a:r>
-              <a:rPr sz="1000" b="1" i="0">
-                <a:solidFill>
-                  <a:srgbClr val="FFFFFF"/>
-                </a:solidFill>
-                <a:latin typeface="Alegreya Sans"/>
-              </a:rPr>
-              <a:t>Juré EDHEC</a:t>
-            </a:r>
-            <a:r>
-              <a:rPr sz="1000" b="0" i="0">
-                <a:solidFill>
-                  <a:srgbClr val="CCD6E8"/>
-                </a:solidFill>
-                <a:latin typeface="Alegreya Sans"/>
-              </a:rPr>
-              <a:t> — Juré des projets IA — certification Digital Ethics Officer.</a:t>
             </a:r>
           </a:p>
         </p:txBody>
@@ -4455,6 +4324,9 @@
           <a:gradFill flip="none" rotWithShape="1">
             <a:gsLst>
               <a:gs pos="0">
+                <a:srgbClr val="0C2A8E"/>
+              </a:gs>
+              <a:gs pos="70000">
                 <a:srgbClr val="0C2A8E"/>
               </a:gs>
               <a:gs pos="100000">
@@ -4495,7 +4367,7 @@
         <p:spPr>
           <a:xfrm>
             <a:off x="0" y="0"/>
-            <a:ext cx="3600000" cy="6858000"/>
+            <a:ext cx="4300000" cy="6858000"/>
           </a:xfrm>
           <a:prstGeom prst="rect">
             <a:avLst/>
@@ -4539,7 +4411,7 @@
         <p:spPr>
           <a:xfrm>
             <a:off x="228600" y="260000"/>
-            <a:ext cx="3142800" cy="800000"/>
+            <a:ext cx="3842800" cy="800000"/>
           </a:xfrm>
           <a:prstGeom prst="rect">
             <a:avLst/>
@@ -4573,8 +4445,8 @@
         </p:nvSpPr>
         <p:spPr>
           <a:xfrm>
-            <a:off x="3828600" y="300000"/>
-            <a:ext cx="8134800" cy="800000"/>
+            <a:off x="4528600" y="300000"/>
+            <a:ext cx="7434800" cy="800000"/>
           </a:xfrm>
           <a:prstGeom prst="rect">
             <a:avLst/>
@@ -4624,7 +4496,7 @@
         <p:spPr>
           <a:xfrm>
             <a:off x="228600" y="1180000"/>
-            <a:ext cx="3142800" cy="5318000"/>
+            <a:ext cx="3842800" cy="5318000"/>
           </a:xfrm>
           <a:prstGeom prst="rect">
             <a:avLst/>
@@ -4779,6 +4651,25 @@
           </a:p>
           <a:p>
             <a:pPr algn="l">
+              <a:spcBef>
+                <a:spcPts val="600"/>
+              </a:spcBef>
+              <a:spcAft>
+                <a:spcPts val="300"/>
+              </a:spcAft>
+            </a:pPr>
+            <a:r>
+              <a:rPr sz="1100" b="1" i="0">
+                <a:solidFill>
+                  <a:srgbClr val="3AEDE5"/>
+                </a:solidFill>
+                <a:latin typeface="Alegreya Sans"/>
+              </a:rPr>
+              <a:t>LANGUAGES</a:t>
+            </a:r>
+          </a:p>
+          <a:p>
+            <a:pPr algn="l">
               <a:spcAft>
                 <a:spcPts val="100"/>
               </a:spcAft>
@@ -4799,7 +4690,32 @@
                 </a:solidFill>
                 <a:latin typeface="Alegreya Sans"/>
               </a:rPr>
-              <a:t>Cross-functional Leadership</a:t>
+              <a:t>French — Native</a:t>
+            </a:r>
+          </a:p>
+          <a:p>
+            <a:pPr algn="l">
+              <a:spcAft>
+                <a:spcPts val="100"/>
+              </a:spcAft>
+            </a:pPr>
+            <a:r>
+              <a:rPr sz="1000" b="1" i="0">
+                <a:solidFill>
+                  <a:srgbClr val="3AEDE5"/>
+                </a:solidFill>
+                <a:latin typeface="Alegreya Sans"/>
+              </a:rPr>
+              <a:t>•  </a:t>
+            </a:r>
+            <a:r>
+              <a:rPr sz="1000" b="0" i="0">
+                <a:solidFill>
+                  <a:srgbClr val="FFFFFF"/>
+                </a:solidFill>
+                <a:latin typeface="Alegreya Sans"/>
+              </a:rPr>
+              <a:t>English — TOEIC 955/990</a:t>
             </a:r>
           </a:p>
           <a:p>
@@ -4818,7 +4734,7 @@
                 </a:solidFill>
                 <a:latin typeface="Alegreya Sans"/>
               </a:rPr>
-              <a:t>LANGUAGES</a:t>
+              <a:t>EDUCATION &amp; CERTIFICATIONS</a:t>
             </a:r>
           </a:p>
           <a:p>
@@ -4834,21 +4750,37 @@
                 </a:solidFill>
                 <a:latin typeface="Alegreya Sans"/>
               </a:rPr>
-              <a:t>•  </a:t>
-            </a:r>
-            <a:r>
-              <a:rPr sz="1000" b="0" i="0">
-                <a:solidFill>
-                  <a:srgbClr val="FFFFFF"/>
-                </a:solidFill>
-                <a:latin typeface="Alegreya Sans"/>
-              </a:rPr>
-              <a:t>French — Native</a:t>
+              <a:t>2024  </a:t>
+            </a:r>
+            <a:r>
+              <a:rPr sz="1000" b="1" i="0">
+                <a:solidFill>
+                  <a:srgbClr val="FFFFFF"/>
+                </a:solidFill>
+                <a:latin typeface="Alegreya Sans"/>
+              </a:rPr>
+              <a:t>EDHEC Business School</a:t>
             </a:r>
           </a:p>
           <a:p>
             <a:pPr algn="l">
               <a:spcAft>
+                <a:spcPts val="300"/>
+              </a:spcAft>
+            </a:pPr>
+            <a:r>
+              <a:rPr sz="1000" b="0" i="1">
+                <a:solidFill>
+                  <a:srgbClr val="CCD6E8"/>
+                </a:solidFill>
+                <a:latin typeface="Alegreya Sans"/>
+              </a:rPr>
+              <a:t>Digital Ethics Officer certification (with Di…</a:t>
+            </a:r>
+          </a:p>
+          <a:p>
+            <a:pPr algn="l">
+              <a:spcAft>
                 <a:spcPts val="100"/>
               </a:spcAft>
             </a:pPr>
@@ -4859,16 +4791,73 @@
                 </a:solidFill>
                 <a:latin typeface="Alegreya Sans"/>
               </a:rPr>
-              <a:t>•  </a:t>
-            </a:r>
-            <a:r>
-              <a:rPr sz="1000" b="0" i="0">
-                <a:solidFill>
-                  <a:srgbClr val="FFFFFF"/>
-                </a:solidFill>
-                <a:latin typeface="Alegreya Sans"/>
-              </a:rPr>
-              <a:t>English — TOEIC 955/990</a:t>
+              <a:t>2015 — 2020  </a:t>
+            </a:r>
+            <a:r>
+              <a:rPr sz="1000" b="1" i="0">
+                <a:solidFill>
+                  <a:srgbClr val="FFFFFF"/>
+                </a:solidFill>
+                <a:latin typeface="Alegreya Sans"/>
+              </a:rPr>
+              <a:t>Sciences Po Saint-Germain-en-Laye</a:t>
+            </a:r>
+          </a:p>
+          <a:p>
+            <a:pPr algn="l">
+              <a:spcAft>
+                <a:spcPts val="300"/>
+              </a:spcAft>
+            </a:pPr>
+            <a:r>
+              <a:rPr sz="1000" b="0" i="1">
+                <a:solidFill>
+                  <a:srgbClr val="CCD6E8"/>
+                </a:solidFill>
+                <a:latin typeface="Alegreya Sans"/>
+              </a:rPr>
+              <a:t>Master's in European &amp; International Affairs…</a:t>
+            </a:r>
+          </a:p>
+          <a:p>
+            <a:pPr algn="l">
+              <a:spcAft>
+                <a:spcPts val="100"/>
+              </a:spcAft>
+            </a:pPr>
+            <a:r>
+              <a:rPr sz="1000" b="1" i="0">
+                <a:solidFill>
+                  <a:srgbClr val="3AEDE5"/>
+                </a:solidFill>
+                <a:latin typeface="Alegreya Sans"/>
+              </a:rPr>
+              <a:t>2020  </a:t>
+            </a:r>
+            <a:r>
+              <a:rPr sz="1000" b="1" i="0">
+                <a:solidFill>
+                  <a:srgbClr val="FFFFFF"/>
+                </a:solidFill>
+                <a:latin typeface="Alegreya Sans"/>
+              </a:rPr>
+              <a:t>University of Versailles Saint-Quentin-en-Yvelines</a:t>
+            </a:r>
+          </a:p>
+          <a:p>
+            <a:pPr algn="l">
+              <a:spcAft>
+                <a:spcPts val="300"/>
+              </a:spcAft>
+            </a:pPr>
+            <a:r>
+              <a:rPr sz="1000" b="0" i="1">
+                <a:solidFill>
+                  <a:srgbClr val="CCD6E8"/>
+                </a:solidFill>
+                <a:latin typeface="Alegreya Sans"/>
+              </a:rPr>
+              <a:t>Master's in Influence &amp; Public Affairs (with…</a:t>
             </a:r>
           </a:p>
           <a:p>
@@ -4887,40 +4876,67 @@
                 </a:solidFill>
                 <a:latin typeface="Alegreya Sans"/>
               </a:rPr>
-              <a:t>EDUCATION &amp; CERTIFICATIONS</a:t>
+              <a:t>ENGAGEMENTS &amp; ACHIEVEMENTS</a:t>
             </a:r>
           </a:p>
           <a:p>
             <a:pPr algn="l">
               <a:spcAft>
-                <a:spcPts val="100"/>
-              </a:spcAft>
-            </a:pPr>
-            <a:r>
-              <a:rPr sz="1000" b="1" i="0">
-                <a:solidFill>
-                  <a:srgbClr val="3AEDE5"/>
-                </a:solidFill>
-                <a:latin typeface="Alegreya Sans"/>
-              </a:rPr>
-              <a:t>2024  </a:t>
-            </a:r>
-            <a:r>
-              <a:rPr sz="1000" b="1" i="0">
-                <a:solidFill>
-                  <a:srgbClr val="FFFFFF"/>
-                </a:solidFill>
-                <a:latin typeface="Alegreya Sans"/>
-              </a:rPr>
-              <a:t>EDHEC Business School</a:t>
+                <a:spcPts val="200"/>
+              </a:spcAft>
+            </a:pPr>
+            <a:r>
+              <a:rPr sz="1000" b="1" i="0">
+                <a:solidFill>
+                  <a:srgbClr val="3AEDE5"/>
+                </a:solidFill>
+                <a:latin typeface="Alegreya Sans"/>
+              </a:rPr>
+              <a:t>• </a:t>
+            </a:r>
+            <a:r>
+              <a:rPr sz="1000" b="1" i="0">
+                <a:solidFill>
+                  <a:srgbClr val="FFFFFF"/>
+                </a:solidFill>
+                <a:latin typeface="Alegreya Sans"/>
+              </a:rPr>
+              <a:t>Digital Council Advisor</a:t>
+            </a:r>
+            <a:r>
+              <a:rPr sz="1000" b="0" i="1">
+                <a:solidFill>
+                  <a:srgbClr val="CCD6E8"/>
+                </a:solidFill>
+                <a:latin typeface="Alegreya Sans"/>
+              </a:rPr>
+              <a:t> — Volunteer at a local Digital Council (Yv…</a:t>
             </a:r>
           </a:p>
           <a:p>
             <a:pPr algn="l">
               <a:spcAft>
-                <a:spcPts val="300"/>
-              </a:spcAft>
-            </a:pPr>
+                <a:spcPts val="200"/>
+              </a:spcAft>
+            </a:pPr>
+            <a:r>
+              <a:rPr sz="1000" b="1" i="0">
+                <a:solidFill>
+                  <a:srgbClr val="3AEDE5"/>
+                </a:solidFill>
+                <a:latin typeface="Alegreya Sans"/>
+              </a:rPr>
+              <a:t>• </a:t>
+            </a:r>
+            <a:r>
+              <a:rPr sz="1000" b="1" i="0">
+                <a:solidFill>
+                  <a:srgbClr val="FFFFFF"/>
+                </a:solidFill>
+                <a:latin typeface="Alegreya Sans"/>
+              </a:rPr>
+              <a:t>Podcaster</a:t>
+            </a:r>
             <a:r>
               <a:rPr sz="1000" b="0" i="1">
                 <a:solidFill>
@@ -4928,40 +4944,33 @@
                 </a:solidFill>
                 <a:latin typeface="Alegreya Sans"/>
               </a:rPr>
-              <a:t>Digital Ethics Officer certification (with Distinction)</a:t>
+              <a:t> — Creator and host of an AI podcast featur…</a:t>
             </a:r>
           </a:p>
           <a:p>
             <a:pPr algn="l">
               <a:spcAft>
-                <a:spcPts val="100"/>
-              </a:spcAft>
-            </a:pPr>
-            <a:r>
-              <a:rPr sz="1000" b="1" i="0">
-                <a:solidFill>
-                  <a:srgbClr val="3AEDE5"/>
-                </a:solidFill>
-                <a:latin typeface="Alegreya Sans"/>
-              </a:rPr>
-              <a:t>2015 — 2020  </a:t>
-            </a:r>
-            <a:r>
-              <a:rPr sz="1000" b="1" i="0">
-                <a:solidFill>
-                  <a:srgbClr val="FFFFFF"/>
-                </a:solidFill>
-                <a:latin typeface="Alegreya Sans"/>
-              </a:rPr>
-              <a:t>Sciences Po Saint-Germain-en-Laye</a:t>
-            </a:r>
-          </a:p>
-          <a:p>
-            <a:pPr algn="l">
-              <a:spcAft>
-                <a:spcPts val="300"/>
-              </a:spcAft>
-            </a:pPr>
+                <a:spcPts val="200"/>
+              </a:spcAft>
+            </a:pPr>
+            <a:r>
+              <a:rPr sz="1000" b="1" i="0">
+                <a:solidFill>
+                  <a:srgbClr val="3AEDE5"/>
+                </a:solidFill>
+                <a:latin typeface="Alegreya Sans"/>
+              </a:rPr>
+              <a:t>• </a:t>
+            </a:r>
+            <a:r>
+              <a:rPr sz="1000" b="1" i="0">
+                <a:solidFill>
+                  <a:srgbClr val="FFFFFF"/>
+                </a:solidFill>
+                <a:latin typeface="Alegreya Sans"/>
+              </a:rPr>
+              <a:t>Speaker</a:t>
+            </a:r>
             <a:r>
               <a:rPr sz="1000" b="0" i="1">
                 <a:solidFill>
@@ -4969,48 +4978,7 @@
                 </a:solidFill>
                 <a:latin typeface="Alegreya Sans"/>
               </a:rPr>
-              <a:t>Master's in European &amp; International Affairs (with Distinction)</a:t>
-            </a:r>
-          </a:p>
-          <a:p>
-            <a:pPr algn="l">
-              <a:spcAft>
-                <a:spcPts val="100"/>
-              </a:spcAft>
-            </a:pPr>
-            <a:r>
-              <a:rPr sz="1000" b="1" i="0">
-                <a:solidFill>
-                  <a:srgbClr val="3AEDE5"/>
-                </a:solidFill>
-                <a:latin typeface="Alegreya Sans"/>
-              </a:rPr>
-              <a:t>2020  </a:t>
-            </a:r>
-            <a:r>
-              <a:rPr sz="1000" b="1" i="0">
-                <a:solidFill>
-                  <a:srgbClr val="FFFFFF"/>
-                </a:solidFill>
-                <a:latin typeface="Alegreya Sans"/>
-              </a:rPr>
-              <a:t>University of Versailles Saint-Quentin-en-Yvelines</a:t>
-            </a:r>
-          </a:p>
-          <a:p>
-            <a:pPr algn="l">
-              <a:spcAft>
-                <a:spcPts val="300"/>
-              </a:spcAft>
-            </a:pPr>
-            <a:r>
-              <a:rPr sz="1000" b="0" i="1">
-                <a:solidFill>
-                  <a:srgbClr val="CCD6E8"/>
-                </a:solidFill>
-                <a:latin typeface="Alegreya Sans"/>
-              </a:rPr>
-              <a:t>Master's in Influence &amp; Public Affairs (with Distinction)</a:t>
+              <a:t> — Speaker on AI and its challenges (busine…</a:t>
             </a:r>
           </a:p>
         </p:txBody>
@@ -5023,8 +4991,8 @@
         </p:nvSpPr>
         <p:spPr>
           <a:xfrm>
-            <a:off x="3828600" y="1180000"/>
-            <a:ext cx="8134800" cy="5318000"/>
+            <a:off x="4528600" y="1180000"/>
+            <a:ext cx="7434800" cy="5318000"/>
           </a:xfrm>
           <a:prstGeom prst="rect">
             <a:avLst/>
@@ -5065,7 +5033,7 @@
                 </a:solidFill>
                 <a:latin typeface="Alegreya Sans"/>
               </a:rPr>
-              <a:t>Expert in AI Governance, AI Risk Management and regulatory compliance, with nearly 8 years of experience advising major banking institutions. Specialised in the EU AI Act and the international rollout of AI governance frameworks.</a:t>
+              <a:t>Expert in AI Governance, AI Risk Management and regulatory compliance, with nearly 8 years of experience advising major banking institutions. Specialised in the EU AI Act and the international rollout of AI governance fr…</a:t>
             </a:r>
           </a:p>
           <a:p>
@@ -5181,6 +5149,49 @@
             </a:r>
           </a:p>
           <a:p>
+            <a:pPr algn="l">
+              <a:spcAft>
+                <a:spcPts val="100"/>
+              </a:spcAft>
+            </a:pPr>
+            <a:r>
+              <a:rPr sz="1000" b="1" i="0">
+                <a:solidFill>
+                  <a:srgbClr val="3AEDE5"/>
+                </a:solidFill>
+                <a:latin typeface="Alegreya Sans"/>
+              </a:rPr>
+              <a:t>▸ </a:t>
+            </a:r>
+            <a:r>
+              <a:rPr sz="1000" b="1" i="0">
+                <a:solidFill>
+                  <a:srgbClr val="FFFFFF"/>
+                </a:solidFill>
+                <a:latin typeface="Alegreya Sans"/>
+              </a:rPr>
+              <a:t>Sia Partners</a:t>
+            </a:r>
+            <a:r>
+              <a:rPr sz="1000" b="0" i="0">
+                <a:solidFill>
+                  <a:srgbClr val="FFFFFF"/>
+                </a:solidFill>
+                <a:latin typeface="Alegreya Sans"/>
+              </a:rPr>
+              <a:t> — Associate Manager</a:t>
+            </a:r>
+            <a:r>
+              <a:rPr sz="1000" b="0" i="1">
+                <a:solidFill>
+                  <a:srgbClr val="3AEDE5"/>
+                </a:solidFill>
+                <a:latin typeface="Alegreya Sans"/>
+              </a:rPr>
+              <a:t>  (10 months — ongoing)</a:t>
+            </a:r>
+          </a:p>
+          <a:p>
             <a:pPr algn="l" lvl="1">
               <a:spcAft>
                 <a:spcPts val="100"/>
@@ -5202,7 +5213,32 @@
                 </a:solidFill>
                 <a:latin typeface="Alegreya Sans"/>
               </a:rPr>
-              <a:t>Contribution to the international rollout across 40+ entities, including USA, UK, APAC and MEA.</a:t>
+              <a:t>Head of the AI Risk Management offering: RFP coordination, strategic and regulatory watch, business development and financial-ecosystem animation.</a:t>
+            </a:r>
+          </a:p>
+          <a:p>
+            <a:pPr algn="l" lvl="1">
+              <a:spcAft>
+                <a:spcPts val="100"/>
+              </a:spcAft>
+            </a:pPr>
+            <a:r>
+              <a:rPr sz="1000" b="1" i="0">
+                <a:solidFill>
+                  <a:srgbClr val="3AEDE5"/>
+                </a:solidFill>
+                <a:latin typeface="Alegreya Sans"/>
+              </a:rPr>
+              <a:t>•  </a:t>
+            </a:r>
+            <a:r>
+              <a:rPr sz="1000" b="0" i="0">
+                <a:solidFill>
+                  <a:srgbClr val="FFFFFF"/>
+                </a:solidFill>
+                <a:latin typeface="Alegreya Sans"/>
+              </a:rPr>
+              <a:t>Lead of the AI working group at Paris Europlace association (40+ senior financial-sector representatives): position papers, EU consultation responses, benchmark…</a:t>
             </a:r>
           </a:p>
           <a:p>
@@ -5227,7 +5263,7 @@
                 </a:solidFill>
                 <a:latin typeface="Alegreya Sans"/>
               </a:rPr>
-              <a:t>Sia Partners</a:t>
+              <a:t>Groupe BPCE</a:t>
             </a:r>
             <a:r>
               <a:rPr sz="1000" b="0" i="0">
@@ -5236,7 +5272,7 @@
                 </a:solidFill>
                 <a:latin typeface="Alegreya Sans"/>
               </a:rPr>
-              <a:t> — Associate Manager</a:t>
+              <a:t> — Group EU AI Act Project Manager</a:t>
             </a:r>
             <a:r>
               <a:rPr sz="1000" b="0" i="1">
@@ -5245,7 +5281,7 @@
                 </a:solidFill>
                 <a:latin typeface="Alegreya Sans"/>
               </a:rPr>
-              <a:t>  (10 months — ongoing)</a:t>
+              <a:t>  (18 months)</a:t>
             </a:r>
           </a:p>
           <a:p>
@@ -5270,7 +5306,7 @@
                 </a:solidFill>
                 <a:latin typeface="Alegreya Sans"/>
               </a:rPr>
-              <a:t>Head of the AI Risk Management offering: RFP coordination, strategic and regulatory watch, business development and financial-ecosystem animation.</a:t>
+              <a:t>Lead of the EU AI Act compliance programme for Groupe BPCE and its entities (Natixis, Oney, BRED, etc.): AI risk mapping and assessment, definition of Group pol…</a:t>
             </a:r>
           </a:p>
           <a:p>
@@ -5295,7 +5331,7 @@
                 </a:solidFill>
                 <a:latin typeface="Alegreya Sans"/>
               </a:rPr>
-              <a:t>Lead of the AI working group at Paris Europlace association (40+ senior financial-sector representatives): position papers, EU consultation responses, benchmarks.</a:t>
+              <a:t>Coordination and support of 35+ local decision-makers (DPO, Chief Compliance Officer, CDO, etc.) in deploying the Group framework.</a:t>
             </a:r>
           </a:p>
           <a:p>
@@ -5320,7 +5356,7 @@
                 </a:solidFill>
                 <a:latin typeface="Alegreya Sans"/>
               </a:rPr>
-              <a:t>Groupe BPCE</a:t>
+              <a:t>Oney / Oneytrust</a:t>
             </a:r>
             <a:r>
               <a:rPr sz="1000" b="0" i="0">
@@ -5329,7 +5365,7 @@
                 </a:solidFill>
                 <a:latin typeface="Alegreya Sans"/>
               </a:rPr>
-              <a:t> — Group EU AI Act Project Manager</a:t>
+              <a:t> — Expert Leader — Digital &amp; AI Compliance Officer</a:t>
             </a:r>
             <a:r>
               <a:rPr sz="1000" b="0" i="1">
@@ -5338,7 +5374,7 @@
                 </a:solidFill>
                 <a:latin typeface="Alegreya Sans"/>
               </a:rPr>
-              <a:t>  (18 months)</a:t>
+              <a:t>  (38 months)</a:t>
             </a:r>
           </a:p>
           <a:p>
@@ -5363,7 +5399,7 @@
                 </a:solidFill>
                 <a:latin typeface="Alegreya Sans"/>
               </a:rPr>
-              <a:t>Lead of the EU AI Act compliance programme for Groupe BPCE and its entities (Natixis, Oney, BRED, etc.): AI risk mapping and assessment, definition of Group policy and standards, operational process evolution, steering-committee animation.</a:t>
+              <a:t>Built the AI risk governance framework with the Chief Data Officer: systems inventory, training of business reference owners, EU AI Act compliance pilot across…</a:t>
             </a:r>
           </a:p>
           <a:p>
@@ -5388,150 +5424,7 @@
                 </a:solidFill>
                 <a:latin typeface="Alegreya Sans"/>
               </a:rPr>
-              <a:t>Coordination and support of 35+ local decision-makers (DPO, Chief Compliance Officer, CDO, etc.) in deploying the Group framework.</a:t>
-            </a:r>
-          </a:p>
-          <a:p>
-            <a:pPr algn="l" lvl="1">
-              <a:spcAft>
-                <a:spcPts val="100"/>
-              </a:spcAft>
-            </a:pPr>
-            <a:r>
-              <a:rPr sz="1000" b="1" i="0">
-                <a:solidFill>
-                  <a:srgbClr val="3AEDE5"/>
-                </a:solidFill>
-                <a:latin typeface="Alegreya Sans"/>
-              </a:rPr>
-              <a:t>•  </a:t>
-            </a:r>
-            <a:r>
-              <a:rPr sz="1000" b="0" i="0">
-                <a:solidFill>
-                  <a:srgbClr val="FFFFFF"/>
-                </a:solidFill>
-                <a:latin typeface="Alegreya Sans"/>
-              </a:rPr>
-              <a:t>Strategic advisory to executives and business lines on interpreting and applying regulatory requirements for AI systems.</a:t>
-            </a:r>
-          </a:p>
-          <a:p>
-            <a:pPr algn="l">
-              <a:spcAft>
-                <a:spcPts val="100"/>
-              </a:spcAft>
-            </a:pPr>
-            <a:r>
-              <a:rPr sz="1000" b="1" i="0">
-                <a:solidFill>
-                  <a:srgbClr val="3AEDE5"/>
-                </a:solidFill>
-                <a:latin typeface="Alegreya Sans"/>
-              </a:rPr>
-              <a:t>▸ </a:t>
-            </a:r>
-            <a:r>
-              <a:rPr sz="1000" b="1" i="0">
-                <a:solidFill>
-                  <a:srgbClr val="FFFFFF"/>
-                </a:solidFill>
-                <a:latin typeface="Alegreya Sans"/>
-              </a:rPr>
-              <a:t>Oney / Oneytrust</a:t>
-            </a:r>
-            <a:r>
-              <a:rPr sz="1000" b="0" i="0">
-                <a:solidFill>
-                  <a:srgbClr val="FFFFFF"/>
-                </a:solidFill>
-                <a:latin typeface="Alegreya Sans"/>
-              </a:rPr>
-              <a:t> — Expert Leader — Digital &amp; AI Compliance Officer</a:t>
-            </a:r>
-            <a:r>
-              <a:rPr sz="1000" b="0" i="1">
-                <a:solidFill>
-                  <a:srgbClr val="3AEDE5"/>
-                </a:solidFill>
-                <a:latin typeface="Alegreya Sans"/>
-              </a:rPr>
-              <a:t>  (38 months)</a:t>
-            </a:r>
-          </a:p>
-          <a:p>
-            <a:pPr algn="l" lvl="1">
-              <a:spcAft>
-                <a:spcPts val="100"/>
-              </a:spcAft>
-            </a:pPr>
-            <a:r>
-              <a:rPr sz="1000" b="1" i="0">
-                <a:solidFill>
-                  <a:srgbClr val="3AEDE5"/>
-                </a:solidFill>
-                <a:latin typeface="Alegreya Sans"/>
-              </a:rPr>
-              <a:t>•  </a:t>
-            </a:r>
-            <a:r>
-              <a:rPr sz="1000" b="0" i="0">
-                <a:solidFill>
-                  <a:srgbClr val="FFFFFF"/>
-                </a:solidFill>
-                <a:latin typeface="Alegreya Sans"/>
-              </a:rPr>
-              <a:t>Built the AI risk governance framework with the Chief Data Officer: systems inventory, training of business reference owners, EU AI Act compliance pilot across 10+ international entities.</a:t>
-            </a:r>
-          </a:p>
-          <a:p>
-            <a:pPr algn="l" lvl="1">
-              <a:spcAft>
-                <a:spcPts val="100"/>
-              </a:spcAft>
-            </a:pPr>
-            <a:r>
-              <a:rPr sz="1000" b="1" i="0">
-                <a:solidFill>
-                  <a:srgbClr val="3AEDE5"/>
-                </a:solidFill>
-                <a:latin typeface="Alegreya Sans"/>
-              </a:rPr>
-              <a:t>•  </a:t>
-            </a:r>
-            <a:r>
-              <a:rPr sz="1000" b="0" i="0">
-                <a:solidFill>
-                  <a:srgbClr val="FFFFFF"/>
-                </a:solidFill>
-                <a:latin typeface="Alegreya Sans"/>
-              </a:rPr>
               <a:t>Group GenAI tools ambassador to 3,000 Oney employees.</a:t>
-            </a:r>
-          </a:p>
-          <a:p>
-            <a:pPr algn="l" lvl="1">
-              <a:spcAft>
-                <a:spcPts val="100"/>
-              </a:spcAft>
-            </a:pPr>
-            <a:r>
-              <a:rPr sz="1000" b="1" i="0">
-                <a:solidFill>
-                  <a:srgbClr val="3AEDE5"/>
-                </a:solidFill>
-                <a:latin typeface="Alegreya Sans"/>
-              </a:rPr>
-              <a:t>•  </a:t>
-            </a:r>
-            <a:r>
-              <a:rPr sz="1000" b="0" i="0">
-                <a:solidFill>
-                  <a:srgbClr val="FFFFFF"/>
-                </a:solidFill>
-                <a:latin typeface="Alegreya Sans"/>
-              </a:rPr>
-              <a:t>Pilot of Oneytrust's GDPR activities: DPIA drafting and updates, contractual clauses, training, GDPR controls, privacy-by-design referent on anti-fraud projects.</a:t>
             </a:r>
           </a:p>
           <a:p>
@@ -5567,161 +5460,6 @@
                 <a:latin typeface="Alegreya Sans"/>
               </a:rPr>
               <a:t>Groupe BPCE, Natixis, Oney, Sia Partners, Paris Europlace</a:t>
-            </a:r>
-          </a:p>
-          <a:p>
-            <a:pPr algn="l">
-              <a:spcBef>
-                <a:spcPts val="600"/>
-              </a:spcBef>
-              <a:spcAft>
-                <a:spcPts val="300"/>
-              </a:spcAft>
-            </a:pPr>
-            <a:r>
-              <a:rPr sz="1100" b="1" i="0">
-                <a:solidFill>
-                  <a:srgbClr val="3AEDE5"/>
-                </a:solidFill>
-                <a:latin typeface="Alegreya Sans"/>
-              </a:rPr>
-              <a:t>ENGAGEMENTS &amp; ACHIEVEMENTS</a:t>
-            </a:r>
-          </a:p>
-          <a:p>
-            <a:pPr algn="l">
-              <a:spcAft>
-                <a:spcPts val="100"/>
-              </a:spcAft>
-            </a:pPr>
-            <a:r>
-              <a:rPr sz="1000" b="1" i="0">
-                <a:solidFill>
-                  <a:srgbClr val="3AEDE5"/>
-                </a:solidFill>
-                <a:latin typeface="Alegreya Sans"/>
-              </a:rPr>
-              <a:t>• </a:t>
-            </a:r>
-            <a:r>
-              <a:rPr sz="1000" b="1" i="0">
-                <a:solidFill>
-                  <a:srgbClr val="FFFFFF"/>
-                </a:solidFill>
-                <a:latin typeface="Alegreya Sans"/>
-              </a:rPr>
-              <a:t>Digital Council Advisor</a:t>
-            </a:r>
-            <a:r>
-              <a:rPr sz="1000" b="0" i="0">
-                <a:solidFill>
-                  <a:srgbClr val="CCD6E8"/>
-                </a:solidFill>
-                <a:latin typeface="Alegreya Sans"/>
-              </a:rPr>
-              <a:t> — Volunteer at a local Digital Council (Yvelines), alongside the Mayor.</a:t>
-            </a:r>
-          </a:p>
-          <a:p>
-            <a:pPr algn="l">
-              <a:spcAft>
-                <a:spcPts val="100"/>
-              </a:spcAft>
-            </a:pPr>
-            <a:r>
-              <a:rPr sz="1000" b="1" i="0">
-                <a:solidFill>
-                  <a:srgbClr val="3AEDE5"/>
-                </a:solidFill>
-                <a:latin typeface="Alegreya Sans"/>
-              </a:rPr>
-              <a:t>• </a:t>
-            </a:r>
-            <a:r>
-              <a:rPr sz="1000" b="1" i="0">
-                <a:solidFill>
-                  <a:srgbClr val="FFFFFF"/>
-                </a:solidFill>
-                <a:latin typeface="Alegreya Sans"/>
-              </a:rPr>
-              <a:t>Podcaster</a:t>
-            </a:r>
-            <a:r>
-              <a:rPr sz="1000" b="0" i="0">
-                <a:solidFill>
-                  <a:srgbClr val="CCD6E8"/>
-                </a:solidFill>
-                <a:latin typeface="Alegreya Sans"/>
-              </a:rPr>
-              <a:t> — Creator and host of an AI podcast featuring influential figures in the sector.</a:t>
-            </a:r>
-          </a:p>
-          <a:p>
-            <a:pPr algn="l">
-              <a:spcAft>
-                <a:spcPts val="100"/>
-              </a:spcAft>
-            </a:pPr>
-            <a:r>
-              <a:rPr sz="1000" b="1" i="0">
-                <a:solidFill>
-                  <a:srgbClr val="3AEDE5"/>
-                </a:solidFill>
-                <a:latin typeface="Alegreya Sans"/>
-              </a:rPr>
-              <a:t>• </a:t>
-            </a:r>
-            <a:r>
-              <a:rPr sz="1000" b="1" i="0">
-                <a:solidFill>
-                  <a:srgbClr val="FFFFFF"/>
-                </a:solidFill>
-                <a:latin typeface="Alegreya Sans"/>
-              </a:rPr>
-              <a:t>Speaker</a:t>
-            </a:r>
-            <a:r>
-              <a:rPr sz="1000" b="0" i="0">
-                <a:solidFill>
-                  <a:srgbClr val="CCD6E8"/>
-                </a:solidFill>
-                <a:latin typeface="Alegreya Sans"/>
-              </a:rPr>
-              <a:t> — Speaker on AI and its challenges (business schools, town halls, board members).</a:t>
-            </a:r>
-          </a:p>
-          <a:p>
-            <a:pPr algn="l">
-              <a:spcAft>
-                <a:spcPts val="100"/>
-              </a:spcAft>
-            </a:pPr>
-            <a:r>
-              <a:rPr sz="1000" b="1" i="0">
-                <a:solidFill>
-                  <a:srgbClr val="3AEDE5"/>
-                </a:solidFill>
-                <a:latin typeface="Alegreya Sans"/>
-              </a:rPr>
-              <a:t>• </a:t>
-            </a:r>
-            <a:r>
-              <a:rPr sz="1000" b="1" i="0">
-                <a:solidFill>
-                  <a:srgbClr val="FFFFFF"/>
-                </a:solidFill>
-                <a:latin typeface="Alegreya Sans"/>
-              </a:rPr>
-              <a:t>EDHEC Juror</a:t>
-            </a:r>
-            <a:r>
-              <a:rPr sz="1000" b="0" i="0">
-                <a:solidFill>
-                  <a:srgbClr val="CCD6E8"/>
-                </a:solidFill>
-                <a:latin typeface="Alegreya Sans"/>
-              </a:rPr>
-              <a:t> — Juror for AI projects — Digital Ethics Officer certification.</a:t>
             </a:r>
           </a:p>
         </p:txBody>

--- a/outputs/A.P._ai_governance.pptx
+++ b/outputs/A.P._ai_governance.pptx
@@ -3110,10 +3110,10 @@
           <a:gradFill flip="none" rotWithShape="1">
             <a:gsLst>
               <a:gs pos="0">
-                <a:srgbClr val="0C2A8E"/>
+                <a:srgbClr val="07227A"/>
               </a:gs>
-              <a:gs pos="70000">
-                <a:srgbClr val="0C2A8E"/>
+              <a:gs pos="85000">
+                <a:srgbClr val="07227A"/>
               </a:gs>
               <a:gs pos="100000">
                 <a:srgbClr val="1FCBD9"/>
@@ -3159,7 +3159,7 @@
             <a:avLst/>
           </a:prstGeom>
           <a:solidFill>
-            <a:srgbClr val="071F66"/>
+            <a:srgbClr val="061A5E"/>
           </a:solidFill>
           <a:ln>
             <a:noFill/>
@@ -3190,7 +3190,51 @@
       </p:sp>
       <p:sp>
         <p:nvSpPr>
-          <p:cNvPr id="4" name="TextBox 3"/>
+          <p:cNvPr id="4" name="Rectangle 3"/>
+          <p:cNvSpPr/>
+          <p:nvPr/>
+        </p:nvSpPr>
+        <p:spPr>
+          <a:xfrm>
+            <a:off x="0" y="6578000"/>
+            <a:ext cx="12192000" cy="280000"/>
+          </a:xfrm>
+          <a:prstGeom prst="rect">
+            <a:avLst/>
+          </a:prstGeom>
+          <a:solidFill>
+            <a:srgbClr val="061A5E"/>
+          </a:solidFill>
+          <a:ln>
+            <a:noFill/>
+          </a:ln>
+          <a:effectLst/>
+        </p:spPr>
+        <p:style>
+          <a:lnRef idx="1">
+            <a:schemeClr val="accent1"/>
+          </a:lnRef>
+          <a:fillRef idx="3">
+            <a:schemeClr val="accent1"/>
+          </a:fillRef>
+          <a:effectRef idx="2">
+            <a:schemeClr val="accent1"/>
+          </a:effectRef>
+          <a:fontRef idx="minor">
+            <a:schemeClr val="lt1"/>
+          </a:fontRef>
+        </p:style>
+        <p:txBody>
+          <a:bodyPr rtlCol="0" anchor="ctr"/>
+          <a:lstStyle/>
+          <a:p>
+            <a:pPr algn="ctr"/>
+          </a:p>
+        </p:txBody>
+      </p:sp>
+      <p:sp>
+        <p:nvSpPr>
+          <p:cNvPr id="5" name="TextBox 4"/>
           <p:cNvSpPr txBox="1"/>
           <p:nvPr/>
         </p:nvSpPr>
@@ -3212,7 +3256,7 @@
           <a:p>
             <a:pPr algn="l"/>
             <a:r>
-              <a:rPr sz="4400" b="1" i="0">
+              <a:rPr sz="4800" b="1" i="0">
                 <a:solidFill>
                   <a:srgbClr val="3AEDE5"/>
                 </a:solidFill>
@@ -3225,7 +3269,7 @@
       </p:sp>
       <p:sp>
         <p:nvSpPr>
-          <p:cNvPr id="5" name="TextBox 4"/>
+          <p:cNvPr id="6" name="TextBox 5"/>
           <p:cNvSpPr txBox="1"/>
           <p:nvPr/>
         </p:nvSpPr>
@@ -3246,7 +3290,7 @@
           <a:lstStyle/>
           <a:p>
             <a:r>
-              <a:rPr sz="2000" b="1" i="0">
+              <a:rPr sz="2400" b="1" i="0">
                 <a:solidFill>
                   <a:srgbClr val="FFFFFF"/>
                 </a:solidFill>
@@ -3262,7 +3306,7 @@
               </a:spcBef>
             </a:pPr>
             <a:r>
-              <a:rPr sz="1300" b="0" i="1">
+              <a:rPr sz="1500" b="0" i="1">
                 <a:solidFill>
                   <a:srgbClr val="3AEDE5"/>
                 </a:solidFill>
@@ -3275,7 +3319,7 @@
       </p:sp>
       <p:sp>
         <p:nvSpPr>
-          <p:cNvPr id="6" name="TextBox 5"/>
+          <p:cNvPr id="7" name="TextBox 6"/>
           <p:cNvSpPr txBox="1"/>
           <p:nvPr/>
         </p:nvSpPr>
@@ -3301,7 +3345,7 @@
               </a:spcAft>
             </a:pPr>
             <a:r>
-              <a:rPr sz="1100" b="1" i="0">
+              <a:rPr sz="1300" b="1" i="0">
                 <a:solidFill>
                   <a:srgbClr val="3AEDE5"/>
                 </a:solidFill>
@@ -3317,7 +3361,7 @@
               </a:spcAft>
             </a:pPr>
             <a:r>
-              <a:rPr sz="1000" b="1" i="0">
+              <a:rPr sz="1200" b="1" i="0">
                 <a:solidFill>
                   <a:srgbClr val="3AEDE5"/>
                 </a:solidFill>
@@ -3326,7 +3370,7 @@
               <a:t>•  </a:t>
             </a:r>
             <a:r>
-              <a:rPr sz="1000" b="0" i="0">
+              <a:rPr sz="1200" b="0" i="0">
                 <a:solidFill>
                   <a:srgbClr val="FFFFFF"/>
                 </a:solidFill>
@@ -3342,7 +3386,7 @@
               </a:spcAft>
             </a:pPr>
             <a:r>
-              <a:rPr sz="1000" b="1" i="0">
+              <a:rPr sz="1200" b="1" i="0">
                 <a:solidFill>
                   <a:srgbClr val="3AEDE5"/>
                 </a:solidFill>
@@ -3351,7 +3395,7 @@
               <a:t>•  </a:t>
             </a:r>
             <a:r>
-              <a:rPr sz="1000" b="0" i="0">
+              <a:rPr sz="1200" b="0" i="0">
                 <a:solidFill>
                   <a:srgbClr val="FFFFFF"/>
                 </a:solidFill>
@@ -3367,7 +3411,7 @@
               </a:spcAft>
             </a:pPr>
             <a:r>
-              <a:rPr sz="1000" b="1" i="0">
+              <a:rPr sz="1200" b="1" i="0">
                 <a:solidFill>
                   <a:srgbClr val="3AEDE5"/>
                 </a:solidFill>
@@ -3376,7 +3420,7 @@
               <a:t>•  </a:t>
             </a:r>
             <a:r>
-              <a:rPr sz="1000" b="0" i="0">
+              <a:rPr sz="1200" b="0" i="0">
                 <a:solidFill>
                   <a:srgbClr val="FFFFFF"/>
                 </a:solidFill>
@@ -3392,7 +3436,7 @@
               </a:spcAft>
             </a:pPr>
             <a:r>
-              <a:rPr sz="1000" b="1" i="0">
+              <a:rPr sz="1200" b="1" i="0">
                 <a:solidFill>
                   <a:srgbClr val="3AEDE5"/>
                 </a:solidFill>
@@ -3401,7 +3445,7 @@
               <a:t>•  </a:t>
             </a:r>
             <a:r>
-              <a:rPr sz="1000" b="0" i="0">
+              <a:rPr sz="1200" b="0" i="0">
                 <a:solidFill>
                   <a:srgbClr val="FFFFFF"/>
                 </a:solidFill>
@@ -3417,7 +3461,7 @@
               </a:spcAft>
             </a:pPr>
             <a:r>
-              <a:rPr sz="1000" b="1" i="0">
+              <a:rPr sz="1200" b="1" i="0">
                 <a:solidFill>
                   <a:srgbClr val="3AEDE5"/>
                 </a:solidFill>
@@ -3426,7 +3470,7 @@
               <a:t>•  </a:t>
             </a:r>
             <a:r>
-              <a:rPr sz="1000" b="0" i="0">
+              <a:rPr sz="1200" b="0" i="0">
                 <a:solidFill>
                   <a:srgbClr val="FFFFFF"/>
                 </a:solidFill>
@@ -3445,7 +3489,7 @@
               </a:spcAft>
             </a:pPr>
             <a:r>
-              <a:rPr sz="1100" b="1" i="0">
+              <a:rPr sz="1300" b="1" i="0">
                 <a:solidFill>
                   <a:srgbClr val="3AEDE5"/>
                 </a:solidFill>
@@ -3461,7 +3505,7 @@
               </a:spcAft>
             </a:pPr>
             <a:r>
-              <a:rPr sz="1000" b="1" i="0">
+              <a:rPr sz="1200" b="1" i="0">
                 <a:solidFill>
                   <a:srgbClr val="3AEDE5"/>
                 </a:solidFill>
@@ -3470,7 +3514,7 @@
               <a:t>•  </a:t>
             </a:r>
             <a:r>
-              <a:rPr sz="1000" b="0" i="0">
+              <a:rPr sz="1200" b="0" i="0">
                 <a:solidFill>
                   <a:srgbClr val="FFFFFF"/>
                 </a:solidFill>
@@ -3486,7 +3530,7 @@
               </a:spcAft>
             </a:pPr>
             <a:r>
-              <a:rPr sz="1000" b="1" i="0">
+              <a:rPr sz="1200" b="1" i="0">
                 <a:solidFill>
                   <a:srgbClr val="3AEDE5"/>
                 </a:solidFill>
@@ -3495,7 +3539,7 @@
               <a:t>•  </a:t>
             </a:r>
             <a:r>
-              <a:rPr sz="1000" b="0" i="0">
+              <a:rPr sz="1200" b="0" i="0">
                 <a:solidFill>
                   <a:srgbClr val="FFFFFF"/>
                 </a:solidFill>
@@ -3514,7 +3558,7 @@
               </a:spcAft>
             </a:pPr>
             <a:r>
-              <a:rPr sz="1100" b="1" i="0">
+              <a:rPr sz="1300" b="1" i="0">
                 <a:solidFill>
                   <a:srgbClr val="3AEDE5"/>
                 </a:solidFill>
@@ -3530,7 +3574,7 @@
               </a:spcAft>
             </a:pPr>
             <a:r>
-              <a:rPr sz="1000" b="1" i="0">
+              <a:rPr sz="1200" b="1" i="0">
                 <a:solidFill>
                   <a:srgbClr val="3AEDE5"/>
                 </a:solidFill>
@@ -3539,7 +3583,7 @@
               <a:t>2024  </a:t>
             </a:r>
             <a:r>
-              <a:rPr sz="1000" b="1" i="0">
+              <a:rPr sz="1200" b="1" i="0">
                 <a:solidFill>
                   <a:srgbClr val="FFFFFF"/>
                 </a:solidFill>
@@ -3555,13 +3599,13 @@
               </a:spcAft>
             </a:pPr>
             <a:r>
-              <a:rPr sz="1000" b="0" i="1">
+              <a:rPr sz="1200" b="0" i="1">
                 <a:solidFill>
                   <a:srgbClr val="CCD6E8"/>
                 </a:solidFill>
                 <a:latin typeface="Alegreya Sans"/>
               </a:rPr>
-              <a:t>Certification Digital Ethics Officer (avec Me…</a:t>
+              <a:t>Certification Digital Ethics Officer (av…</a:t>
             </a:r>
           </a:p>
           <a:p>
@@ -3571,7 +3615,7 @@
               </a:spcAft>
             </a:pPr>
             <a:r>
-              <a:rPr sz="1000" b="1" i="0">
+              <a:rPr sz="1200" b="1" i="0">
                 <a:solidFill>
                   <a:srgbClr val="3AEDE5"/>
                 </a:solidFill>
@@ -3580,7 +3624,7 @@
               <a:t>2015 — 2020  </a:t>
             </a:r>
             <a:r>
-              <a:rPr sz="1000" b="1" i="0">
+              <a:rPr sz="1200" b="1" i="0">
                 <a:solidFill>
                   <a:srgbClr val="FFFFFF"/>
                 </a:solidFill>
@@ -3596,13 +3640,13 @@
               </a:spcAft>
             </a:pPr>
             <a:r>
-              <a:rPr sz="1000" b="0" i="1">
+              <a:rPr sz="1200" b="0" i="1">
                 <a:solidFill>
                   <a:srgbClr val="CCD6E8"/>
                 </a:solidFill>
                 <a:latin typeface="Alegreya Sans"/>
               </a:rPr>
-              <a:t>Master II Affaires européennes et internation…</a:t>
+              <a:t>Master II Affaires européennes et intern…</a:t>
             </a:r>
           </a:p>
           <a:p>
@@ -3612,7 +3656,7 @@
               </a:spcAft>
             </a:pPr>
             <a:r>
-              <a:rPr sz="1000" b="1" i="0">
+              <a:rPr sz="1200" b="1" i="0">
                 <a:solidFill>
                   <a:srgbClr val="3AEDE5"/>
                 </a:solidFill>
@@ -3621,7 +3665,7 @@
               <a:t>2020  </a:t>
             </a:r>
             <a:r>
-              <a:rPr sz="1000" b="1" i="0">
+              <a:rPr sz="1200" b="1" i="0">
                 <a:solidFill>
                   <a:srgbClr val="FFFFFF"/>
                 </a:solidFill>
@@ -3637,13 +3681,13 @@
               </a:spcAft>
             </a:pPr>
             <a:r>
-              <a:rPr sz="1000" b="0" i="1">
+              <a:rPr sz="1200" b="0" i="1">
                 <a:solidFill>
                   <a:srgbClr val="CCD6E8"/>
                 </a:solidFill>
                 <a:latin typeface="Alegreya Sans"/>
               </a:rPr>
-              <a:t>Master II Influence &amp; Affaires publiques (ave…</a:t>
+              <a:t>Master II Influence &amp; Affaires publiques…</a:t>
             </a:r>
           </a:p>
           <a:p>
@@ -3656,7 +3700,7 @@
               </a:spcAft>
             </a:pPr>
             <a:r>
-              <a:rPr sz="1100" b="1" i="0">
+              <a:rPr sz="1300" b="1" i="0">
                 <a:solidFill>
                   <a:srgbClr val="3AEDE5"/>
                 </a:solidFill>
@@ -3672,7 +3716,7 @@
               </a:spcAft>
             </a:pPr>
             <a:r>
-              <a:rPr sz="1000" b="1" i="0">
+              <a:rPr sz="1200" b="1" i="0">
                 <a:solidFill>
                   <a:srgbClr val="3AEDE5"/>
                 </a:solidFill>
@@ -3681,7 +3725,7 @@
               <a:t>• </a:t>
             </a:r>
             <a:r>
-              <a:rPr sz="1000" b="1" i="0">
+              <a:rPr sz="1200" b="1" i="0">
                 <a:solidFill>
                   <a:srgbClr val="FFFFFF"/>
                 </a:solidFill>
@@ -3690,13 +3734,13 @@
               <a:t>Conseiller Numérique</a:t>
             </a:r>
             <a:r>
-              <a:rPr sz="1000" b="0" i="1">
+              <a:rPr sz="1200" b="0" i="1">
                 <a:solidFill>
                   <a:srgbClr val="CCD6E8"/>
                 </a:solidFill>
                 <a:latin typeface="Alegreya Sans"/>
               </a:rPr>
-              <a:t> — Bénévole au sein du Conseil du Numérique…</a:t>
+              <a:t> — Bénévole au sein du Conseil du Numé…</a:t>
             </a:r>
           </a:p>
           <a:p>
@@ -3706,7 +3750,7 @@
               </a:spcAft>
             </a:pPr>
             <a:r>
-              <a:rPr sz="1000" b="1" i="0">
+              <a:rPr sz="1200" b="1" i="0">
                 <a:solidFill>
                   <a:srgbClr val="3AEDE5"/>
                 </a:solidFill>
@@ -3715,7 +3759,7 @@
               <a:t>• </a:t>
             </a:r>
             <a:r>
-              <a:rPr sz="1000" b="1" i="0">
+              <a:rPr sz="1200" b="1" i="0">
                 <a:solidFill>
                   <a:srgbClr val="FFFFFF"/>
                 </a:solidFill>
@@ -3724,13 +3768,13 @@
               <a:t>Podcasteur</a:t>
             </a:r>
             <a:r>
-              <a:rPr sz="1000" b="0" i="1">
+              <a:rPr sz="1200" b="0" i="1">
                 <a:solidFill>
                   <a:srgbClr val="CCD6E8"/>
                 </a:solidFill>
                 <a:latin typeface="Alegreya Sans"/>
               </a:rPr>
-              <a:t> — Créateur et animateur d'un podcast sur l…</a:t>
+              <a:t> — Créateur et animateur d'un podcast…</a:t>
             </a:r>
           </a:p>
           <a:p>
@@ -3740,7 +3784,7 @@
               </a:spcAft>
             </a:pPr>
             <a:r>
-              <a:rPr sz="1000" b="1" i="0">
+              <a:rPr sz="1200" b="1" i="0">
                 <a:solidFill>
                   <a:srgbClr val="3AEDE5"/>
                 </a:solidFill>
@@ -3749,7 +3793,7 @@
               <a:t>• </a:t>
             </a:r>
             <a:r>
-              <a:rPr sz="1000" b="1" i="0">
+              <a:rPr sz="1200" b="1" i="0">
                 <a:solidFill>
                   <a:srgbClr val="FFFFFF"/>
                 </a:solidFill>
@@ -3758,20 +3802,20 @@
               <a:t>Conférencier</a:t>
             </a:r>
             <a:r>
-              <a:rPr sz="1000" b="0" i="1">
+              <a:rPr sz="1200" b="0" i="1">
                 <a:solidFill>
                   <a:srgbClr val="CCD6E8"/>
                 </a:solidFill>
                 <a:latin typeface="Alegreya Sans"/>
               </a:rPr>
-              <a:t> — Intervenant sur l'IA et ses enjeux (écol…</a:t>
-            </a:r>
-          </a:p>
-        </p:txBody>
-      </p:sp>
-      <p:sp>
-        <p:nvSpPr>
-          <p:cNvPr id="7" name="TextBox 6"/>
+              <a:t> — Intervenant sur l'IA et ses enjeux…</a:t>
+            </a:r>
+          </a:p>
+        </p:txBody>
+      </p:sp>
+      <p:sp>
+        <p:nvSpPr>
+          <p:cNvPr id="8" name="TextBox 7"/>
           <p:cNvSpPr txBox="1"/>
           <p:nvPr/>
         </p:nvSpPr>
@@ -3797,7 +3841,7 @@
               </a:spcAft>
             </a:pPr>
             <a:r>
-              <a:rPr sz="1100" b="1" i="0">
+              <a:rPr sz="1300" b="1" i="0">
                 <a:solidFill>
                   <a:srgbClr val="3AEDE5"/>
                 </a:solidFill>
@@ -3813,13 +3857,13 @@
               </a:spcAft>
             </a:pPr>
             <a:r>
-              <a:rPr sz="1000" b="0" i="0">
-                <a:solidFill>
-                  <a:srgbClr val="FFFFFF"/>
-                </a:solidFill>
-                <a:latin typeface="Alegreya Sans"/>
-              </a:rPr>
-              <a:t>Expert en gouvernance de l'IA, AI Risk Management et conformité réglementaire, avec près de 8 ans d'expérience auprès de grandes institutions bancaires. Spécialisé dans l'EU AI Act et le déploiement de dispositifs de gou…</a:t>
+              <a:rPr sz="1200" b="0" i="0">
+                <a:solidFill>
+                  <a:srgbClr val="FFFFFF"/>
+                </a:solidFill>
+                <a:latin typeface="Alegreya Sans"/>
+              </a:rPr>
+              <a:t>Expert en gouvernance de l'IA, AI Risk Management et conformité réglementaire, avec près de 8 ans d'expérience auprès de grandes institutions bancaires. Spécialisé dans l'EU AI Act et le déploiement d…</a:t>
             </a:r>
           </a:p>
           <a:p>
@@ -3832,7 +3876,7 @@
               </a:spcAft>
             </a:pPr>
             <a:r>
-              <a:rPr sz="1100" b="1" i="0">
+              <a:rPr sz="1300" b="1" i="0">
                 <a:solidFill>
                   <a:srgbClr val="3AEDE5"/>
                 </a:solidFill>
@@ -3848,7 +3892,7 @@
               </a:spcAft>
             </a:pPr>
             <a:r>
-              <a:rPr sz="1000" b="1" i="0">
+              <a:rPr sz="1200" b="1" i="0">
                 <a:solidFill>
                   <a:srgbClr val="3AEDE5"/>
                 </a:solidFill>
@@ -3857,7 +3901,7 @@
               <a:t>▸ </a:t>
             </a:r>
             <a:r>
-              <a:rPr sz="1000" b="1" i="0">
+              <a:rPr sz="1200" b="1" i="0">
                 <a:solidFill>
                   <a:srgbClr val="FFFFFF"/>
                 </a:solidFill>
@@ -3866,7 +3910,7 @@
               <a:t>Top-tier CIB européenne</a:t>
             </a:r>
             <a:r>
-              <a:rPr sz="1000" b="0" i="0">
+              <a:rPr sz="1200" b="0" i="0">
                 <a:solidFill>
                   <a:srgbClr val="FFFFFF"/>
                 </a:solidFill>
@@ -3875,7 +3919,7 @@
               <a:t> — AI Compliance Lead (consultant)</a:t>
             </a:r>
             <a:r>
-              <a:rPr sz="1000" b="0" i="1">
+              <a:rPr sz="1200" b="0" i="1">
                 <a:solidFill>
                   <a:srgbClr val="3AEDE5"/>
                 </a:solidFill>
@@ -3891,7 +3935,7 @@
               </a:spcAft>
             </a:pPr>
             <a:r>
-              <a:rPr sz="1000" b="1" i="0">
+              <a:rPr sz="1200" b="1" i="0">
                 <a:solidFill>
                   <a:srgbClr val="3AEDE5"/>
                 </a:solidFill>
@@ -3900,13 +3944,13 @@
               <a:t>•  </a:t>
             </a:r>
             <a:r>
-              <a:rPr sz="1000" b="0" i="0">
-                <a:solidFill>
-                  <a:srgbClr val="FFFFFF"/>
-                </a:solidFill>
-                <a:latin typeface="Alegreya Sans"/>
-              </a:rPr>
-              <a:t>Finalisation et mise en œuvre du cadre de gouvernance des risques IA : politiques internes, cartographie des risques, comitologie et coordination des fonctions…</a:t>
+              <a:rPr sz="1200" b="0" i="0">
+                <a:solidFill>
+                  <a:srgbClr val="FFFFFF"/>
+                </a:solidFill>
+                <a:latin typeface="Alegreya Sans"/>
+              </a:rPr>
+              <a:t>Finalisation et mise en œuvre du cadre de gouvernance des risques IA : politiques internes, cartographie des risques, comitologie et coordin…</a:t>
             </a:r>
           </a:p>
           <a:p>
@@ -3916,7 +3960,7 @@
               </a:spcAft>
             </a:pPr>
             <a:r>
-              <a:rPr sz="1000" b="1" i="0">
+              <a:rPr sz="1200" b="1" i="0">
                 <a:solidFill>
                   <a:srgbClr val="3AEDE5"/>
                 </a:solidFill>
@@ -3925,7 +3969,7 @@
               <a:t>•  </a:t>
             </a:r>
             <a:r>
-              <a:rPr sz="1000" b="0" i="0">
+              <a:rPr sz="1200" b="0" i="0">
                 <a:solidFill>
                   <a:srgbClr val="FFFFFF"/>
                 </a:solidFill>
@@ -3941,7 +3985,7 @@
               </a:spcAft>
             </a:pPr>
             <a:r>
-              <a:rPr sz="1000" b="1" i="0">
+              <a:rPr sz="1200" b="1" i="0">
                 <a:solidFill>
                   <a:srgbClr val="3AEDE5"/>
                 </a:solidFill>
@@ -3950,7 +3994,7 @@
               <a:t>▸ </a:t>
             </a:r>
             <a:r>
-              <a:rPr sz="1000" b="1" i="0">
+              <a:rPr sz="1200" b="1" i="0">
                 <a:solidFill>
                   <a:srgbClr val="FFFFFF"/>
                 </a:solidFill>
@@ -3959,7 +4003,7 @@
               <a:t>Sia Partners</a:t>
             </a:r>
             <a:r>
-              <a:rPr sz="1000" b="0" i="0">
+              <a:rPr sz="1200" b="0" i="0">
                 <a:solidFill>
                   <a:srgbClr val="FFFFFF"/>
                 </a:solidFill>
@@ -3968,7 +4012,7 @@
               <a:t> — Associate Manager</a:t>
             </a:r>
             <a:r>
-              <a:rPr sz="1000" b="0" i="1">
+              <a:rPr sz="1200" b="0" i="1">
                 <a:solidFill>
                   <a:srgbClr val="3AEDE5"/>
                 </a:solidFill>
@@ -3984,7 +4028,7 @@
               </a:spcAft>
             </a:pPr>
             <a:r>
-              <a:rPr sz="1000" b="1" i="0">
+              <a:rPr sz="1200" b="1" i="0">
                 <a:solidFill>
                   <a:srgbClr val="3AEDE5"/>
                 </a:solidFill>
@@ -3993,13 +4037,13 @@
               <a:t>•  </a:t>
             </a:r>
             <a:r>
-              <a:rPr sz="1000" b="0" i="0">
-                <a:solidFill>
-                  <a:srgbClr val="FFFFFF"/>
-                </a:solidFill>
-                <a:latin typeface="Alegreya Sans"/>
-              </a:rPr>
-              <a:t>Responsable de l'offre AI Risk Management : coordination des réponses aux appels d'offres, veille stratégique et réglementaire, développement commercial et anim…</a:t>
+              <a:rPr sz="1200" b="0" i="0">
+                <a:solidFill>
+                  <a:srgbClr val="FFFFFF"/>
+                </a:solidFill>
+                <a:latin typeface="Alegreya Sans"/>
+              </a:rPr>
+              <a:t>Responsable de l'offre AI Risk Management : coordination des réponses aux appels d'offres, veille stratégique et réglementaire, développemen…</a:t>
             </a:r>
           </a:p>
           <a:p>
@@ -4009,7 +4053,7 @@
               </a:spcAft>
             </a:pPr>
             <a:r>
-              <a:rPr sz="1000" b="1" i="0">
+              <a:rPr sz="1200" b="1" i="0">
                 <a:solidFill>
                   <a:srgbClr val="3AEDE5"/>
                 </a:solidFill>
@@ -4018,13 +4062,13 @@
               <a:t>•  </a:t>
             </a:r>
             <a:r>
-              <a:rPr sz="1000" b="0" i="0">
-                <a:solidFill>
-                  <a:srgbClr val="FFFFFF"/>
-                </a:solidFill>
-                <a:latin typeface="Alegreya Sans"/>
-              </a:rPr>
-              <a:t>Pilotage et animation du groupe de travail IA de l'association Paris Europlace (+40 responsables du secteur financier) : rédaction de position papers et de répo…</a:t>
+              <a:rPr sz="1200" b="0" i="0">
+                <a:solidFill>
+                  <a:srgbClr val="FFFFFF"/>
+                </a:solidFill>
+                <a:latin typeface="Alegreya Sans"/>
+              </a:rPr>
+              <a:t>Pilotage et animation du groupe de travail IA de l'association Paris Europlace (+40 responsables du secteur financier) : rédaction de positi…</a:t>
             </a:r>
           </a:p>
           <a:p>
@@ -4034,7 +4078,7 @@
               </a:spcAft>
             </a:pPr>
             <a:r>
-              <a:rPr sz="1000" b="1" i="0">
+              <a:rPr sz="1200" b="1" i="0">
                 <a:solidFill>
                   <a:srgbClr val="3AEDE5"/>
                 </a:solidFill>
@@ -4043,7 +4087,7 @@
               <a:t>▸ </a:t>
             </a:r>
             <a:r>
-              <a:rPr sz="1000" b="1" i="0">
+              <a:rPr sz="1200" b="1" i="0">
                 <a:solidFill>
                   <a:srgbClr val="FFFFFF"/>
                 </a:solidFill>
@@ -4052,7 +4096,7 @@
               <a:t>Groupe BPCE</a:t>
             </a:r>
             <a:r>
-              <a:rPr sz="1000" b="0" i="0">
+              <a:rPr sz="1200" b="0" i="0">
                 <a:solidFill>
                   <a:srgbClr val="FFFFFF"/>
                 </a:solidFill>
@@ -4061,7 +4105,7 @@
               <a:t> — Group EU AI Act Project Manager</a:t>
             </a:r>
             <a:r>
-              <a:rPr sz="1000" b="0" i="1">
+              <a:rPr sz="1200" b="0" i="1">
                 <a:solidFill>
                   <a:srgbClr val="3AEDE5"/>
                 </a:solidFill>
@@ -4077,7 +4121,7 @@
               </a:spcAft>
             </a:pPr>
             <a:r>
-              <a:rPr sz="1000" b="1" i="0">
+              <a:rPr sz="1200" b="1" i="0">
                 <a:solidFill>
                   <a:srgbClr val="3AEDE5"/>
                 </a:solidFill>
@@ -4086,13 +4130,13 @@
               <a:t>•  </a:t>
             </a:r>
             <a:r>
-              <a:rPr sz="1000" b="0" i="0">
-                <a:solidFill>
-                  <a:srgbClr val="FFFFFF"/>
-                </a:solidFill>
-                <a:latin typeface="Alegreya Sans"/>
-              </a:rPr>
-              <a:t>Responsable du programme de mise en conformité EU AI Act du Groupe BPCE et de ses entités (Natixis, Oney, BRED, etc.) : cartographie et évaluation des risques I…</a:t>
+              <a:rPr sz="1200" b="0" i="0">
+                <a:solidFill>
+                  <a:srgbClr val="FFFFFF"/>
+                </a:solidFill>
+                <a:latin typeface="Alegreya Sans"/>
+              </a:rPr>
+              <a:t>Responsable du programme de mise en conformité EU AI Act du Groupe BPCE et de ses entités (Natixis, Oney, BRED, etc.) : cartographie et éval…</a:t>
             </a:r>
           </a:p>
           <a:p>
@@ -4102,7 +4146,7 @@
               </a:spcAft>
             </a:pPr>
             <a:r>
-              <a:rPr sz="1000" b="1" i="0">
+              <a:rPr sz="1200" b="1" i="0">
                 <a:solidFill>
                   <a:srgbClr val="3AEDE5"/>
                 </a:solidFill>
@@ -4111,13 +4155,13 @@
               <a:t>•  </a:t>
             </a:r>
             <a:r>
-              <a:rPr sz="1000" b="0" i="0">
-                <a:solidFill>
-                  <a:srgbClr val="FFFFFF"/>
-                </a:solidFill>
-                <a:latin typeface="Alegreya Sans"/>
-              </a:rPr>
-              <a:t>Coordination et accompagnement de plus de 35 décideurs locaux (DPO, Chief Compliance Officer, CDO, etc.) dans la déclinaison du cadre normatif Groupe.</a:t>
+              <a:rPr sz="1200" b="0" i="0">
+                <a:solidFill>
+                  <a:srgbClr val="FFFFFF"/>
+                </a:solidFill>
+                <a:latin typeface="Alegreya Sans"/>
+              </a:rPr>
+              <a:t>Coordination et accompagnement de plus de 35 décideurs locaux (DPO, Chief Compliance Officer, CDO, etc.) dans la déclinaison du cadre normat…</a:t>
             </a:r>
           </a:p>
           <a:p>
@@ -4127,7 +4171,7 @@
               </a:spcAft>
             </a:pPr>
             <a:r>
-              <a:rPr sz="1000" b="1" i="0">
+              <a:rPr sz="1200" b="1" i="0">
                 <a:solidFill>
                   <a:srgbClr val="3AEDE5"/>
                 </a:solidFill>
@@ -4136,7 +4180,7 @@
               <a:t>▸ </a:t>
             </a:r>
             <a:r>
-              <a:rPr sz="1000" b="1" i="0">
+              <a:rPr sz="1200" b="1" i="0">
                 <a:solidFill>
                   <a:srgbClr val="FFFFFF"/>
                 </a:solidFill>
@@ -4145,7 +4189,7 @@
               <a:t>Oney / Oneytrust</a:t>
             </a:r>
             <a:r>
-              <a:rPr sz="1000" b="0" i="0">
+              <a:rPr sz="1200" b="0" i="0">
                 <a:solidFill>
                   <a:srgbClr val="FFFFFF"/>
                 </a:solidFill>
@@ -4154,7 +4198,7 @@
               <a:t> — Expert Leader — Digital &amp; AI Compliance Officer</a:t>
             </a:r>
             <a:r>
-              <a:rPr sz="1000" b="0" i="1">
+              <a:rPr sz="1200" b="0" i="1">
                 <a:solidFill>
                   <a:srgbClr val="3AEDE5"/>
                 </a:solidFill>
@@ -4170,7 +4214,7 @@
               </a:spcAft>
             </a:pPr>
             <a:r>
-              <a:rPr sz="1000" b="1" i="0">
+              <a:rPr sz="1200" b="1" i="0">
                 <a:solidFill>
                   <a:srgbClr val="3AEDE5"/>
                 </a:solidFill>
@@ -4179,13 +4223,13 @@
               <a:t>•  </a:t>
             </a:r>
             <a:r>
-              <a:rPr sz="1000" b="0" i="0">
-                <a:solidFill>
-                  <a:srgbClr val="FFFFFF"/>
-                </a:solidFill>
-                <a:latin typeface="Alegreya Sans"/>
-              </a:rPr>
-              <a:t>Structuration du cadre de gouvernance des risques IA avec le Chief Data Officer : inventaire des systèmes, formation des référents métiers et pilotage de la con…</a:t>
+              <a:rPr sz="1200" b="0" i="0">
+                <a:solidFill>
+                  <a:srgbClr val="FFFFFF"/>
+                </a:solidFill>
+                <a:latin typeface="Alegreya Sans"/>
+              </a:rPr>
+              <a:t>Structuration du cadre de gouvernance des risques IA avec le Chief Data Officer : inventaire des systèmes, formation des référents métiers e…</a:t>
             </a:r>
           </a:p>
           <a:p>
@@ -4195,7 +4239,7 @@
               </a:spcAft>
             </a:pPr>
             <a:r>
-              <a:rPr sz="1000" b="1" i="0">
+              <a:rPr sz="1200" b="1" i="0">
                 <a:solidFill>
                   <a:srgbClr val="3AEDE5"/>
                 </a:solidFill>
@@ -4204,7 +4248,7 @@
               <a:t>•  </a:t>
             </a:r>
             <a:r>
-              <a:rPr sz="1000" b="0" i="0">
+              <a:rPr sz="1200" b="0" i="0">
                 <a:solidFill>
                   <a:srgbClr val="FFFFFF"/>
                 </a:solidFill>
@@ -4223,7 +4267,7 @@
               </a:spcAft>
             </a:pPr>
             <a:r>
-              <a:rPr sz="1100" b="1" i="0">
+              <a:rPr sz="1300" b="1" i="0">
                 <a:solidFill>
                   <a:srgbClr val="3AEDE5"/>
                 </a:solidFill>
@@ -4239,7 +4283,7 @@
               </a:spcAft>
             </a:pPr>
             <a:r>
-              <a:rPr sz="1000" b="0" i="1">
+              <a:rPr sz="1200" b="0" i="1">
                 <a:solidFill>
                   <a:srgbClr val="FFFFFF"/>
                 </a:solidFill>
@@ -4252,7 +4296,7 @@
       </p:sp>
       <p:sp>
         <p:nvSpPr>
-          <p:cNvPr id="8" name="TextBox 7"/>
+          <p:cNvPr id="9" name="TextBox 8"/>
           <p:cNvSpPr txBox="1"/>
           <p:nvPr/>
         </p:nvSpPr>
@@ -4274,7 +4318,7 @@
           <a:p>
             <a:pPr algn="ctr"/>
             <a:r>
-              <a:rPr sz="900" b="0" i="1">
+              <a:rPr sz="1000" b="0" i="1">
                 <a:solidFill>
                   <a:srgbClr val="CCD6E8"/>
                 </a:solidFill>
@@ -4324,10 +4368,10 @@
           <a:gradFill flip="none" rotWithShape="1">
             <a:gsLst>
               <a:gs pos="0">
-                <a:srgbClr val="0C2A8E"/>
+                <a:srgbClr val="07227A"/>
               </a:gs>
-              <a:gs pos="70000">
-                <a:srgbClr val="0C2A8E"/>
+              <a:gs pos="85000">
+                <a:srgbClr val="07227A"/>
               </a:gs>
               <a:gs pos="100000">
                 <a:srgbClr val="1FCBD9"/>
@@ -4373,7 +4417,7 @@
             <a:avLst/>
           </a:prstGeom>
           <a:solidFill>
-            <a:srgbClr val="071F66"/>
+            <a:srgbClr val="061A5E"/>
           </a:solidFill>
           <a:ln>
             <a:noFill/>
@@ -4404,7 +4448,51 @@
       </p:sp>
       <p:sp>
         <p:nvSpPr>
-          <p:cNvPr id="4" name="TextBox 3"/>
+          <p:cNvPr id="4" name="Rectangle 3"/>
+          <p:cNvSpPr/>
+          <p:nvPr/>
+        </p:nvSpPr>
+        <p:spPr>
+          <a:xfrm>
+            <a:off x="0" y="6578000"/>
+            <a:ext cx="12192000" cy="280000"/>
+          </a:xfrm>
+          <a:prstGeom prst="rect">
+            <a:avLst/>
+          </a:prstGeom>
+          <a:solidFill>
+            <a:srgbClr val="061A5E"/>
+          </a:solidFill>
+          <a:ln>
+            <a:noFill/>
+          </a:ln>
+          <a:effectLst/>
+        </p:spPr>
+        <p:style>
+          <a:lnRef idx="1">
+            <a:schemeClr val="accent1"/>
+          </a:lnRef>
+          <a:fillRef idx="3">
+            <a:schemeClr val="accent1"/>
+          </a:fillRef>
+          <a:effectRef idx="2">
+            <a:schemeClr val="accent1"/>
+          </a:effectRef>
+          <a:fontRef idx="minor">
+            <a:schemeClr val="lt1"/>
+          </a:fontRef>
+        </p:style>
+        <p:txBody>
+          <a:bodyPr rtlCol="0" anchor="ctr"/>
+          <a:lstStyle/>
+          <a:p>
+            <a:pPr algn="ctr"/>
+          </a:p>
+        </p:txBody>
+      </p:sp>
+      <p:sp>
+        <p:nvSpPr>
+          <p:cNvPr id="5" name="TextBox 4"/>
           <p:cNvSpPr txBox="1"/>
           <p:nvPr/>
         </p:nvSpPr>
@@ -4426,7 +4514,7 @@
           <a:p>
             <a:pPr algn="l"/>
             <a:r>
-              <a:rPr sz="4400" b="1" i="0">
+              <a:rPr sz="4800" b="1" i="0">
                 <a:solidFill>
                   <a:srgbClr val="3AEDE5"/>
                 </a:solidFill>
@@ -4439,7 +4527,7 @@
       </p:sp>
       <p:sp>
         <p:nvSpPr>
-          <p:cNvPr id="5" name="TextBox 4"/>
+          <p:cNvPr id="6" name="TextBox 5"/>
           <p:cNvSpPr txBox="1"/>
           <p:nvPr/>
         </p:nvSpPr>
@@ -4460,7 +4548,7 @@
           <a:lstStyle/>
           <a:p>
             <a:r>
-              <a:rPr sz="2000" b="1" i="0">
+              <a:rPr sz="2400" b="1" i="0">
                 <a:solidFill>
                   <a:srgbClr val="FFFFFF"/>
                 </a:solidFill>
@@ -4476,7 +4564,7 @@
               </a:spcBef>
             </a:pPr>
             <a:r>
-              <a:rPr sz="1300" b="0" i="1">
+              <a:rPr sz="1500" b="0" i="1">
                 <a:solidFill>
                   <a:srgbClr val="3AEDE5"/>
                 </a:solidFill>
@@ -4489,7 +4577,7 @@
       </p:sp>
       <p:sp>
         <p:nvSpPr>
-          <p:cNvPr id="6" name="TextBox 5"/>
+          <p:cNvPr id="7" name="TextBox 6"/>
           <p:cNvSpPr txBox="1"/>
           <p:nvPr/>
         </p:nvSpPr>
@@ -4515,7 +4603,7 @@
               </a:spcAft>
             </a:pPr>
             <a:r>
-              <a:rPr sz="1100" b="1" i="0">
+              <a:rPr sz="1300" b="1" i="0">
                 <a:solidFill>
                   <a:srgbClr val="3AEDE5"/>
                 </a:solidFill>
@@ -4531,7 +4619,7 @@
               </a:spcAft>
             </a:pPr>
             <a:r>
-              <a:rPr sz="1000" b="1" i="0">
+              <a:rPr sz="1200" b="1" i="0">
                 <a:solidFill>
                   <a:srgbClr val="3AEDE5"/>
                 </a:solidFill>
@@ -4540,7 +4628,7 @@
               <a:t>•  </a:t>
             </a:r>
             <a:r>
-              <a:rPr sz="1000" b="0" i="0">
+              <a:rPr sz="1200" b="0" i="0">
                 <a:solidFill>
                   <a:srgbClr val="FFFFFF"/>
                 </a:solidFill>
@@ -4556,7 +4644,7 @@
               </a:spcAft>
             </a:pPr>
             <a:r>
-              <a:rPr sz="1000" b="1" i="0">
+              <a:rPr sz="1200" b="1" i="0">
                 <a:solidFill>
                   <a:srgbClr val="3AEDE5"/>
                 </a:solidFill>
@@ -4565,7 +4653,7 @@
               <a:t>•  </a:t>
             </a:r>
             <a:r>
-              <a:rPr sz="1000" b="0" i="0">
+              <a:rPr sz="1200" b="0" i="0">
                 <a:solidFill>
                   <a:srgbClr val="FFFFFF"/>
                 </a:solidFill>
@@ -4581,7 +4669,7 @@
               </a:spcAft>
             </a:pPr>
             <a:r>
-              <a:rPr sz="1000" b="1" i="0">
+              <a:rPr sz="1200" b="1" i="0">
                 <a:solidFill>
                   <a:srgbClr val="3AEDE5"/>
                 </a:solidFill>
@@ -4590,7 +4678,7 @@
               <a:t>•  </a:t>
             </a:r>
             <a:r>
-              <a:rPr sz="1000" b="0" i="0">
+              <a:rPr sz="1200" b="0" i="0">
                 <a:solidFill>
                   <a:srgbClr val="FFFFFF"/>
                 </a:solidFill>
@@ -4606,7 +4694,7 @@
               </a:spcAft>
             </a:pPr>
             <a:r>
-              <a:rPr sz="1000" b="1" i="0">
+              <a:rPr sz="1200" b="1" i="0">
                 <a:solidFill>
                   <a:srgbClr val="3AEDE5"/>
                 </a:solidFill>
@@ -4615,7 +4703,7 @@
               <a:t>•  </a:t>
             </a:r>
             <a:r>
-              <a:rPr sz="1000" b="0" i="0">
+              <a:rPr sz="1200" b="0" i="0">
                 <a:solidFill>
                   <a:srgbClr val="FFFFFF"/>
                 </a:solidFill>
@@ -4631,7 +4719,7 @@
               </a:spcAft>
             </a:pPr>
             <a:r>
-              <a:rPr sz="1000" b="1" i="0">
+              <a:rPr sz="1200" b="1" i="0">
                 <a:solidFill>
                   <a:srgbClr val="3AEDE5"/>
                 </a:solidFill>
@@ -4640,7 +4728,7 @@
               <a:t>•  </a:t>
             </a:r>
             <a:r>
-              <a:rPr sz="1000" b="0" i="0">
+              <a:rPr sz="1200" b="0" i="0">
                 <a:solidFill>
                   <a:srgbClr val="FFFFFF"/>
                 </a:solidFill>
@@ -4659,7 +4747,7 @@
               </a:spcAft>
             </a:pPr>
             <a:r>
-              <a:rPr sz="1100" b="1" i="0">
+              <a:rPr sz="1300" b="1" i="0">
                 <a:solidFill>
                   <a:srgbClr val="3AEDE5"/>
                 </a:solidFill>
@@ -4675,7 +4763,7 @@
               </a:spcAft>
             </a:pPr>
             <a:r>
-              <a:rPr sz="1000" b="1" i="0">
+              <a:rPr sz="1200" b="1" i="0">
                 <a:solidFill>
                   <a:srgbClr val="3AEDE5"/>
                 </a:solidFill>
@@ -4684,7 +4772,7 @@
               <a:t>•  </a:t>
             </a:r>
             <a:r>
-              <a:rPr sz="1000" b="0" i="0">
+              <a:rPr sz="1200" b="0" i="0">
                 <a:solidFill>
                   <a:srgbClr val="FFFFFF"/>
                 </a:solidFill>
@@ -4700,7 +4788,7 @@
               </a:spcAft>
             </a:pPr>
             <a:r>
-              <a:rPr sz="1000" b="1" i="0">
+              <a:rPr sz="1200" b="1" i="0">
                 <a:solidFill>
                   <a:srgbClr val="3AEDE5"/>
                 </a:solidFill>
@@ -4709,7 +4797,7 @@
               <a:t>•  </a:t>
             </a:r>
             <a:r>
-              <a:rPr sz="1000" b="0" i="0">
+              <a:rPr sz="1200" b="0" i="0">
                 <a:solidFill>
                   <a:srgbClr val="FFFFFF"/>
                 </a:solidFill>
@@ -4728,7 +4816,7 @@
               </a:spcAft>
             </a:pPr>
             <a:r>
-              <a:rPr sz="1100" b="1" i="0">
+              <a:rPr sz="1300" b="1" i="0">
                 <a:solidFill>
                   <a:srgbClr val="3AEDE5"/>
                 </a:solidFill>
@@ -4744,7 +4832,7 @@
               </a:spcAft>
             </a:pPr>
             <a:r>
-              <a:rPr sz="1000" b="1" i="0">
+              <a:rPr sz="1200" b="1" i="0">
                 <a:solidFill>
                   <a:srgbClr val="3AEDE5"/>
                 </a:solidFill>
@@ -4753,7 +4841,7 @@
               <a:t>2024  </a:t>
             </a:r>
             <a:r>
-              <a:rPr sz="1000" b="1" i="0">
+              <a:rPr sz="1200" b="1" i="0">
                 <a:solidFill>
                   <a:srgbClr val="FFFFFF"/>
                 </a:solidFill>
@@ -4769,13 +4857,13 @@
               </a:spcAft>
             </a:pPr>
             <a:r>
-              <a:rPr sz="1000" b="0" i="1">
+              <a:rPr sz="1200" b="0" i="1">
                 <a:solidFill>
                   <a:srgbClr val="CCD6E8"/>
                 </a:solidFill>
                 <a:latin typeface="Alegreya Sans"/>
               </a:rPr>
-              <a:t>Digital Ethics Officer certification (with Di…</a:t>
+              <a:t>Digital Ethics Officer certification (wi…</a:t>
             </a:r>
           </a:p>
           <a:p>
@@ -4785,7 +4873,7 @@
               </a:spcAft>
             </a:pPr>
             <a:r>
-              <a:rPr sz="1000" b="1" i="0">
+              <a:rPr sz="1200" b="1" i="0">
                 <a:solidFill>
                   <a:srgbClr val="3AEDE5"/>
                 </a:solidFill>
@@ -4794,7 +4882,7 @@
               <a:t>2015 — 2020  </a:t>
             </a:r>
             <a:r>
-              <a:rPr sz="1000" b="1" i="0">
+              <a:rPr sz="1200" b="1" i="0">
                 <a:solidFill>
                   <a:srgbClr val="FFFFFF"/>
                 </a:solidFill>
@@ -4810,13 +4898,13 @@
               </a:spcAft>
             </a:pPr>
             <a:r>
-              <a:rPr sz="1000" b="0" i="1">
+              <a:rPr sz="1200" b="0" i="1">
                 <a:solidFill>
                   <a:srgbClr val="CCD6E8"/>
                 </a:solidFill>
                 <a:latin typeface="Alegreya Sans"/>
               </a:rPr>
-              <a:t>Master's in European &amp; International Affairs…</a:t>
+              <a:t>Master's in European &amp; International Aff…</a:t>
             </a:r>
           </a:p>
           <a:p>
@@ -4826,7 +4914,7 @@
               </a:spcAft>
             </a:pPr>
             <a:r>
-              <a:rPr sz="1000" b="1" i="0">
+              <a:rPr sz="1200" b="1" i="0">
                 <a:solidFill>
                   <a:srgbClr val="3AEDE5"/>
                 </a:solidFill>
@@ -4835,7 +4923,7 @@
               <a:t>2020  </a:t>
             </a:r>
             <a:r>
-              <a:rPr sz="1000" b="1" i="0">
+              <a:rPr sz="1200" b="1" i="0">
                 <a:solidFill>
                   <a:srgbClr val="FFFFFF"/>
                 </a:solidFill>
@@ -4851,13 +4939,13 @@
               </a:spcAft>
             </a:pPr>
             <a:r>
-              <a:rPr sz="1000" b="0" i="1">
+              <a:rPr sz="1200" b="0" i="1">
                 <a:solidFill>
                   <a:srgbClr val="CCD6E8"/>
                 </a:solidFill>
                 <a:latin typeface="Alegreya Sans"/>
               </a:rPr>
-              <a:t>Master's in Influence &amp; Public Affairs (with…</a:t>
+              <a:t>Master's in Influence &amp; Public Affairs (…</a:t>
             </a:r>
           </a:p>
           <a:p>
@@ -4870,7 +4958,7 @@
               </a:spcAft>
             </a:pPr>
             <a:r>
-              <a:rPr sz="1100" b="1" i="0">
+              <a:rPr sz="1300" b="1" i="0">
                 <a:solidFill>
                   <a:srgbClr val="3AEDE5"/>
                 </a:solidFill>
@@ -4886,7 +4974,7 @@
               </a:spcAft>
             </a:pPr>
             <a:r>
-              <a:rPr sz="1000" b="1" i="0">
+              <a:rPr sz="1200" b="1" i="0">
                 <a:solidFill>
                   <a:srgbClr val="3AEDE5"/>
                 </a:solidFill>
@@ -4895,7 +4983,7 @@
               <a:t>• </a:t>
             </a:r>
             <a:r>
-              <a:rPr sz="1000" b="1" i="0">
+              <a:rPr sz="1200" b="1" i="0">
                 <a:solidFill>
                   <a:srgbClr val="FFFFFF"/>
                 </a:solidFill>
@@ -4904,13 +4992,13 @@
               <a:t>Digital Council Advisor</a:t>
             </a:r>
             <a:r>
-              <a:rPr sz="1000" b="0" i="1">
+              <a:rPr sz="1200" b="0" i="1">
                 <a:solidFill>
                   <a:srgbClr val="CCD6E8"/>
                 </a:solidFill>
                 <a:latin typeface="Alegreya Sans"/>
               </a:rPr>
-              <a:t> — Volunteer at a local Digital Council (Yv…</a:t>
+              <a:t> — Volunteer at a local Digital Counci…</a:t>
             </a:r>
           </a:p>
           <a:p>
@@ -4920,7 +5008,7 @@
               </a:spcAft>
             </a:pPr>
             <a:r>
-              <a:rPr sz="1000" b="1" i="0">
+              <a:rPr sz="1200" b="1" i="0">
                 <a:solidFill>
                   <a:srgbClr val="3AEDE5"/>
                 </a:solidFill>
@@ -4929,7 +5017,7 @@
               <a:t>• </a:t>
             </a:r>
             <a:r>
-              <a:rPr sz="1000" b="1" i="0">
+              <a:rPr sz="1200" b="1" i="0">
                 <a:solidFill>
                   <a:srgbClr val="FFFFFF"/>
                 </a:solidFill>
@@ -4938,13 +5026,13 @@
               <a:t>Podcaster</a:t>
             </a:r>
             <a:r>
-              <a:rPr sz="1000" b="0" i="1">
+              <a:rPr sz="1200" b="0" i="1">
                 <a:solidFill>
                   <a:srgbClr val="CCD6E8"/>
                 </a:solidFill>
                 <a:latin typeface="Alegreya Sans"/>
               </a:rPr>
-              <a:t> — Creator and host of an AI podcast featur…</a:t>
+              <a:t> — Creator and host of an AI podcast f…</a:t>
             </a:r>
           </a:p>
           <a:p>
@@ -4954,7 +5042,7 @@
               </a:spcAft>
             </a:pPr>
             <a:r>
-              <a:rPr sz="1000" b="1" i="0">
+              <a:rPr sz="1200" b="1" i="0">
                 <a:solidFill>
                   <a:srgbClr val="3AEDE5"/>
                 </a:solidFill>
@@ -4963,7 +5051,7 @@
               <a:t>• </a:t>
             </a:r>
             <a:r>
-              <a:rPr sz="1000" b="1" i="0">
+              <a:rPr sz="1200" b="1" i="0">
                 <a:solidFill>
                   <a:srgbClr val="FFFFFF"/>
                 </a:solidFill>
@@ -4972,20 +5060,20 @@
               <a:t>Speaker</a:t>
             </a:r>
             <a:r>
-              <a:rPr sz="1000" b="0" i="1">
+              <a:rPr sz="1200" b="0" i="1">
                 <a:solidFill>
                   <a:srgbClr val="CCD6E8"/>
                 </a:solidFill>
                 <a:latin typeface="Alegreya Sans"/>
               </a:rPr>
-              <a:t> — Speaker on AI and its challenges (busine…</a:t>
-            </a:r>
-          </a:p>
-        </p:txBody>
-      </p:sp>
-      <p:sp>
-        <p:nvSpPr>
-          <p:cNvPr id="7" name="TextBox 6"/>
+              <a:t> — Speaker on AI and its challenges (b…</a:t>
+            </a:r>
+          </a:p>
+        </p:txBody>
+      </p:sp>
+      <p:sp>
+        <p:nvSpPr>
+          <p:cNvPr id="8" name="TextBox 7"/>
           <p:cNvSpPr txBox="1"/>
           <p:nvPr/>
         </p:nvSpPr>
@@ -5011,7 +5099,7 @@
               </a:spcAft>
             </a:pPr>
             <a:r>
-              <a:rPr sz="1100" b="1" i="0">
+              <a:rPr sz="1300" b="1" i="0">
                 <a:solidFill>
                   <a:srgbClr val="3AEDE5"/>
                 </a:solidFill>
@@ -5027,13 +5115,13 @@
               </a:spcAft>
             </a:pPr>
             <a:r>
-              <a:rPr sz="1000" b="0" i="0">
-                <a:solidFill>
-                  <a:srgbClr val="FFFFFF"/>
-                </a:solidFill>
-                <a:latin typeface="Alegreya Sans"/>
-              </a:rPr>
-              <a:t>Expert in AI Governance, AI Risk Management and regulatory compliance, with nearly 8 years of experience advising major banking institutions. Specialised in the EU AI Act and the international rollout of AI governance fr…</a:t>
+              <a:rPr sz="1200" b="0" i="0">
+                <a:solidFill>
+                  <a:srgbClr val="FFFFFF"/>
+                </a:solidFill>
+                <a:latin typeface="Alegreya Sans"/>
+              </a:rPr>
+              <a:t>Expert in AI Governance, AI Risk Management and regulatory compliance, with nearly 8 years of experience advising major banking institutions. Specialised in the EU AI Act and the international rollout…</a:t>
             </a:r>
           </a:p>
           <a:p>
@@ -5046,7 +5134,7 @@
               </a:spcAft>
             </a:pPr>
             <a:r>
-              <a:rPr sz="1100" b="1" i="0">
+              <a:rPr sz="1300" b="1" i="0">
                 <a:solidFill>
                   <a:srgbClr val="3AEDE5"/>
                 </a:solidFill>
@@ -5062,7 +5150,7 @@
               </a:spcAft>
             </a:pPr>
             <a:r>
-              <a:rPr sz="1000" b="1" i="0">
+              <a:rPr sz="1200" b="1" i="0">
                 <a:solidFill>
                   <a:srgbClr val="3AEDE5"/>
                 </a:solidFill>
@@ -5071,7 +5159,7 @@
               <a:t>▸ </a:t>
             </a:r>
             <a:r>
-              <a:rPr sz="1000" b="1" i="0">
+              <a:rPr sz="1200" b="1" i="0">
                 <a:solidFill>
                   <a:srgbClr val="FFFFFF"/>
                 </a:solidFill>
@@ -5080,7 +5168,7 @@
               <a:t>Top-tier European CIB</a:t>
             </a:r>
             <a:r>
-              <a:rPr sz="1000" b="0" i="0">
+              <a:rPr sz="1200" b="0" i="0">
                 <a:solidFill>
                   <a:srgbClr val="FFFFFF"/>
                 </a:solidFill>
@@ -5089,7 +5177,7 @@
               <a:t> — AI Compliance Lead (consultant)</a:t>
             </a:r>
             <a:r>
-              <a:rPr sz="1000" b="0" i="1">
+              <a:rPr sz="1200" b="0" i="1">
                 <a:solidFill>
                   <a:srgbClr val="3AEDE5"/>
                 </a:solidFill>
@@ -5105,7 +5193,7 @@
               </a:spcAft>
             </a:pPr>
             <a:r>
-              <a:rPr sz="1000" b="1" i="0">
+              <a:rPr sz="1200" b="1" i="0">
                 <a:solidFill>
                   <a:srgbClr val="3AEDE5"/>
                 </a:solidFill>
@@ -5114,13 +5202,13 @@
               <a:t>•  </a:t>
             </a:r>
             <a:r>
-              <a:rPr sz="1000" b="0" i="0">
-                <a:solidFill>
-                  <a:srgbClr val="FFFFFF"/>
-                </a:solidFill>
-                <a:latin typeface="Alegreya Sans"/>
-              </a:rPr>
-              <a:t>Finalisation and rollout of the AI risk governance framework: internal policies, risk mapping, committee design, coordination of support and business functions.</a:t>
+              <a:rPr sz="1200" b="0" i="0">
+                <a:solidFill>
+                  <a:srgbClr val="FFFFFF"/>
+                </a:solidFill>
+                <a:latin typeface="Alegreya Sans"/>
+              </a:rPr>
+              <a:t>Finalisation and rollout of the AI risk governance framework: internal policies, risk mapping, committee design, coordination of support and…</a:t>
             </a:r>
           </a:p>
           <a:p>
@@ -5130,7 +5218,7 @@
               </a:spcAft>
             </a:pPr>
             <a:r>
-              <a:rPr sz="1000" b="1" i="0">
+              <a:rPr sz="1200" b="1" i="0">
                 <a:solidFill>
                   <a:srgbClr val="3AEDE5"/>
                 </a:solidFill>
@@ -5139,7 +5227,7 @@
               <a:t>•  </a:t>
             </a:r>
             <a:r>
-              <a:rPr sz="1000" b="0" i="0">
+              <a:rPr sz="1200" b="0" i="0">
                 <a:solidFill>
                   <a:srgbClr val="FFFFFF"/>
                 </a:solidFill>
@@ -5155,7 +5243,7 @@
               </a:spcAft>
             </a:pPr>
             <a:r>
-              <a:rPr sz="1000" b="1" i="0">
+              <a:rPr sz="1200" b="1" i="0">
                 <a:solidFill>
                   <a:srgbClr val="3AEDE5"/>
                 </a:solidFill>
@@ -5164,7 +5252,7 @@
               <a:t>▸ </a:t>
             </a:r>
             <a:r>
-              <a:rPr sz="1000" b="1" i="0">
+              <a:rPr sz="1200" b="1" i="0">
                 <a:solidFill>
                   <a:srgbClr val="FFFFFF"/>
                 </a:solidFill>
@@ -5173,7 +5261,7 @@
               <a:t>Sia Partners</a:t>
             </a:r>
             <a:r>
-              <a:rPr sz="1000" b="0" i="0">
+              <a:rPr sz="1200" b="0" i="0">
                 <a:solidFill>
                   <a:srgbClr val="FFFFFF"/>
                 </a:solidFill>
@@ -5182,7 +5270,7 @@
               <a:t> — Associate Manager</a:t>
             </a:r>
             <a:r>
-              <a:rPr sz="1000" b="0" i="1">
+              <a:rPr sz="1200" b="0" i="1">
                 <a:solidFill>
                   <a:srgbClr val="3AEDE5"/>
                 </a:solidFill>
@@ -5198,7 +5286,7 @@
               </a:spcAft>
             </a:pPr>
             <a:r>
-              <a:rPr sz="1000" b="1" i="0">
+              <a:rPr sz="1200" b="1" i="0">
                 <a:solidFill>
                   <a:srgbClr val="3AEDE5"/>
                 </a:solidFill>
@@ -5207,13 +5295,13 @@
               <a:t>•  </a:t>
             </a:r>
             <a:r>
-              <a:rPr sz="1000" b="0" i="0">
-                <a:solidFill>
-                  <a:srgbClr val="FFFFFF"/>
-                </a:solidFill>
-                <a:latin typeface="Alegreya Sans"/>
-              </a:rPr>
-              <a:t>Head of the AI Risk Management offering: RFP coordination, strategic and regulatory watch, business development and financial-ecosystem animation.</a:t>
+              <a:rPr sz="1200" b="0" i="0">
+                <a:solidFill>
+                  <a:srgbClr val="FFFFFF"/>
+                </a:solidFill>
+                <a:latin typeface="Alegreya Sans"/>
+              </a:rPr>
+              <a:t>Head of the AI Risk Management offering: RFP coordination, strategic and regulatory watch, business development and financial-ecosystem anim…</a:t>
             </a:r>
           </a:p>
           <a:p>
@@ -5223,7 +5311,7 @@
               </a:spcAft>
             </a:pPr>
             <a:r>
-              <a:rPr sz="1000" b="1" i="0">
+              <a:rPr sz="1200" b="1" i="0">
                 <a:solidFill>
                   <a:srgbClr val="3AEDE5"/>
                 </a:solidFill>
@@ -5232,13 +5320,13 @@
               <a:t>•  </a:t>
             </a:r>
             <a:r>
-              <a:rPr sz="1000" b="0" i="0">
-                <a:solidFill>
-                  <a:srgbClr val="FFFFFF"/>
-                </a:solidFill>
-                <a:latin typeface="Alegreya Sans"/>
-              </a:rPr>
-              <a:t>Lead of the AI working group at Paris Europlace association (40+ senior financial-sector representatives): position papers, EU consultation responses, benchmark…</a:t>
+              <a:rPr sz="1200" b="0" i="0">
+                <a:solidFill>
+                  <a:srgbClr val="FFFFFF"/>
+                </a:solidFill>
+                <a:latin typeface="Alegreya Sans"/>
+              </a:rPr>
+              <a:t>Lead of the AI working group at Paris Europlace association (40+ senior financial-sector representatives): position papers, EU consultation…</a:t>
             </a:r>
           </a:p>
           <a:p>
@@ -5248,7 +5336,7 @@
               </a:spcAft>
             </a:pPr>
             <a:r>
-              <a:rPr sz="1000" b="1" i="0">
+              <a:rPr sz="1200" b="1" i="0">
                 <a:solidFill>
                   <a:srgbClr val="3AEDE5"/>
                 </a:solidFill>
@@ -5257,7 +5345,7 @@
               <a:t>▸ </a:t>
             </a:r>
             <a:r>
-              <a:rPr sz="1000" b="1" i="0">
+              <a:rPr sz="1200" b="1" i="0">
                 <a:solidFill>
                   <a:srgbClr val="FFFFFF"/>
                 </a:solidFill>
@@ -5266,7 +5354,7 @@
               <a:t>Groupe BPCE</a:t>
             </a:r>
             <a:r>
-              <a:rPr sz="1000" b="0" i="0">
+              <a:rPr sz="1200" b="0" i="0">
                 <a:solidFill>
                   <a:srgbClr val="FFFFFF"/>
                 </a:solidFill>
@@ -5275,7 +5363,7 @@
               <a:t> — Group EU AI Act Project Manager</a:t>
             </a:r>
             <a:r>
-              <a:rPr sz="1000" b="0" i="1">
+              <a:rPr sz="1200" b="0" i="1">
                 <a:solidFill>
                   <a:srgbClr val="3AEDE5"/>
                 </a:solidFill>
@@ -5291,7 +5379,7 @@
               </a:spcAft>
             </a:pPr>
             <a:r>
-              <a:rPr sz="1000" b="1" i="0">
+              <a:rPr sz="1200" b="1" i="0">
                 <a:solidFill>
                   <a:srgbClr val="3AEDE5"/>
                 </a:solidFill>
@@ -5300,13 +5388,13 @@
               <a:t>•  </a:t>
             </a:r>
             <a:r>
-              <a:rPr sz="1000" b="0" i="0">
-                <a:solidFill>
-                  <a:srgbClr val="FFFFFF"/>
-                </a:solidFill>
-                <a:latin typeface="Alegreya Sans"/>
-              </a:rPr>
-              <a:t>Lead of the EU AI Act compliance programme for Groupe BPCE and its entities (Natixis, Oney, BRED, etc.): AI risk mapping and assessment, definition of Group pol…</a:t>
+              <a:rPr sz="1200" b="0" i="0">
+                <a:solidFill>
+                  <a:srgbClr val="FFFFFF"/>
+                </a:solidFill>
+                <a:latin typeface="Alegreya Sans"/>
+              </a:rPr>
+              <a:t>Lead of the EU AI Act compliance programme for Groupe BPCE and its entities (Natixis, Oney, BRED, etc.): AI risk mapping and assessment, def…</a:t>
             </a:r>
           </a:p>
           <a:p>
@@ -5316,7 +5404,7 @@
               </a:spcAft>
             </a:pPr>
             <a:r>
-              <a:rPr sz="1000" b="1" i="0">
+              <a:rPr sz="1200" b="1" i="0">
                 <a:solidFill>
                   <a:srgbClr val="3AEDE5"/>
                 </a:solidFill>
@@ -5325,7 +5413,7 @@
               <a:t>•  </a:t>
             </a:r>
             <a:r>
-              <a:rPr sz="1000" b="0" i="0">
+              <a:rPr sz="1200" b="0" i="0">
                 <a:solidFill>
                   <a:srgbClr val="FFFFFF"/>
                 </a:solidFill>
@@ -5341,7 +5429,7 @@
               </a:spcAft>
             </a:pPr>
             <a:r>
-              <a:rPr sz="1000" b="1" i="0">
+              <a:rPr sz="1200" b="1" i="0">
                 <a:solidFill>
                   <a:srgbClr val="3AEDE5"/>
                 </a:solidFill>
@@ -5350,7 +5438,7 @@
               <a:t>▸ </a:t>
             </a:r>
             <a:r>
-              <a:rPr sz="1000" b="1" i="0">
+              <a:rPr sz="1200" b="1" i="0">
                 <a:solidFill>
                   <a:srgbClr val="FFFFFF"/>
                 </a:solidFill>
@@ -5359,7 +5447,7 @@
               <a:t>Oney / Oneytrust</a:t>
             </a:r>
             <a:r>
-              <a:rPr sz="1000" b="0" i="0">
+              <a:rPr sz="1200" b="0" i="0">
                 <a:solidFill>
                   <a:srgbClr val="FFFFFF"/>
                 </a:solidFill>
@@ -5368,7 +5456,7 @@
               <a:t> — Expert Leader — Digital &amp; AI Compliance Officer</a:t>
             </a:r>
             <a:r>
-              <a:rPr sz="1000" b="0" i="1">
+              <a:rPr sz="1200" b="0" i="1">
                 <a:solidFill>
                   <a:srgbClr val="3AEDE5"/>
                 </a:solidFill>
@@ -5384,7 +5472,7 @@
               </a:spcAft>
             </a:pPr>
             <a:r>
-              <a:rPr sz="1000" b="1" i="0">
+              <a:rPr sz="1200" b="1" i="0">
                 <a:solidFill>
                   <a:srgbClr val="3AEDE5"/>
                 </a:solidFill>
@@ -5393,13 +5481,13 @@
               <a:t>•  </a:t>
             </a:r>
             <a:r>
-              <a:rPr sz="1000" b="0" i="0">
-                <a:solidFill>
-                  <a:srgbClr val="FFFFFF"/>
-                </a:solidFill>
-                <a:latin typeface="Alegreya Sans"/>
-              </a:rPr>
-              <a:t>Built the AI risk governance framework with the Chief Data Officer: systems inventory, training of business reference owners, EU AI Act compliance pilot across…</a:t>
+              <a:rPr sz="1200" b="0" i="0">
+                <a:solidFill>
+                  <a:srgbClr val="FFFFFF"/>
+                </a:solidFill>
+                <a:latin typeface="Alegreya Sans"/>
+              </a:rPr>
+              <a:t>Built the AI risk governance framework with the Chief Data Officer: systems inventory, training of business reference owners, EU AI Act comp…</a:t>
             </a:r>
           </a:p>
           <a:p>
@@ -5409,7 +5497,7 @@
               </a:spcAft>
             </a:pPr>
             <a:r>
-              <a:rPr sz="1000" b="1" i="0">
+              <a:rPr sz="1200" b="1" i="0">
                 <a:solidFill>
                   <a:srgbClr val="3AEDE5"/>
                 </a:solidFill>
@@ -5418,7 +5506,7 @@
               <a:t>•  </a:t>
             </a:r>
             <a:r>
-              <a:rPr sz="1000" b="0" i="0">
+              <a:rPr sz="1200" b="0" i="0">
                 <a:solidFill>
                   <a:srgbClr val="FFFFFF"/>
                 </a:solidFill>
@@ -5437,7 +5525,7 @@
               </a:spcAft>
             </a:pPr>
             <a:r>
-              <a:rPr sz="1100" b="1" i="0">
+              <a:rPr sz="1300" b="1" i="0">
                 <a:solidFill>
                   <a:srgbClr val="3AEDE5"/>
                 </a:solidFill>
@@ -5453,7 +5541,7 @@
               </a:spcAft>
             </a:pPr>
             <a:r>
-              <a:rPr sz="1000" b="0" i="1">
+              <a:rPr sz="1200" b="0" i="1">
                 <a:solidFill>
                   <a:srgbClr val="FFFFFF"/>
                 </a:solidFill>
@@ -5466,7 +5554,7 @@
       </p:sp>
       <p:sp>
         <p:nvSpPr>
-          <p:cNvPr id="8" name="TextBox 7"/>
+          <p:cNvPr id="9" name="TextBox 8"/>
           <p:cNvSpPr txBox="1"/>
           <p:nvPr/>
         </p:nvSpPr>
@@ -5488,7 +5576,7 @@
           <a:p>
             <a:pPr algn="ctr"/>
             <a:r>
-              <a:rPr sz="900" b="0" i="1">
+              <a:rPr sz="1000" b="0" i="1">
                 <a:solidFill>
                   <a:srgbClr val="CCD6E8"/>
                 </a:solidFill>

--- a/outputs/A.P._ai_governance.pptx
+++ b/outputs/A.P._ai_governance.pptx
@@ -3232,9 +3232,33 @@
           </a:p>
         </p:txBody>
       </p:sp>
-      <p:sp>
-        <p:nvSpPr>
-          <p:cNvPr id="5" name="TextBox 4"/>
+      <p:pic>
+        <p:nvPicPr>
+          <p:cNvPr id="5" name="Picture 4" descr="inside_circle_logo.png"/>
+          <p:cNvPicPr>
+            <a:picLocks noChangeAspect="1"/>
+          </p:cNvPicPr>
+          <p:nvPr/>
+        </p:nvPicPr>
+        <p:blipFill>
+          <a:blip r:embed="rId2"/>
+          <a:stretch>
+            <a:fillRect/>
+          </a:stretch>
+        </p:blipFill>
+        <p:spPr>
+          <a:xfrm>
+            <a:off x="11012000" y="200000"/>
+            <a:ext cx="900000" cy="900000"/>
+          </a:xfrm>
+          <a:prstGeom prst="rect">
+            <a:avLst/>
+          </a:prstGeom>
+        </p:spPr>
+      </p:pic>
+      <p:sp>
+        <p:nvSpPr>
+          <p:cNvPr id="6" name="TextBox 5"/>
           <p:cNvSpPr txBox="1"/>
           <p:nvPr/>
         </p:nvSpPr>
@@ -3269,14 +3293,14 @@
       </p:sp>
       <p:sp>
         <p:nvSpPr>
-          <p:cNvPr id="6" name="TextBox 5"/>
+          <p:cNvPr id="7" name="TextBox 6"/>
           <p:cNvSpPr txBox="1"/>
           <p:nvPr/>
         </p:nvSpPr>
         <p:spPr>
           <a:xfrm>
             <a:off x="4528600" y="300000"/>
-            <a:ext cx="7434800" cy="800000"/>
+            <a:ext cx="6333400" cy="800000"/>
           </a:xfrm>
           <a:prstGeom prst="rect">
             <a:avLst/>
@@ -3319,7 +3343,7 @@
       </p:sp>
       <p:sp>
         <p:nvSpPr>
-          <p:cNvPr id="7" name="TextBox 6"/>
+          <p:cNvPr id="8" name="TextBox 7"/>
           <p:cNvSpPr txBox="1"/>
           <p:nvPr/>
         </p:nvSpPr>
@@ -3815,7 +3839,7 @@
       </p:sp>
       <p:sp>
         <p:nvSpPr>
-          <p:cNvPr id="8" name="TextBox 7"/>
+          <p:cNvPr id="9" name="TextBox 8"/>
           <p:cNvSpPr txBox="1"/>
           <p:nvPr/>
         </p:nvSpPr>
@@ -4296,7 +4320,7 @@
       </p:sp>
       <p:sp>
         <p:nvSpPr>
-          <p:cNvPr id="9" name="TextBox 8"/>
+          <p:cNvPr id="10" name="TextBox 9"/>
           <p:cNvSpPr txBox="1"/>
           <p:nvPr/>
         </p:nvSpPr>
@@ -4490,9 +4514,33 @@
           </a:p>
         </p:txBody>
       </p:sp>
-      <p:sp>
-        <p:nvSpPr>
-          <p:cNvPr id="5" name="TextBox 4"/>
+      <p:pic>
+        <p:nvPicPr>
+          <p:cNvPr id="5" name="Picture 4" descr="inside_circle_logo.png"/>
+          <p:cNvPicPr>
+            <a:picLocks noChangeAspect="1"/>
+          </p:cNvPicPr>
+          <p:nvPr/>
+        </p:nvPicPr>
+        <p:blipFill>
+          <a:blip r:embed="rId2"/>
+          <a:stretch>
+            <a:fillRect/>
+          </a:stretch>
+        </p:blipFill>
+        <p:spPr>
+          <a:xfrm>
+            <a:off x="11012000" y="200000"/>
+            <a:ext cx="900000" cy="900000"/>
+          </a:xfrm>
+          <a:prstGeom prst="rect">
+            <a:avLst/>
+          </a:prstGeom>
+        </p:spPr>
+      </p:pic>
+      <p:sp>
+        <p:nvSpPr>
+          <p:cNvPr id="6" name="TextBox 5"/>
           <p:cNvSpPr txBox="1"/>
           <p:nvPr/>
         </p:nvSpPr>
@@ -4527,14 +4575,14 @@
       </p:sp>
       <p:sp>
         <p:nvSpPr>
-          <p:cNvPr id="6" name="TextBox 5"/>
+          <p:cNvPr id="7" name="TextBox 6"/>
           <p:cNvSpPr txBox="1"/>
           <p:nvPr/>
         </p:nvSpPr>
         <p:spPr>
           <a:xfrm>
             <a:off x="4528600" y="300000"/>
-            <a:ext cx="7434800" cy="800000"/>
+            <a:ext cx="6333400" cy="800000"/>
           </a:xfrm>
           <a:prstGeom prst="rect">
             <a:avLst/>
@@ -4577,7 +4625,7 @@
       </p:sp>
       <p:sp>
         <p:nvSpPr>
-          <p:cNvPr id="7" name="TextBox 6"/>
+          <p:cNvPr id="8" name="TextBox 7"/>
           <p:cNvSpPr txBox="1"/>
           <p:nvPr/>
         </p:nvSpPr>
@@ -5073,7 +5121,7 @@
       </p:sp>
       <p:sp>
         <p:nvSpPr>
-          <p:cNvPr id="8" name="TextBox 7"/>
+          <p:cNvPr id="9" name="TextBox 8"/>
           <p:cNvSpPr txBox="1"/>
           <p:nvPr/>
         </p:nvSpPr>
@@ -5554,7 +5602,7 @@
       </p:sp>
       <p:sp>
         <p:nvSpPr>
-          <p:cNvPr id="9" name="TextBox 8"/>
+          <p:cNvPr id="10" name="TextBox 9"/>
           <p:cNvSpPr txBox="1"/>
           <p:nvPr/>
         </p:nvSpPr>

--- a/outputs/A.P._ai_governance.pptx
+++ b/outputs/A.P._ai_governance.pptx
@@ -3248,8 +3248,8 @@
         </p:blipFill>
         <p:spPr>
           <a:xfrm>
-            <a:off x="11012000" y="200000"/>
-            <a:ext cx="900000" cy="900000"/>
+            <a:off x="11462000" y="230000"/>
+            <a:ext cx="530000" cy="530000"/>
           </a:xfrm>
           <a:prstGeom prst="rect">
             <a:avLst/>
@@ -3300,7 +3300,7 @@
         <p:spPr>
           <a:xfrm>
             <a:off x="4528600" y="300000"/>
-            <a:ext cx="6333400" cy="800000"/>
+            <a:ext cx="6783400" cy="800000"/>
           </a:xfrm>
           <a:prstGeom prst="rect">
             <a:avLst/>
@@ -4530,8 +4530,8 @@
         </p:blipFill>
         <p:spPr>
           <a:xfrm>
-            <a:off x="11012000" y="200000"/>
-            <a:ext cx="900000" cy="900000"/>
+            <a:off x="11462000" y="230000"/>
+            <a:ext cx="530000" cy="530000"/>
           </a:xfrm>
           <a:prstGeom prst="rect">
             <a:avLst/>
@@ -4582,7 +4582,7 @@
         <p:spPr>
           <a:xfrm>
             <a:off x="4528600" y="300000"/>
-            <a:ext cx="6333400" cy="800000"/>
+            <a:ext cx="6783400" cy="800000"/>
           </a:xfrm>
           <a:prstGeom prst="rect">
             <a:avLst/>

--- a/outputs/A.P._ai_governance.pptx
+++ b/outputs/A.P._ai_governance.pptx
@@ -3248,8 +3248,8 @@
         </p:blipFill>
         <p:spPr>
           <a:xfrm>
-            <a:off x="11462000" y="230000"/>
-            <a:ext cx="530000" cy="530000"/>
+            <a:off x="10660000" y="130000"/>
+            <a:ext cx="1302000" cy="420000"/>
           </a:xfrm>
           <a:prstGeom prst="rect">
             <a:avLst/>
@@ -3300,7 +3300,7 @@
         <p:spPr>
           <a:xfrm>
             <a:off x="4528600" y="300000"/>
-            <a:ext cx="6783400" cy="800000"/>
+            <a:ext cx="5963400" cy="800000"/>
           </a:xfrm>
           <a:prstGeom prst="rect">
             <a:avLst/>
@@ -4530,8 +4530,8 @@
         </p:blipFill>
         <p:spPr>
           <a:xfrm>
-            <a:off x="11462000" y="230000"/>
-            <a:ext cx="530000" cy="530000"/>
+            <a:off x="10660000" y="130000"/>
+            <a:ext cx="1302000" cy="420000"/>
           </a:xfrm>
           <a:prstGeom prst="rect">
             <a:avLst/>
@@ -4582,7 +4582,7 @@
         <p:spPr>
           <a:xfrm>
             <a:off x="4528600" y="300000"/>
-            <a:ext cx="6783400" cy="800000"/>
+            <a:ext cx="5963400" cy="800000"/>
           </a:xfrm>
           <a:prstGeom prst="rect">
             <a:avLst/>

--- a/outputs/A.P._ai_governance.pptx
+++ b/outputs/A.P._ai_governance.pptx
@@ -3103,61 +3103,6 @@
           <a:prstGeom prst="rect">
             <a:avLst/>
           </a:prstGeom>
-          <a:ln>
-            <a:noFill/>
-          </a:ln>
-          <a:effectLst/>
-          <a:gradFill flip="none" rotWithShape="1">
-            <a:gsLst>
-              <a:gs pos="0">
-                <a:srgbClr val="07227A"/>
-              </a:gs>
-              <a:gs pos="85000">
-                <a:srgbClr val="07227A"/>
-              </a:gs>
-              <a:gs pos="100000">
-                <a:srgbClr val="1FCBD9"/>
-              </a:gs>
-            </a:gsLst>
-            <a:lin ang="2700000" scaled="0"/>
-          </a:gradFill>
-        </p:spPr>
-        <p:style>
-          <a:lnRef idx="1">
-            <a:schemeClr val="accent1"/>
-          </a:lnRef>
-          <a:fillRef idx="3">
-            <a:schemeClr val="accent1"/>
-          </a:fillRef>
-          <a:effectRef idx="2">
-            <a:schemeClr val="accent1"/>
-          </a:effectRef>
-          <a:fontRef idx="minor">
-            <a:schemeClr val="lt1"/>
-          </a:fontRef>
-        </p:style>
-        <p:txBody>
-          <a:bodyPr rtlCol="0" anchor="ctr"/>
-          <a:lstStyle/>
-          <a:p>
-            <a:pPr algn="ctr"/>
-          </a:p>
-        </p:txBody>
-      </p:sp>
-      <p:sp>
-        <p:nvSpPr>
-          <p:cNvPr id="3" name="Rectangle 2"/>
-          <p:cNvSpPr/>
-          <p:nvPr/>
-        </p:nvSpPr>
-        <p:spPr>
-          <a:xfrm>
-            <a:off x="0" y="0"/>
-            <a:ext cx="4300000" cy="6858000"/>
-          </a:xfrm>
-          <a:prstGeom prst="rect">
-            <a:avLst/>
-          </a:prstGeom>
           <a:solidFill>
             <a:srgbClr val="061A5E"/>
           </a:solidFill>
@@ -3190,7 +3135,1137 @@
       </p:sp>
       <p:sp>
         <p:nvSpPr>
-          <p:cNvPr id="4" name="Rectangle 3"/>
+          <p:cNvPr id="3" name="Rectangle 2"/>
+          <p:cNvSpPr/>
+          <p:nvPr/>
+        </p:nvSpPr>
+        <p:spPr>
+          <a:xfrm>
+            <a:off x="4300000" y="0"/>
+            <a:ext cx="15000" cy="6858000"/>
+          </a:xfrm>
+          <a:prstGeom prst="rect">
+            <a:avLst/>
+          </a:prstGeom>
+          <a:solidFill>
+            <a:srgbClr val="3AEDE5"/>
+          </a:solidFill>
+          <a:ln>
+            <a:noFill/>
+          </a:ln>
+          <a:effectLst/>
+        </p:spPr>
+        <p:style>
+          <a:lnRef idx="1">
+            <a:schemeClr val="accent1"/>
+          </a:lnRef>
+          <a:fillRef idx="3">
+            <a:schemeClr val="accent1"/>
+          </a:fillRef>
+          <a:effectRef idx="2">
+            <a:schemeClr val="accent1"/>
+          </a:effectRef>
+          <a:fontRef idx="minor">
+            <a:schemeClr val="lt1"/>
+          </a:fontRef>
+        </p:style>
+        <p:txBody>
+          <a:bodyPr rtlCol="0" anchor="ctr"/>
+          <a:lstStyle/>
+          <a:p>
+            <a:pPr algn="ctr"/>
+          </a:p>
+        </p:txBody>
+      </p:sp>
+      <p:pic>
+        <p:nvPicPr>
+          <p:cNvPr id="4" name="Picture 3" descr="inside_circle_logo.png"/>
+          <p:cNvPicPr>
+            <a:picLocks noChangeAspect="1"/>
+          </p:cNvPicPr>
+          <p:nvPr/>
+        </p:nvPicPr>
+        <p:blipFill>
+          <a:blip r:embed="rId2"/>
+          <a:stretch>
+            <a:fillRect/>
+          </a:stretch>
+        </p:blipFill>
+        <p:spPr>
+          <a:xfrm>
+            <a:off x="10660000" y="130000"/>
+            <a:ext cx="1302000" cy="420000"/>
+          </a:xfrm>
+          <a:prstGeom prst="rect">
+            <a:avLst/>
+          </a:prstGeom>
+        </p:spPr>
+      </p:pic>
+      <p:sp>
+        <p:nvSpPr>
+          <p:cNvPr id="5" name="TextBox 4"/>
+          <p:cNvSpPr txBox="1"/>
+          <p:nvPr/>
+        </p:nvSpPr>
+        <p:spPr>
+          <a:xfrm>
+            <a:off x="228600" y="260000"/>
+            <a:ext cx="3842800" cy="800000"/>
+          </a:xfrm>
+          <a:prstGeom prst="rect">
+            <a:avLst/>
+          </a:prstGeom>
+          <a:noFill/>
+        </p:spPr>
+        <p:txBody>
+          <a:bodyPr wrap="square" lIns="0" rIns="0" tIns="0" bIns="0">
+            <a:spAutoFit/>
+          </a:bodyPr>
+          <a:lstStyle/>
+          <a:p>
+            <a:pPr algn="l"/>
+            <a:r>
+              <a:rPr sz="4800" b="1" i="0">
+                <a:solidFill>
+                  <a:srgbClr val="3AEDE5"/>
+                </a:solidFill>
+                <a:latin typeface="Alegreya Sans"/>
+              </a:rPr>
+              <a:t>A.P.</a:t>
+            </a:r>
+          </a:p>
+        </p:txBody>
+      </p:sp>
+      <p:sp>
+        <p:nvSpPr>
+          <p:cNvPr id="6" name="TextBox 5"/>
+          <p:cNvSpPr txBox="1"/>
+          <p:nvPr/>
+        </p:nvSpPr>
+        <p:spPr>
+          <a:xfrm>
+            <a:off x="4528600" y="300000"/>
+            <a:ext cx="5963400" cy="800000"/>
+          </a:xfrm>
+          <a:prstGeom prst="rect">
+            <a:avLst/>
+          </a:prstGeom>
+          <a:noFill/>
+        </p:spPr>
+        <p:txBody>
+          <a:bodyPr wrap="square" lIns="0" rIns="0" tIns="0" bIns="0">
+            <a:spAutoFit/>
+          </a:bodyPr>
+          <a:lstStyle/>
+          <a:p>
+            <a:r>
+              <a:rPr sz="2400" b="1" i="0">
+                <a:solidFill>
+                  <a:srgbClr val="FFFFFF"/>
+                </a:solidFill>
+                <a:latin typeface="Alegreya Sans"/>
+              </a:rPr>
+              <a:t>Spécialiste AI Governance, AI Risk &amp; EU AI Act</a:t>
+            </a:r>
+          </a:p>
+          <a:p>
+            <a:pPr>
+              <a:spcBef>
+                <a:spcPts val="200"/>
+              </a:spcBef>
+            </a:pPr>
+            <a:r>
+              <a:rPr sz="1500" b="0" i="1">
+                <a:solidFill>
+                  <a:srgbClr val="3AEDE5"/>
+                </a:solidFill>
+                <a:latin typeface="Alegreya Sans"/>
+              </a:rPr>
+              <a:t>Gouvernance IA &amp; Conformité réglementaire — Services financiers</a:t>
+            </a:r>
+          </a:p>
+        </p:txBody>
+      </p:sp>
+      <p:sp>
+        <p:nvSpPr>
+          <p:cNvPr id="7" name="TextBox 6"/>
+          <p:cNvSpPr txBox="1"/>
+          <p:nvPr/>
+        </p:nvSpPr>
+        <p:spPr>
+          <a:xfrm>
+            <a:off x="228600" y="1180000"/>
+            <a:ext cx="3842800" cy="5318000"/>
+          </a:xfrm>
+          <a:prstGeom prst="rect">
+            <a:avLst/>
+          </a:prstGeom>
+          <a:noFill/>
+        </p:spPr>
+        <p:txBody>
+          <a:bodyPr wrap="square" lIns="0" rIns="0" tIns="0" bIns="0">
+            <a:spAutoFit/>
+          </a:bodyPr>
+          <a:lstStyle/>
+          <a:p>
+            <a:pPr algn="l">
+              <a:spcAft>
+                <a:spcPts val="300"/>
+              </a:spcAft>
+            </a:pPr>
+            <a:r>
+              <a:rPr sz="1300" b="1" i="0">
+                <a:solidFill>
+                  <a:srgbClr val="3AEDE5"/>
+                </a:solidFill>
+                <a:latin typeface="Alegreya Sans"/>
+              </a:rPr>
+              <a:t>DOMAINES D'EXPERTISE</a:t>
+            </a:r>
+          </a:p>
+          <a:p>
+            <a:pPr algn="l">
+              <a:spcAft>
+                <a:spcPts val="100"/>
+              </a:spcAft>
+            </a:pPr>
+            <a:r>
+              <a:rPr sz="1200" b="1" i="0">
+                <a:solidFill>
+                  <a:srgbClr val="3AEDE5"/>
+                </a:solidFill>
+                <a:latin typeface="Alegreya Sans"/>
+              </a:rPr>
+              <a:t>•  </a:t>
+            </a:r>
+            <a:r>
+              <a:rPr sz="1200" b="0" i="0">
+                <a:solidFill>
+                  <a:srgbClr val="FFFFFF"/>
+                </a:solidFill>
+                <a:latin typeface="Alegreya Sans"/>
+              </a:rPr>
+              <a:t>AI Governance</a:t>
+            </a:r>
+          </a:p>
+          <a:p>
+            <a:pPr algn="l">
+              <a:spcAft>
+                <a:spcPts val="100"/>
+              </a:spcAft>
+            </a:pPr>
+            <a:r>
+              <a:rPr sz="1200" b="1" i="0">
+                <a:solidFill>
+                  <a:srgbClr val="3AEDE5"/>
+                </a:solidFill>
+                <a:latin typeface="Alegreya Sans"/>
+              </a:rPr>
+              <a:t>•  </a:t>
+            </a:r>
+            <a:r>
+              <a:rPr sz="1200" b="0" i="0">
+                <a:solidFill>
+                  <a:srgbClr val="FFFFFF"/>
+                </a:solidFill>
+                <a:latin typeface="Alegreya Sans"/>
+              </a:rPr>
+              <a:t>AI Risk Management</a:t>
+            </a:r>
+          </a:p>
+          <a:p>
+            <a:pPr algn="l">
+              <a:spcAft>
+                <a:spcPts val="100"/>
+              </a:spcAft>
+            </a:pPr>
+            <a:r>
+              <a:rPr sz="1200" b="1" i="0">
+                <a:solidFill>
+                  <a:srgbClr val="3AEDE5"/>
+                </a:solidFill>
+                <a:latin typeface="Alegreya Sans"/>
+              </a:rPr>
+              <a:t>•  </a:t>
+            </a:r>
+            <a:r>
+              <a:rPr sz="1200" b="0" i="0">
+                <a:solidFill>
+                  <a:srgbClr val="FFFFFF"/>
+                </a:solidFill>
+                <a:latin typeface="Alegreya Sans"/>
+              </a:rPr>
+              <a:t>EU AI Act</a:t>
+            </a:r>
+          </a:p>
+          <a:p>
+            <a:pPr algn="l">
+              <a:spcAft>
+                <a:spcPts val="100"/>
+              </a:spcAft>
+            </a:pPr>
+            <a:r>
+              <a:rPr sz="1200" b="1" i="0">
+                <a:solidFill>
+                  <a:srgbClr val="3AEDE5"/>
+                </a:solidFill>
+                <a:latin typeface="Alegreya Sans"/>
+              </a:rPr>
+              <a:t>•  </a:t>
+            </a:r>
+            <a:r>
+              <a:rPr sz="1200" b="0" i="0">
+                <a:solidFill>
+                  <a:srgbClr val="FFFFFF"/>
+                </a:solidFill>
+                <a:latin typeface="Alegreya Sans"/>
+              </a:rPr>
+              <a:t>Digital Compliance</a:t>
+            </a:r>
+          </a:p>
+          <a:p>
+            <a:pPr algn="l">
+              <a:spcAft>
+                <a:spcPts val="100"/>
+              </a:spcAft>
+            </a:pPr>
+            <a:r>
+              <a:rPr sz="1200" b="1" i="0">
+                <a:solidFill>
+                  <a:srgbClr val="3AEDE5"/>
+                </a:solidFill>
+                <a:latin typeface="Alegreya Sans"/>
+              </a:rPr>
+              <a:t>•  </a:t>
+            </a:r>
+            <a:r>
+              <a:rPr sz="1200" b="0" i="0">
+                <a:solidFill>
+                  <a:srgbClr val="FFFFFF"/>
+                </a:solidFill>
+                <a:latin typeface="Alegreya Sans"/>
+              </a:rPr>
+              <a:t>Regulatory Strategy</a:t>
+            </a:r>
+          </a:p>
+          <a:p>
+            <a:pPr algn="l">
+              <a:spcBef>
+                <a:spcPts val="600"/>
+              </a:spcBef>
+              <a:spcAft>
+                <a:spcPts val="300"/>
+              </a:spcAft>
+            </a:pPr>
+            <a:r>
+              <a:rPr sz="1300" b="1" i="0">
+                <a:solidFill>
+                  <a:srgbClr val="3AEDE5"/>
+                </a:solidFill>
+                <a:latin typeface="Alegreya Sans"/>
+              </a:rPr>
+              <a:t>LANGUES</a:t>
+            </a:r>
+          </a:p>
+          <a:p>
+            <a:pPr algn="l">
+              <a:spcAft>
+                <a:spcPts val="100"/>
+              </a:spcAft>
+            </a:pPr>
+            <a:r>
+              <a:rPr sz="1200" b="1" i="0">
+                <a:solidFill>
+                  <a:srgbClr val="3AEDE5"/>
+                </a:solidFill>
+                <a:latin typeface="Alegreya Sans"/>
+              </a:rPr>
+              <a:t>•  </a:t>
+            </a:r>
+            <a:r>
+              <a:rPr sz="1200" b="0" i="0">
+                <a:solidFill>
+                  <a:srgbClr val="FFFFFF"/>
+                </a:solidFill>
+                <a:latin typeface="Alegreya Sans"/>
+              </a:rPr>
+              <a:t>Français — Langue maternelle</a:t>
+            </a:r>
+          </a:p>
+          <a:p>
+            <a:pPr algn="l">
+              <a:spcAft>
+                <a:spcPts val="100"/>
+              </a:spcAft>
+            </a:pPr>
+            <a:r>
+              <a:rPr sz="1200" b="1" i="0">
+                <a:solidFill>
+                  <a:srgbClr val="3AEDE5"/>
+                </a:solidFill>
+                <a:latin typeface="Alegreya Sans"/>
+              </a:rPr>
+              <a:t>•  </a:t>
+            </a:r>
+            <a:r>
+              <a:rPr sz="1200" b="0" i="0">
+                <a:solidFill>
+                  <a:srgbClr val="FFFFFF"/>
+                </a:solidFill>
+                <a:latin typeface="Alegreya Sans"/>
+              </a:rPr>
+              <a:t>Anglais — TOEIC 955/990</a:t>
+            </a:r>
+          </a:p>
+          <a:p>
+            <a:pPr algn="l">
+              <a:spcBef>
+                <a:spcPts val="600"/>
+              </a:spcBef>
+              <a:spcAft>
+                <a:spcPts val="300"/>
+              </a:spcAft>
+            </a:pPr>
+            <a:r>
+              <a:rPr sz="1300" b="1" i="0">
+                <a:solidFill>
+                  <a:srgbClr val="3AEDE5"/>
+                </a:solidFill>
+                <a:latin typeface="Alegreya Sans"/>
+              </a:rPr>
+              <a:t>FORMATION &amp; CERTIFICATIONS</a:t>
+            </a:r>
+          </a:p>
+          <a:p>
+            <a:pPr algn="l">
+              <a:spcAft>
+                <a:spcPts val="100"/>
+              </a:spcAft>
+            </a:pPr>
+            <a:r>
+              <a:rPr sz="1200" b="1" i="0">
+                <a:solidFill>
+                  <a:srgbClr val="3AEDE5"/>
+                </a:solidFill>
+                <a:latin typeface="Alegreya Sans"/>
+              </a:rPr>
+              <a:t>2024  </a:t>
+            </a:r>
+            <a:r>
+              <a:rPr sz="1200" b="1" i="0">
+                <a:solidFill>
+                  <a:srgbClr val="FFFFFF"/>
+                </a:solidFill>
+                <a:latin typeface="Alegreya Sans"/>
+              </a:rPr>
+              <a:t>EDHEC Business School</a:t>
+            </a:r>
+          </a:p>
+          <a:p>
+            <a:pPr algn="l">
+              <a:spcAft>
+                <a:spcPts val="300"/>
+              </a:spcAft>
+            </a:pPr>
+            <a:r>
+              <a:rPr sz="1200" b="0" i="1">
+                <a:solidFill>
+                  <a:srgbClr val="CCD6E8"/>
+                </a:solidFill>
+                <a:latin typeface="Alegreya Sans"/>
+              </a:rPr>
+              <a:t>Certification Digital Ethics Officer (av…</a:t>
+            </a:r>
+          </a:p>
+          <a:p>
+            <a:pPr algn="l">
+              <a:spcAft>
+                <a:spcPts val="100"/>
+              </a:spcAft>
+            </a:pPr>
+            <a:r>
+              <a:rPr sz="1200" b="1" i="0">
+                <a:solidFill>
+                  <a:srgbClr val="3AEDE5"/>
+                </a:solidFill>
+                <a:latin typeface="Alegreya Sans"/>
+              </a:rPr>
+              <a:t>2015 — 2020  </a:t>
+            </a:r>
+            <a:r>
+              <a:rPr sz="1200" b="1" i="0">
+                <a:solidFill>
+                  <a:srgbClr val="FFFFFF"/>
+                </a:solidFill>
+                <a:latin typeface="Alegreya Sans"/>
+              </a:rPr>
+              <a:t>Sciences Po Saint-Germain-en-Laye</a:t>
+            </a:r>
+          </a:p>
+          <a:p>
+            <a:pPr algn="l">
+              <a:spcAft>
+                <a:spcPts val="300"/>
+              </a:spcAft>
+            </a:pPr>
+            <a:r>
+              <a:rPr sz="1200" b="0" i="1">
+                <a:solidFill>
+                  <a:srgbClr val="CCD6E8"/>
+                </a:solidFill>
+                <a:latin typeface="Alegreya Sans"/>
+              </a:rPr>
+              <a:t>Master II Affaires européennes et intern…</a:t>
+            </a:r>
+          </a:p>
+          <a:p>
+            <a:pPr algn="l">
+              <a:spcAft>
+                <a:spcPts val="100"/>
+              </a:spcAft>
+            </a:pPr>
+            <a:r>
+              <a:rPr sz="1200" b="1" i="0">
+                <a:solidFill>
+                  <a:srgbClr val="3AEDE5"/>
+                </a:solidFill>
+                <a:latin typeface="Alegreya Sans"/>
+              </a:rPr>
+              <a:t>2020  </a:t>
+            </a:r>
+            <a:r>
+              <a:rPr sz="1200" b="1" i="0">
+                <a:solidFill>
+                  <a:srgbClr val="FFFFFF"/>
+                </a:solidFill>
+                <a:latin typeface="Alegreya Sans"/>
+              </a:rPr>
+              <a:t>Université de Versailles Saint-Quentin-en-Yvelines</a:t>
+            </a:r>
+          </a:p>
+          <a:p>
+            <a:pPr algn="l">
+              <a:spcAft>
+                <a:spcPts val="300"/>
+              </a:spcAft>
+            </a:pPr>
+            <a:r>
+              <a:rPr sz="1200" b="0" i="1">
+                <a:solidFill>
+                  <a:srgbClr val="CCD6E8"/>
+                </a:solidFill>
+                <a:latin typeface="Alegreya Sans"/>
+              </a:rPr>
+              <a:t>Master II Influence &amp; Affaires publiques…</a:t>
+            </a:r>
+          </a:p>
+          <a:p>
+            <a:pPr algn="l">
+              <a:spcBef>
+                <a:spcPts val="600"/>
+              </a:spcBef>
+              <a:spcAft>
+                <a:spcPts val="300"/>
+              </a:spcAft>
+            </a:pPr>
+            <a:r>
+              <a:rPr sz="1300" b="1" i="0">
+                <a:solidFill>
+                  <a:srgbClr val="3AEDE5"/>
+                </a:solidFill>
+                <a:latin typeface="Alegreya Sans"/>
+              </a:rPr>
+              <a:t>ENGAGEMENTS &amp; RÉALISATIONS</a:t>
+            </a:r>
+          </a:p>
+          <a:p>
+            <a:pPr algn="l">
+              <a:spcAft>
+                <a:spcPts val="200"/>
+              </a:spcAft>
+            </a:pPr>
+            <a:r>
+              <a:rPr sz="1200" b="1" i="0">
+                <a:solidFill>
+                  <a:srgbClr val="3AEDE5"/>
+                </a:solidFill>
+                <a:latin typeface="Alegreya Sans"/>
+              </a:rPr>
+              <a:t>• </a:t>
+            </a:r>
+            <a:r>
+              <a:rPr sz="1200" b="1" i="0">
+                <a:solidFill>
+                  <a:srgbClr val="FFFFFF"/>
+                </a:solidFill>
+                <a:latin typeface="Alegreya Sans"/>
+              </a:rPr>
+              <a:t>Conseiller Numérique</a:t>
+            </a:r>
+            <a:r>
+              <a:rPr sz="1200" b="0" i="1">
+                <a:solidFill>
+                  <a:srgbClr val="CCD6E8"/>
+                </a:solidFill>
+                <a:latin typeface="Alegreya Sans"/>
+              </a:rPr>
+              <a:t> — Bénévole au sein du Conseil du Numé…</a:t>
+            </a:r>
+          </a:p>
+          <a:p>
+            <a:pPr algn="l">
+              <a:spcAft>
+                <a:spcPts val="200"/>
+              </a:spcAft>
+            </a:pPr>
+            <a:r>
+              <a:rPr sz="1200" b="1" i="0">
+                <a:solidFill>
+                  <a:srgbClr val="3AEDE5"/>
+                </a:solidFill>
+                <a:latin typeface="Alegreya Sans"/>
+              </a:rPr>
+              <a:t>• </a:t>
+            </a:r>
+            <a:r>
+              <a:rPr sz="1200" b="1" i="0">
+                <a:solidFill>
+                  <a:srgbClr val="FFFFFF"/>
+                </a:solidFill>
+                <a:latin typeface="Alegreya Sans"/>
+              </a:rPr>
+              <a:t>Podcasteur</a:t>
+            </a:r>
+            <a:r>
+              <a:rPr sz="1200" b="0" i="1">
+                <a:solidFill>
+                  <a:srgbClr val="CCD6E8"/>
+                </a:solidFill>
+                <a:latin typeface="Alegreya Sans"/>
+              </a:rPr>
+              <a:t> — Créateur et animateur d'un podcast…</a:t>
+            </a:r>
+          </a:p>
+          <a:p>
+            <a:pPr algn="l">
+              <a:spcAft>
+                <a:spcPts val="200"/>
+              </a:spcAft>
+            </a:pPr>
+            <a:r>
+              <a:rPr sz="1200" b="1" i="0">
+                <a:solidFill>
+                  <a:srgbClr val="3AEDE5"/>
+                </a:solidFill>
+                <a:latin typeface="Alegreya Sans"/>
+              </a:rPr>
+              <a:t>• </a:t>
+            </a:r>
+            <a:r>
+              <a:rPr sz="1200" b="1" i="0">
+                <a:solidFill>
+                  <a:srgbClr val="FFFFFF"/>
+                </a:solidFill>
+                <a:latin typeface="Alegreya Sans"/>
+              </a:rPr>
+              <a:t>Conférencier</a:t>
+            </a:r>
+            <a:r>
+              <a:rPr sz="1200" b="0" i="1">
+                <a:solidFill>
+                  <a:srgbClr val="CCD6E8"/>
+                </a:solidFill>
+                <a:latin typeface="Alegreya Sans"/>
+              </a:rPr>
+              <a:t> — Intervenant sur l'IA et ses enjeux…</a:t>
+            </a:r>
+          </a:p>
+        </p:txBody>
+      </p:sp>
+      <p:sp>
+        <p:nvSpPr>
+          <p:cNvPr id="8" name="TextBox 7"/>
+          <p:cNvSpPr txBox="1"/>
+          <p:nvPr/>
+        </p:nvSpPr>
+        <p:spPr>
+          <a:xfrm>
+            <a:off x="4528600" y="1180000"/>
+            <a:ext cx="7434800" cy="5318000"/>
+          </a:xfrm>
+          <a:prstGeom prst="rect">
+            <a:avLst/>
+          </a:prstGeom>
+          <a:noFill/>
+        </p:spPr>
+        <p:txBody>
+          <a:bodyPr wrap="square" lIns="0" rIns="0" tIns="0" bIns="0">
+            <a:spAutoFit/>
+          </a:bodyPr>
+          <a:lstStyle/>
+          <a:p>
+            <a:pPr algn="l">
+              <a:spcAft>
+                <a:spcPts val="300"/>
+              </a:spcAft>
+            </a:pPr>
+            <a:r>
+              <a:rPr sz="1300" b="1" i="0">
+                <a:solidFill>
+                  <a:srgbClr val="3AEDE5"/>
+                </a:solidFill>
+                <a:latin typeface="Alegreya Sans"/>
+              </a:rPr>
+              <a:t>RÉSUMÉ</a:t>
+            </a:r>
+          </a:p>
+          <a:p>
+            <a:pPr algn="l">
+              <a:spcAft>
+                <a:spcPts val="300"/>
+              </a:spcAft>
+            </a:pPr>
+            <a:r>
+              <a:rPr sz="1200" b="0" i="0">
+                <a:solidFill>
+                  <a:srgbClr val="FFFFFF"/>
+                </a:solidFill>
+                <a:latin typeface="Alegreya Sans"/>
+              </a:rPr>
+              <a:t>Expert en gouvernance de l'IA, AI Risk Management et conformité réglementaire, avec près de 8 ans d'expérience auprès de grandes institutions bancaires. Spécialisé dans l'EU AI Act et le déploiement d…</a:t>
+            </a:r>
+          </a:p>
+          <a:p>
+            <a:pPr algn="l">
+              <a:spcBef>
+                <a:spcPts val="600"/>
+              </a:spcBef>
+              <a:spcAft>
+                <a:spcPts val="300"/>
+              </a:spcAft>
+            </a:pPr>
+            <a:r>
+              <a:rPr sz="1300" b="1" i="0">
+                <a:solidFill>
+                  <a:srgbClr val="3AEDE5"/>
+                </a:solidFill>
+                <a:latin typeface="Alegreya Sans"/>
+              </a:rPr>
+              <a:t>EXPÉRIENCE PROFESSIONNELLE</a:t>
+            </a:r>
+          </a:p>
+          <a:p>
+            <a:pPr algn="l">
+              <a:spcAft>
+                <a:spcPts val="100"/>
+              </a:spcAft>
+            </a:pPr>
+            <a:r>
+              <a:rPr sz="1200" b="1" i="0">
+                <a:solidFill>
+                  <a:srgbClr val="3AEDE5"/>
+                </a:solidFill>
+                <a:latin typeface="Alegreya Sans"/>
+              </a:rPr>
+              <a:t>▸ </a:t>
+            </a:r>
+            <a:r>
+              <a:rPr sz="1200" b="1" i="0">
+                <a:solidFill>
+                  <a:srgbClr val="FFFFFF"/>
+                </a:solidFill>
+                <a:latin typeface="Alegreya Sans"/>
+              </a:rPr>
+              <a:t>Top-tier CIB européenne</a:t>
+            </a:r>
+            <a:r>
+              <a:rPr sz="1200" b="0" i="0">
+                <a:solidFill>
+                  <a:srgbClr val="FFFFFF"/>
+                </a:solidFill>
+                <a:latin typeface="Alegreya Sans"/>
+              </a:rPr>
+              <a:t> — AI Compliance Lead (consultant)</a:t>
+            </a:r>
+            <a:r>
+              <a:rPr sz="1200" b="0" i="1">
+                <a:solidFill>
+                  <a:srgbClr val="3AEDE5"/>
+                </a:solidFill>
+                <a:latin typeface="Alegreya Sans"/>
+              </a:rPr>
+              <a:t>  (8 mois — en cours)</a:t>
+            </a:r>
+          </a:p>
+          <a:p>
+            <a:pPr algn="l" lvl="1">
+              <a:spcAft>
+                <a:spcPts val="100"/>
+              </a:spcAft>
+            </a:pPr>
+            <a:r>
+              <a:rPr sz="1200" b="1" i="0">
+                <a:solidFill>
+                  <a:srgbClr val="3AEDE5"/>
+                </a:solidFill>
+                <a:latin typeface="Alegreya Sans"/>
+              </a:rPr>
+              <a:t>•  </a:t>
+            </a:r>
+            <a:r>
+              <a:rPr sz="1200" b="0" i="0">
+                <a:solidFill>
+                  <a:srgbClr val="FFFFFF"/>
+                </a:solidFill>
+                <a:latin typeface="Alegreya Sans"/>
+              </a:rPr>
+              <a:t>Finalisation et mise en œuvre du cadre de gouvernance des risques IA : politiques internes, cartographie des risques, comitologie et coordin…</a:t>
+            </a:r>
+          </a:p>
+          <a:p>
+            <a:pPr algn="l" lvl="1">
+              <a:spcAft>
+                <a:spcPts val="100"/>
+              </a:spcAft>
+            </a:pPr>
+            <a:r>
+              <a:rPr sz="1200" b="1" i="0">
+                <a:solidFill>
+                  <a:srgbClr val="3AEDE5"/>
+                </a:solidFill>
+                <a:latin typeface="Alegreya Sans"/>
+              </a:rPr>
+              <a:t>•  </a:t>
+            </a:r>
+            <a:r>
+              <a:rPr sz="1200" b="0" i="0">
+                <a:solidFill>
+                  <a:srgbClr val="FFFFFF"/>
+                </a:solidFill>
+                <a:latin typeface="Alegreya Sans"/>
+              </a:rPr>
+              <a:t>Pilotage opérationnel de la gouvernance : identification, évaluation, priorisation, validation et remédiation des systèmes d'IA.</a:t>
+            </a:r>
+          </a:p>
+          <a:p>
+            <a:pPr algn="l">
+              <a:spcAft>
+                <a:spcPts val="100"/>
+              </a:spcAft>
+            </a:pPr>
+            <a:r>
+              <a:rPr sz="1200" b="1" i="0">
+                <a:solidFill>
+                  <a:srgbClr val="3AEDE5"/>
+                </a:solidFill>
+                <a:latin typeface="Alegreya Sans"/>
+              </a:rPr>
+              <a:t>▸ </a:t>
+            </a:r>
+            <a:r>
+              <a:rPr sz="1200" b="1" i="0">
+                <a:solidFill>
+                  <a:srgbClr val="FFFFFF"/>
+                </a:solidFill>
+                <a:latin typeface="Alegreya Sans"/>
+              </a:rPr>
+              <a:t>Sia Partners</a:t>
+            </a:r>
+            <a:r>
+              <a:rPr sz="1200" b="0" i="0">
+                <a:solidFill>
+                  <a:srgbClr val="FFFFFF"/>
+                </a:solidFill>
+                <a:latin typeface="Alegreya Sans"/>
+              </a:rPr>
+              <a:t> — Associate Manager</a:t>
+            </a:r>
+            <a:r>
+              <a:rPr sz="1200" b="0" i="1">
+                <a:solidFill>
+                  <a:srgbClr val="3AEDE5"/>
+                </a:solidFill>
+                <a:latin typeface="Alegreya Sans"/>
+              </a:rPr>
+              <a:t>  (10 mois — en cours)</a:t>
+            </a:r>
+          </a:p>
+          <a:p>
+            <a:pPr algn="l" lvl="1">
+              <a:spcAft>
+                <a:spcPts val="100"/>
+              </a:spcAft>
+            </a:pPr>
+            <a:r>
+              <a:rPr sz="1200" b="1" i="0">
+                <a:solidFill>
+                  <a:srgbClr val="3AEDE5"/>
+                </a:solidFill>
+                <a:latin typeface="Alegreya Sans"/>
+              </a:rPr>
+              <a:t>•  </a:t>
+            </a:r>
+            <a:r>
+              <a:rPr sz="1200" b="0" i="0">
+                <a:solidFill>
+                  <a:srgbClr val="FFFFFF"/>
+                </a:solidFill>
+                <a:latin typeface="Alegreya Sans"/>
+              </a:rPr>
+              <a:t>Responsable de l'offre AI Risk Management : coordination des réponses aux appels d'offres, veille stratégique et réglementaire, développemen…</a:t>
+            </a:r>
+          </a:p>
+          <a:p>
+            <a:pPr algn="l" lvl="1">
+              <a:spcAft>
+                <a:spcPts val="100"/>
+              </a:spcAft>
+            </a:pPr>
+            <a:r>
+              <a:rPr sz="1200" b="1" i="0">
+                <a:solidFill>
+                  <a:srgbClr val="3AEDE5"/>
+                </a:solidFill>
+                <a:latin typeface="Alegreya Sans"/>
+              </a:rPr>
+              <a:t>•  </a:t>
+            </a:r>
+            <a:r>
+              <a:rPr sz="1200" b="0" i="0">
+                <a:solidFill>
+                  <a:srgbClr val="FFFFFF"/>
+                </a:solidFill>
+                <a:latin typeface="Alegreya Sans"/>
+              </a:rPr>
+              <a:t>Pilotage et animation du groupe de travail IA de l'association Paris Europlace (+40 responsables du secteur financier) : rédaction de positi…</a:t>
+            </a:r>
+          </a:p>
+          <a:p>
+            <a:pPr algn="l">
+              <a:spcAft>
+                <a:spcPts val="100"/>
+              </a:spcAft>
+            </a:pPr>
+            <a:r>
+              <a:rPr sz="1200" b="1" i="0">
+                <a:solidFill>
+                  <a:srgbClr val="3AEDE5"/>
+                </a:solidFill>
+                <a:latin typeface="Alegreya Sans"/>
+              </a:rPr>
+              <a:t>▸ </a:t>
+            </a:r>
+            <a:r>
+              <a:rPr sz="1200" b="1" i="0">
+                <a:solidFill>
+                  <a:srgbClr val="FFFFFF"/>
+                </a:solidFill>
+                <a:latin typeface="Alegreya Sans"/>
+              </a:rPr>
+              <a:t>Groupe BPCE</a:t>
+            </a:r>
+            <a:r>
+              <a:rPr sz="1200" b="0" i="0">
+                <a:solidFill>
+                  <a:srgbClr val="FFFFFF"/>
+                </a:solidFill>
+                <a:latin typeface="Alegreya Sans"/>
+              </a:rPr>
+              <a:t> — Group EU AI Act Project Manager</a:t>
+            </a:r>
+            <a:r>
+              <a:rPr sz="1200" b="0" i="1">
+                <a:solidFill>
+                  <a:srgbClr val="3AEDE5"/>
+                </a:solidFill>
+                <a:latin typeface="Alegreya Sans"/>
+              </a:rPr>
+              <a:t>  (18 mois)</a:t>
+            </a:r>
+          </a:p>
+          <a:p>
+            <a:pPr algn="l" lvl="1">
+              <a:spcAft>
+                <a:spcPts val="100"/>
+              </a:spcAft>
+            </a:pPr>
+            <a:r>
+              <a:rPr sz="1200" b="1" i="0">
+                <a:solidFill>
+                  <a:srgbClr val="3AEDE5"/>
+                </a:solidFill>
+                <a:latin typeface="Alegreya Sans"/>
+              </a:rPr>
+              <a:t>•  </a:t>
+            </a:r>
+            <a:r>
+              <a:rPr sz="1200" b="0" i="0">
+                <a:solidFill>
+                  <a:srgbClr val="FFFFFF"/>
+                </a:solidFill>
+                <a:latin typeface="Alegreya Sans"/>
+              </a:rPr>
+              <a:t>Responsable du programme de mise en conformité EU AI Act du Groupe BPCE et de ses entités (Natixis, Oney, BRED, etc.) : cartographie et éval…</a:t>
+            </a:r>
+          </a:p>
+          <a:p>
+            <a:pPr algn="l" lvl="1">
+              <a:spcAft>
+                <a:spcPts val="100"/>
+              </a:spcAft>
+            </a:pPr>
+            <a:r>
+              <a:rPr sz="1200" b="1" i="0">
+                <a:solidFill>
+                  <a:srgbClr val="3AEDE5"/>
+                </a:solidFill>
+                <a:latin typeface="Alegreya Sans"/>
+              </a:rPr>
+              <a:t>•  </a:t>
+            </a:r>
+            <a:r>
+              <a:rPr sz="1200" b="0" i="0">
+                <a:solidFill>
+                  <a:srgbClr val="FFFFFF"/>
+                </a:solidFill>
+                <a:latin typeface="Alegreya Sans"/>
+              </a:rPr>
+              <a:t>Coordination et accompagnement de plus de 35 décideurs locaux (DPO, Chief Compliance Officer, CDO, etc.) dans la déclinaison du cadre normat…</a:t>
+            </a:r>
+          </a:p>
+          <a:p>
+            <a:pPr algn="l">
+              <a:spcAft>
+                <a:spcPts val="100"/>
+              </a:spcAft>
+            </a:pPr>
+            <a:r>
+              <a:rPr sz="1200" b="1" i="0">
+                <a:solidFill>
+                  <a:srgbClr val="3AEDE5"/>
+                </a:solidFill>
+                <a:latin typeface="Alegreya Sans"/>
+              </a:rPr>
+              <a:t>▸ </a:t>
+            </a:r>
+            <a:r>
+              <a:rPr sz="1200" b="1" i="0">
+                <a:solidFill>
+                  <a:srgbClr val="FFFFFF"/>
+                </a:solidFill>
+                <a:latin typeface="Alegreya Sans"/>
+              </a:rPr>
+              <a:t>Oney / Oneytrust</a:t>
+            </a:r>
+            <a:r>
+              <a:rPr sz="1200" b="0" i="0">
+                <a:solidFill>
+                  <a:srgbClr val="FFFFFF"/>
+                </a:solidFill>
+                <a:latin typeface="Alegreya Sans"/>
+              </a:rPr>
+              <a:t> — Expert Leader — Digital &amp; AI Compliance Officer</a:t>
+            </a:r>
+            <a:r>
+              <a:rPr sz="1200" b="0" i="1">
+                <a:solidFill>
+                  <a:srgbClr val="3AEDE5"/>
+                </a:solidFill>
+                <a:latin typeface="Alegreya Sans"/>
+              </a:rPr>
+              <a:t>  (38 mois)</a:t>
+            </a:r>
+          </a:p>
+          <a:p>
+            <a:pPr algn="l" lvl="1">
+              <a:spcAft>
+                <a:spcPts val="100"/>
+              </a:spcAft>
+            </a:pPr>
+            <a:r>
+              <a:rPr sz="1200" b="1" i="0">
+                <a:solidFill>
+                  <a:srgbClr val="3AEDE5"/>
+                </a:solidFill>
+                <a:latin typeface="Alegreya Sans"/>
+              </a:rPr>
+              <a:t>•  </a:t>
+            </a:r>
+            <a:r>
+              <a:rPr sz="1200" b="0" i="0">
+                <a:solidFill>
+                  <a:srgbClr val="FFFFFF"/>
+                </a:solidFill>
+                <a:latin typeface="Alegreya Sans"/>
+              </a:rPr>
+              <a:t>Structuration du cadre de gouvernance des risques IA avec le Chief Data Officer : inventaire des systèmes, formation des référents métiers e…</a:t>
+            </a:r>
+          </a:p>
+          <a:p>
+            <a:pPr algn="l" lvl="1">
+              <a:spcAft>
+                <a:spcPts val="100"/>
+              </a:spcAft>
+            </a:pPr>
+            <a:r>
+              <a:rPr sz="1200" b="1" i="0">
+                <a:solidFill>
+                  <a:srgbClr val="3AEDE5"/>
+                </a:solidFill>
+                <a:latin typeface="Alegreya Sans"/>
+              </a:rPr>
+              <a:t>•  </a:t>
+            </a:r>
+            <a:r>
+              <a:rPr sz="1200" b="0" i="0">
+                <a:solidFill>
+                  <a:srgbClr val="FFFFFF"/>
+                </a:solidFill>
+                <a:latin typeface="Alegreya Sans"/>
+              </a:rPr>
+              <a:t>Ambassadeur des outils d'IA Générative Groupe auprès de 3 000 collaborateurs Oney.</a:t>
+            </a:r>
+          </a:p>
+          <a:p>
+            <a:pPr algn="l">
+              <a:spcBef>
+                <a:spcPts val="600"/>
+              </a:spcBef>
+              <a:spcAft>
+                <a:spcPts val="300"/>
+              </a:spcAft>
+            </a:pPr>
+            <a:r>
+              <a:rPr sz="1300" b="1" i="0">
+                <a:solidFill>
+                  <a:srgbClr val="3AEDE5"/>
+                </a:solidFill>
+                <a:latin typeface="Alegreya Sans"/>
+              </a:rPr>
+              <a:t>RÉFÉRENCES</a:t>
+            </a:r>
+          </a:p>
+          <a:p>
+            <a:pPr algn="l">
+              <a:spcAft>
+                <a:spcPts val="200"/>
+              </a:spcAft>
+            </a:pPr>
+            <a:r>
+              <a:rPr sz="1200" b="0" i="1">
+                <a:solidFill>
+                  <a:srgbClr val="FFFFFF"/>
+                </a:solidFill>
+                <a:latin typeface="Alegreya Sans"/>
+              </a:rPr>
+              <a:t>Groupe BPCE, Natixis, Oney, Sia Partners, Paris Europlace</a:t>
+            </a:r>
+          </a:p>
+        </p:txBody>
+      </p:sp>
+      <p:sp>
+        <p:nvSpPr>
+          <p:cNvPr id="9" name="Rectangle 8"/>
           <p:cNvSpPr/>
           <p:nvPr/>
         </p:nvSpPr>
@@ -3232,1092 +4307,6 @@
           </a:p>
         </p:txBody>
       </p:sp>
-      <p:pic>
-        <p:nvPicPr>
-          <p:cNvPr id="5" name="Picture 4" descr="inside_circle_logo.png"/>
-          <p:cNvPicPr>
-            <a:picLocks noChangeAspect="1"/>
-          </p:cNvPicPr>
-          <p:nvPr/>
-        </p:nvPicPr>
-        <p:blipFill>
-          <a:blip r:embed="rId2"/>
-          <a:stretch>
-            <a:fillRect/>
-          </a:stretch>
-        </p:blipFill>
-        <p:spPr>
-          <a:xfrm>
-            <a:off x="10660000" y="130000"/>
-            <a:ext cx="1302000" cy="420000"/>
-          </a:xfrm>
-          <a:prstGeom prst="rect">
-            <a:avLst/>
-          </a:prstGeom>
-        </p:spPr>
-      </p:pic>
-      <p:sp>
-        <p:nvSpPr>
-          <p:cNvPr id="6" name="TextBox 5"/>
-          <p:cNvSpPr txBox="1"/>
-          <p:nvPr/>
-        </p:nvSpPr>
-        <p:spPr>
-          <a:xfrm>
-            <a:off x="228600" y="260000"/>
-            <a:ext cx="3842800" cy="800000"/>
-          </a:xfrm>
-          <a:prstGeom prst="rect">
-            <a:avLst/>
-          </a:prstGeom>
-          <a:noFill/>
-        </p:spPr>
-        <p:txBody>
-          <a:bodyPr wrap="square" lIns="0" rIns="0" tIns="0" bIns="0">
-            <a:spAutoFit/>
-          </a:bodyPr>
-          <a:lstStyle/>
-          <a:p>
-            <a:pPr algn="l"/>
-            <a:r>
-              <a:rPr sz="4800" b="1" i="0">
-                <a:solidFill>
-                  <a:srgbClr val="3AEDE5"/>
-                </a:solidFill>
-                <a:latin typeface="Alegreya Sans"/>
-              </a:rPr>
-              <a:t>A.P.</a:t>
-            </a:r>
-          </a:p>
-        </p:txBody>
-      </p:sp>
-      <p:sp>
-        <p:nvSpPr>
-          <p:cNvPr id="7" name="TextBox 6"/>
-          <p:cNvSpPr txBox="1"/>
-          <p:nvPr/>
-        </p:nvSpPr>
-        <p:spPr>
-          <a:xfrm>
-            <a:off x="4528600" y="300000"/>
-            <a:ext cx="5963400" cy="800000"/>
-          </a:xfrm>
-          <a:prstGeom prst="rect">
-            <a:avLst/>
-          </a:prstGeom>
-          <a:noFill/>
-        </p:spPr>
-        <p:txBody>
-          <a:bodyPr wrap="square" lIns="0" rIns="0" tIns="0" bIns="0">
-            <a:spAutoFit/>
-          </a:bodyPr>
-          <a:lstStyle/>
-          <a:p>
-            <a:r>
-              <a:rPr sz="2400" b="1" i="0">
-                <a:solidFill>
-                  <a:srgbClr val="FFFFFF"/>
-                </a:solidFill>
-                <a:latin typeface="Alegreya Sans"/>
-              </a:rPr>
-              <a:t>Spécialiste AI Governance, AI Risk &amp; EU AI Act</a:t>
-            </a:r>
-          </a:p>
-          <a:p>
-            <a:pPr>
-              <a:spcBef>
-                <a:spcPts val="200"/>
-              </a:spcBef>
-            </a:pPr>
-            <a:r>
-              <a:rPr sz="1500" b="0" i="1">
-                <a:solidFill>
-                  <a:srgbClr val="3AEDE5"/>
-                </a:solidFill>
-                <a:latin typeface="Alegreya Sans"/>
-              </a:rPr>
-              <a:t>Gouvernance IA &amp; Conformité réglementaire — Services financiers</a:t>
-            </a:r>
-          </a:p>
-        </p:txBody>
-      </p:sp>
-      <p:sp>
-        <p:nvSpPr>
-          <p:cNvPr id="8" name="TextBox 7"/>
-          <p:cNvSpPr txBox="1"/>
-          <p:nvPr/>
-        </p:nvSpPr>
-        <p:spPr>
-          <a:xfrm>
-            <a:off x="228600" y="1180000"/>
-            <a:ext cx="3842800" cy="5318000"/>
-          </a:xfrm>
-          <a:prstGeom prst="rect">
-            <a:avLst/>
-          </a:prstGeom>
-          <a:noFill/>
-        </p:spPr>
-        <p:txBody>
-          <a:bodyPr wrap="square" lIns="0" rIns="0" tIns="0" bIns="0">
-            <a:spAutoFit/>
-          </a:bodyPr>
-          <a:lstStyle/>
-          <a:p>
-            <a:pPr algn="l">
-              <a:spcAft>
-                <a:spcPts val="300"/>
-              </a:spcAft>
-            </a:pPr>
-            <a:r>
-              <a:rPr sz="1300" b="1" i="0">
-                <a:solidFill>
-                  <a:srgbClr val="3AEDE5"/>
-                </a:solidFill>
-                <a:latin typeface="Alegreya Sans"/>
-              </a:rPr>
-              <a:t>DOMAINES D'EXPERTISE</a:t>
-            </a:r>
-          </a:p>
-          <a:p>
-            <a:pPr algn="l">
-              <a:spcAft>
-                <a:spcPts val="100"/>
-              </a:spcAft>
-            </a:pPr>
-            <a:r>
-              <a:rPr sz="1200" b="1" i="0">
-                <a:solidFill>
-                  <a:srgbClr val="3AEDE5"/>
-                </a:solidFill>
-                <a:latin typeface="Alegreya Sans"/>
-              </a:rPr>
-              <a:t>•  </a:t>
-            </a:r>
-            <a:r>
-              <a:rPr sz="1200" b="0" i="0">
-                <a:solidFill>
-                  <a:srgbClr val="FFFFFF"/>
-                </a:solidFill>
-                <a:latin typeface="Alegreya Sans"/>
-              </a:rPr>
-              <a:t>AI Governance</a:t>
-            </a:r>
-          </a:p>
-          <a:p>
-            <a:pPr algn="l">
-              <a:spcAft>
-                <a:spcPts val="100"/>
-              </a:spcAft>
-            </a:pPr>
-            <a:r>
-              <a:rPr sz="1200" b="1" i="0">
-                <a:solidFill>
-                  <a:srgbClr val="3AEDE5"/>
-                </a:solidFill>
-                <a:latin typeface="Alegreya Sans"/>
-              </a:rPr>
-              <a:t>•  </a:t>
-            </a:r>
-            <a:r>
-              <a:rPr sz="1200" b="0" i="0">
-                <a:solidFill>
-                  <a:srgbClr val="FFFFFF"/>
-                </a:solidFill>
-                <a:latin typeface="Alegreya Sans"/>
-              </a:rPr>
-              <a:t>AI Risk Management</a:t>
-            </a:r>
-          </a:p>
-          <a:p>
-            <a:pPr algn="l">
-              <a:spcAft>
-                <a:spcPts val="100"/>
-              </a:spcAft>
-            </a:pPr>
-            <a:r>
-              <a:rPr sz="1200" b="1" i="0">
-                <a:solidFill>
-                  <a:srgbClr val="3AEDE5"/>
-                </a:solidFill>
-                <a:latin typeface="Alegreya Sans"/>
-              </a:rPr>
-              <a:t>•  </a:t>
-            </a:r>
-            <a:r>
-              <a:rPr sz="1200" b="0" i="0">
-                <a:solidFill>
-                  <a:srgbClr val="FFFFFF"/>
-                </a:solidFill>
-                <a:latin typeface="Alegreya Sans"/>
-              </a:rPr>
-              <a:t>EU AI Act</a:t>
-            </a:r>
-          </a:p>
-          <a:p>
-            <a:pPr algn="l">
-              <a:spcAft>
-                <a:spcPts val="100"/>
-              </a:spcAft>
-            </a:pPr>
-            <a:r>
-              <a:rPr sz="1200" b="1" i="0">
-                <a:solidFill>
-                  <a:srgbClr val="3AEDE5"/>
-                </a:solidFill>
-                <a:latin typeface="Alegreya Sans"/>
-              </a:rPr>
-              <a:t>•  </a:t>
-            </a:r>
-            <a:r>
-              <a:rPr sz="1200" b="0" i="0">
-                <a:solidFill>
-                  <a:srgbClr val="FFFFFF"/>
-                </a:solidFill>
-                <a:latin typeface="Alegreya Sans"/>
-              </a:rPr>
-              <a:t>Digital Compliance</a:t>
-            </a:r>
-          </a:p>
-          <a:p>
-            <a:pPr algn="l">
-              <a:spcAft>
-                <a:spcPts val="100"/>
-              </a:spcAft>
-            </a:pPr>
-            <a:r>
-              <a:rPr sz="1200" b="1" i="0">
-                <a:solidFill>
-                  <a:srgbClr val="3AEDE5"/>
-                </a:solidFill>
-                <a:latin typeface="Alegreya Sans"/>
-              </a:rPr>
-              <a:t>•  </a:t>
-            </a:r>
-            <a:r>
-              <a:rPr sz="1200" b="0" i="0">
-                <a:solidFill>
-                  <a:srgbClr val="FFFFFF"/>
-                </a:solidFill>
-                <a:latin typeface="Alegreya Sans"/>
-              </a:rPr>
-              <a:t>Regulatory Strategy</a:t>
-            </a:r>
-          </a:p>
-          <a:p>
-            <a:pPr algn="l">
-              <a:spcBef>
-                <a:spcPts val="600"/>
-              </a:spcBef>
-              <a:spcAft>
-                <a:spcPts val="300"/>
-              </a:spcAft>
-            </a:pPr>
-            <a:r>
-              <a:rPr sz="1300" b="1" i="0">
-                <a:solidFill>
-                  <a:srgbClr val="3AEDE5"/>
-                </a:solidFill>
-                <a:latin typeface="Alegreya Sans"/>
-              </a:rPr>
-              <a:t>LANGUES</a:t>
-            </a:r>
-          </a:p>
-          <a:p>
-            <a:pPr algn="l">
-              <a:spcAft>
-                <a:spcPts val="100"/>
-              </a:spcAft>
-            </a:pPr>
-            <a:r>
-              <a:rPr sz="1200" b="1" i="0">
-                <a:solidFill>
-                  <a:srgbClr val="3AEDE5"/>
-                </a:solidFill>
-                <a:latin typeface="Alegreya Sans"/>
-              </a:rPr>
-              <a:t>•  </a:t>
-            </a:r>
-            <a:r>
-              <a:rPr sz="1200" b="0" i="0">
-                <a:solidFill>
-                  <a:srgbClr val="FFFFFF"/>
-                </a:solidFill>
-                <a:latin typeface="Alegreya Sans"/>
-              </a:rPr>
-              <a:t>Français — Langue maternelle</a:t>
-            </a:r>
-          </a:p>
-          <a:p>
-            <a:pPr algn="l">
-              <a:spcAft>
-                <a:spcPts val="100"/>
-              </a:spcAft>
-            </a:pPr>
-            <a:r>
-              <a:rPr sz="1200" b="1" i="0">
-                <a:solidFill>
-                  <a:srgbClr val="3AEDE5"/>
-                </a:solidFill>
-                <a:latin typeface="Alegreya Sans"/>
-              </a:rPr>
-              <a:t>•  </a:t>
-            </a:r>
-            <a:r>
-              <a:rPr sz="1200" b="0" i="0">
-                <a:solidFill>
-                  <a:srgbClr val="FFFFFF"/>
-                </a:solidFill>
-                <a:latin typeface="Alegreya Sans"/>
-              </a:rPr>
-              <a:t>Anglais — TOEIC 955/990</a:t>
-            </a:r>
-          </a:p>
-          <a:p>
-            <a:pPr algn="l">
-              <a:spcBef>
-                <a:spcPts val="600"/>
-              </a:spcBef>
-              <a:spcAft>
-                <a:spcPts val="300"/>
-              </a:spcAft>
-            </a:pPr>
-            <a:r>
-              <a:rPr sz="1300" b="1" i="0">
-                <a:solidFill>
-                  <a:srgbClr val="3AEDE5"/>
-                </a:solidFill>
-                <a:latin typeface="Alegreya Sans"/>
-              </a:rPr>
-              <a:t>FORMATION &amp; CERTIFICATIONS</a:t>
-            </a:r>
-          </a:p>
-          <a:p>
-            <a:pPr algn="l">
-              <a:spcAft>
-                <a:spcPts val="100"/>
-              </a:spcAft>
-            </a:pPr>
-            <a:r>
-              <a:rPr sz="1200" b="1" i="0">
-                <a:solidFill>
-                  <a:srgbClr val="3AEDE5"/>
-                </a:solidFill>
-                <a:latin typeface="Alegreya Sans"/>
-              </a:rPr>
-              <a:t>2024  </a:t>
-            </a:r>
-            <a:r>
-              <a:rPr sz="1200" b="1" i="0">
-                <a:solidFill>
-                  <a:srgbClr val="FFFFFF"/>
-                </a:solidFill>
-                <a:latin typeface="Alegreya Sans"/>
-              </a:rPr>
-              <a:t>EDHEC Business School</a:t>
-            </a:r>
-          </a:p>
-          <a:p>
-            <a:pPr algn="l">
-              <a:spcAft>
-                <a:spcPts val="300"/>
-              </a:spcAft>
-            </a:pPr>
-            <a:r>
-              <a:rPr sz="1200" b="0" i="1">
-                <a:solidFill>
-                  <a:srgbClr val="CCD6E8"/>
-                </a:solidFill>
-                <a:latin typeface="Alegreya Sans"/>
-              </a:rPr>
-              <a:t>Certification Digital Ethics Officer (av…</a:t>
-            </a:r>
-          </a:p>
-          <a:p>
-            <a:pPr algn="l">
-              <a:spcAft>
-                <a:spcPts val="100"/>
-              </a:spcAft>
-            </a:pPr>
-            <a:r>
-              <a:rPr sz="1200" b="1" i="0">
-                <a:solidFill>
-                  <a:srgbClr val="3AEDE5"/>
-                </a:solidFill>
-                <a:latin typeface="Alegreya Sans"/>
-              </a:rPr>
-              <a:t>2015 — 2020  </a:t>
-            </a:r>
-            <a:r>
-              <a:rPr sz="1200" b="1" i="0">
-                <a:solidFill>
-                  <a:srgbClr val="FFFFFF"/>
-                </a:solidFill>
-                <a:latin typeface="Alegreya Sans"/>
-              </a:rPr>
-              <a:t>Sciences Po Saint-Germain-en-Laye</a:t>
-            </a:r>
-          </a:p>
-          <a:p>
-            <a:pPr algn="l">
-              <a:spcAft>
-                <a:spcPts val="300"/>
-              </a:spcAft>
-            </a:pPr>
-            <a:r>
-              <a:rPr sz="1200" b="0" i="1">
-                <a:solidFill>
-                  <a:srgbClr val="CCD6E8"/>
-                </a:solidFill>
-                <a:latin typeface="Alegreya Sans"/>
-              </a:rPr>
-              <a:t>Master II Affaires européennes et intern…</a:t>
-            </a:r>
-          </a:p>
-          <a:p>
-            <a:pPr algn="l">
-              <a:spcAft>
-                <a:spcPts val="100"/>
-              </a:spcAft>
-            </a:pPr>
-            <a:r>
-              <a:rPr sz="1200" b="1" i="0">
-                <a:solidFill>
-                  <a:srgbClr val="3AEDE5"/>
-                </a:solidFill>
-                <a:latin typeface="Alegreya Sans"/>
-              </a:rPr>
-              <a:t>2020  </a:t>
-            </a:r>
-            <a:r>
-              <a:rPr sz="1200" b="1" i="0">
-                <a:solidFill>
-                  <a:srgbClr val="FFFFFF"/>
-                </a:solidFill>
-                <a:latin typeface="Alegreya Sans"/>
-              </a:rPr>
-              <a:t>Université de Versailles Saint-Quentin-en-Yvelines</a:t>
-            </a:r>
-          </a:p>
-          <a:p>
-            <a:pPr algn="l">
-              <a:spcAft>
-                <a:spcPts val="300"/>
-              </a:spcAft>
-            </a:pPr>
-            <a:r>
-              <a:rPr sz="1200" b="0" i="1">
-                <a:solidFill>
-                  <a:srgbClr val="CCD6E8"/>
-                </a:solidFill>
-                <a:latin typeface="Alegreya Sans"/>
-              </a:rPr>
-              <a:t>Master II Influence &amp; Affaires publiques…</a:t>
-            </a:r>
-          </a:p>
-          <a:p>
-            <a:pPr algn="l">
-              <a:spcBef>
-                <a:spcPts val="600"/>
-              </a:spcBef>
-              <a:spcAft>
-                <a:spcPts val="300"/>
-              </a:spcAft>
-            </a:pPr>
-            <a:r>
-              <a:rPr sz="1300" b="1" i="0">
-                <a:solidFill>
-                  <a:srgbClr val="3AEDE5"/>
-                </a:solidFill>
-                <a:latin typeface="Alegreya Sans"/>
-              </a:rPr>
-              <a:t>ENGAGEMENTS &amp; RÉALISATIONS</a:t>
-            </a:r>
-          </a:p>
-          <a:p>
-            <a:pPr algn="l">
-              <a:spcAft>
-                <a:spcPts val="200"/>
-              </a:spcAft>
-            </a:pPr>
-            <a:r>
-              <a:rPr sz="1200" b="1" i="0">
-                <a:solidFill>
-                  <a:srgbClr val="3AEDE5"/>
-                </a:solidFill>
-                <a:latin typeface="Alegreya Sans"/>
-              </a:rPr>
-              <a:t>• </a:t>
-            </a:r>
-            <a:r>
-              <a:rPr sz="1200" b="1" i="0">
-                <a:solidFill>
-                  <a:srgbClr val="FFFFFF"/>
-                </a:solidFill>
-                <a:latin typeface="Alegreya Sans"/>
-              </a:rPr>
-              <a:t>Conseiller Numérique</a:t>
-            </a:r>
-            <a:r>
-              <a:rPr sz="1200" b="0" i="1">
-                <a:solidFill>
-                  <a:srgbClr val="CCD6E8"/>
-                </a:solidFill>
-                <a:latin typeface="Alegreya Sans"/>
-              </a:rPr>
-              <a:t> — Bénévole au sein du Conseil du Numé…</a:t>
-            </a:r>
-          </a:p>
-          <a:p>
-            <a:pPr algn="l">
-              <a:spcAft>
-                <a:spcPts val="200"/>
-              </a:spcAft>
-            </a:pPr>
-            <a:r>
-              <a:rPr sz="1200" b="1" i="0">
-                <a:solidFill>
-                  <a:srgbClr val="3AEDE5"/>
-                </a:solidFill>
-                <a:latin typeface="Alegreya Sans"/>
-              </a:rPr>
-              <a:t>• </a:t>
-            </a:r>
-            <a:r>
-              <a:rPr sz="1200" b="1" i="0">
-                <a:solidFill>
-                  <a:srgbClr val="FFFFFF"/>
-                </a:solidFill>
-                <a:latin typeface="Alegreya Sans"/>
-              </a:rPr>
-              <a:t>Podcasteur</a:t>
-            </a:r>
-            <a:r>
-              <a:rPr sz="1200" b="0" i="1">
-                <a:solidFill>
-                  <a:srgbClr val="CCD6E8"/>
-                </a:solidFill>
-                <a:latin typeface="Alegreya Sans"/>
-              </a:rPr>
-              <a:t> — Créateur et animateur d'un podcast…</a:t>
-            </a:r>
-          </a:p>
-          <a:p>
-            <a:pPr algn="l">
-              <a:spcAft>
-                <a:spcPts val="200"/>
-              </a:spcAft>
-            </a:pPr>
-            <a:r>
-              <a:rPr sz="1200" b="1" i="0">
-                <a:solidFill>
-                  <a:srgbClr val="3AEDE5"/>
-                </a:solidFill>
-                <a:latin typeface="Alegreya Sans"/>
-              </a:rPr>
-              <a:t>• </a:t>
-            </a:r>
-            <a:r>
-              <a:rPr sz="1200" b="1" i="0">
-                <a:solidFill>
-                  <a:srgbClr val="FFFFFF"/>
-                </a:solidFill>
-                <a:latin typeface="Alegreya Sans"/>
-              </a:rPr>
-              <a:t>Conférencier</a:t>
-            </a:r>
-            <a:r>
-              <a:rPr sz="1200" b="0" i="1">
-                <a:solidFill>
-                  <a:srgbClr val="CCD6E8"/>
-                </a:solidFill>
-                <a:latin typeface="Alegreya Sans"/>
-              </a:rPr>
-              <a:t> — Intervenant sur l'IA et ses enjeux…</a:t>
-            </a:r>
-          </a:p>
-        </p:txBody>
-      </p:sp>
-      <p:sp>
-        <p:nvSpPr>
-          <p:cNvPr id="9" name="TextBox 8"/>
-          <p:cNvSpPr txBox="1"/>
-          <p:nvPr/>
-        </p:nvSpPr>
-        <p:spPr>
-          <a:xfrm>
-            <a:off x="4528600" y="1180000"/>
-            <a:ext cx="7434800" cy="5318000"/>
-          </a:xfrm>
-          <a:prstGeom prst="rect">
-            <a:avLst/>
-          </a:prstGeom>
-          <a:noFill/>
-        </p:spPr>
-        <p:txBody>
-          <a:bodyPr wrap="square" lIns="0" rIns="0" tIns="0" bIns="0">
-            <a:spAutoFit/>
-          </a:bodyPr>
-          <a:lstStyle/>
-          <a:p>
-            <a:pPr algn="l">
-              <a:spcAft>
-                <a:spcPts val="300"/>
-              </a:spcAft>
-            </a:pPr>
-            <a:r>
-              <a:rPr sz="1300" b="1" i="0">
-                <a:solidFill>
-                  <a:srgbClr val="3AEDE5"/>
-                </a:solidFill>
-                <a:latin typeface="Alegreya Sans"/>
-              </a:rPr>
-              <a:t>RÉSUMÉ</a:t>
-            </a:r>
-          </a:p>
-          <a:p>
-            <a:pPr algn="l">
-              <a:spcAft>
-                <a:spcPts val="300"/>
-              </a:spcAft>
-            </a:pPr>
-            <a:r>
-              <a:rPr sz="1200" b="0" i="0">
-                <a:solidFill>
-                  <a:srgbClr val="FFFFFF"/>
-                </a:solidFill>
-                <a:latin typeface="Alegreya Sans"/>
-              </a:rPr>
-              <a:t>Expert en gouvernance de l'IA, AI Risk Management et conformité réglementaire, avec près de 8 ans d'expérience auprès de grandes institutions bancaires. Spécialisé dans l'EU AI Act et le déploiement d…</a:t>
-            </a:r>
-          </a:p>
-          <a:p>
-            <a:pPr algn="l">
-              <a:spcBef>
-                <a:spcPts val="600"/>
-              </a:spcBef>
-              <a:spcAft>
-                <a:spcPts val="300"/>
-              </a:spcAft>
-            </a:pPr>
-            <a:r>
-              <a:rPr sz="1300" b="1" i="0">
-                <a:solidFill>
-                  <a:srgbClr val="3AEDE5"/>
-                </a:solidFill>
-                <a:latin typeface="Alegreya Sans"/>
-              </a:rPr>
-              <a:t>EXPÉRIENCE PROFESSIONNELLE</a:t>
-            </a:r>
-          </a:p>
-          <a:p>
-            <a:pPr algn="l">
-              <a:spcAft>
-                <a:spcPts val="100"/>
-              </a:spcAft>
-            </a:pPr>
-            <a:r>
-              <a:rPr sz="1200" b="1" i="0">
-                <a:solidFill>
-                  <a:srgbClr val="3AEDE5"/>
-                </a:solidFill>
-                <a:latin typeface="Alegreya Sans"/>
-              </a:rPr>
-              <a:t>▸ </a:t>
-            </a:r>
-            <a:r>
-              <a:rPr sz="1200" b="1" i="0">
-                <a:solidFill>
-                  <a:srgbClr val="FFFFFF"/>
-                </a:solidFill>
-                <a:latin typeface="Alegreya Sans"/>
-              </a:rPr>
-              <a:t>Top-tier CIB européenne</a:t>
-            </a:r>
-            <a:r>
-              <a:rPr sz="1200" b="0" i="0">
-                <a:solidFill>
-                  <a:srgbClr val="FFFFFF"/>
-                </a:solidFill>
-                <a:latin typeface="Alegreya Sans"/>
-              </a:rPr>
-              <a:t> — AI Compliance Lead (consultant)</a:t>
-            </a:r>
-            <a:r>
-              <a:rPr sz="1200" b="0" i="1">
-                <a:solidFill>
-                  <a:srgbClr val="3AEDE5"/>
-                </a:solidFill>
-                <a:latin typeface="Alegreya Sans"/>
-              </a:rPr>
-              <a:t>  (8 mois — en cours)</a:t>
-            </a:r>
-          </a:p>
-          <a:p>
-            <a:pPr algn="l" lvl="1">
-              <a:spcAft>
-                <a:spcPts val="100"/>
-              </a:spcAft>
-            </a:pPr>
-            <a:r>
-              <a:rPr sz="1200" b="1" i="0">
-                <a:solidFill>
-                  <a:srgbClr val="3AEDE5"/>
-                </a:solidFill>
-                <a:latin typeface="Alegreya Sans"/>
-              </a:rPr>
-              <a:t>•  </a:t>
-            </a:r>
-            <a:r>
-              <a:rPr sz="1200" b="0" i="0">
-                <a:solidFill>
-                  <a:srgbClr val="FFFFFF"/>
-                </a:solidFill>
-                <a:latin typeface="Alegreya Sans"/>
-              </a:rPr>
-              <a:t>Finalisation et mise en œuvre du cadre de gouvernance des risques IA : politiques internes, cartographie des risques, comitologie et coordin…</a:t>
-            </a:r>
-          </a:p>
-          <a:p>
-            <a:pPr algn="l" lvl="1">
-              <a:spcAft>
-                <a:spcPts val="100"/>
-              </a:spcAft>
-            </a:pPr>
-            <a:r>
-              <a:rPr sz="1200" b="1" i="0">
-                <a:solidFill>
-                  <a:srgbClr val="3AEDE5"/>
-                </a:solidFill>
-                <a:latin typeface="Alegreya Sans"/>
-              </a:rPr>
-              <a:t>•  </a:t>
-            </a:r>
-            <a:r>
-              <a:rPr sz="1200" b="0" i="0">
-                <a:solidFill>
-                  <a:srgbClr val="FFFFFF"/>
-                </a:solidFill>
-                <a:latin typeface="Alegreya Sans"/>
-              </a:rPr>
-              <a:t>Pilotage opérationnel de la gouvernance : identification, évaluation, priorisation, validation et remédiation des systèmes d'IA.</a:t>
-            </a:r>
-          </a:p>
-          <a:p>
-            <a:pPr algn="l">
-              <a:spcAft>
-                <a:spcPts val="100"/>
-              </a:spcAft>
-            </a:pPr>
-            <a:r>
-              <a:rPr sz="1200" b="1" i="0">
-                <a:solidFill>
-                  <a:srgbClr val="3AEDE5"/>
-                </a:solidFill>
-                <a:latin typeface="Alegreya Sans"/>
-              </a:rPr>
-              <a:t>▸ </a:t>
-            </a:r>
-            <a:r>
-              <a:rPr sz="1200" b="1" i="0">
-                <a:solidFill>
-                  <a:srgbClr val="FFFFFF"/>
-                </a:solidFill>
-                <a:latin typeface="Alegreya Sans"/>
-              </a:rPr>
-              <a:t>Sia Partners</a:t>
-            </a:r>
-            <a:r>
-              <a:rPr sz="1200" b="0" i="0">
-                <a:solidFill>
-                  <a:srgbClr val="FFFFFF"/>
-                </a:solidFill>
-                <a:latin typeface="Alegreya Sans"/>
-              </a:rPr>
-              <a:t> — Associate Manager</a:t>
-            </a:r>
-            <a:r>
-              <a:rPr sz="1200" b="0" i="1">
-                <a:solidFill>
-                  <a:srgbClr val="3AEDE5"/>
-                </a:solidFill>
-                <a:latin typeface="Alegreya Sans"/>
-              </a:rPr>
-              <a:t>  (10 mois — en cours)</a:t>
-            </a:r>
-          </a:p>
-          <a:p>
-            <a:pPr algn="l" lvl="1">
-              <a:spcAft>
-                <a:spcPts val="100"/>
-              </a:spcAft>
-            </a:pPr>
-            <a:r>
-              <a:rPr sz="1200" b="1" i="0">
-                <a:solidFill>
-                  <a:srgbClr val="3AEDE5"/>
-                </a:solidFill>
-                <a:latin typeface="Alegreya Sans"/>
-              </a:rPr>
-              <a:t>•  </a:t>
-            </a:r>
-            <a:r>
-              <a:rPr sz="1200" b="0" i="0">
-                <a:solidFill>
-                  <a:srgbClr val="FFFFFF"/>
-                </a:solidFill>
-                <a:latin typeface="Alegreya Sans"/>
-              </a:rPr>
-              <a:t>Responsable de l'offre AI Risk Management : coordination des réponses aux appels d'offres, veille stratégique et réglementaire, développemen…</a:t>
-            </a:r>
-          </a:p>
-          <a:p>
-            <a:pPr algn="l" lvl="1">
-              <a:spcAft>
-                <a:spcPts val="100"/>
-              </a:spcAft>
-            </a:pPr>
-            <a:r>
-              <a:rPr sz="1200" b="1" i="0">
-                <a:solidFill>
-                  <a:srgbClr val="3AEDE5"/>
-                </a:solidFill>
-                <a:latin typeface="Alegreya Sans"/>
-              </a:rPr>
-              <a:t>•  </a:t>
-            </a:r>
-            <a:r>
-              <a:rPr sz="1200" b="0" i="0">
-                <a:solidFill>
-                  <a:srgbClr val="FFFFFF"/>
-                </a:solidFill>
-                <a:latin typeface="Alegreya Sans"/>
-              </a:rPr>
-              <a:t>Pilotage et animation du groupe de travail IA de l'association Paris Europlace (+40 responsables du secteur financier) : rédaction de positi…</a:t>
-            </a:r>
-          </a:p>
-          <a:p>
-            <a:pPr algn="l">
-              <a:spcAft>
-                <a:spcPts val="100"/>
-              </a:spcAft>
-            </a:pPr>
-            <a:r>
-              <a:rPr sz="1200" b="1" i="0">
-                <a:solidFill>
-                  <a:srgbClr val="3AEDE5"/>
-                </a:solidFill>
-                <a:latin typeface="Alegreya Sans"/>
-              </a:rPr>
-              <a:t>▸ </a:t>
-            </a:r>
-            <a:r>
-              <a:rPr sz="1200" b="1" i="0">
-                <a:solidFill>
-                  <a:srgbClr val="FFFFFF"/>
-                </a:solidFill>
-                <a:latin typeface="Alegreya Sans"/>
-              </a:rPr>
-              <a:t>Groupe BPCE</a:t>
-            </a:r>
-            <a:r>
-              <a:rPr sz="1200" b="0" i="0">
-                <a:solidFill>
-                  <a:srgbClr val="FFFFFF"/>
-                </a:solidFill>
-                <a:latin typeface="Alegreya Sans"/>
-              </a:rPr>
-              <a:t> — Group EU AI Act Project Manager</a:t>
-            </a:r>
-            <a:r>
-              <a:rPr sz="1200" b="0" i="1">
-                <a:solidFill>
-                  <a:srgbClr val="3AEDE5"/>
-                </a:solidFill>
-                <a:latin typeface="Alegreya Sans"/>
-              </a:rPr>
-              <a:t>  (18 mois)</a:t>
-            </a:r>
-          </a:p>
-          <a:p>
-            <a:pPr algn="l" lvl="1">
-              <a:spcAft>
-                <a:spcPts val="100"/>
-              </a:spcAft>
-            </a:pPr>
-            <a:r>
-              <a:rPr sz="1200" b="1" i="0">
-                <a:solidFill>
-                  <a:srgbClr val="3AEDE5"/>
-                </a:solidFill>
-                <a:latin typeface="Alegreya Sans"/>
-              </a:rPr>
-              <a:t>•  </a:t>
-            </a:r>
-            <a:r>
-              <a:rPr sz="1200" b="0" i="0">
-                <a:solidFill>
-                  <a:srgbClr val="FFFFFF"/>
-                </a:solidFill>
-                <a:latin typeface="Alegreya Sans"/>
-              </a:rPr>
-              <a:t>Responsable du programme de mise en conformité EU AI Act du Groupe BPCE et de ses entités (Natixis, Oney, BRED, etc.) : cartographie et éval…</a:t>
-            </a:r>
-          </a:p>
-          <a:p>
-            <a:pPr algn="l" lvl="1">
-              <a:spcAft>
-                <a:spcPts val="100"/>
-              </a:spcAft>
-            </a:pPr>
-            <a:r>
-              <a:rPr sz="1200" b="1" i="0">
-                <a:solidFill>
-                  <a:srgbClr val="3AEDE5"/>
-                </a:solidFill>
-                <a:latin typeface="Alegreya Sans"/>
-              </a:rPr>
-              <a:t>•  </a:t>
-            </a:r>
-            <a:r>
-              <a:rPr sz="1200" b="0" i="0">
-                <a:solidFill>
-                  <a:srgbClr val="FFFFFF"/>
-                </a:solidFill>
-                <a:latin typeface="Alegreya Sans"/>
-              </a:rPr>
-              <a:t>Coordination et accompagnement de plus de 35 décideurs locaux (DPO, Chief Compliance Officer, CDO, etc.) dans la déclinaison du cadre normat…</a:t>
-            </a:r>
-          </a:p>
-          <a:p>
-            <a:pPr algn="l">
-              <a:spcAft>
-                <a:spcPts val="100"/>
-              </a:spcAft>
-            </a:pPr>
-            <a:r>
-              <a:rPr sz="1200" b="1" i="0">
-                <a:solidFill>
-                  <a:srgbClr val="3AEDE5"/>
-                </a:solidFill>
-                <a:latin typeface="Alegreya Sans"/>
-              </a:rPr>
-              <a:t>▸ </a:t>
-            </a:r>
-            <a:r>
-              <a:rPr sz="1200" b="1" i="0">
-                <a:solidFill>
-                  <a:srgbClr val="FFFFFF"/>
-                </a:solidFill>
-                <a:latin typeface="Alegreya Sans"/>
-              </a:rPr>
-              <a:t>Oney / Oneytrust</a:t>
-            </a:r>
-            <a:r>
-              <a:rPr sz="1200" b="0" i="0">
-                <a:solidFill>
-                  <a:srgbClr val="FFFFFF"/>
-                </a:solidFill>
-                <a:latin typeface="Alegreya Sans"/>
-              </a:rPr>
-              <a:t> — Expert Leader — Digital &amp; AI Compliance Officer</a:t>
-            </a:r>
-            <a:r>
-              <a:rPr sz="1200" b="0" i="1">
-                <a:solidFill>
-                  <a:srgbClr val="3AEDE5"/>
-                </a:solidFill>
-                <a:latin typeface="Alegreya Sans"/>
-              </a:rPr>
-              <a:t>  (38 mois)</a:t>
-            </a:r>
-          </a:p>
-          <a:p>
-            <a:pPr algn="l" lvl="1">
-              <a:spcAft>
-                <a:spcPts val="100"/>
-              </a:spcAft>
-            </a:pPr>
-            <a:r>
-              <a:rPr sz="1200" b="1" i="0">
-                <a:solidFill>
-                  <a:srgbClr val="3AEDE5"/>
-                </a:solidFill>
-                <a:latin typeface="Alegreya Sans"/>
-              </a:rPr>
-              <a:t>•  </a:t>
-            </a:r>
-            <a:r>
-              <a:rPr sz="1200" b="0" i="0">
-                <a:solidFill>
-                  <a:srgbClr val="FFFFFF"/>
-                </a:solidFill>
-                <a:latin typeface="Alegreya Sans"/>
-              </a:rPr>
-              <a:t>Structuration du cadre de gouvernance des risques IA avec le Chief Data Officer : inventaire des systèmes, formation des référents métiers e…</a:t>
-            </a:r>
-          </a:p>
-          <a:p>
-            <a:pPr algn="l" lvl="1">
-              <a:spcAft>
-                <a:spcPts val="100"/>
-              </a:spcAft>
-            </a:pPr>
-            <a:r>
-              <a:rPr sz="1200" b="1" i="0">
-                <a:solidFill>
-                  <a:srgbClr val="3AEDE5"/>
-                </a:solidFill>
-                <a:latin typeface="Alegreya Sans"/>
-              </a:rPr>
-              <a:t>•  </a:t>
-            </a:r>
-            <a:r>
-              <a:rPr sz="1200" b="0" i="0">
-                <a:solidFill>
-                  <a:srgbClr val="FFFFFF"/>
-                </a:solidFill>
-                <a:latin typeface="Alegreya Sans"/>
-              </a:rPr>
-              <a:t>Ambassadeur des outils d'IA Générative Groupe auprès de 3 000 collaborateurs Oney.</a:t>
-            </a:r>
-          </a:p>
-          <a:p>
-            <a:pPr algn="l">
-              <a:spcBef>
-                <a:spcPts val="600"/>
-              </a:spcBef>
-              <a:spcAft>
-                <a:spcPts val="300"/>
-              </a:spcAft>
-            </a:pPr>
-            <a:r>
-              <a:rPr sz="1300" b="1" i="0">
-                <a:solidFill>
-                  <a:srgbClr val="3AEDE5"/>
-                </a:solidFill>
-                <a:latin typeface="Alegreya Sans"/>
-              </a:rPr>
-              <a:t>RÉFÉRENCES</a:t>
-            </a:r>
-          </a:p>
-          <a:p>
-            <a:pPr algn="l">
-              <a:spcAft>
-                <a:spcPts val="200"/>
-              </a:spcAft>
-            </a:pPr>
-            <a:r>
-              <a:rPr sz="1200" b="0" i="1">
-                <a:solidFill>
-                  <a:srgbClr val="FFFFFF"/>
-                </a:solidFill>
-                <a:latin typeface="Alegreya Sans"/>
-              </a:rPr>
-              <a:t>Groupe BPCE, Natixis, Oney, Sia Partners, Paris Europlace</a:t>
-            </a:r>
-          </a:p>
-        </p:txBody>
-      </p:sp>
       <p:sp>
         <p:nvSpPr>
           <p:cNvPr id="10" name="TextBox 9"/>
@@ -4381,61 +4370,6 @@
           <a:xfrm>
             <a:off x="0" y="0"/>
             <a:ext cx="12192000" cy="6858000"/>
-          </a:xfrm>
-          <a:prstGeom prst="rect">
-            <a:avLst/>
-          </a:prstGeom>
-          <a:ln>
-            <a:noFill/>
-          </a:ln>
-          <a:effectLst/>
-          <a:gradFill flip="none" rotWithShape="1">
-            <a:gsLst>
-              <a:gs pos="0">
-                <a:srgbClr val="07227A"/>
-              </a:gs>
-              <a:gs pos="85000">
-                <a:srgbClr val="07227A"/>
-              </a:gs>
-              <a:gs pos="100000">
-                <a:srgbClr val="1FCBD9"/>
-              </a:gs>
-            </a:gsLst>
-            <a:lin ang="2700000" scaled="0"/>
-          </a:gradFill>
-        </p:spPr>
-        <p:style>
-          <a:lnRef idx="1">
-            <a:schemeClr val="accent1"/>
-          </a:lnRef>
-          <a:fillRef idx="3">
-            <a:schemeClr val="accent1"/>
-          </a:fillRef>
-          <a:effectRef idx="2">
-            <a:schemeClr val="accent1"/>
-          </a:effectRef>
-          <a:fontRef idx="minor">
-            <a:schemeClr val="lt1"/>
-          </a:fontRef>
-        </p:style>
-        <p:txBody>
-          <a:bodyPr rtlCol="0" anchor="ctr"/>
-          <a:lstStyle/>
-          <a:p>
-            <a:pPr algn="ctr"/>
-          </a:p>
-        </p:txBody>
-      </p:sp>
-      <p:sp>
-        <p:nvSpPr>
-          <p:cNvPr id="3" name="Rectangle 2"/>
-          <p:cNvSpPr/>
-          <p:nvPr/>
-        </p:nvSpPr>
-        <p:spPr>
-          <a:xfrm>
-            <a:off x="0" y="0"/>
-            <a:ext cx="4300000" cy="6858000"/>
           </a:xfrm>
           <a:prstGeom prst="rect">
             <a:avLst/>
@@ -4472,7 +4406,1137 @@
       </p:sp>
       <p:sp>
         <p:nvSpPr>
-          <p:cNvPr id="4" name="Rectangle 3"/>
+          <p:cNvPr id="3" name="Rectangle 2"/>
+          <p:cNvSpPr/>
+          <p:nvPr/>
+        </p:nvSpPr>
+        <p:spPr>
+          <a:xfrm>
+            <a:off x="4300000" y="0"/>
+            <a:ext cx="15000" cy="6858000"/>
+          </a:xfrm>
+          <a:prstGeom prst="rect">
+            <a:avLst/>
+          </a:prstGeom>
+          <a:solidFill>
+            <a:srgbClr val="3AEDE5"/>
+          </a:solidFill>
+          <a:ln>
+            <a:noFill/>
+          </a:ln>
+          <a:effectLst/>
+        </p:spPr>
+        <p:style>
+          <a:lnRef idx="1">
+            <a:schemeClr val="accent1"/>
+          </a:lnRef>
+          <a:fillRef idx="3">
+            <a:schemeClr val="accent1"/>
+          </a:fillRef>
+          <a:effectRef idx="2">
+            <a:schemeClr val="accent1"/>
+          </a:effectRef>
+          <a:fontRef idx="minor">
+            <a:schemeClr val="lt1"/>
+          </a:fontRef>
+        </p:style>
+        <p:txBody>
+          <a:bodyPr rtlCol="0" anchor="ctr"/>
+          <a:lstStyle/>
+          <a:p>
+            <a:pPr algn="ctr"/>
+          </a:p>
+        </p:txBody>
+      </p:sp>
+      <p:pic>
+        <p:nvPicPr>
+          <p:cNvPr id="4" name="Picture 3" descr="inside_circle_logo.png"/>
+          <p:cNvPicPr>
+            <a:picLocks noChangeAspect="1"/>
+          </p:cNvPicPr>
+          <p:nvPr/>
+        </p:nvPicPr>
+        <p:blipFill>
+          <a:blip r:embed="rId2"/>
+          <a:stretch>
+            <a:fillRect/>
+          </a:stretch>
+        </p:blipFill>
+        <p:spPr>
+          <a:xfrm>
+            <a:off x="10660000" y="130000"/>
+            <a:ext cx="1302000" cy="420000"/>
+          </a:xfrm>
+          <a:prstGeom prst="rect">
+            <a:avLst/>
+          </a:prstGeom>
+        </p:spPr>
+      </p:pic>
+      <p:sp>
+        <p:nvSpPr>
+          <p:cNvPr id="5" name="TextBox 4"/>
+          <p:cNvSpPr txBox="1"/>
+          <p:nvPr/>
+        </p:nvSpPr>
+        <p:spPr>
+          <a:xfrm>
+            <a:off x="228600" y="260000"/>
+            <a:ext cx="3842800" cy="800000"/>
+          </a:xfrm>
+          <a:prstGeom prst="rect">
+            <a:avLst/>
+          </a:prstGeom>
+          <a:noFill/>
+        </p:spPr>
+        <p:txBody>
+          <a:bodyPr wrap="square" lIns="0" rIns="0" tIns="0" bIns="0">
+            <a:spAutoFit/>
+          </a:bodyPr>
+          <a:lstStyle/>
+          <a:p>
+            <a:pPr algn="l"/>
+            <a:r>
+              <a:rPr sz="4800" b="1" i="0">
+                <a:solidFill>
+                  <a:srgbClr val="3AEDE5"/>
+                </a:solidFill>
+                <a:latin typeface="Alegreya Sans"/>
+              </a:rPr>
+              <a:t>A.P.</a:t>
+            </a:r>
+          </a:p>
+        </p:txBody>
+      </p:sp>
+      <p:sp>
+        <p:nvSpPr>
+          <p:cNvPr id="6" name="TextBox 5"/>
+          <p:cNvSpPr txBox="1"/>
+          <p:nvPr/>
+        </p:nvSpPr>
+        <p:spPr>
+          <a:xfrm>
+            <a:off x="4528600" y="300000"/>
+            <a:ext cx="5963400" cy="800000"/>
+          </a:xfrm>
+          <a:prstGeom prst="rect">
+            <a:avLst/>
+          </a:prstGeom>
+          <a:noFill/>
+        </p:spPr>
+        <p:txBody>
+          <a:bodyPr wrap="square" lIns="0" rIns="0" tIns="0" bIns="0">
+            <a:spAutoFit/>
+          </a:bodyPr>
+          <a:lstStyle/>
+          <a:p>
+            <a:r>
+              <a:rPr sz="2400" b="1" i="0">
+                <a:solidFill>
+                  <a:srgbClr val="FFFFFF"/>
+                </a:solidFill>
+                <a:latin typeface="Alegreya Sans"/>
+              </a:rPr>
+              <a:t>AI Governance, AI Risk &amp; EU AI Act Specialist</a:t>
+            </a:r>
+          </a:p>
+          <a:p>
+            <a:pPr>
+              <a:spcBef>
+                <a:spcPts val="200"/>
+              </a:spcBef>
+            </a:pPr>
+            <a:r>
+              <a:rPr sz="1500" b="0" i="1">
+                <a:solidFill>
+                  <a:srgbClr val="3AEDE5"/>
+                </a:solidFill>
+                <a:latin typeface="Alegreya Sans"/>
+              </a:rPr>
+              <a:t>AI Governance &amp; Regulatory Compliance — Financial Services</a:t>
+            </a:r>
+          </a:p>
+        </p:txBody>
+      </p:sp>
+      <p:sp>
+        <p:nvSpPr>
+          <p:cNvPr id="7" name="TextBox 6"/>
+          <p:cNvSpPr txBox="1"/>
+          <p:nvPr/>
+        </p:nvSpPr>
+        <p:spPr>
+          <a:xfrm>
+            <a:off x="228600" y="1180000"/>
+            <a:ext cx="3842800" cy="5318000"/>
+          </a:xfrm>
+          <a:prstGeom prst="rect">
+            <a:avLst/>
+          </a:prstGeom>
+          <a:noFill/>
+        </p:spPr>
+        <p:txBody>
+          <a:bodyPr wrap="square" lIns="0" rIns="0" tIns="0" bIns="0">
+            <a:spAutoFit/>
+          </a:bodyPr>
+          <a:lstStyle/>
+          <a:p>
+            <a:pPr algn="l">
+              <a:spcAft>
+                <a:spcPts val="300"/>
+              </a:spcAft>
+            </a:pPr>
+            <a:r>
+              <a:rPr sz="1300" b="1" i="0">
+                <a:solidFill>
+                  <a:srgbClr val="3AEDE5"/>
+                </a:solidFill>
+                <a:latin typeface="Alegreya Sans"/>
+              </a:rPr>
+              <a:t>MAIN AREAS OF EXPERTISE</a:t>
+            </a:r>
+          </a:p>
+          <a:p>
+            <a:pPr algn="l">
+              <a:spcAft>
+                <a:spcPts val="100"/>
+              </a:spcAft>
+            </a:pPr>
+            <a:r>
+              <a:rPr sz="1200" b="1" i="0">
+                <a:solidFill>
+                  <a:srgbClr val="3AEDE5"/>
+                </a:solidFill>
+                <a:latin typeface="Alegreya Sans"/>
+              </a:rPr>
+              <a:t>•  </a:t>
+            </a:r>
+            <a:r>
+              <a:rPr sz="1200" b="0" i="0">
+                <a:solidFill>
+                  <a:srgbClr val="FFFFFF"/>
+                </a:solidFill>
+                <a:latin typeface="Alegreya Sans"/>
+              </a:rPr>
+              <a:t>AI Governance</a:t>
+            </a:r>
+          </a:p>
+          <a:p>
+            <a:pPr algn="l">
+              <a:spcAft>
+                <a:spcPts val="100"/>
+              </a:spcAft>
+            </a:pPr>
+            <a:r>
+              <a:rPr sz="1200" b="1" i="0">
+                <a:solidFill>
+                  <a:srgbClr val="3AEDE5"/>
+                </a:solidFill>
+                <a:latin typeface="Alegreya Sans"/>
+              </a:rPr>
+              <a:t>•  </a:t>
+            </a:r>
+            <a:r>
+              <a:rPr sz="1200" b="0" i="0">
+                <a:solidFill>
+                  <a:srgbClr val="FFFFFF"/>
+                </a:solidFill>
+                <a:latin typeface="Alegreya Sans"/>
+              </a:rPr>
+              <a:t>AI Risk Management</a:t>
+            </a:r>
+          </a:p>
+          <a:p>
+            <a:pPr algn="l">
+              <a:spcAft>
+                <a:spcPts val="100"/>
+              </a:spcAft>
+            </a:pPr>
+            <a:r>
+              <a:rPr sz="1200" b="1" i="0">
+                <a:solidFill>
+                  <a:srgbClr val="3AEDE5"/>
+                </a:solidFill>
+                <a:latin typeface="Alegreya Sans"/>
+              </a:rPr>
+              <a:t>•  </a:t>
+            </a:r>
+            <a:r>
+              <a:rPr sz="1200" b="0" i="0">
+                <a:solidFill>
+                  <a:srgbClr val="FFFFFF"/>
+                </a:solidFill>
+                <a:latin typeface="Alegreya Sans"/>
+              </a:rPr>
+              <a:t>EU AI Act</a:t>
+            </a:r>
+          </a:p>
+          <a:p>
+            <a:pPr algn="l">
+              <a:spcAft>
+                <a:spcPts val="100"/>
+              </a:spcAft>
+            </a:pPr>
+            <a:r>
+              <a:rPr sz="1200" b="1" i="0">
+                <a:solidFill>
+                  <a:srgbClr val="3AEDE5"/>
+                </a:solidFill>
+                <a:latin typeface="Alegreya Sans"/>
+              </a:rPr>
+              <a:t>•  </a:t>
+            </a:r>
+            <a:r>
+              <a:rPr sz="1200" b="0" i="0">
+                <a:solidFill>
+                  <a:srgbClr val="FFFFFF"/>
+                </a:solidFill>
+                <a:latin typeface="Alegreya Sans"/>
+              </a:rPr>
+              <a:t>Digital Compliance</a:t>
+            </a:r>
+          </a:p>
+          <a:p>
+            <a:pPr algn="l">
+              <a:spcAft>
+                <a:spcPts val="100"/>
+              </a:spcAft>
+            </a:pPr>
+            <a:r>
+              <a:rPr sz="1200" b="1" i="0">
+                <a:solidFill>
+                  <a:srgbClr val="3AEDE5"/>
+                </a:solidFill>
+                <a:latin typeface="Alegreya Sans"/>
+              </a:rPr>
+              <a:t>•  </a:t>
+            </a:r>
+            <a:r>
+              <a:rPr sz="1200" b="0" i="0">
+                <a:solidFill>
+                  <a:srgbClr val="FFFFFF"/>
+                </a:solidFill>
+                <a:latin typeface="Alegreya Sans"/>
+              </a:rPr>
+              <a:t>Regulatory Strategy</a:t>
+            </a:r>
+          </a:p>
+          <a:p>
+            <a:pPr algn="l">
+              <a:spcBef>
+                <a:spcPts val="600"/>
+              </a:spcBef>
+              <a:spcAft>
+                <a:spcPts val="300"/>
+              </a:spcAft>
+            </a:pPr>
+            <a:r>
+              <a:rPr sz="1300" b="1" i="0">
+                <a:solidFill>
+                  <a:srgbClr val="3AEDE5"/>
+                </a:solidFill>
+                <a:latin typeface="Alegreya Sans"/>
+              </a:rPr>
+              <a:t>LANGUAGES</a:t>
+            </a:r>
+          </a:p>
+          <a:p>
+            <a:pPr algn="l">
+              <a:spcAft>
+                <a:spcPts val="100"/>
+              </a:spcAft>
+            </a:pPr>
+            <a:r>
+              <a:rPr sz="1200" b="1" i="0">
+                <a:solidFill>
+                  <a:srgbClr val="3AEDE5"/>
+                </a:solidFill>
+                <a:latin typeface="Alegreya Sans"/>
+              </a:rPr>
+              <a:t>•  </a:t>
+            </a:r>
+            <a:r>
+              <a:rPr sz="1200" b="0" i="0">
+                <a:solidFill>
+                  <a:srgbClr val="FFFFFF"/>
+                </a:solidFill>
+                <a:latin typeface="Alegreya Sans"/>
+              </a:rPr>
+              <a:t>French — Native</a:t>
+            </a:r>
+          </a:p>
+          <a:p>
+            <a:pPr algn="l">
+              <a:spcAft>
+                <a:spcPts val="100"/>
+              </a:spcAft>
+            </a:pPr>
+            <a:r>
+              <a:rPr sz="1200" b="1" i="0">
+                <a:solidFill>
+                  <a:srgbClr val="3AEDE5"/>
+                </a:solidFill>
+                <a:latin typeface="Alegreya Sans"/>
+              </a:rPr>
+              <a:t>•  </a:t>
+            </a:r>
+            <a:r>
+              <a:rPr sz="1200" b="0" i="0">
+                <a:solidFill>
+                  <a:srgbClr val="FFFFFF"/>
+                </a:solidFill>
+                <a:latin typeface="Alegreya Sans"/>
+              </a:rPr>
+              <a:t>English — TOEIC 955/990</a:t>
+            </a:r>
+          </a:p>
+          <a:p>
+            <a:pPr algn="l">
+              <a:spcBef>
+                <a:spcPts val="600"/>
+              </a:spcBef>
+              <a:spcAft>
+                <a:spcPts val="300"/>
+              </a:spcAft>
+            </a:pPr>
+            <a:r>
+              <a:rPr sz="1300" b="1" i="0">
+                <a:solidFill>
+                  <a:srgbClr val="3AEDE5"/>
+                </a:solidFill>
+                <a:latin typeface="Alegreya Sans"/>
+              </a:rPr>
+              <a:t>EDUCATION &amp; CERTIFICATIONS</a:t>
+            </a:r>
+          </a:p>
+          <a:p>
+            <a:pPr algn="l">
+              <a:spcAft>
+                <a:spcPts val="100"/>
+              </a:spcAft>
+            </a:pPr>
+            <a:r>
+              <a:rPr sz="1200" b="1" i="0">
+                <a:solidFill>
+                  <a:srgbClr val="3AEDE5"/>
+                </a:solidFill>
+                <a:latin typeface="Alegreya Sans"/>
+              </a:rPr>
+              <a:t>2024  </a:t>
+            </a:r>
+            <a:r>
+              <a:rPr sz="1200" b="1" i="0">
+                <a:solidFill>
+                  <a:srgbClr val="FFFFFF"/>
+                </a:solidFill>
+                <a:latin typeface="Alegreya Sans"/>
+              </a:rPr>
+              <a:t>EDHEC Business School</a:t>
+            </a:r>
+          </a:p>
+          <a:p>
+            <a:pPr algn="l">
+              <a:spcAft>
+                <a:spcPts val="300"/>
+              </a:spcAft>
+            </a:pPr>
+            <a:r>
+              <a:rPr sz="1200" b="0" i="1">
+                <a:solidFill>
+                  <a:srgbClr val="CCD6E8"/>
+                </a:solidFill>
+                <a:latin typeface="Alegreya Sans"/>
+              </a:rPr>
+              <a:t>Digital Ethics Officer certification (wi…</a:t>
+            </a:r>
+          </a:p>
+          <a:p>
+            <a:pPr algn="l">
+              <a:spcAft>
+                <a:spcPts val="100"/>
+              </a:spcAft>
+            </a:pPr>
+            <a:r>
+              <a:rPr sz="1200" b="1" i="0">
+                <a:solidFill>
+                  <a:srgbClr val="3AEDE5"/>
+                </a:solidFill>
+                <a:latin typeface="Alegreya Sans"/>
+              </a:rPr>
+              <a:t>2015 — 2020  </a:t>
+            </a:r>
+            <a:r>
+              <a:rPr sz="1200" b="1" i="0">
+                <a:solidFill>
+                  <a:srgbClr val="FFFFFF"/>
+                </a:solidFill>
+                <a:latin typeface="Alegreya Sans"/>
+              </a:rPr>
+              <a:t>Sciences Po Saint-Germain-en-Laye</a:t>
+            </a:r>
+          </a:p>
+          <a:p>
+            <a:pPr algn="l">
+              <a:spcAft>
+                <a:spcPts val="300"/>
+              </a:spcAft>
+            </a:pPr>
+            <a:r>
+              <a:rPr sz="1200" b="0" i="1">
+                <a:solidFill>
+                  <a:srgbClr val="CCD6E8"/>
+                </a:solidFill>
+                <a:latin typeface="Alegreya Sans"/>
+              </a:rPr>
+              <a:t>Master's in European &amp; International Aff…</a:t>
+            </a:r>
+          </a:p>
+          <a:p>
+            <a:pPr algn="l">
+              <a:spcAft>
+                <a:spcPts val="100"/>
+              </a:spcAft>
+            </a:pPr>
+            <a:r>
+              <a:rPr sz="1200" b="1" i="0">
+                <a:solidFill>
+                  <a:srgbClr val="3AEDE5"/>
+                </a:solidFill>
+                <a:latin typeface="Alegreya Sans"/>
+              </a:rPr>
+              <a:t>2020  </a:t>
+            </a:r>
+            <a:r>
+              <a:rPr sz="1200" b="1" i="0">
+                <a:solidFill>
+                  <a:srgbClr val="FFFFFF"/>
+                </a:solidFill>
+                <a:latin typeface="Alegreya Sans"/>
+              </a:rPr>
+              <a:t>University of Versailles Saint-Quentin-en-Yvelines</a:t>
+            </a:r>
+          </a:p>
+          <a:p>
+            <a:pPr algn="l">
+              <a:spcAft>
+                <a:spcPts val="300"/>
+              </a:spcAft>
+            </a:pPr>
+            <a:r>
+              <a:rPr sz="1200" b="0" i="1">
+                <a:solidFill>
+                  <a:srgbClr val="CCD6E8"/>
+                </a:solidFill>
+                <a:latin typeface="Alegreya Sans"/>
+              </a:rPr>
+              <a:t>Master's in Influence &amp; Public Affairs (…</a:t>
+            </a:r>
+          </a:p>
+          <a:p>
+            <a:pPr algn="l">
+              <a:spcBef>
+                <a:spcPts val="600"/>
+              </a:spcBef>
+              <a:spcAft>
+                <a:spcPts val="300"/>
+              </a:spcAft>
+            </a:pPr>
+            <a:r>
+              <a:rPr sz="1300" b="1" i="0">
+                <a:solidFill>
+                  <a:srgbClr val="3AEDE5"/>
+                </a:solidFill>
+                <a:latin typeface="Alegreya Sans"/>
+              </a:rPr>
+              <a:t>ENGAGEMENTS &amp; ACHIEVEMENTS</a:t>
+            </a:r>
+          </a:p>
+          <a:p>
+            <a:pPr algn="l">
+              <a:spcAft>
+                <a:spcPts val="200"/>
+              </a:spcAft>
+            </a:pPr>
+            <a:r>
+              <a:rPr sz="1200" b="1" i="0">
+                <a:solidFill>
+                  <a:srgbClr val="3AEDE5"/>
+                </a:solidFill>
+                <a:latin typeface="Alegreya Sans"/>
+              </a:rPr>
+              <a:t>• </a:t>
+            </a:r>
+            <a:r>
+              <a:rPr sz="1200" b="1" i="0">
+                <a:solidFill>
+                  <a:srgbClr val="FFFFFF"/>
+                </a:solidFill>
+                <a:latin typeface="Alegreya Sans"/>
+              </a:rPr>
+              <a:t>Digital Council Advisor</a:t>
+            </a:r>
+            <a:r>
+              <a:rPr sz="1200" b="0" i="1">
+                <a:solidFill>
+                  <a:srgbClr val="CCD6E8"/>
+                </a:solidFill>
+                <a:latin typeface="Alegreya Sans"/>
+              </a:rPr>
+              <a:t> — Volunteer at a local Digital Counci…</a:t>
+            </a:r>
+          </a:p>
+          <a:p>
+            <a:pPr algn="l">
+              <a:spcAft>
+                <a:spcPts val="200"/>
+              </a:spcAft>
+            </a:pPr>
+            <a:r>
+              <a:rPr sz="1200" b="1" i="0">
+                <a:solidFill>
+                  <a:srgbClr val="3AEDE5"/>
+                </a:solidFill>
+                <a:latin typeface="Alegreya Sans"/>
+              </a:rPr>
+              <a:t>• </a:t>
+            </a:r>
+            <a:r>
+              <a:rPr sz="1200" b="1" i="0">
+                <a:solidFill>
+                  <a:srgbClr val="FFFFFF"/>
+                </a:solidFill>
+                <a:latin typeface="Alegreya Sans"/>
+              </a:rPr>
+              <a:t>Podcaster</a:t>
+            </a:r>
+            <a:r>
+              <a:rPr sz="1200" b="0" i="1">
+                <a:solidFill>
+                  <a:srgbClr val="CCD6E8"/>
+                </a:solidFill>
+                <a:latin typeface="Alegreya Sans"/>
+              </a:rPr>
+              <a:t> — Creator and host of an AI podcast f…</a:t>
+            </a:r>
+          </a:p>
+          <a:p>
+            <a:pPr algn="l">
+              <a:spcAft>
+                <a:spcPts val="200"/>
+              </a:spcAft>
+            </a:pPr>
+            <a:r>
+              <a:rPr sz="1200" b="1" i="0">
+                <a:solidFill>
+                  <a:srgbClr val="3AEDE5"/>
+                </a:solidFill>
+                <a:latin typeface="Alegreya Sans"/>
+              </a:rPr>
+              <a:t>• </a:t>
+            </a:r>
+            <a:r>
+              <a:rPr sz="1200" b="1" i="0">
+                <a:solidFill>
+                  <a:srgbClr val="FFFFFF"/>
+                </a:solidFill>
+                <a:latin typeface="Alegreya Sans"/>
+              </a:rPr>
+              <a:t>Speaker</a:t>
+            </a:r>
+            <a:r>
+              <a:rPr sz="1200" b="0" i="1">
+                <a:solidFill>
+                  <a:srgbClr val="CCD6E8"/>
+                </a:solidFill>
+                <a:latin typeface="Alegreya Sans"/>
+              </a:rPr>
+              <a:t> — Speaker on AI and its challenges (b…</a:t>
+            </a:r>
+          </a:p>
+        </p:txBody>
+      </p:sp>
+      <p:sp>
+        <p:nvSpPr>
+          <p:cNvPr id="8" name="TextBox 7"/>
+          <p:cNvSpPr txBox="1"/>
+          <p:nvPr/>
+        </p:nvSpPr>
+        <p:spPr>
+          <a:xfrm>
+            <a:off x="4528600" y="1180000"/>
+            <a:ext cx="7434800" cy="5318000"/>
+          </a:xfrm>
+          <a:prstGeom prst="rect">
+            <a:avLst/>
+          </a:prstGeom>
+          <a:noFill/>
+        </p:spPr>
+        <p:txBody>
+          <a:bodyPr wrap="square" lIns="0" rIns="0" tIns="0" bIns="0">
+            <a:spAutoFit/>
+          </a:bodyPr>
+          <a:lstStyle/>
+          <a:p>
+            <a:pPr algn="l">
+              <a:spcAft>
+                <a:spcPts val="300"/>
+              </a:spcAft>
+            </a:pPr>
+            <a:r>
+              <a:rPr sz="1300" b="1" i="0">
+                <a:solidFill>
+                  <a:srgbClr val="3AEDE5"/>
+                </a:solidFill>
+                <a:latin typeface="Alegreya Sans"/>
+              </a:rPr>
+              <a:t>SUMMARY</a:t>
+            </a:r>
+          </a:p>
+          <a:p>
+            <a:pPr algn="l">
+              <a:spcAft>
+                <a:spcPts val="300"/>
+              </a:spcAft>
+            </a:pPr>
+            <a:r>
+              <a:rPr sz="1200" b="0" i="0">
+                <a:solidFill>
+                  <a:srgbClr val="FFFFFF"/>
+                </a:solidFill>
+                <a:latin typeface="Alegreya Sans"/>
+              </a:rPr>
+              <a:t>Expert in AI Governance, AI Risk Management and regulatory compliance, with nearly 8 years of experience advising major banking institutions. Specialised in the EU AI Act and the international rollout…</a:t>
+            </a:r>
+          </a:p>
+          <a:p>
+            <a:pPr algn="l">
+              <a:spcBef>
+                <a:spcPts val="600"/>
+              </a:spcBef>
+              <a:spcAft>
+                <a:spcPts val="300"/>
+              </a:spcAft>
+            </a:pPr>
+            <a:r>
+              <a:rPr sz="1300" b="1" i="0">
+                <a:solidFill>
+                  <a:srgbClr val="3AEDE5"/>
+                </a:solidFill>
+                <a:latin typeface="Alegreya Sans"/>
+              </a:rPr>
+              <a:t>PROFESSIONAL EXPERIENCE</a:t>
+            </a:r>
+          </a:p>
+          <a:p>
+            <a:pPr algn="l">
+              <a:spcAft>
+                <a:spcPts val="100"/>
+              </a:spcAft>
+            </a:pPr>
+            <a:r>
+              <a:rPr sz="1200" b="1" i="0">
+                <a:solidFill>
+                  <a:srgbClr val="3AEDE5"/>
+                </a:solidFill>
+                <a:latin typeface="Alegreya Sans"/>
+              </a:rPr>
+              <a:t>▸ </a:t>
+            </a:r>
+            <a:r>
+              <a:rPr sz="1200" b="1" i="0">
+                <a:solidFill>
+                  <a:srgbClr val="FFFFFF"/>
+                </a:solidFill>
+                <a:latin typeface="Alegreya Sans"/>
+              </a:rPr>
+              <a:t>Top-tier European CIB</a:t>
+            </a:r>
+            <a:r>
+              <a:rPr sz="1200" b="0" i="0">
+                <a:solidFill>
+                  <a:srgbClr val="FFFFFF"/>
+                </a:solidFill>
+                <a:latin typeface="Alegreya Sans"/>
+              </a:rPr>
+              <a:t> — AI Compliance Lead (consultant)</a:t>
+            </a:r>
+            <a:r>
+              <a:rPr sz="1200" b="0" i="1">
+                <a:solidFill>
+                  <a:srgbClr val="3AEDE5"/>
+                </a:solidFill>
+                <a:latin typeface="Alegreya Sans"/>
+              </a:rPr>
+              <a:t>  (8 months — ongoing)</a:t>
+            </a:r>
+          </a:p>
+          <a:p>
+            <a:pPr algn="l" lvl="1">
+              <a:spcAft>
+                <a:spcPts val="100"/>
+              </a:spcAft>
+            </a:pPr>
+            <a:r>
+              <a:rPr sz="1200" b="1" i="0">
+                <a:solidFill>
+                  <a:srgbClr val="3AEDE5"/>
+                </a:solidFill>
+                <a:latin typeface="Alegreya Sans"/>
+              </a:rPr>
+              <a:t>•  </a:t>
+            </a:r>
+            <a:r>
+              <a:rPr sz="1200" b="0" i="0">
+                <a:solidFill>
+                  <a:srgbClr val="FFFFFF"/>
+                </a:solidFill>
+                <a:latin typeface="Alegreya Sans"/>
+              </a:rPr>
+              <a:t>Finalisation and rollout of the AI risk governance framework: internal policies, risk mapping, committee design, coordination of support and…</a:t>
+            </a:r>
+          </a:p>
+          <a:p>
+            <a:pPr algn="l" lvl="1">
+              <a:spcAft>
+                <a:spcPts val="100"/>
+              </a:spcAft>
+            </a:pPr>
+            <a:r>
+              <a:rPr sz="1200" b="1" i="0">
+                <a:solidFill>
+                  <a:srgbClr val="3AEDE5"/>
+                </a:solidFill>
+                <a:latin typeface="Alegreya Sans"/>
+              </a:rPr>
+              <a:t>•  </a:t>
+            </a:r>
+            <a:r>
+              <a:rPr sz="1200" b="0" i="0">
+                <a:solidFill>
+                  <a:srgbClr val="FFFFFF"/>
+                </a:solidFill>
+                <a:latin typeface="Alegreya Sans"/>
+              </a:rPr>
+              <a:t>Operational pilot of AI governance: identification, assessment, prioritisation, validation and remediation of AI systems.</a:t>
+            </a:r>
+          </a:p>
+          <a:p>
+            <a:pPr algn="l">
+              <a:spcAft>
+                <a:spcPts val="100"/>
+              </a:spcAft>
+            </a:pPr>
+            <a:r>
+              <a:rPr sz="1200" b="1" i="0">
+                <a:solidFill>
+                  <a:srgbClr val="3AEDE5"/>
+                </a:solidFill>
+                <a:latin typeface="Alegreya Sans"/>
+              </a:rPr>
+              <a:t>▸ </a:t>
+            </a:r>
+            <a:r>
+              <a:rPr sz="1200" b="1" i="0">
+                <a:solidFill>
+                  <a:srgbClr val="FFFFFF"/>
+                </a:solidFill>
+                <a:latin typeface="Alegreya Sans"/>
+              </a:rPr>
+              <a:t>Sia Partners</a:t>
+            </a:r>
+            <a:r>
+              <a:rPr sz="1200" b="0" i="0">
+                <a:solidFill>
+                  <a:srgbClr val="FFFFFF"/>
+                </a:solidFill>
+                <a:latin typeface="Alegreya Sans"/>
+              </a:rPr>
+              <a:t> — Associate Manager</a:t>
+            </a:r>
+            <a:r>
+              <a:rPr sz="1200" b="0" i="1">
+                <a:solidFill>
+                  <a:srgbClr val="3AEDE5"/>
+                </a:solidFill>
+                <a:latin typeface="Alegreya Sans"/>
+              </a:rPr>
+              <a:t>  (10 months — ongoing)</a:t>
+            </a:r>
+          </a:p>
+          <a:p>
+            <a:pPr algn="l" lvl="1">
+              <a:spcAft>
+                <a:spcPts val="100"/>
+              </a:spcAft>
+            </a:pPr>
+            <a:r>
+              <a:rPr sz="1200" b="1" i="0">
+                <a:solidFill>
+                  <a:srgbClr val="3AEDE5"/>
+                </a:solidFill>
+                <a:latin typeface="Alegreya Sans"/>
+              </a:rPr>
+              <a:t>•  </a:t>
+            </a:r>
+            <a:r>
+              <a:rPr sz="1200" b="0" i="0">
+                <a:solidFill>
+                  <a:srgbClr val="FFFFFF"/>
+                </a:solidFill>
+                <a:latin typeface="Alegreya Sans"/>
+              </a:rPr>
+              <a:t>Head of the AI Risk Management offering: RFP coordination, strategic and regulatory watch, business development and financial-ecosystem anim…</a:t>
+            </a:r>
+          </a:p>
+          <a:p>
+            <a:pPr algn="l" lvl="1">
+              <a:spcAft>
+                <a:spcPts val="100"/>
+              </a:spcAft>
+            </a:pPr>
+            <a:r>
+              <a:rPr sz="1200" b="1" i="0">
+                <a:solidFill>
+                  <a:srgbClr val="3AEDE5"/>
+                </a:solidFill>
+                <a:latin typeface="Alegreya Sans"/>
+              </a:rPr>
+              <a:t>•  </a:t>
+            </a:r>
+            <a:r>
+              <a:rPr sz="1200" b="0" i="0">
+                <a:solidFill>
+                  <a:srgbClr val="FFFFFF"/>
+                </a:solidFill>
+                <a:latin typeface="Alegreya Sans"/>
+              </a:rPr>
+              <a:t>Lead of the AI working group at Paris Europlace association (40+ senior financial-sector representatives): position papers, EU consultation…</a:t>
+            </a:r>
+          </a:p>
+          <a:p>
+            <a:pPr algn="l">
+              <a:spcAft>
+                <a:spcPts val="100"/>
+              </a:spcAft>
+            </a:pPr>
+            <a:r>
+              <a:rPr sz="1200" b="1" i="0">
+                <a:solidFill>
+                  <a:srgbClr val="3AEDE5"/>
+                </a:solidFill>
+                <a:latin typeface="Alegreya Sans"/>
+              </a:rPr>
+              <a:t>▸ </a:t>
+            </a:r>
+            <a:r>
+              <a:rPr sz="1200" b="1" i="0">
+                <a:solidFill>
+                  <a:srgbClr val="FFFFFF"/>
+                </a:solidFill>
+                <a:latin typeface="Alegreya Sans"/>
+              </a:rPr>
+              <a:t>Groupe BPCE</a:t>
+            </a:r>
+            <a:r>
+              <a:rPr sz="1200" b="0" i="0">
+                <a:solidFill>
+                  <a:srgbClr val="FFFFFF"/>
+                </a:solidFill>
+                <a:latin typeface="Alegreya Sans"/>
+              </a:rPr>
+              <a:t> — Group EU AI Act Project Manager</a:t>
+            </a:r>
+            <a:r>
+              <a:rPr sz="1200" b="0" i="1">
+                <a:solidFill>
+                  <a:srgbClr val="3AEDE5"/>
+                </a:solidFill>
+                <a:latin typeface="Alegreya Sans"/>
+              </a:rPr>
+              <a:t>  (18 months)</a:t>
+            </a:r>
+          </a:p>
+          <a:p>
+            <a:pPr algn="l" lvl="1">
+              <a:spcAft>
+                <a:spcPts val="100"/>
+              </a:spcAft>
+            </a:pPr>
+            <a:r>
+              <a:rPr sz="1200" b="1" i="0">
+                <a:solidFill>
+                  <a:srgbClr val="3AEDE5"/>
+                </a:solidFill>
+                <a:latin typeface="Alegreya Sans"/>
+              </a:rPr>
+              <a:t>•  </a:t>
+            </a:r>
+            <a:r>
+              <a:rPr sz="1200" b="0" i="0">
+                <a:solidFill>
+                  <a:srgbClr val="FFFFFF"/>
+                </a:solidFill>
+                <a:latin typeface="Alegreya Sans"/>
+              </a:rPr>
+              <a:t>Lead of the EU AI Act compliance programme for Groupe BPCE and its entities (Natixis, Oney, BRED, etc.): AI risk mapping and assessment, def…</a:t>
+            </a:r>
+          </a:p>
+          <a:p>
+            <a:pPr algn="l" lvl="1">
+              <a:spcAft>
+                <a:spcPts val="100"/>
+              </a:spcAft>
+            </a:pPr>
+            <a:r>
+              <a:rPr sz="1200" b="1" i="0">
+                <a:solidFill>
+                  <a:srgbClr val="3AEDE5"/>
+                </a:solidFill>
+                <a:latin typeface="Alegreya Sans"/>
+              </a:rPr>
+              <a:t>•  </a:t>
+            </a:r>
+            <a:r>
+              <a:rPr sz="1200" b="0" i="0">
+                <a:solidFill>
+                  <a:srgbClr val="FFFFFF"/>
+                </a:solidFill>
+                <a:latin typeface="Alegreya Sans"/>
+              </a:rPr>
+              <a:t>Coordination and support of 35+ local decision-makers (DPO, Chief Compliance Officer, CDO, etc.) in deploying the Group framework.</a:t>
+            </a:r>
+          </a:p>
+          <a:p>
+            <a:pPr algn="l">
+              <a:spcAft>
+                <a:spcPts val="100"/>
+              </a:spcAft>
+            </a:pPr>
+            <a:r>
+              <a:rPr sz="1200" b="1" i="0">
+                <a:solidFill>
+                  <a:srgbClr val="3AEDE5"/>
+                </a:solidFill>
+                <a:latin typeface="Alegreya Sans"/>
+              </a:rPr>
+              <a:t>▸ </a:t>
+            </a:r>
+            <a:r>
+              <a:rPr sz="1200" b="1" i="0">
+                <a:solidFill>
+                  <a:srgbClr val="FFFFFF"/>
+                </a:solidFill>
+                <a:latin typeface="Alegreya Sans"/>
+              </a:rPr>
+              <a:t>Oney / Oneytrust</a:t>
+            </a:r>
+            <a:r>
+              <a:rPr sz="1200" b="0" i="0">
+                <a:solidFill>
+                  <a:srgbClr val="FFFFFF"/>
+                </a:solidFill>
+                <a:latin typeface="Alegreya Sans"/>
+              </a:rPr>
+              <a:t> — Expert Leader — Digital &amp; AI Compliance Officer</a:t>
+            </a:r>
+            <a:r>
+              <a:rPr sz="1200" b="0" i="1">
+                <a:solidFill>
+                  <a:srgbClr val="3AEDE5"/>
+                </a:solidFill>
+                <a:latin typeface="Alegreya Sans"/>
+              </a:rPr>
+              <a:t>  (38 months)</a:t>
+            </a:r>
+          </a:p>
+          <a:p>
+            <a:pPr algn="l" lvl="1">
+              <a:spcAft>
+                <a:spcPts val="100"/>
+              </a:spcAft>
+            </a:pPr>
+            <a:r>
+              <a:rPr sz="1200" b="1" i="0">
+                <a:solidFill>
+                  <a:srgbClr val="3AEDE5"/>
+                </a:solidFill>
+                <a:latin typeface="Alegreya Sans"/>
+              </a:rPr>
+              <a:t>•  </a:t>
+            </a:r>
+            <a:r>
+              <a:rPr sz="1200" b="0" i="0">
+                <a:solidFill>
+                  <a:srgbClr val="FFFFFF"/>
+                </a:solidFill>
+                <a:latin typeface="Alegreya Sans"/>
+              </a:rPr>
+              <a:t>Built the AI risk governance framework with the Chief Data Officer: systems inventory, training of business reference owners, EU AI Act comp…</a:t>
+            </a:r>
+          </a:p>
+          <a:p>
+            <a:pPr algn="l" lvl="1">
+              <a:spcAft>
+                <a:spcPts val="100"/>
+              </a:spcAft>
+            </a:pPr>
+            <a:r>
+              <a:rPr sz="1200" b="1" i="0">
+                <a:solidFill>
+                  <a:srgbClr val="3AEDE5"/>
+                </a:solidFill>
+                <a:latin typeface="Alegreya Sans"/>
+              </a:rPr>
+              <a:t>•  </a:t>
+            </a:r>
+            <a:r>
+              <a:rPr sz="1200" b="0" i="0">
+                <a:solidFill>
+                  <a:srgbClr val="FFFFFF"/>
+                </a:solidFill>
+                <a:latin typeface="Alegreya Sans"/>
+              </a:rPr>
+              <a:t>Group GenAI tools ambassador to 3,000 Oney employees.</a:t>
+            </a:r>
+          </a:p>
+          <a:p>
+            <a:pPr algn="l">
+              <a:spcBef>
+                <a:spcPts val="600"/>
+              </a:spcBef>
+              <a:spcAft>
+                <a:spcPts val="300"/>
+              </a:spcAft>
+            </a:pPr>
+            <a:r>
+              <a:rPr sz="1300" b="1" i="0">
+                <a:solidFill>
+                  <a:srgbClr val="3AEDE5"/>
+                </a:solidFill>
+                <a:latin typeface="Alegreya Sans"/>
+              </a:rPr>
+              <a:t>MAIN REFERENCES</a:t>
+            </a:r>
+          </a:p>
+          <a:p>
+            <a:pPr algn="l">
+              <a:spcAft>
+                <a:spcPts val="200"/>
+              </a:spcAft>
+            </a:pPr>
+            <a:r>
+              <a:rPr sz="1200" b="0" i="1">
+                <a:solidFill>
+                  <a:srgbClr val="FFFFFF"/>
+                </a:solidFill>
+                <a:latin typeface="Alegreya Sans"/>
+              </a:rPr>
+              <a:t>Groupe BPCE, Natixis, Oney, Sia Partners, Paris Europlace</a:t>
+            </a:r>
+          </a:p>
+        </p:txBody>
+      </p:sp>
+      <p:sp>
+        <p:nvSpPr>
+          <p:cNvPr id="9" name="Rectangle 8"/>
           <p:cNvSpPr/>
           <p:nvPr/>
         </p:nvSpPr>
@@ -4511,1092 +5575,6 @@
           <a:lstStyle/>
           <a:p>
             <a:pPr algn="ctr"/>
-          </a:p>
-        </p:txBody>
-      </p:sp>
-      <p:pic>
-        <p:nvPicPr>
-          <p:cNvPr id="5" name="Picture 4" descr="inside_circle_logo.png"/>
-          <p:cNvPicPr>
-            <a:picLocks noChangeAspect="1"/>
-          </p:cNvPicPr>
-          <p:nvPr/>
-        </p:nvPicPr>
-        <p:blipFill>
-          <a:blip r:embed="rId2"/>
-          <a:stretch>
-            <a:fillRect/>
-          </a:stretch>
-        </p:blipFill>
-        <p:spPr>
-          <a:xfrm>
-            <a:off x="10660000" y="130000"/>
-            <a:ext cx="1302000" cy="420000"/>
-          </a:xfrm>
-          <a:prstGeom prst="rect">
-            <a:avLst/>
-          </a:prstGeom>
-        </p:spPr>
-      </p:pic>
-      <p:sp>
-        <p:nvSpPr>
-          <p:cNvPr id="6" name="TextBox 5"/>
-          <p:cNvSpPr txBox="1"/>
-          <p:nvPr/>
-        </p:nvSpPr>
-        <p:spPr>
-          <a:xfrm>
-            <a:off x="228600" y="260000"/>
-            <a:ext cx="3842800" cy="800000"/>
-          </a:xfrm>
-          <a:prstGeom prst="rect">
-            <a:avLst/>
-          </a:prstGeom>
-          <a:noFill/>
-        </p:spPr>
-        <p:txBody>
-          <a:bodyPr wrap="square" lIns="0" rIns="0" tIns="0" bIns="0">
-            <a:spAutoFit/>
-          </a:bodyPr>
-          <a:lstStyle/>
-          <a:p>
-            <a:pPr algn="l"/>
-            <a:r>
-              <a:rPr sz="4800" b="1" i="0">
-                <a:solidFill>
-                  <a:srgbClr val="3AEDE5"/>
-                </a:solidFill>
-                <a:latin typeface="Alegreya Sans"/>
-              </a:rPr>
-              <a:t>A.P.</a:t>
-            </a:r>
-          </a:p>
-        </p:txBody>
-      </p:sp>
-      <p:sp>
-        <p:nvSpPr>
-          <p:cNvPr id="7" name="TextBox 6"/>
-          <p:cNvSpPr txBox="1"/>
-          <p:nvPr/>
-        </p:nvSpPr>
-        <p:spPr>
-          <a:xfrm>
-            <a:off x="4528600" y="300000"/>
-            <a:ext cx="5963400" cy="800000"/>
-          </a:xfrm>
-          <a:prstGeom prst="rect">
-            <a:avLst/>
-          </a:prstGeom>
-          <a:noFill/>
-        </p:spPr>
-        <p:txBody>
-          <a:bodyPr wrap="square" lIns="0" rIns="0" tIns="0" bIns="0">
-            <a:spAutoFit/>
-          </a:bodyPr>
-          <a:lstStyle/>
-          <a:p>
-            <a:r>
-              <a:rPr sz="2400" b="1" i="0">
-                <a:solidFill>
-                  <a:srgbClr val="FFFFFF"/>
-                </a:solidFill>
-                <a:latin typeface="Alegreya Sans"/>
-              </a:rPr>
-              <a:t>AI Governance, AI Risk &amp; EU AI Act Specialist</a:t>
-            </a:r>
-          </a:p>
-          <a:p>
-            <a:pPr>
-              <a:spcBef>
-                <a:spcPts val="200"/>
-              </a:spcBef>
-            </a:pPr>
-            <a:r>
-              <a:rPr sz="1500" b="0" i="1">
-                <a:solidFill>
-                  <a:srgbClr val="3AEDE5"/>
-                </a:solidFill>
-                <a:latin typeface="Alegreya Sans"/>
-              </a:rPr>
-              <a:t>AI Governance &amp; Regulatory Compliance — Financial Services</a:t>
-            </a:r>
-          </a:p>
-        </p:txBody>
-      </p:sp>
-      <p:sp>
-        <p:nvSpPr>
-          <p:cNvPr id="8" name="TextBox 7"/>
-          <p:cNvSpPr txBox="1"/>
-          <p:nvPr/>
-        </p:nvSpPr>
-        <p:spPr>
-          <a:xfrm>
-            <a:off x="228600" y="1180000"/>
-            <a:ext cx="3842800" cy="5318000"/>
-          </a:xfrm>
-          <a:prstGeom prst="rect">
-            <a:avLst/>
-          </a:prstGeom>
-          <a:noFill/>
-        </p:spPr>
-        <p:txBody>
-          <a:bodyPr wrap="square" lIns="0" rIns="0" tIns="0" bIns="0">
-            <a:spAutoFit/>
-          </a:bodyPr>
-          <a:lstStyle/>
-          <a:p>
-            <a:pPr algn="l">
-              <a:spcAft>
-                <a:spcPts val="300"/>
-              </a:spcAft>
-            </a:pPr>
-            <a:r>
-              <a:rPr sz="1300" b="1" i="0">
-                <a:solidFill>
-                  <a:srgbClr val="3AEDE5"/>
-                </a:solidFill>
-                <a:latin typeface="Alegreya Sans"/>
-              </a:rPr>
-              <a:t>MAIN AREAS OF EXPERTISE</a:t>
-            </a:r>
-          </a:p>
-          <a:p>
-            <a:pPr algn="l">
-              <a:spcAft>
-                <a:spcPts val="100"/>
-              </a:spcAft>
-            </a:pPr>
-            <a:r>
-              <a:rPr sz="1200" b="1" i="0">
-                <a:solidFill>
-                  <a:srgbClr val="3AEDE5"/>
-                </a:solidFill>
-                <a:latin typeface="Alegreya Sans"/>
-              </a:rPr>
-              <a:t>•  </a:t>
-            </a:r>
-            <a:r>
-              <a:rPr sz="1200" b="0" i="0">
-                <a:solidFill>
-                  <a:srgbClr val="FFFFFF"/>
-                </a:solidFill>
-                <a:latin typeface="Alegreya Sans"/>
-              </a:rPr>
-              <a:t>AI Governance</a:t>
-            </a:r>
-          </a:p>
-          <a:p>
-            <a:pPr algn="l">
-              <a:spcAft>
-                <a:spcPts val="100"/>
-              </a:spcAft>
-            </a:pPr>
-            <a:r>
-              <a:rPr sz="1200" b="1" i="0">
-                <a:solidFill>
-                  <a:srgbClr val="3AEDE5"/>
-                </a:solidFill>
-                <a:latin typeface="Alegreya Sans"/>
-              </a:rPr>
-              <a:t>•  </a:t>
-            </a:r>
-            <a:r>
-              <a:rPr sz="1200" b="0" i="0">
-                <a:solidFill>
-                  <a:srgbClr val="FFFFFF"/>
-                </a:solidFill>
-                <a:latin typeface="Alegreya Sans"/>
-              </a:rPr>
-              <a:t>AI Risk Management</a:t>
-            </a:r>
-          </a:p>
-          <a:p>
-            <a:pPr algn="l">
-              <a:spcAft>
-                <a:spcPts val="100"/>
-              </a:spcAft>
-            </a:pPr>
-            <a:r>
-              <a:rPr sz="1200" b="1" i="0">
-                <a:solidFill>
-                  <a:srgbClr val="3AEDE5"/>
-                </a:solidFill>
-                <a:latin typeface="Alegreya Sans"/>
-              </a:rPr>
-              <a:t>•  </a:t>
-            </a:r>
-            <a:r>
-              <a:rPr sz="1200" b="0" i="0">
-                <a:solidFill>
-                  <a:srgbClr val="FFFFFF"/>
-                </a:solidFill>
-                <a:latin typeface="Alegreya Sans"/>
-              </a:rPr>
-              <a:t>EU AI Act</a:t>
-            </a:r>
-          </a:p>
-          <a:p>
-            <a:pPr algn="l">
-              <a:spcAft>
-                <a:spcPts val="100"/>
-              </a:spcAft>
-            </a:pPr>
-            <a:r>
-              <a:rPr sz="1200" b="1" i="0">
-                <a:solidFill>
-                  <a:srgbClr val="3AEDE5"/>
-                </a:solidFill>
-                <a:latin typeface="Alegreya Sans"/>
-              </a:rPr>
-              <a:t>•  </a:t>
-            </a:r>
-            <a:r>
-              <a:rPr sz="1200" b="0" i="0">
-                <a:solidFill>
-                  <a:srgbClr val="FFFFFF"/>
-                </a:solidFill>
-                <a:latin typeface="Alegreya Sans"/>
-              </a:rPr>
-              <a:t>Digital Compliance</a:t>
-            </a:r>
-          </a:p>
-          <a:p>
-            <a:pPr algn="l">
-              <a:spcAft>
-                <a:spcPts val="100"/>
-              </a:spcAft>
-            </a:pPr>
-            <a:r>
-              <a:rPr sz="1200" b="1" i="0">
-                <a:solidFill>
-                  <a:srgbClr val="3AEDE5"/>
-                </a:solidFill>
-                <a:latin typeface="Alegreya Sans"/>
-              </a:rPr>
-              <a:t>•  </a:t>
-            </a:r>
-            <a:r>
-              <a:rPr sz="1200" b="0" i="0">
-                <a:solidFill>
-                  <a:srgbClr val="FFFFFF"/>
-                </a:solidFill>
-                <a:latin typeface="Alegreya Sans"/>
-              </a:rPr>
-              <a:t>Regulatory Strategy</a:t>
-            </a:r>
-          </a:p>
-          <a:p>
-            <a:pPr algn="l">
-              <a:spcBef>
-                <a:spcPts val="600"/>
-              </a:spcBef>
-              <a:spcAft>
-                <a:spcPts val="300"/>
-              </a:spcAft>
-            </a:pPr>
-            <a:r>
-              <a:rPr sz="1300" b="1" i="0">
-                <a:solidFill>
-                  <a:srgbClr val="3AEDE5"/>
-                </a:solidFill>
-                <a:latin typeface="Alegreya Sans"/>
-              </a:rPr>
-              <a:t>LANGUAGES</a:t>
-            </a:r>
-          </a:p>
-          <a:p>
-            <a:pPr algn="l">
-              <a:spcAft>
-                <a:spcPts val="100"/>
-              </a:spcAft>
-            </a:pPr>
-            <a:r>
-              <a:rPr sz="1200" b="1" i="0">
-                <a:solidFill>
-                  <a:srgbClr val="3AEDE5"/>
-                </a:solidFill>
-                <a:latin typeface="Alegreya Sans"/>
-              </a:rPr>
-              <a:t>•  </a:t>
-            </a:r>
-            <a:r>
-              <a:rPr sz="1200" b="0" i="0">
-                <a:solidFill>
-                  <a:srgbClr val="FFFFFF"/>
-                </a:solidFill>
-                <a:latin typeface="Alegreya Sans"/>
-              </a:rPr>
-              <a:t>French — Native</a:t>
-            </a:r>
-          </a:p>
-          <a:p>
-            <a:pPr algn="l">
-              <a:spcAft>
-                <a:spcPts val="100"/>
-              </a:spcAft>
-            </a:pPr>
-            <a:r>
-              <a:rPr sz="1200" b="1" i="0">
-                <a:solidFill>
-                  <a:srgbClr val="3AEDE5"/>
-                </a:solidFill>
-                <a:latin typeface="Alegreya Sans"/>
-              </a:rPr>
-              <a:t>•  </a:t>
-            </a:r>
-            <a:r>
-              <a:rPr sz="1200" b="0" i="0">
-                <a:solidFill>
-                  <a:srgbClr val="FFFFFF"/>
-                </a:solidFill>
-                <a:latin typeface="Alegreya Sans"/>
-              </a:rPr>
-              <a:t>English — TOEIC 955/990</a:t>
-            </a:r>
-          </a:p>
-          <a:p>
-            <a:pPr algn="l">
-              <a:spcBef>
-                <a:spcPts val="600"/>
-              </a:spcBef>
-              <a:spcAft>
-                <a:spcPts val="300"/>
-              </a:spcAft>
-            </a:pPr>
-            <a:r>
-              <a:rPr sz="1300" b="1" i="0">
-                <a:solidFill>
-                  <a:srgbClr val="3AEDE5"/>
-                </a:solidFill>
-                <a:latin typeface="Alegreya Sans"/>
-              </a:rPr>
-              <a:t>EDUCATION &amp; CERTIFICATIONS</a:t>
-            </a:r>
-          </a:p>
-          <a:p>
-            <a:pPr algn="l">
-              <a:spcAft>
-                <a:spcPts val="100"/>
-              </a:spcAft>
-            </a:pPr>
-            <a:r>
-              <a:rPr sz="1200" b="1" i="0">
-                <a:solidFill>
-                  <a:srgbClr val="3AEDE5"/>
-                </a:solidFill>
-                <a:latin typeface="Alegreya Sans"/>
-              </a:rPr>
-              <a:t>2024  </a:t>
-            </a:r>
-            <a:r>
-              <a:rPr sz="1200" b="1" i="0">
-                <a:solidFill>
-                  <a:srgbClr val="FFFFFF"/>
-                </a:solidFill>
-                <a:latin typeface="Alegreya Sans"/>
-              </a:rPr>
-              <a:t>EDHEC Business School</a:t>
-            </a:r>
-          </a:p>
-          <a:p>
-            <a:pPr algn="l">
-              <a:spcAft>
-                <a:spcPts val="300"/>
-              </a:spcAft>
-            </a:pPr>
-            <a:r>
-              <a:rPr sz="1200" b="0" i="1">
-                <a:solidFill>
-                  <a:srgbClr val="CCD6E8"/>
-                </a:solidFill>
-                <a:latin typeface="Alegreya Sans"/>
-              </a:rPr>
-              <a:t>Digital Ethics Officer certification (wi…</a:t>
-            </a:r>
-          </a:p>
-          <a:p>
-            <a:pPr algn="l">
-              <a:spcAft>
-                <a:spcPts val="100"/>
-              </a:spcAft>
-            </a:pPr>
-            <a:r>
-              <a:rPr sz="1200" b="1" i="0">
-                <a:solidFill>
-                  <a:srgbClr val="3AEDE5"/>
-                </a:solidFill>
-                <a:latin typeface="Alegreya Sans"/>
-              </a:rPr>
-              <a:t>2015 — 2020  </a:t>
-            </a:r>
-            <a:r>
-              <a:rPr sz="1200" b="1" i="0">
-                <a:solidFill>
-                  <a:srgbClr val="FFFFFF"/>
-                </a:solidFill>
-                <a:latin typeface="Alegreya Sans"/>
-              </a:rPr>
-              <a:t>Sciences Po Saint-Germain-en-Laye</a:t>
-            </a:r>
-          </a:p>
-          <a:p>
-            <a:pPr algn="l">
-              <a:spcAft>
-                <a:spcPts val="300"/>
-              </a:spcAft>
-            </a:pPr>
-            <a:r>
-              <a:rPr sz="1200" b="0" i="1">
-                <a:solidFill>
-                  <a:srgbClr val="CCD6E8"/>
-                </a:solidFill>
-                <a:latin typeface="Alegreya Sans"/>
-              </a:rPr>
-              <a:t>Master's in European &amp; International Aff…</a:t>
-            </a:r>
-          </a:p>
-          <a:p>
-            <a:pPr algn="l">
-              <a:spcAft>
-                <a:spcPts val="100"/>
-              </a:spcAft>
-            </a:pPr>
-            <a:r>
-              <a:rPr sz="1200" b="1" i="0">
-                <a:solidFill>
-                  <a:srgbClr val="3AEDE5"/>
-                </a:solidFill>
-                <a:latin typeface="Alegreya Sans"/>
-              </a:rPr>
-              <a:t>2020  </a:t>
-            </a:r>
-            <a:r>
-              <a:rPr sz="1200" b="1" i="0">
-                <a:solidFill>
-                  <a:srgbClr val="FFFFFF"/>
-                </a:solidFill>
-                <a:latin typeface="Alegreya Sans"/>
-              </a:rPr>
-              <a:t>University of Versailles Saint-Quentin-en-Yvelines</a:t>
-            </a:r>
-          </a:p>
-          <a:p>
-            <a:pPr algn="l">
-              <a:spcAft>
-                <a:spcPts val="300"/>
-              </a:spcAft>
-            </a:pPr>
-            <a:r>
-              <a:rPr sz="1200" b="0" i="1">
-                <a:solidFill>
-                  <a:srgbClr val="CCD6E8"/>
-                </a:solidFill>
-                <a:latin typeface="Alegreya Sans"/>
-              </a:rPr>
-              <a:t>Master's in Influence &amp; Public Affairs (…</a:t>
-            </a:r>
-          </a:p>
-          <a:p>
-            <a:pPr algn="l">
-              <a:spcBef>
-                <a:spcPts val="600"/>
-              </a:spcBef>
-              <a:spcAft>
-                <a:spcPts val="300"/>
-              </a:spcAft>
-            </a:pPr>
-            <a:r>
-              <a:rPr sz="1300" b="1" i="0">
-                <a:solidFill>
-                  <a:srgbClr val="3AEDE5"/>
-                </a:solidFill>
-                <a:latin typeface="Alegreya Sans"/>
-              </a:rPr>
-              <a:t>ENGAGEMENTS &amp; ACHIEVEMENTS</a:t>
-            </a:r>
-          </a:p>
-          <a:p>
-            <a:pPr algn="l">
-              <a:spcAft>
-                <a:spcPts val="200"/>
-              </a:spcAft>
-            </a:pPr>
-            <a:r>
-              <a:rPr sz="1200" b="1" i="0">
-                <a:solidFill>
-                  <a:srgbClr val="3AEDE5"/>
-                </a:solidFill>
-                <a:latin typeface="Alegreya Sans"/>
-              </a:rPr>
-              <a:t>• </a:t>
-            </a:r>
-            <a:r>
-              <a:rPr sz="1200" b="1" i="0">
-                <a:solidFill>
-                  <a:srgbClr val="FFFFFF"/>
-                </a:solidFill>
-                <a:latin typeface="Alegreya Sans"/>
-              </a:rPr>
-              <a:t>Digital Council Advisor</a:t>
-            </a:r>
-            <a:r>
-              <a:rPr sz="1200" b="0" i="1">
-                <a:solidFill>
-                  <a:srgbClr val="CCD6E8"/>
-                </a:solidFill>
-                <a:latin typeface="Alegreya Sans"/>
-              </a:rPr>
-              <a:t> — Volunteer at a local Digital Counci…</a:t>
-            </a:r>
-          </a:p>
-          <a:p>
-            <a:pPr algn="l">
-              <a:spcAft>
-                <a:spcPts val="200"/>
-              </a:spcAft>
-            </a:pPr>
-            <a:r>
-              <a:rPr sz="1200" b="1" i="0">
-                <a:solidFill>
-                  <a:srgbClr val="3AEDE5"/>
-                </a:solidFill>
-                <a:latin typeface="Alegreya Sans"/>
-              </a:rPr>
-              <a:t>• </a:t>
-            </a:r>
-            <a:r>
-              <a:rPr sz="1200" b="1" i="0">
-                <a:solidFill>
-                  <a:srgbClr val="FFFFFF"/>
-                </a:solidFill>
-                <a:latin typeface="Alegreya Sans"/>
-              </a:rPr>
-              <a:t>Podcaster</a:t>
-            </a:r>
-            <a:r>
-              <a:rPr sz="1200" b="0" i="1">
-                <a:solidFill>
-                  <a:srgbClr val="CCD6E8"/>
-                </a:solidFill>
-                <a:latin typeface="Alegreya Sans"/>
-              </a:rPr>
-              <a:t> — Creator and host of an AI podcast f…</a:t>
-            </a:r>
-          </a:p>
-          <a:p>
-            <a:pPr algn="l">
-              <a:spcAft>
-                <a:spcPts val="200"/>
-              </a:spcAft>
-            </a:pPr>
-            <a:r>
-              <a:rPr sz="1200" b="1" i="0">
-                <a:solidFill>
-                  <a:srgbClr val="3AEDE5"/>
-                </a:solidFill>
-                <a:latin typeface="Alegreya Sans"/>
-              </a:rPr>
-              <a:t>• </a:t>
-            </a:r>
-            <a:r>
-              <a:rPr sz="1200" b="1" i="0">
-                <a:solidFill>
-                  <a:srgbClr val="FFFFFF"/>
-                </a:solidFill>
-                <a:latin typeface="Alegreya Sans"/>
-              </a:rPr>
-              <a:t>Speaker</a:t>
-            </a:r>
-            <a:r>
-              <a:rPr sz="1200" b="0" i="1">
-                <a:solidFill>
-                  <a:srgbClr val="CCD6E8"/>
-                </a:solidFill>
-                <a:latin typeface="Alegreya Sans"/>
-              </a:rPr>
-              <a:t> — Speaker on AI and its challenges (b…</a:t>
-            </a:r>
-          </a:p>
-        </p:txBody>
-      </p:sp>
-      <p:sp>
-        <p:nvSpPr>
-          <p:cNvPr id="9" name="TextBox 8"/>
-          <p:cNvSpPr txBox="1"/>
-          <p:nvPr/>
-        </p:nvSpPr>
-        <p:spPr>
-          <a:xfrm>
-            <a:off x="4528600" y="1180000"/>
-            <a:ext cx="7434800" cy="5318000"/>
-          </a:xfrm>
-          <a:prstGeom prst="rect">
-            <a:avLst/>
-          </a:prstGeom>
-          <a:noFill/>
-        </p:spPr>
-        <p:txBody>
-          <a:bodyPr wrap="square" lIns="0" rIns="0" tIns="0" bIns="0">
-            <a:spAutoFit/>
-          </a:bodyPr>
-          <a:lstStyle/>
-          <a:p>
-            <a:pPr algn="l">
-              <a:spcAft>
-                <a:spcPts val="300"/>
-              </a:spcAft>
-            </a:pPr>
-            <a:r>
-              <a:rPr sz="1300" b="1" i="0">
-                <a:solidFill>
-                  <a:srgbClr val="3AEDE5"/>
-                </a:solidFill>
-                <a:latin typeface="Alegreya Sans"/>
-              </a:rPr>
-              <a:t>SUMMARY</a:t>
-            </a:r>
-          </a:p>
-          <a:p>
-            <a:pPr algn="l">
-              <a:spcAft>
-                <a:spcPts val="300"/>
-              </a:spcAft>
-            </a:pPr>
-            <a:r>
-              <a:rPr sz="1200" b="0" i="0">
-                <a:solidFill>
-                  <a:srgbClr val="FFFFFF"/>
-                </a:solidFill>
-                <a:latin typeface="Alegreya Sans"/>
-              </a:rPr>
-              <a:t>Expert in AI Governance, AI Risk Management and regulatory compliance, with nearly 8 years of experience advising major banking institutions. Specialised in the EU AI Act and the international rollout…</a:t>
-            </a:r>
-          </a:p>
-          <a:p>
-            <a:pPr algn="l">
-              <a:spcBef>
-                <a:spcPts val="600"/>
-              </a:spcBef>
-              <a:spcAft>
-                <a:spcPts val="300"/>
-              </a:spcAft>
-            </a:pPr>
-            <a:r>
-              <a:rPr sz="1300" b="1" i="0">
-                <a:solidFill>
-                  <a:srgbClr val="3AEDE5"/>
-                </a:solidFill>
-                <a:latin typeface="Alegreya Sans"/>
-              </a:rPr>
-              <a:t>PROFESSIONAL EXPERIENCE</a:t>
-            </a:r>
-          </a:p>
-          <a:p>
-            <a:pPr algn="l">
-              <a:spcAft>
-                <a:spcPts val="100"/>
-              </a:spcAft>
-            </a:pPr>
-            <a:r>
-              <a:rPr sz="1200" b="1" i="0">
-                <a:solidFill>
-                  <a:srgbClr val="3AEDE5"/>
-                </a:solidFill>
-                <a:latin typeface="Alegreya Sans"/>
-              </a:rPr>
-              <a:t>▸ </a:t>
-            </a:r>
-            <a:r>
-              <a:rPr sz="1200" b="1" i="0">
-                <a:solidFill>
-                  <a:srgbClr val="FFFFFF"/>
-                </a:solidFill>
-                <a:latin typeface="Alegreya Sans"/>
-              </a:rPr>
-              <a:t>Top-tier European CIB</a:t>
-            </a:r>
-            <a:r>
-              <a:rPr sz="1200" b="0" i="0">
-                <a:solidFill>
-                  <a:srgbClr val="FFFFFF"/>
-                </a:solidFill>
-                <a:latin typeface="Alegreya Sans"/>
-              </a:rPr>
-              <a:t> — AI Compliance Lead (consultant)</a:t>
-            </a:r>
-            <a:r>
-              <a:rPr sz="1200" b="0" i="1">
-                <a:solidFill>
-                  <a:srgbClr val="3AEDE5"/>
-                </a:solidFill>
-                <a:latin typeface="Alegreya Sans"/>
-              </a:rPr>
-              <a:t>  (8 months — ongoing)</a:t>
-            </a:r>
-          </a:p>
-          <a:p>
-            <a:pPr algn="l" lvl="1">
-              <a:spcAft>
-                <a:spcPts val="100"/>
-              </a:spcAft>
-            </a:pPr>
-            <a:r>
-              <a:rPr sz="1200" b="1" i="0">
-                <a:solidFill>
-                  <a:srgbClr val="3AEDE5"/>
-                </a:solidFill>
-                <a:latin typeface="Alegreya Sans"/>
-              </a:rPr>
-              <a:t>•  </a:t>
-            </a:r>
-            <a:r>
-              <a:rPr sz="1200" b="0" i="0">
-                <a:solidFill>
-                  <a:srgbClr val="FFFFFF"/>
-                </a:solidFill>
-                <a:latin typeface="Alegreya Sans"/>
-              </a:rPr>
-              <a:t>Finalisation and rollout of the AI risk governance framework: internal policies, risk mapping, committee design, coordination of support and…</a:t>
-            </a:r>
-          </a:p>
-          <a:p>
-            <a:pPr algn="l" lvl="1">
-              <a:spcAft>
-                <a:spcPts val="100"/>
-              </a:spcAft>
-            </a:pPr>
-            <a:r>
-              <a:rPr sz="1200" b="1" i="0">
-                <a:solidFill>
-                  <a:srgbClr val="3AEDE5"/>
-                </a:solidFill>
-                <a:latin typeface="Alegreya Sans"/>
-              </a:rPr>
-              <a:t>•  </a:t>
-            </a:r>
-            <a:r>
-              <a:rPr sz="1200" b="0" i="0">
-                <a:solidFill>
-                  <a:srgbClr val="FFFFFF"/>
-                </a:solidFill>
-                <a:latin typeface="Alegreya Sans"/>
-              </a:rPr>
-              <a:t>Operational pilot of AI governance: identification, assessment, prioritisation, validation and remediation of AI systems.</a:t>
-            </a:r>
-          </a:p>
-          <a:p>
-            <a:pPr algn="l">
-              <a:spcAft>
-                <a:spcPts val="100"/>
-              </a:spcAft>
-            </a:pPr>
-            <a:r>
-              <a:rPr sz="1200" b="1" i="0">
-                <a:solidFill>
-                  <a:srgbClr val="3AEDE5"/>
-                </a:solidFill>
-                <a:latin typeface="Alegreya Sans"/>
-              </a:rPr>
-              <a:t>▸ </a:t>
-            </a:r>
-            <a:r>
-              <a:rPr sz="1200" b="1" i="0">
-                <a:solidFill>
-                  <a:srgbClr val="FFFFFF"/>
-                </a:solidFill>
-                <a:latin typeface="Alegreya Sans"/>
-              </a:rPr>
-              <a:t>Sia Partners</a:t>
-            </a:r>
-            <a:r>
-              <a:rPr sz="1200" b="0" i="0">
-                <a:solidFill>
-                  <a:srgbClr val="FFFFFF"/>
-                </a:solidFill>
-                <a:latin typeface="Alegreya Sans"/>
-              </a:rPr>
-              <a:t> — Associate Manager</a:t>
-            </a:r>
-            <a:r>
-              <a:rPr sz="1200" b="0" i="1">
-                <a:solidFill>
-                  <a:srgbClr val="3AEDE5"/>
-                </a:solidFill>
-                <a:latin typeface="Alegreya Sans"/>
-              </a:rPr>
-              <a:t>  (10 months — ongoing)</a:t>
-            </a:r>
-          </a:p>
-          <a:p>
-            <a:pPr algn="l" lvl="1">
-              <a:spcAft>
-                <a:spcPts val="100"/>
-              </a:spcAft>
-            </a:pPr>
-            <a:r>
-              <a:rPr sz="1200" b="1" i="0">
-                <a:solidFill>
-                  <a:srgbClr val="3AEDE5"/>
-                </a:solidFill>
-                <a:latin typeface="Alegreya Sans"/>
-              </a:rPr>
-              <a:t>•  </a:t>
-            </a:r>
-            <a:r>
-              <a:rPr sz="1200" b="0" i="0">
-                <a:solidFill>
-                  <a:srgbClr val="FFFFFF"/>
-                </a:solidFill>
-                <a:latin typeface="Alegreya Sans"/>
-              </a:rPr>
-              <a:t>Head of the AI Risk Management offering: RFP coordination, strategic and regulatory watch, business development and financial-ecosystem anim…</a:t>
-            </a:r>
-          </a:p>
-          <a:p>
-            <a:pPr algn="l" lvl="1">
-              <a:spcAft>
-                <a:spcPts val="100"/>
-              </a:spcAft>
-            </a:pPr>
-            <a:r>
-              <a:rPr sz="1200" b="1" i="0">
-                <a:solidFill>
-                  <a:srgbClr val="3AEDE5"/>
-                </a:solidFill>
-                <a:latin typeface="Alegreya Sans"/>
-              </a:rPr>
-              <a:t>•  </a:t>
-            </a:r>
-            <a:r>
-              <a:rPr sz="1200" b="0" i="0">
-                <a:solidFill>
-                  <a:srgbClr val="FFFFFF"/>
-                </a:solidFill>
-                <a:latin typeface="Alegreya Sans"/>
-              </a:rPr>
-              <a:t>Lead of the AI working group at Paris Europlace association (40+ senior financial-sector representatives): position papers, EU consultation…</a:t>
-            </a:r>
-          </a:p>
-          <a:p>
-            <a:pPr algn="l">
-              <a:spcAft>
-                <a:spcPts val="100"/>
-              </a:spcAft>
-            </a:pPr>
-            <a:r>
-              <a:rPr sz="1200" b="1" i="0">
-                <a:solidFill>
-                  <a:srgbClr val="3AEDE5"/>
-                </a:solidFill>
-                <a:latin typeface="Alegreya Sans"/>
-              </a:rPr>
-              <a:t>▸ </a:t>
-            </a:r>
-            <a:r>
-              <a:rPr sz="1200" b="1" i="0">
-                <a:solidFill>
-                  <a:srgbClr val="FFFFFF"/>
-                </a:solidFill>
-                <a:latin typeface="Alegreya Sans"/>
-              </a:rPr>
-              <a:t>Groupe BPCE</a:t>
-            </a:r>
-            <a:r>
-              <a:rPr sz="1200" b="0" i="0">
-                <a:solidFill>
-                  <a:srgbClr val="FFFFFF"/>
-                </a:solidFill>
-                <a:latin typeface="Alegreya Sans"/>
-              </a:rPr>
-              <a:t> — Group EU AI Act Project Manager</a:t>
-            </a:r>
-            <a:r>
-              <a:rPr sz="1200" b="0" i="1">
-                <a:solidFill>
-                  <a:srgbClr val="3AEDE5"/>
-                </a:solidFill>
-                <a:latin typeface="Alegreya Sans"/>
-              </a:rPr>
-              <a:t>  (18 months)</a:t>
-            </a:r>
-          </a:p>
-          <a:p>
-            <a:pPr algn="l" lvl="1">
-              <a:spcAft>
-                <a:spcPts val="100"/>
-              </a:spcAft>
-            </a:pPr>
-            <a:r>
-              <a:rPr sz="1200" b="1" i="0">
-                <a:solidFill>
-                  <a:srgbClr val="3AEDE5"/>
-                </a:solidFill>
-                <a:latin typeface="Alegreya Sans"/>
-              </a:rPr>
-              <a:t>•  </a:t>
-            </a:r>
-            <a:r>
-              <a:rPr sz="1200" b="0" i="0">
-                <a:solidFill>
-                  <a:srgbClr val="FFFFFF"/>
-                </a:solidFill>
-                <a:latin typeface="Alegreya Sans"/>
-              </a:rPr>
-              <a:t>Lead of the EU AI Act compliance programme for Groupe BPCE and its entities (Natixis, Oney, BRED, etc.): AI risk mapping and assessment, def…</a:t>
-            </a:r>
-          </a:p>
-          <a:p>
-            <a:pPr algn="l" lvl="1">
-              <a:spcAft>
-                <a:spcPts val="100"/>
-              </a:spcAft>
-            </a:pPr>
-            <a:r>
-              <a:rPr sz="1200" b="1" i="0">
-                <a:solidFill>
-                  <a:srgbClr val="3AEDE5"/>
-                </a:solidFill>
-                <a:latin typeface="Alegreya Sans"/>
-              </a:rPr>
-              <a:t>•  </a:t>
-            </a:r>
-            <a:r>
-              <a:rPr sz="1200" b="0" i="0">
-                <a:solidFill>
-                  <a:srgbClr val="FFFFFF"/>
-                </a:solidFill>
-                <a:latin typeface="Alegreya Sans"/>
-              </a:rPr>
-              <a:t>Coordination and support of 35+ local decision-makers (DPO, Chief Compliance Officer, CDO, etc.) in deploying the Group framework.</a:t>
-            </a:r>
-          </a:p>
-          <a:p>
-            <a:pPr algn="l">
-              <a:spcAft>
-                <a:spcPts val="100"/>
-              </a:spcAft>
-            </a:pPr>
-            <a:r>
-              <a:rPr sz="1200" b="1" i="0">
-                <a:solidFill>
-                  <a:srgbClr val="3AEDE5"/>
-                </a:solidFill>
-                <a:latin typeface="Alegreya Sans"/>
-              </a:rPr>
-              <a:t>▸ </a:t>
-            </a:r>
-            <a:r>
-              <a:rPr sz="1200" b="1" i="0">
-                <a:solidFill>
-                  <a:srgbClr val="FFFFFF"/>
-                </a:solidFill>
-                <a:latin typeface="Alegreya Sans"/>
-              </a:rPr>
-              <a:t>Oney / Oneytrust</a:t>
-            </a:r>
-            <a:r>
-              <a:rPr sz="1200" b="0" i="0">
-                <a:solidFill>
-                  <a:srgbClr val="FFFFFF"/>
-                </a:solidFill>
-                <a:latin typeface="Alegreya Sans"/>
-              </a:rPr>
-              <a:t> — Expert Leader — Digital &amp; AI Compliance Officer</a:t>
-            </a:r>
-            <a:r>
-              <a:rPr sz="1200" b="0" i="1">
-                <a:solidFill>
-                  <a:srgbClr val="3AEDE5"/>
-                </a:solidFill>
-                <a:latin typeface="Alegreya Sans"/>
-              </a:rPr>
-              <a:t>  (38 months)</a:t>
-            </a:r>
-          </a:p>
-          <a:p>
-            <a:pPr algn="l" lvl="1">
-              <a:spcAft>
-                <a:spcPts val="100"/>
-              </a:spcAft>
-            </a:pPr>
-            <a:r>
-              <a:rPr sz="1200" b="1" i="0">
-                <a:solidFill>
-                  <a:srgbClr val="3AEDE5"/>
-                </a:solidFill>
-                <a:latin typeface="Alegreya Sans"/>
-              </a:rPr>
-              <a:t>•  </a:t>
-            </a:r>
-            <a:r>
-              <a:rPr sz="1200" b="0" i="0">
-                <a:solidFill>
-                  <a:srgbClr val="FFFFFF"/>
-                </a:solidFill>
-                <a:latin typeface="Alegreya Sans"/>
-              </a:rPr>
-              <a:t>Built the AI risk governance framework with the Chief Data Officer: systems inventory, training of business reference owners, EU AI Act comp…</a:t>
-            </a:r>
-          </a:p>
-          <a:p>
-            <a:pPr algn="l" lvl="1">
-              <a:spcAft>
-                <a:spcPts val="100"/>
-              </a:spcAft>
-            </a:pPr>
-            <a:r>
-              <a:rPr sz="1200" b="1" i="0">
-                <a:solidFill>
-                  <a:srgbClr val="3AEDE5"/>
-                </a:solidFill>
-                <a:latin typeface="Alegreya Sans"/>
-              </a:rPr>
-              <a:t>•  </a:t>
-            </a:r>
-            <a:r>
-              <a:rPr sz="1200" b="0" i="0">
-                <a:solidFill>
-                  <a:srgbClr val="FFFFFF"/>
-                </a:solidFill>
-                <a:latin typeface="Alegreya Sans"/>
-              </a:rPr>
-              <a:t>Group GenAI tools ambassador to 3,000 Oney employees.</a:t>
-            </a:r>
-          </a:p>
-          <a:p>
-            <a:pPr algn="l">
-              <a:spcBef>
-                <a:spcPts val="600"/>
-              </a:spcBef>
-              <a:spcAft>
-                <a:spcPts val="300"/>
-              </a:spcAft>
-            </a:pPr>
-            <a:r>
-              <a:rPr sz="1300" b="1" i="0">
-                <a:solidFill>
-                  <a:srgbClr val="3AEDE5"/>
-                </a:solidFill>
-                <a:latin typeface="Alegreya Sans"/>
-              </a:rPr>
-              <a:t>MAIN REFERENCES</a:t>
-            </a:r>
-          </a:p>
-          <a:p>
-            <a:pPr algn="l">
-              <a:spcAft>
-                <a:spcPts val="200"/>
-              </a:spcAft>
-            </a:pPr>
-            <a:r>
-              <a:rPr sz="1200" b="0" i="1">
-                <a:solidFill>
-                  <a:srgbClr val="FFFFFF"/>
-                </a:solidFill>
-                <a:latin typeface="Alegreya Sans"/>
-              </a:rPr>
-              <a:t>Groupe BPCE, Natixis, Oney, Sia Partners, Paris Europlace</a:t>
-            </a:r>
           </a:p>
         </p:txBody>
       </p:sp>

--- a/outputs/A.P._ai_governance.pptx
+++ b/outputs/A.P._ai_governance.pptx
@@ -3574,7 +3574,7 @@
                 </a:solidFill>
                 <a:latin typeface="Alegreya Sans"/>
               </a:rPr>
-              <a:t>Certification Digital Ethics Officer (av…</a:t>
+              <a:t>Certification Digital Ethics Officer (avec Mention)</a:t>
             </a:r>
           </a:p>
           <a:p>
@@ -3615,7 +3615,7 @@
                 </a:solidFill>
                 <a:latin typeface="Alegreya Sans"/>
               </a:rPr>
-              <a:t>Master II Affaires européennes et intern…</a:t>
+              <a:t>Master II Affaires européennes et internationales (avec Mention)</a:t>
             </a:r>
           </a:p>
           <a:p>
@@ -3656,7 +3656,7 @@
                 </a:solidFill>
                 <a:latin typeface="Alegreya Sans"/>
               </a:rPr>
-              <a:t>Master II Influence &amp; Affaires publiques…</a:t>
+              <a:t>Master II Influence &amp; Affaires publiques (avec Mention)</a:t>
             </a:r>
           </a:p>
           <a:p>
@@ -3702,15 +3702,6 @@
               </a:rPr>
               <a:t>Conseiller Numérique</a:t>
             </a:r>
-            <a:r>
-              <a:rPr sz="1200" b="0" i="1">
-                <a:solidFill>
-                  <a:srgbClr val="CCD6E8"/>
-                </a:solidFill>
-                <a:latin typeface="Alegreya Sans"/>
-              </a:rPr>
-              <a:t> — Bénévole au sein du Conseil du Numé…</a:t>
-            </a:r>
           </a:p>
           <a:p>
             <a:pPr algn="l">
@@ -3736,15 +3727,6 @@
               </a:rPr>
               <a:t>Podcasteur</a:t>
             </a:r>
-            <a:r>
-              <a:rPr sz="1200" b="0" i="1">
-                <a:solidFill>
-                  <a:srgbClr val="CCD6E8"/>
-                </a:solidFill>
-                <a:latin typeface="Alegreya Sans"/>
-              </a:rPr>
-              <a:t> — Créateur et animateur d'un podcast…</a:t>
-            </a:r>
           </a:p>
           <a:p>
             <a:pPr algn="l">
@@ -3769,15 +3751,6 @@
                 <a:latin typeface="Alegreya Sans"/>
               </a:rPr>
               <a:t>Conférencier</a:t>
-            </a:r>
-            <a:r>
-              <a:rPr sz="1200" b="0" i="1">
-                <a:solidFill>
-                  <a:srgbClr val="CCD6E8"/>
-                </a:solidFill>
-                <a:latin typeface="Alegreya Sans"/>
-              </a:rPr>
-              <a:t> — Intervenant sur l'IA et ses enjeux…</a:t>
             </a:r>
           </a:p>
         </p:txBody>
@@ -3832,7 +3805,7 @@
                 </a:solidFill>
                 <a:latin typeface="Alegreya Sans"/>
               </a:rPr>
-              <a:t>Expert en gouvernance de l'IA, AI Risk Management et conformité réglementaire, avec près de 8 ans d'expérience auprès de grandes institutions bancaires. Spécialisé dans l'EU AI Act et le déploiement d…</a:t>
+              <a:t>Expert en gouvernance de l'IA, AI Risk Management et conformité réglementaire, avec près de 8 ans d'expérience auprès de grandes institutions bancaires. Spécialisé dans l'EU AI Act et le déploiement de dispositifs de gouvernance IA à l'échelle internationale.</a:t>
             </a:r>
           </a:p>
           <a:p>
@@ -3919,7 +3892,7 @@
                 </a:solidFill>
                 <a:latin typeface="Alegreya Sans"/>
               </a:rPr>
-              <a:t>Finalisation et mise en œuvre du cadre de gouvernance des risques IA : politiques internes, cartographie des risques, comitologie et coordin…</a:t>
+              <a:t>Finalisation et mise en œuvre du cadre de gouvernance des risques IA : politiques internes, cartographie des risques, comitologie et coordination des fonctions support et métiers.</a:t>
             </a:r>
           </a:p>
           <a:p>
@@ -4012,7 +3985,7 @@
                 </a:solidFill>
                 <a:latin typeface="Alegreya Sans"/>
               </a:rPr>
-              <a:t>Responsable de l'offre AI Risk Management : coordination des réponses aux appels d'offres, veille stratégique et réglementaire, développemen…</a:t>
+              <a:t>Responsable de l'offre AI Risk Management : coordination des réponses aux appels d'offres, veille stratégique et réglementaire, développement commercial et animation de l'écosystème financier.</a:t>
             </a:r>
           </a:p>
           <a:p>
@@ -4037,7 +4010,7 @@
                 </a:solidFill>
                 <a:latin typeface="Alegreya Sans"/>
               </a:rPr>
-              <a:t>Pilotage et animation du groupe de travail IA de l'association Paris Europlace (+40 responsables du secteur financier) : rédaction de positi…</a:t>
+              <a:t>Pilotage et animation du groupe de travail IA de l'association Paris Europlace (+40 responsables du secteur financier) : rédaction de position papers et de réponses aux consultations européennes, benchmarks.</a:t>
             </a:r>
           </a:p>
           <a:p>
@@ -4105,7 +4078,7 @@
                 </a:solidFill>
                 <a:latin typeface="Alegreya Sans"/>
               </a:rPr>
-              <a:t>Responsable du programme de mise en conformité EU AI Act du Groupe BPCE et de ses entités (Natixis, Oney, BRED, etc.) : cartographie et éval…</a:t>
+              <a:t>Responsable du programme de mise en conformité EU AI Act du Groupe BPCE et de ses entités (Natixis, Oney, BRED, etc.) : cartographie et évaluation des risques IA, définition de la politique et du cadre normatif Groupe, évolution des processus opérationnels, animation du comité de pilotage.</a:t>
             </a:r>
           </a:p>
           <a:p>
@@ -4130,7 +4103,7 @@
                 </a:solidFill>
                 <a:latin typeface="Alegreya Sans"/>
               </a:rPr>
-              <a:t>Coordination et accompagnement de plus de 35 décideurs locaux (DPO, Chief Compliance Officer, CDO, etc.) dans la déclinaison du cadre normat…</a:t>
+              <a:t>Coordination et accompagnement de plus de 35 décideurs locaux (DPO, Chief Compliance Officer, CDO, etc.) dans la déclinaison du cadre normatif Groupe.</a:t>
             </a:r>
           </a:p>
           <a:p>
@@ -4198,7 +4171,7 @@
                 </a:solidFill>
                 <a:latin typeface="Alegreya Sans"/>
               </a:rPr>
-              <a:t>Structuration du cadre de gouvernance des risques IA avec le Chief Data Officer : inventaire des systèmes, formation des référents métiers e…</a:t>
+              <a:t>Structuration du cadre de gouvernance des risques IA avec le Chief Data Officer : inventaire des systèmes, formation des référents métiers et pilotage de la conformité EU AI Act dans plus de 10 entités internationales.</a:t>
             </a:r>
           </a:p>
           <a:p>
@@ -4224,41 +4197,6 @@
                 <a:latin typeface="Alegreya Sans"/>
               </a:rPr>
               <a:t>Ambassadeur des outils d'IA Générative Groupe auprès de 3 000 collaborateurs Oney.</a:t>
-            </a:r>
-          </a:p>
-          <a:p>
-            <a:pPr algn="l">
-              <a:spcBef>
-                <a:spcPts val="600"/>
-              </a:spcBef>
-              <a:spcAft>
-                <a:spcPts val="300"/>
-              </a:spcAft>
-            </a:pPr>
-            <a:r>
-              <a:rPr sz="1300" b="1" i="0">
-                <a:solidFill>
-                  <a:srgbClr val="3AEDE5"/>
-                </a:solidFill>
-                <a:latin typeface="Alegreya Sans"/>
-              </a:rPr>
-              <a:t>RÉFÉRENCES</a:t>
-            </a:r>
-          </a:p>
-          <a:p>
-            <a:pPr algn="l">
-              <a:spcAft>
-                <a:spcPts val="200"/>
-              </a:spcAft>
-            </a:pPr>
-            <a:r>
-              <a:rPr sz="1200" b="0" i="1">
-                <a:solidFill>
-                  <a:srgbClr val="FFFFFF"/>
-                </a:solidFill>
-                <a:latin typeface="Alegreya Sans"/>
-              </a:rPr>
-              <a:t>Groupe BPCE, Natixis, Oney, Sia Partners, Paris Europlace</a:t>
             </a:r>
           </a:p>
         </p:txBody>
@@ -4845,7 +4783,7 @@
                 </a:solidFill>
                 <a:latin typeface="Alegreya Sans"/>
               </a:rPr>
-              <a:t>Digital Ethics Officer certification (wi…</a:t>
+              <a:t>Digital Ethics Officer certification (with Distinction)</a:t>
             </a:r>
           </a:p>
           <a:p>
@@ -4886,7 +4824,7 @@
                 </a:solidFill>
                 <a:latin typeface="Alegreya Sans"/>
               </a:rPr>
-              <a:t>Master's in European &amp; International Aff…</a:t>
+              <a:t>Master's in European &amp; International Affairs (with Distinction)</a:t>
             </a:r>
           </a:p>
           <a:p>
@@ -4927,7 +4865,7 @@
                 </a:solidFill>
                 <a:latin typeface="Alegreya Sans"/>
               </a:rPr>
-              <a:t>Master's in Influence &amp; Public Affairs (…</a:t>
+              <a:t>Master's in Influence &amp; Public Affairs (with Distinction)</a:t>
             </a:r>
           </a:p>
           <a:p>
@@ -4973,15 +4911,6 @@
               </a:rPr>
               <a:t>Digital Council Advisor</a:t>
             </a:r>
-            <a:r>
-              <a:rPr sz="1200" b="0" i="1">
-                <a:solidFill>
-                  <a:srgbClr val="CCD6E8"/>
-                </a:solidFill>
-                <a:latin typeface="Alegreya Sans"/>
-              </a:rPr>
-              <a:t> — Volunteer at a local Digital Counci…</a:t>
-            </a:r>
           </a:p>
           <a:p>
             <a:pPr algn="l">
@@ -5007,15 +4936,6 @@
               </a:rPr>
               <a:t>Podcaster</a:t>
             </a:r>
-            <a:r>
-              <a:rPr sz="1200" b="0" i="1">
-                <a:solidFill>
-                  <a:srgbClr val="CCD6E8"/>
-                </a:solidFill>
-                <a:latin typeface="Alegreya Sans"/>
-              </a:rPr>
-              <a:t> — Creator and host of an AI podcast f…</a:t>
-            </a:r>
           </a:p>
           <a:p>
             <a:pPr algn="l">
@@ -5040,15 +4960,6 @@
                 <a:latin typeface="Alegreya Sans"/>
               </a:rPr>
               <a:t>Speaker</a:t>
-            </a:r>
-            <a:r>
-              <a:rPr sz="1200" b="0" i="1">
-                <a:solidFill>
-                  <a:srgbClr val="CCD6E8"/>
-                </a:solidFill>
-                <a:latin typeface="Alegreya Sans"/>
-              </a:rPr>
-              <a:t> — Speaker on AI and its challenges (b…</a:t>
             </a:r>
           </a:p>
         </p:txBody>
@@ -5103,7 +5014,7 @@
                 </a:solidFill>
                 <a:latin typeface="Alegreya Sans"/>
               </a:rPr>
-              <a:t>Expert in AI Governance, AI Risk Management and regulatory compliance, with nearly 8 years of experience advising major banking institutions. Specialised in the EU AI Act and the international rollout…</a:t>
+              <a:t>Expert in AI Governance, AI Risk Management and regulatory compliance, with nearly 8 years of experience advising major banking institutions. Specialised in the EU AI Act and the international rollout of AI governance frameworks.</a:t>
             </a:r>
           </a:p>
           <a:p>
@@ -5190,7 +5101,7 @@
                 </a:solidFill>
                 <a:latin typeface="Alegreya Sans"/>
               </a:rPr>
-              <a:t>Finalisation and rollout of the AI risk governance framework: internal policies, risk mapping, committee design, coordination of support and…</a:t>
+              <a:t>Finalisation and rollout of the AI risk governance framework: internal policies, risk mapping, committee design, coordination of support and business functions.</a:t>
             </a:r>
           </a:p>
           <a:p>
@@ -5283,7 +5194,7 @@
                 </a:solidFill>
                 <a:latin typeface="Alegreya Sans"/>
               </a:rPr>
-              <a:t>Head of the AI Risk Management offering: RFP coordination, strategic and regulatory watch, business development and financial-ecosystem anim…</a:t>
+              <a:t>Head of the AI Risk Management offering: RFP coordination, strategic and regulatory watch, business development and financial-ecosystem animation.</a:t>
             </a:r>
           </a:p>
           <a:p>
@@ -5308,7 +5219,7 @@
                 </a:solidFill>
                 <a:latin typeface="Alegreya Sans"/>
               </a:rPr>
-              <a:t>Lead of the AI working group at Paris Europlace association (40+ senior financial-sector representatives): position papers, EU consultation…</a:t>
+              <a:t>Lead of the AI working group at Paris Europlace association (40+ senior financial-sector representatives): position papers, EU consultation responses, benchmarks.</a:t>
             </a:r>
           </a:p>
           <a:p>
@@ -5376,7 +5287,7 @@
                 </a:solidFill>
                 <a:latin typeface="Alegreya Sans"/>
               </a:rPr>
-              <a:t>Lead of the EU AI Act compliance programme for Groupe BPCE and its entities (Natixis, Oney, BRED, etc.): AI risk mapping and assessment, def…</a:t>
+              <a:t>Lead of the EU AI Act compliance programme for Groupe BPCE and its entities (Natixis, Oney, BRED, etc.): AI risk mapping and assessment, definition of Group policy and standards, operational process evolution, steering-committee animation.</a:t>
             </a:r>
           </a:p>
           <a:p>
@@ -5469,7 +5380,7 @@
                 </a:solidFill>
                 <a:latin typeface="Alegreya Sans"/>
               </a:rPr>
-              <a:t>Built the AI risk governance framework with the Chief Data Officer: systems inventory, training of business reference owners, EU AI Act comp…</a:t>
+              <a:t>Built the AI risk governance framework with the Chief Data Officer: systems inventory, training of business reference owners, EU AI Act compliance pilot across 10+ international entities.</a:t>
             </a:r>
           </a:p>
           <a:p>
@@ -5495,41 +5406,6 @@
                 <a:latin typeface="Alegreya Sans"/>
               </a:rPr>
               <a:t>Group GenAI tools ambassador to 3,000 Oney employees.</a:t>
-            </a:r>
-          </a:p>
-          <a:p>
-            <a:pPr algn="l">
-              <a:spcBef>
-                <a:spcPts val="600"/>
-              </a:spcBef>
-              <a:spcAft>
-                <a:spcPts val="300"/>
-              </a:spcAft>
-            </a:pPr>
-            <a:r>
-              <a:rPr sz="1300" b="1" i="0">
-                <a:solidFill>
-                  <a:srgbClr val="3AEDE5"/>
-                </a:solidFill>
-                <a:latin typeface="Alegreya Sans"/>
-              </a:rPr>
-              <a:t>MAIN REFERENCES</a:t>
-            </a:r>
-          </a:p>
-          <a:p>
-            <a:pPr algn="l">
-              <a:spcAft>
-                <a:spcPts val="200"/>
-              </a:spcAft>
-            </a:pPr>
-            <a:r>
-              <a:rPr sz="1200" b="0" i="1">
-                <a:solidFill>
-                  <a:srgbClr val="FFFFFF"/>
-                </a:solidFill>
-                <a:latin typeface="Alegreya Sans"/>
-              </a:rPr>
-              <a:t>Groupe BPCE, Natixis, Oney, Sia Partners, Paris Europlace</a:t>
             </a:r>
           </a:p>
         </p:txBody>

--- a/outputs/A.P._ai_governance.pptx
+++ b/outputs/A.P._ai_governance.pptx
@@ -3209,8 +3209,8 @@
         </p:nvSpPr>
         <p:spPr>
           <a:xfrm>
-            <a:off x="228600" y="260000"/>
-            <a:ext cx="3842800" cy="800000"/>
+            <a:off x="228600" y="240000"/>
+            <a:ext cx="3842800" cy="1300000"/>
           </a:xfrm>
           <a:prstGeom prst="rect">
             <a:avLst/>
@@ -3225,13 +3225,29 @@
           <a:p>
             <a:pPr algn="l"/>
             <a:r>
-              <a:rPr sz="4800" b="1" i="0">
-                <a:solidFill>
-                  <a:srgbClr val="3AEDE5"/>
-                </a:solidFill>
-                <a:latin typeface="Alegreya Sans"/>
-              </a:rPr>
-              <a:t>A.P.</a:t>
+              <a:rPr sz="2800" b="0" i="0">
+                <a:solidFill>
+                  <a:srgbClr val="3AEDE5"/>
+                </a:solidFill>
+                <a:latin typeface="Alegreya Sans"/>
+              </a:rPr>
+              <a:t>Alexandre</a:t>
+            </a:r>
+          </a:p>
+          <a:p>
+            <a:pPr>
+              <a:spcBef>
+                <a:spcPts val="0"/>
+              </a:spcBef>
+            </a:pPr>
+            <a:r>
+              <a:rPr sz="3200" b="1" i="0">
+                <a:solidFill>
+                  <a:srgbClr val="3AEDE5"/>
+                </a:solidFill>
+                <a:latin typeface="Alegreya Sans"/>
+              </a:rPr>
+              <a:t>POLAKOWSKI</a:t>
             </a:r>
           </a:p>
         </p:txBody>
@@ -3574,7 +3590,7 @@
                 </a:solidFill>
                 <a:latin typeface="Alegreya Sans"/>
               </a:rPr>
-              <a:t>Certification Digital Ethics Officer (avec Mention)</a:t>
+              <a:t>Certification Digital Ethics Officer</a:t>
             </a:r>
           </a:p>
           <a:p>
@@ -3615,7 +3631,7 @@
                 </a:solidFill>
                 <a:latin typeface="Alegreya Sans"/>
               </a:rPr>
-              <a:t>Master II Affaires européennes et internationales (avec Mention)</a:t>
+              <a:t>Master II Affaires européennes et internationales</a:t>
             </a:r>
           </a:p>
           <a:p>
@@ -3640,7 +3656,7 @@
                 </a:solidFill>
                 <a:latin typeface="Alegreya Sans"/>
               </a:rPr>
-              <a:t>Université de Versailles Saint-Quentin-en-Yvelines</a:t>
+              <a:t>UVSQ</a:t>
             </a:r>
           </a:p>
           <a:p>
@@ -3656,7 +3672,7 @@
                 </a:solidFill>
                 <a:latin typeface="Alegreya Sans"/>
               </a:rPr>
-              <a:t>Master II Influence &amp; Affaires publiques (avec Mention)</a:t>
+              <a:t>Master II Influence &amp; Affaires publiques</a:t>
             </a:r>
           </a:p>
           <a:p>
@@ -3702,6 +3718,15 @@
               </a:rPr>
               <a:t>Conseiller Numérique</a:t>
             </a:r>
+            <a:r>
+              <a:rPr sz="1200" b="0" i="1">
+                <a:solidFill>
+                  <a:srgbClr val="CCD6E8"/>
+                </a:solidFill>
+                <a:latin typeface="Alegreya Sans"/>
+              </a:rPr>
+              <a:t> — Saint-Germain-en-Laye</a:t>
+            </a:r>
           </a:p>
           <a:p>
             <a:pPr algn="l">
@@ -3727,6 +3752,15 @@
               </a:rPr>
               <a:t>Podcasteur</a:t>
             </a:r>
+            <a:r>
+              <a:rPr sz="1200" b="0" i="1">
+                <a:solidFill>
+                  <a:srgbClr val="CCD6E8"/>
+                </a:solidFill>
+                <a:latin typeface="Alegreya Sans"/>
+              </a:rPr>
+              <a:t> — Créateur du podcast Esprit IA</a:t>
+            </a:r>
           </a:p>
           <a:p>
             <a:pPr algn="l">
@@ -3750,7 +3784,7 @@
                 </a:solidFill>
                 <a:latin typeface="Alegreya Sans"/>
               </a:rPr>
-              <a:t>Conférencier</a:t>
+              <a:t>Conférencier &amp; Juré EDHEC</a:t>
             </a:r>
           </a:p>
         </p:txBody>
@@ -3805,7 +3839,7 @@
                 </a:solidFill>
                 <a:latin typeface="Alegreya Sans"/>
               </a:rPr>
-              <a:t>Expert en gouvernance de l'IA, AI Risk Management et conformité réglementaire, avec près de 8 ans d'expérience auprès de grandes institutions bancaires. Spécialisé dans l'EU AI Act et le déploiement de dispositifs de gouvernance IA à l'échelle internationale.</a:t>
+              <a:t>Expert en gouvernance de l'IA, AI Risk Management et conformité réglementaire, avec près de 8 ans d'expérience auprès de grandes institutions bancaires. Spécialisé dans l'EU AI Act et le déploiement international de dispositifs de gouvernance IA.</a:t>
             </a:r>
           </a:p>
           <a:p>
@@ -3824,7 +3858,7 @@
                 </a:solidFill>
                 <a:latin typeface="Alegreya Sans"/>
               </a:rPr>
-              <a:t>EXPÉRIENCE PROFESSIONNELLE</a:t>
+              <a:t>PRINCIPALES EXPÉRIENCES PROFESSIONNELLES</a:t>
             </a:r>
           </a:p>
           <a:p>
@@ -3892,7 +3926,7 @@
                 </a:solidFill>
                 <a:latin typeface="Alegreya Sans"/>
               </a:rPr>
-              <a:t>Finalisation et mise en œuvre du cadre de gouvernance des risques IA : politiques internes, cartographie des risques, comitologie et coordination des fonctions support et métiers.</a:t>
+              <a:t>Finalisation et mise en œuvre du cadre de gouvernance des risques IA : politiques internes, cartographie des risques, comitologie.</a:t>
             </a:r>
           </a:p>
           <a:p>
@@ -3917,7 +3951,7 @@
                 </a:solidFill>
                 <a:latin typeface="Alegreya Sans"/>
               </a:rPr>
-              <a:t>Pilotage opérationnel de la gouvernance : identification, évaluation, priorisation, validation et remédiation des systèmes d'IA.</a:t>
+              <a:t>Déploiement international du dispositif dans plus de 40 entités (USA, UK, APAC, MEA).</a:t>
             </a:r>
           </a:p>
           <a:p>
@@ -3985,7 +4019,7 @@
                 </a:solidFill>
                 <a:latin typeface="Alegreya Sans"/>
               </a:rPr>
-              <a:t>Responsable de l'offre AI Risk Management : coordination des réponses aux appels d'offres, veille stratégique et réglementaire, développement commercial et animation de l'écosystème financier.</a:t>
+              <a:t>Responsable de l'offre AI Risk Management : appels d'offres, veille réglementaire, développement commercial.</a:t>
             </a:r>
           </a:p>
           <a:p>
@@ -4010,7 +4044,7 @@
                 </a:solidFill>
                 <a:latin typeface="Alegreya Sans"/>
               </a:rPr>
-              <a:t>Pilotage et animation du groupe de travail IA de l'association Paris Europlace (+40 responsables du secteur financier) : rédaction de position papers et de réponses aux consultations européennes, benchmarks.</a:t>
+              <a:t>Pilotage du groupe de travail IA de Paris Europlace (+40 responsables du secteur financier) : position papers, consultations européennes.</a:t>
             </a:r>
           </a:p>
           <a:p>
@@ -4078,7 +4112,7 @@
                 </a:solidFill>
                 <a:latin typeface="Alegreya Sans"/>
               </a:rPr>
-              <a:t>Responsable du programme de mise en conformité EU AI Act du Groupe BPCE et de ses entités (Natixis, Oney, BRED, etc.) : cartographie et évaluation des risques IA, définition de la politique et du cadre normatif Groupe, évolution des processus opérationnels, animation du comité de pilotage.</a:t>
+              <a:t>Responsable du programme EU AI Act du Groupe BPCE et de ses entités (Natixis, Oney, BRED) : cartographie des risques IA, cadre normatif Groupe.</a:t>
             </a:r>
           </a:p>
           <a:p>
@@ -4103,7 +4137,7 @@
                 </a:solidFill>
                 <a:latin typeface="Alegreya Sans"/>
               </a:rPr>
-              <a:t>Coordination et accompagnement de plus de 35 décideurs locaux (DPO, Chief Compliance Officer, CDO, etc.) dans la déclinaison du cadre normatif Groupe.</a:t>
+              <a:t>Accompagnement de plus de 35 décideurs locaux (DPO, CCO, CDO) dans la déclinaison du cadre normatif.</a:t>
             </a:r>
           </a:p>
           <a:p>
@@ -4171,7 +4205,7 @@
                 </a:solidFill>
                 <a:latin typeface="Alegreya Sans"/>
               </a:rPr>
-              <a:t>Structuration du cadre de gouvernance des risques IA avec le Chief Data Officer : inventaire des systèmes, formation des référents métiers et pilotage de la conformité EU AI Act dans plus de 10 entités internationales.</a:t>
+              <a:t>Structuration du cadre de gouvernance des risques IA avec le CDO : inventaire, formation, conformité EU AI Act dans plus de 10 entités.</a:t>
             </a:r>
           </a:p>
           <a:p>
@@ -4196,7 +4230,7 @@
                 </a:solidFill>
                 <a:latin typeface="Alegreya Sans"/>
               </a:rPr>
-              <a:t>Ambassadeur des outils d'IA Générative Groupe auprès de 3 000 collaborateurs Oney.</a:t>
+              <a:t>Ambassadeur IA Générative auprès de 3 000 collaborateurs ; pilotage des activités RGPD d'Oneytrust.</a:t>
             </a:r>
           </a:p>
         </p:txBody>
@@ -4418,8 +4452,8 @@
         </p:nvSpPr>
         <p:spPr>
           <a:xfrm>
-            <a:off x="228600" y="260000"/>
-            <a:ext cx="3842800" cy="800000"/>
+            <a:off x="228600" y="240000"/>
+            <a:ext cx="3842800" cy="1300000"/>
           </a:xfrm>
           <a:prstGeom prst="rect">
             <a:avLst/>
@@ -4434,13 +4468,29 @@
           <a:p>
             <a:pPr algn="l"/>
             <a:r>
-              <a:rPr sz="4800" b="1" i="0">
-                <a:solidFill>
-                  <a:srgbClr val="3AEDE5"/>
-                </a:solidFill>
-                <a:latin typeface="Alegreya Sans"/>
-              </a:rPr>
-              <a:t>A.P.</a:t>
+              <a:rPr sz="2800" b="0" i="0">
+                <a:solidFill>
+                  <a:srgbClr val="3AEDE5"/>
+                </a:solidFill>
+                <a:latin typeface="Alegreya Sans"/>
+              </a:rPr>
+              <a:t>Alexandre</a:t>
+            </a:r>
+          </a:p>
+          <a:p>
+            <a:pPr>
+              <a:spcBef>
+                <a:spcPts val="0"/>
+              </a:spcBef>
+            </a:pPr>
+            <a:r>
+              <a:rPr sz="3200" b="1" i="0">
+                <a:solidFill>
+                  <a:srgbClr val="3AEDE5"/>
+                </a:solidFill>
+                <a:latin typeface="Alegreya Sans"/>
+              </a:rPr>
+              <a:t>POLAKOWSKI</a:t>
             </a:r>
           </a:p>
         </p:txBody>
@@ -4783,7 +4833,7 @@
                 </a:solidFill>
                 <a:latin typeface="Alegreya Sans"/>
               </a:rPr>
-              <a:t>Digital Ethics Officer certification (with Distinction)</a:t>
+              <a:t>Digital Ethics Officer certification</a:t>
             </a:r>
           </a:p>
           <a:p>
@@ -4824,7 +4874,7 @@
                 </a:solidFill>
                 <a:latin typeface="Alegreya Sans"/>
               </a:rPr>
-              <a:t>Master's in European &amp; International Affairs (with Distinction)</a:t>
+              <a:t>Master's in European &amp; International Affairs</a:t>
             </a:r>
           </a:p>
           <a:p>
@@ -4849,7 +4899,7 @@
                 </a:solidFill>
                 <a:latin typeface="Alegreya Sans"/>
               </a:rPr>
-              <a:t>University of Versailles Saint-Quentin-en-Yvelines</a:t>
+              <a:t>UVSQ</a:t>
             </a:r>
           </a:p>
           <a:p>
@@ -4865,7 +4915,7 @@
                 </a:solidFill>
                 <a:latin typeface="Alegreya Sans"/>
               </a:rPr>
-              <a:t>Master's in Influence &amp; Public Affairs (with Distinction)</a:t>
+              <a:t>Master's in Influence &amp; Public Affairs</a:t>
             </a:r>
           </a:p>
           <a:p>
@@ -4911,6 +4961,15 @@
               </a:rPr>
               <a:t>Digital Council Advisor</a:t>
             </a:r>
+            <a:r>
+              <a:rPr sz="1200" b="0" i="1">
+                <a:solidFill>
+                  <a:srgbClr val="CCD6E8"/>
+                </a:solidFill>
+                <a:latin typeface="Alegreya Sans"/>
+              </a:rPr>
+              <a:t> — Saint-Germain-en-Laye</a:t>
+            </a:r>
           </a:p>
           <a:p>
             <a:pPr algn="l">
@@ -4936,6 +4995,15 @@
               </a:rPr>
               <a:t>Podcaster</a:t>
             </a:r>
+            <a:r>
+              <a:rPr sz="1200" b="0" i="1">
+                <a:solidFill>
+                  <a:srgbClr val="CCD6E8"/>
+                </a:solidFill>
+                <a:latin typeface="Alegreya Sans"/>
+              </a:rPr>
+              <a:t> — Creator of the Esprit IA podcast</a:t>
+            </a:r>
           </a:p>
           <a:p>
             <a:pPr algn="l">
@@ -4959,7 +5027,7 @@
                 </a:solidFill>
                 <a:latin typeface="Alegreya Sans"/>
               </a:rPr>
-              <a:t>Speaker</a:t>
+              <a:t>Speaker &amp; EDHEC Juror</a:t>
             </a:r>
           </a:p>
         </p:txBody>
@@ -5014,7 +5082,7 @@
                 </a:solidFill>
                 <a:latin typeface="Alegreya Sans"/>
               </a:rPr>
-              <a:t>Expert in AI Governance, AI Risk Management and regulatory compliance, with nearly 8 years of experience advising major banking institutions. Specialised in the EU AI Act and the international rollout of AI governance frameworks.</a:t>
+              <a:t>Expert in AI Governance, AI Risk Management and regulatory compliance, with nearly 8 years of experience advising major banking institutions. Specialised in the EU AI Act and international AI governance rollouts.</a:t>
             </a:r>
           </a:p>
           <a:p>
@@ -5033,7 +5101,7 @@
                 </a:solidFill>
                 <a:latin typeface="Alegreya Sans"/>
               </a:rPr>
-              <a:t>PROFESSIONAL EXPERIENCE</a:t>
+              <a:t>MAIN PROFESSIONAL EXPERIENCE</a:t>
             </a:r>
           </a:p>
           <a:p>
@@ -5101,7 +5169,7 @@
                 </a:solidFill>
                 <a:latin typeface="Alegreya Sans"/>
               </a:rPr>
-              <a:t>Finalisation and rollout of the AI risk governance framework: internal policies, risk mapping, committee design, coordination of support and business functions.</a:t>
+              <a:t>Finalisation and rollout of the AI risk governance framework: internal policies, risk mapping, committee design.</a:t>
             </a:r>
           </a:p>
           <a:p>
@@ -5126,7 +5194,7 @@
                 </a:solidFill>
                 <a:latin typeface="Alegreya Sans"/>
               </a:rPr>
-              <a:t>Operational pilot of AI governance: identification, assessment, prioritisation, validation and remediation of AI systems.</a:t>
+              <a:t>International rollout across 40+ entities (USA, UK, APAC, MEA).</a:t>
             </a:r>
           </a:p>
           <a:p>
@@ -5194,7 +5262,7 @@
                 </a:solidFill>
                 <a:latin typeface="Alegreya Sans"/>
               </a:rPr>
-              <a:t>Head of the AI Risk Management offering: RFP coordination, strategic and regulatory watch, business development and financial-ecosystem animation.</a:t>
+              <a:t>Head of the AI Risk Management offering: RFPs, regulatory watch, business development.</a:t>
             </a:r>
           </a:p>
           <a:p>
@@ -5219,7 +5287,7 @@
                 </a:solidFill>
                 <a:latin typeface="Alegreya Sans"/>
               </a:rPr>
-              <a:t>Lead of the AI working group at Paris Europlace association (40+ senior financial-sector representatives): position papers, EU consultation responses, benchmarks.</a:t>
+              <a:t>Lead of the AI working group at Paris Europlace (40+ senior financial-sector representatives): position papers, EU consultations.</a:t>
             </a:r>
           </a:p>
           <a:p>
@@ -5287,7 +5355,7 @@
                 </a:solidFill>
                 <a:latin typeface="Alegreya Sans"/>
               </a:rPr>
-              <a:t>Lead of the EU AI Act compliance programme for Groupe BPCE and its entities (Natixis, Oney, BRED, etc.): AI risk mapping and assessment, definition of Group policy and standards, operational process evolution, steering-committee animation.</a:t>
+              <a:t>Lead of the EU AI Act compliance programme for Groupe BPCE and its entities (Natixis, Oney, BRED): AI risk mapping, Group standards framework.</a:t>
             </a:r>
           </a:p>
           <a:p>
@@ -5312,7 +5380,7 @@
                 </a:solidFill>
                 <a:latin typeface="Alegreya Sans"/>
               </a:rPr>
-              <a:t>Coordination and support of 35+ local decision-makers (DPO, Chief Compliance Officer, CDO, etc.) in deploying the Group framework.</a:t>
+              <a:t>Support of 35+ local decision-makers (DPO, CCO, CDO) in deploying the Group framework.</a:t>
             </a:r>
           </a:p>
           <a:p>
@@ -5380,7 +5448,7 @@
                 </a:solidFill>
                 <a:latin typeface="Alegreya Sans"/>
               </a:rPr>
-              <a:t>Built the AI risk governance framework with the Chief Data Officer: systems inventory, training of business reference owners, EU AI Act compliance pilot across 10+ international entities.</a:t>
+              <a:t>Built the AI risk governance framework with the CDO: inventory, training, EU AI Act compliance across 10+ entities.</a:t>
             </a:r>
           </a:p>
           <a:p>
@@ -5405,7 +5473,42 @@
                 </a:solidFill>
                 <a:latin typeface="Alegreya Sans"/>
               </a:rPr>
-              <a:t>Group GenAI tools ambassador to 3,000 Oney employees.</a:t>
+              <a:t>Group GenAI ambassador to 3,000 employees; pilot of Oneytrust's GDPR activities.</a:t>
+            </a:r>
+          </a:p>
+          <a:p>
+            <a:pPr algn="l">
+              <a:spcBef>
+                <a:spcPts val="600"/>
+              </a:spcBef>
+              <a:spcAft>
+                <a:spcPts val="300"/>
+              </a:spcAft>
+            </a:pPr>
+            <a:r>
+              <a:rPr sz="1300" b="1" i="0">
+                <a:solidFill>
+                  <a:srgbClr val="3AEDE5"/>
+                </a:solidFill>
+                <a:latin typeface="Alegreya Sans"/>
+              </a:rPr>
+              <a:t>MAIN REFERENCES</a:t>
+            </a:r>
+          </a:p>
+          <a:p>
+            <a:pPr algn="l">
+              <a:spcAft>
+                <a:spcPts val="200"/>
+              </a:spcAft>
+            </a:pPr>
+            <a:r>
+              <a:rPr sz="1200" b="0" i="1">
+                <a:solidFill>
+                  <a:srgbClr val="FFFFFF"/>
+                </a:solidFill>
+                <a:latin typeface="Alegreya Sans"/>
+              </a:rPr>
+              <a:t>Groupe BPCE, Natixis, Oney, Sia Partners, Paris Europlace</a:t>
             </a:r>
           </a:p>
         </p:txBody>
